--- a/IETF-126-TSVWG-SCTP-DTLS-Chunk.pptx
+++ b/IETF-126-TSVWG-SCTP-DTLS-Chunk.pptx
@@ -65,12 +65,10 @@
 </p:presentation>
 </file>
 
-<file path=ppt/revisionInfo.xml><?xml version="1.0" encoding="utf-8"?>
-<p1510:revInfo xmlns:a="http://schemas.openxmlformats.org/drawingml/2006/main" xmlns:r="http://schemas.openxmlformats.org/officeDocument/2006/relationships" xmlns:p1510="http://schemas.microsoft.com/office/powerpoint/2015/10/main">
-  <p1510:revLst>
-    <p1510:client id="{9C4ECF09-2665-384A-8528-82C99FA27729}" v="35" dt="2026-07-16T13:06:01.784"/>
-  </p1510:revLst>
-</p1510:revInfo>
+<file path=ppt/authors.xml><?xml version="1.0" encoding="utf-8"?>
+<p188:authorLst xmlns:a="http://schemas.openxmlformats.org/drawingml/2006/main" xmlns:r="http://schemas.openxmlformats.org/officeDocument/2006/relationships" xmlns:p188="http://schemas.microsoft.com/office/powerpoint/2018/8/main">
+  <p188:author id="{AD1D1FE1-8989-AC62-B09F-3A4283D2C96E}" name="John Mattsson" initials="JP" userId="S::john.mattsson@ericsson.com::af1d955f-31b2-4b66-a94f-49d4d7f7d266" providerId="AD"/>
+</p188:authorLst>
 </file>
 
 <file path=ppt/changesInfos/changesInfo1.xml><?xml version="1.0" encoding="utf-8"?>
@@ -78,7 +76,7 @@
   <pc:docChgLst>
     <pc:chgData name="Magnus Westerlund" userId="d1f911fd-f2d9-4af0-9810-372c2434ea9e" providerId="ADAL" clId="{7C0B1DB3-C1BB-5C7B-ADA6-81A78F8132A4}"/>
     <pc:docChg chg="custSel modSld">
-      <pc:chgData name="Magnus Westerlund" userId="d1f911fd-f2d9-4af0-9810-372c2434ea9e" providerId="ADAL" clId="{7C0B1DB3-C1BB-5C7B-ADA6-81A78F8132A4}" dt="2026-07-17T14:11:05.116" v="169" actId="20577"/>
+      <pc:chgData name="Magnus Westerlund" userId="d1f911fd-f2d9-4af0-9810-372c2434ea9e" providerId="ADAL" clId="{7C0B1DB3-C1BB-5C7B-ADA6-81A78F8132A4}" dt="2026-07-18T12:35:02.143" v="176" actId="20577"/>
       <pc:docMkLst>
         <pc:docMk/>
       </pc:docMkLst>
@@ -128,6 +126,21 @@
         </pc:spChg>
       </pc:sldChg>
       <pc:sldChg chg="modSp mod">
+        <pc:chgData name="Magnus Westerlund" userId="d1f911fd-f2d9-4af0-9810-372c2434ea9e" providerId="ADAL" clId="{7C0B1DB3-C1BB-5C7B-ADA6-81A78F8132A4}" dt="2026-07-18T12:35:02.143" v="176" actId="20577"/>
+        <pc:sldMkLst>
+          <pc:docMk/>
+          <pc:sldMk cId="2124198194" sldId="274"/>
+        </pc:sldMkLst>
+        <pc:spChg chg="mod">
+          <ac:chgData name="Magnus Westerlund" userId="d1f911fd-f2d9-4af0-9810-372c2434ea9e" providerId="ADAL" clId="{7C0B1DB3-C1BB-5C7B-ADA6-81A78F8132A4}" dt="2026-07-18T12:35:02.143" v="176" actId="20577"/>
+          <ac:spMkLst>
+            <pc:docMk/>
+            <pc:sldMk cId="2124198194" sldId="274"/>
+            <ac:spMk id="4" creationId="{314A80B3-1CF1-518A-C35B-B27359B70B41}"/>
+          </ac:spMkLst>
+        </pc:spChg>
+      </pc:sldChg>
+      <pc:sldChg chg="modSp mod">
         <pc:chgData name="Magnus Westerlund" userId="d1f911fd-f2d9-4af0-9810-372c2434ea9e" providerId="ADAL" clId="{7C0B1DB3-C1BB-5C7B-ADA6-81A78F8132A4}" dt="2026-07-17T14:11:05.116" v="169" actId="20577"/>
         <pc:sldMkLst>
           <pc:docMk/>
@@ -154,6 +167,61 @@
             <pc:docMk/>
             <pc:sldMk cId="1304617088" sldId="276"/>
             <ac:spMk id="3" creationId="{A34535F1-01E7-D3B7-FF34-E094F215875B}"/>
+          </ac:spMkLst>
+        </pc:spChg>
+      </pc:sldChg>
+    </pc:docChg>
+  </pc:docChgLst>
+  <pc:docChgLst>
+    <pc:chgData name="John Mattsson" userId="af1d955f-31b2-4b66-a94f-49d4d7f7d266" providerId="ADAL" clId="{CEB9C44D-A79E-5021-A295-4255D07D6C4D}"/>
+    <pc:docChg chg="modSld">
+      <pc:chgData name="John Mattsson" userId="af1d955f-31b2-4b66-a94f-49d4d7f7d266" providerId="ADAL" clId="{CEB9C44D-A79E-5021-A295-4255D07D6C4D}" dt="2026-07-18T12:22:09.255" v="4" actId="2"/>
+      <pc:docMkLst>
+        <pc:docMk/>
+      </pc:docMkLst>
+      <pc:sldChg chg="modSp mod">
+        <pc:chgData name="John Mattsson" userId="af1d955f-31b2-4b66-a94f-49d4d7f7d266" providerId="ADAL" clId="{CEB9C44D-A79E-5021-A295-4255D07D6C4D}" dt="2026-07-18T12:22:09.255" v="4" actId="2"/>
+        <pc:sldMkLst>
+          <pc:docMk/>
+          <pc:sldMk cId="2604203220" sldId="272"/>
+        </pc:sldMkLst>
+        <pc:spChg chg="mod">
+          <ac:chgData name="John Mattsson" userId="af1d955f-31b2-4b66-a94f-49d4d7f7d266" providerId="ADAL" clId="{CEB9C44D-A79E-5021-A295-4255D07D6C4D}" dt="2026-07-18T12:22:09.255" v="4" actId="2"/>
+          <ac:spMkLst>
+            <pc:docMk/>
+            <pc:sldMk cId="2604203220" sldId="272"/>
+            <ac:spMk id="5" creationId="{80CFE1E9-2446-4327-A152-D121E1DA7E83}"/>
+          </ac:spMkLst>
+        </pc:spChg>
+      </pc:sldChg>
+      <pc:sldChg chg="modSp mod">
+        <pc:chgData name="John Mattsson" userId="af1d955f-31b2-4b66-a94f-49d4d7f7d266" providerId="ADAL" clId="{CEB9C44D-A79E-5021-A295-4255D07D6C4D}" dt="2026-07-18T12:22:04.383" v="2" actId="2"/>
+        <pc:sldMkLst>
+          <pc:docMk/>
+          <pc:sldMk cId="2764015099" sldId="275"/>
+        </pc:sldMkLst>
+        <pc:spChg chg="mod">
+          <ac:chgData name="John Mattsson" userId="af1d955f-31b2-4b66-a94f-49d4d7f7d266" providerId="ADAL" clId="{CEB9C44D-A79E-5021-A295-4255D07D6C4D}" dt="2026-07-18T12:22:02.332" v="0" actId="2"/>
+          <ac:spMkLst>
+            <pc:docMk/>
+            <pc:sldMk cId="2764015099" sldId="275"/>
+            <ac:spMk id="5" creationId="{960C9FF5-1894-156C-43F6-643A7F7A1C7D}"/>
+          </ac:spMkLst>
+        </pc:spChg>
+        <pc:spChg chg="mod">
+          <ac:chgData name="John Mattsson" userId="af1d955f-31b2-4b66-a94f-49d4d7f7d266" providerId="ADAL" clId="{CEB9C44D-A79E-5021-A295-4255D07D6C4D}" dt="2026-07-18T12:22:03.706" v="1" actId="2"/>
+          <ac:spMkLst>
+            <pc:docMk/>
+            <pc:sldMk cId="2764015099" sldId="275"/>
+            <ac:spMk id="22" creationId="{FAC3E9BB-C227-E96B-3FEB-9ABF5D4273B9}"/>
+          </ac:spMkLst>
+        </pc:spChg>
+        <pc:spChg chg="mod">
+          <ac:chgData name="John Mattsson" userId="af1d955f-31b2-4b66-a94f-49d4d7f7d266" providerId="ADAL" clId="{CEB9C44D-A79E-5021-A295-4255D07D6C4D}" dt="2026-07-18T12:22:04.383" v="2" actId="2"/>
+          <ac:spMkLst>
+            <pc:docMk/>
+            <pc:sldMk cId="2764015099" sldId="275"/>
+            <ac:spMk id="24" creationId="{094B2021-F91A-99ED-75B0-508368A658F3}"/>
           </ac:spMkLst>
         </pc:spChg>
       </pc:sldChg>
@@ -1704,7 +1772,7 @@
               <a:buFont typeface="Ericsson Hilda" panose="00000500000000000000" pitchFamily="2" charset="0"/>
               <a:buChar char="●"/>
             </a:pPr>
-            <a:endParaRPr lang="en-US" dirty="0" err="1">
+            <a:endParaRPr lang="en-US" dirty="0">
               <a:solidFill>
                 <a:schemeClr val="bg1"/>
               </a:solidFill>
@@ -2356,7 +2424,7 @@
               <a:buFont typeface="Ericsson Hilda" panose="00000500000000000000" pitchFamily="2" charset="0"/>
               <a:buChar char="●"/>
             </a:pPr>
-            <a:endParaRPr lang="en-US" dirty="0" err="1">
+            <a:endParaRPr lang="en-US" dirty="0">
               <a:solidFill>
                 <a:schemeClr val="bg1"/>
               </a:solidFill>
@@ -3164,7 +3232,7 @@
               <a:buFont typeface="Ericsson Hilda" panose="00000500000000000000" pitchFamily="2" charset="0"/>
               <a:buChar char="●"/>
             </a:pPr>
-            <a:endParaRPr lang="en-US" dirty="0" err="1">
+            <a:endParaRPr lang="en-US" dirty="0">
               <a:solidFill>
                 <a:schemeClr val="bg1"/>
               </a:solidFill>
@@ -4107,7 +4175,7 @@
               <a:buFont typeface="Ericsson Hilda" panose="00000500000000000000" pitchFamily="2" charset="0"/>
               <a:buChar char="●"/>
             </a:pPr>
-            <a:endParaRPr lang="en-US" dirty="0" err="1">
+            <a:endParaRPr lang="en-US" dirty="0">
               <a:solidFill>
                 <a:schemeClr val="bg1"/>
               </a:solidFill>
@@ -5182,7 +5250,7 @@
               <a:buFont typeface="Ericsson Hilda" panose="00000500000000000000" pitchFamily="2" charset="0"/>
               <a:buChar char="●"/>
             </a:pPr>
-            <a:endParaRPr lang="en-US" dirty="0" err="1">
+            <a:endParaRPr lang="en-US" dirty="0">
               <a:solidFill>
                 <a:schemeClr val="bg1"/>
               </a:solidFill>
@@ -6523,7 +6591,7 @@
               <a:buFont typeface="Ericsson Hilda" panose="00000500000000000000" pitchFamily="2" charset="0"/>
               <a:buChar char="●"/>
             </a:pPr>
-            <a:endParaRPr lang="en-US" dirty="0" err="1">
+            <a:endParaRPr lang="en-US" dirty="0">
               <a:solidFill>
                 <a:schemeClr val="bg1"/>
               </a:solidFill>
@@ -6933,7 +7001,7 @@
               <a:buFont typeface="Ericsson Hilda" panose="00000500000000000000" pitchFamily="2" charset="0"/>
               <a:buChar char="●"/>
             </a:pPr>
-            <a:endParaRPr lang="en-US" dirty="0" err="1">
+            <a:endParaRPr lang="en-US" dirty="0">
               <a:solidFill>
                 <a:schemeClr val="bg1"/>
               </a:solidFill>
@@ -7875,7 +7943,7 @@
               <a:buFont typeface="Ericsson Hilda" panose="00000500000000000000" pitchFamily="2" charset="0"/>
               <a:buChar char="●"/>
             </a:pPr>
-            <a:endParaRPr lang="en-US" dirty="0" err="1">
+            <a:endParaRPr lang="en-US" dirty="0">
               <a:solidFill>
                 <a:schemeClr val="bg1"/>
               </a:solidFill>
@@ -9044,7 +9112,7 @@
               <a:buFont typeface="Ericsson Hilda" panose="00000500000000000000" pitchFamily="2" charset="0"/>
               <a:buChar char="●"/>
             </a:pPr>
-            <a:endParaRPr lang="en-US" dirty="0" err="1">
+            <a:endParaRPr lang="en-US" dirty="0">
               <a:solidFill>
                 <a:schemeClr val="bg1"/>
               </a:solidFill>
@@ -9338,7 +9406,7 @@
               <a:buFont typeface="Ericsson Hilda" panose="00000500000000000000" pitchFamily="2" charset="0"/>
               <a:buChar char="●"/>
             </a:pPr>
-            <a:endParaRPr lang="en-US" dirty="0" err="1">
+            <a:endParaRPr lang="en-US" dirty="0">
               <a:solidFill>
                 <a:schemeClr val="bg1"/>
               </a:solidFill>
@@ -9786,7 +9854,7 @@
               <a:buFont typeface="Ericsson Hilda" panose="00000500000000000000" pitchFamily="2" charset="0"/>
               <a:buChar char="●"/>
             </a:pPr>
-            <a:endParaRPr lang="en-US" dirty="0" err="1">
+            <a:endParaRPr lang="en-US" dirty="0">
               <a:solidFill>
                 <a:schemeClr val="bg1"/>
               </a:solidFill>
@@ -11712,7 +11780,15 @@
           <a:p>
             <a:r>
               <a:rPr lang="en-US" dirty="0"/>
-              <a:t>Clarified Mandatory to Implement Ciphers that unless something else specifies it one MUST implement:</a:t>
+              <a:t>Clarified Mandatory to Implement Ciphers that unless something else specifies it </a:t>
+            </a:r>
+            <a:r>
+              <a:rPr lang="en-US"/>
+              <a:t>one MUST/SHOULD </a:t>
+            </a:r>
+            <a:r>
+              <a:rPr lang="en-US" dirty="0"/>
+              <a:t>implement:</a:t>
             </a:r>
           </a:p>
           <a:p>
@@ -11793,7 +11869,7 @@
               <a:buFont typeface="Arial" panose="020B0604020202020204" pitchFamily="34" charset="0"/>
               <a:buChar char="•"/>
             </a:pPr>
-            <a:endParaRPr kumimoji="0" lang="en-US" sz="2000" b="0" i="0" u="none" strike="noStrike" kern="1000" cap="none" spc="-30" normalizeH="0" baseline="0" noProof="0" dirty="0" err="1">
+            <a:endParaRPr kumimoji="0" lang="en-US" sz="2000" b="0" i="0" u="none" strike="noStrike" kern="1000" cap="none" spc="-30" normalizeH="0" baseline="0" noProof="0" dirty="0">
               <a:ln>
                 <a:noFill/>
               </a:ln>
@@ -12080,15 +12156,7 @@
           <a:p>
             <a:r>
               <a:rPr lang="en-US" dirty="0"/>
-              <a:t>Interoperability achieved between </a:t>
-            </a:r>
-            <a:r>
-              <a:rPr lang="en-US" dirty="0" err="1"/>
-              <a:t>Redhat’s</a:t>
-            </a:r>
-            <a:r>
-              <a:rPr lang="en-US" dirty="0"/>
-              <a:t> Linux SCTP Implementation and Ericsson’s user space stack using the key-management method of </a:t>
+              <a:t>Interoperability achieved between Redhat’s Linux SCTP Implementation and Ericsson’s user space stack using the key-management method of </a:t>
             </a:r>
             <a:r>
               <a:rPr lang="en-SE" dirty="0">
@@ -12819,10 +12887,9 @@
               </a:spcBef>
             </a:pPr>
             <a:r>
-              <a:rPr lang="en-US" dirty="0" err="1"/>
+              <a:rPr lang="en-US" dirty="0"/>
               <a:t>WolfSSL</a:t>
             </a:r>
-            <a:endParaRPr lang="en-US" dirty="0"/>
           </a:p>
         </p:txBody>
       </p:sp>
@@ -12879,10 +12946,9 @@
               </a:spcBef>
             </a:pPr>
             <a:r>
-              <a:rPr lang="en-US" dirty="0" err="1"/>
+              <a:rPr lang="en-US" dirty="0"/>
               <a:t>WolfSSL</a:t>
             </a:r>
-            <a:endParaRPr lang="en-US" dirty="0"/>
           </a:p>
         </p:txBody>
       </p:sp>
@@ -12968,7 +13034,7 @@
               <a:buSzTx/>
               <a:tabLst/>
             </a:pPr>
-            <a:endParaRPr kumimoji="0" lang="en-US" sz="2000" b="0" i="0" u="none" strike="noStrike" kern="1000" cap="none" spc="-30" normalizeH="0" baseline="0" noProof="0" dirty="0" err="1">
+            <a:endParaRPr kumimoji="0" lang="en-US" sz="2000" b="0" i="0" u="none" strike="noStrike" kern="1000" cap="none" spc="-30" normalizeH="0" baseline="0" noProof="0" dirty="0">
               <a:ln>
                 <a:noFill/>
               </a:ln>
@@ -13074,45 +13140,13 @@
           <a:p>
             <a:r>
               <a:rPr lang="en-US" dirty="0"/>
-              <a:t>Pre-shared Key has been used for validating the DTLS 1.3 implementation in Linux Kernel SCTP versus the </a:t>
-            </a:r>
-            <a:r>
-              <a:rPr lang="en-US" dirty="0" err="1"/>
-              <a:t>WolfSSL</a:t>
-            </a:r>
-            <a:r>
-              <a:rPr lang="en-US" dirty="0"/>
-              <a:t> implementation</a:t>
-            </a:r>
-          </a:p>
-          <a:p>
-            <a:r>
-              <a:rPr lang="en-US" dirty="0"/>
-              <a:t>Implementation of the TLS 1.3 based Key Management of draft-</a:t>
-            </a:r>
-            <a:r>
-              <a:rPr lang="en-US" dirty="0" err="1"/>
-              <a:t>porfiri</a:t>
-            </a:r>
-            <a:r>
-              <a:rPr lang="en-US" dirty="0"/>
-              <a:t>-</a:t>
-            </a:r>
-            <a:r>
-              <a:rPr lang="en-US" dirty="0" err="1"/>
-              <a:t>sctp</a:t>
-            </a:r>
-            <a:r>
-              <a:rPr lang="en-US" dirty="0"/>
-              <a:t>-</a:t>
-            </a:r>
-            <a:r>
-              <a:rPr lang="en-US" dirty="0" err="1"/>
-              <a:t>dtls</a:t>
-            </a:r>
-            <a:r>
-              <a:rPr lang="en-US" dirty="0"/>
-              <a:t>-handshake to validate its specification</a:t>
+              <a:t>Pre-shared Key has been used for validating the DTLS 1.3 implementation in Linux Kernel SCTP versus the WolfSSL implementation</a:t>
+            </a:r>
+          </a:p>
+          <a:p>
+            <a:r>
+              <a:rPr lang="en-US" dirty="0"/>
+              <a:t>Implementation of the TLS 1.3 based Key Management of draft-porfiri-sctp-dtls-handshake to validate its specification</a:t>
             </a:r>
           </a:p>
           <a:p>

--- a/IETF-126-TSVWG-SCTP-DTLS-Chunk.pptx
+++ b/IETF-126-TSVWG-SCTP-DTLS-Chunk.pptx
@@ -25,28 +25,31 @@
   <p:notesSz cx="6858000" cy="9144000"/>
   <p:embeddedFontLst>
     <p:embeddedFont>
-      <p:font typeface="Ericsson Hilda" pitchFamily="2" charset="0"/>
+      <p:font typeface="Ericsson Hilda" panose="020B0604020202020204" charset="0"/>
       <p:regular r:id="rId28"/>
       <p:bold r:id="rId29"/>
+      <p:italic r:id="rId30"/>
+      <p:boldItalic r:id="rId31"/>
     </p:embeddedFont>
     <p:embeddedFont>
-      <p:font typeface="Ericsson Hilda ExtraBold" pitchFamily="2" charset="0"/>
-      <p:bold r:id="rId30"/>
+      <p:font typeface="Ericsson Hilda ExtraBold" panose="020B0604020202020204" charset="0"/>
+      <p:bold r:id="rId32"/>
     </p:embeddedFont>
     <p:embeddedFont>
-      <p:font typeface="Ericsson Hilda ExtraLight" pitchFamily="2" charset="0"/>
-      <p:regular r:id="rId31"/>
+      <p:font typeface="Ericsson Hilda ExtraLight" panose="020B0604020202020204" charset="0"/>
+      <p:regular r:id="rId33"/>
     </p:embeddedFont>
     <p:embeddedFont>
-      <p:font typeface="Ericsson Hilda Light" pitchFamily="2" charset="0"/>
-      <p:regular r:id="rId32"/>
+      <p:font typeface="Ericsson Hilda Light" panose="020B0604020202020204" charset="0"/>
+      <p:regular r:id="rId34"/>
+      <p:italic r:id="rId35"/>
     </p:embeddedFont>
     <p:embeddedFont>
-      <p:font typeface="Ericsson Technical Icons" pitchFamily="2" charset="0"/>
-      <p:regular r:id="rId33"/>
-      <p:bold r:id="rId34"/>
-      <p:italic r:id="rId35"/>
-      <p:boldItalic r:id="rId36"/>
+      <p:font typeface="Ericsson Technical Icons" panose="020B0604020202020204" charset="0"/>
+      <p:regular r:id="rId36"/>
+      <p:bold r:id="rId37"/>
+      <p:italic r:id="rId38"/>
+      <p:boldItalic r:id="rId39"/>
     </p:embeddedFont>
   </p:embeddedFontLst>
   <p:defaultTextStyle>
@@ -54,14 +57,6 @@
       <a:defRPr lang="en-US"/>
     </a:defPPr>
   </p:defaultTextStyle>
-  <p:extLst>
-    <p:ext uri="{EFAFB233-063F-42B5-8137-9DF3F51BA10A}">
-      <p15:sldGuideLst xmlns:p15="http://schemas.microsoft.com/office/powerpoint/2012/main"/>
-    </p:ext>
-    <p:ext uri="{2D200454-40CA-4A62-9FC3-DE9A4176ACB9}">
-      <p15:notesGuideLst xmlns:p15="http://schemas.microsoft.com/office/powerpoint/2012/main"/>
-    </p:ext>
-  </p:extLst>
 </p:presentation>
 </file>
 
@@ -71,8 +66,1592 @@
 </p188:authorLst>
 </file>
 
+<file path=ppt/revisionInfo.xml><?xml version="1.0" encoding="utf-8"?>
+<p1510:revInfo xmlns:a="http://schemas.openxmlformats.org/drawingml/2006/main" xmlns:r="http://schemas.openxmlformats.org/officeDocument/2006/relationships" xmlns:p1510="http://schemas.microsoft.com/office/powerpoint/2015/10/main">
+  <p1510:revLst>
+    <p1510:client id="{34A8A487-5761-401B-A48C-C24BDC687B67}" v="208" dt="2026-07-18T12:46:55.206"/>
+  </p1510:revLst>
+</p1510:revInfo>
+</file>
+
 <file path=ppt/changesInfos/changesInfo1.xml><?xml version="1.0" encoding="utf-8"?>
 <pc:chgInfo xmlns:a="http://schemas.openxmlformats.org/drawingml/2006/main" xmlns:r="http://schemas.openxmlformats.org/officeDocument/2006/relationships" xmlns:ac="http://schemas.microsoft.com/office/drawing/2013/main/command" xmlns:pc="http://schemas.microsoft.com/office/powerpoint/2013/main/command">
+  <pc:docChgLst>
+    <pc:chgData name="John Mattsson" userId="af1d955f-31b2-4b66-a94f-49d4d7f7d266" providerId="ADAL" clId="{CEB9C44D-A79E-5021-A295-4255D07D6C4D}"/>
+    <pc:docChg chg="modSld">
+      <pc:chgData name="John Mattsson" userId="af1d955f-31b2-4b66-a94f-49d4d7f7d266" providerId="ADAL" clId="{CEB9C44D-A79E-5021-A295-4255D07D6C4D}" dt="2026-07-18T12:22:09.255" v="4" actId="2"/>
+      <pc:docMkLst>
+        <pc:docMk/>
+      </pc:docMkLst>
+      <pc:sldChg chg="modSp mod">
+        <pc:chgData name="John Mattsson" userId="af1d955f-31b2-4b66-a94f-49d4d7f7d266" providerId="ADAL" clId="{CEB9C44D-A79E-5021-A295-4255D07D6C4D}" dt="2026-07-18T12:22:09.255" v="4" actId="2"/>
+        <pc:sldMkLst>
+          <pc:docMk/>
+          <pc:sldMk cId="2604203220" sldId="272"/>
+        </pc:sldMkLst>
+        <pc:spChg chg="mod">
+          <ac:chgData name="John Mattsson" userId="af1d955f-31b2-4b66-a94f-49d4d7f7d266" providerId="ADAL" clId="{CEB9C44D-A79E-5021-A295-4255D07D6C4D}" dt="2026-07-18T12:22:09.255" v="4" actId="2"/>
+          <ac:spMkLst>
+            <pc:docMk/>
+            <pc:sldMk cId="2604203220" sldId="272"/>
+            <ac:spMk id="5" creationId="{80CFE1E9-2446-4327-A152-D121E1DA7E83}"/>
+          </ac:spMkLst>
+        </pc:spChg>
+      </pc:sldChg>
+      <pc:sldChg chg="modSp mod">
+        <pc:chgData name="John Mattsson" userId="af1d955f-31b2-4b66-a94f-49d4d7f7d266" providerId="ADAL" clId="{CEB9C44D-A79E-5021-A295-4255D07D6C4D}" dt="2026-07-18T12:22:04.383" v="2" actId="2"/>
+        <pc:sldMkLst>
+          <pc:docMk/>
+          <pc:sldMk cId="2764015099" sldId="275"/>
+        </pc:sldMkLst>
+        <pc:spChg chg="mod">
+          <ac:chgData name="John Mattsson" userId="af1d955f-31b2-4b66-a94f-49d4d7f7d266" providerId="ADAL" clId="{CEB9C44D-A79E-5021-A295-4255D07D6C4D}" dt="2026-07-18T12:22:02.332" v="0" actId="2"/>
+          <ac:spMkLst>
+            <pc:docMk/>
+            <pc:sldMk cId="2764015099" sldId="275"/>
+            <ac:spMk id="5" creationId="{960C9FF5-1894-156C-43F6-643A7F7A1C7D}"/>
+          </ac:spMkLst>
+        </pc:spChg>
+        <pc:spChg chg="mod">
+          <ac:chgData name="John Mattsson" userId="af1d955f-31b2-4b66-a94f-49d4d7f7d266" providerId="ADAL" clId="{CEB9C44D-A79E-5021-A295-4255D07D6C4D}" dt="2026-07-18T12:22:03.706" v="1" actId="2"/>
+          <ac:spMkLst>
+            <pc:docMk/>
+            <pc:sldMk cId="2764015099" sldId="275"/>
+            <ac:spMk id="22" creationId="{FAC3E9BB-C227-E96B-3FEB-9ABF5D4273B9}"/>
+          </ac:spMkLst>
+        </pc:spChg>
+        <pc:spChg chg="mod">
+          <ac:chgData name="John Mattsson" userId="af1d955f-31b2-4b66-a94f-49d4d7f7d266" providerId="ADAL" clId="{CEB9C44D-A79E-5021-A295-4255D07D6C4D}" dt="2026-07-18T12:22:04.383" v="2" actId="2"/>
+          <ac:spMkLst>
+            <pc:docMk/>
+            <pc:sldMk cId="2764015099" sldId="275"/>
+            <ac:spMk id="24" creationId="{094B2021-F91A-99ED-75B0-508368A658F3}"/>
+          </ac:spMkLst>
+        </pc:spChg>
+      </pc:sldChg>
+    </pc:docChg>
+  </pc:docChgLst>
+  <pc:docChgLst>
+    <pc:chgData name="Marcus Ihlar" userId="3466507a-8f95-47f2-ae1b-ce7d6ca611a4" providerId="ADAL" clId="{3438F4FC-D214-4A35-B915-405844213C8B}"/>
+    <pc:docChg chg="custSel modSld modMainMaster">
+      <pc:chgData name="Marcus Ihlar" userId="3466507a-8f95-47f2-ae1b-ce7d6ca611a4" providerId="ADAL" clId="{3438F4FC-D214-4A35-B915-405844213C8B}" dt="2026-07-18T12:46:55.206" v="263"/>
+      <pc:docMkLst>
+        <pc:docMk/>
+      </pc:docMkLst>
+      <pc:sldChg chg="modSp mod">
+        <pc:chgData name="Marcus Ihlar" userId="3466507a-8f95-47f2-ae1b-ce7d6ca611a4" providerId="ADAL" clId="{3438F4FC-D214-4A35-B915-405844213C8B}" dt="2026-07-18T12:46:54.549" v="95" actId="790"/>
+        <pc:sldMkLst>
+          <pc:docMk/>
+          <pc:sldMk cId="1383928708" sldId="261"/>
+        </pc:sldMkLst>
+        <pc:spChg chg="mod">
+          <ac:chgData name="Marcus Ihlar" userId="3466507a-8f95-47f2-ae1b-ce7d6ca611a4" providerId="ADAL" clId="{3438F4FC-D214-4A35-B915-405844213C8B}" dt="2026-07-18T12:46:54.549" v="95" actId="790"/>
+          <ac:spMkLst>
+            <pc:docMk/>
+            <pc:sldMk cId="1383928708" sldId="261"/>
+            <ac:spMk id="4" creationId="{6FF69E04-8523-4965-90ED-73D4F9BAE271}"/>
+          </ac:spMkLst>
+        </pc:spChg>
+      </pc:sldChg>
+      <pc:sldChg chg="modSp mod">
+        <pc:chgData name="Marcus Ihlar" userId="3466507a-8f95-47f2-ae1b-ce7d6ca611a4" providerId="ADAL" clId="{3438F4FC-D214-4A35-B915-405844213C8B}" dt="2026-07-18T12:46:54.504" v="66" actId="790"/>
+        <pc:sldMkLst>
+          <pc:docMk/>
+          <pc:sldMk cId="3709959988" sldId="270"/>
+        </pc:sldMkLst>
+        <pc:spChg chg="mod">
+          <ac:chgData name="Marcus Ihlar" userId="3466507a-8f95-47f2-ae1b-ce7d6ca611a4" providerId="ADAL" clId="{3438F4FC-D214-4A35-B915-405844213C8B}" dt="2026-07-18T12:46:54.502" v="65" actId="790"/>
+          <ac:spMkLst>
+            <pc:docMk/>
+            <pc:sldMk cId="3709959988" sldId="270"/>
+            <ac:spMk id="2" creationId="{596B0A1D-8369-1F32-91B8-AD5040D13892}"/>
+          </ac:spMkLst>
+        </pc:spChg>
+        <pc:spChg chg="mod">
+          <ac:chgData name="Marcus Ihlar" userId="3466507a-8f95-47f2-ae1b-ce7d6ca611a4" providerId="ADAL" clId="{3438F4FC-D214-4A35-B915-405844213C8B}" dt="2026-07-18T12:46:54.504" v="66" actId="790"/>
+          <ac:spMkLst>
+            <pc:docMk/>
+            <pc:sldMk cId="3709959988" sldId="270"/>
+            <ac:spMk id="4" creationId="{E93AAB2F-D478-E837-ACB0-D912DA518E4B}"/>
+          </ac:spMkLst>
+        </pc:spChg>
+      </pc:sldChg>
+      <pc:sldChg chg="modSp mod">
+        <pc:chgData name="Marcus Ihlar" userId="3466507a-8f95-47f2-ae1b-ce7d6ca611a4" providerId="ADAL" clId="{3438F4FC-D214-4A35-B915-405844213C8B}" dt="2026-07-18T12:46:54.502" v="64" actId="790"/>
+        <pc:sldMkLst>
+          <pc:docMk/>
+          <pc:sldMk cId="2230748882" sldId="271"/>
+        </pc:sldMkLst>
+        <pc:spChg chg="mod">
+          <ac:chgData name="Marcus Ihlar" userId="3466507a-8f95-47f2-ae1b-ce7d6ca611a4" providerId="ADAL" clId="{3438F4FC-D214-4A35-B915-405844213C8B}" dt="2026-07-18T12:46:54.496" v="60" actId="790"/>
+          <ac:spMkLst>
+            <pc:docMk/>
+            <pc:sldMk cId="2230748882" sldId="271"/>
+            <ac:spMk id="3" creationId="{17D5CE7D-CCF0-44B0-843A-8D46859C44EE}"/>
+          </ac:spMkLst>
+        </pc:spChg>
+        <pc:spChg chg="mod">
+          <ac:chgData name="Marcus Ihlar" userId="3466507a-8f95-47f2-ae1b-ce7d6ca611a4" providerId="ADAL" clId="{3438F4FC-D214-4A35-B915-405844213C8B}" dt="2026-07-18T12:46:54.500" v="61" actId="790"/>
+          <ac:spMkLst>
+            <pc:docMk/>
+            <pc:sldMk cId="2230748882" sldId="271"/>
+            <ac:spMk id="4" creationId="{6A927E07-3624-45B8-934B-C229726CA813}"/>
+          </ac:spMkLst>
+        </pc:spChg>
+        <pc:spChg chg="mod">
+          <ac:chgData name="Marcus Ihlar" userId="3466507a-8f95-47f2-ae1b-ce7d6ca611a4" providerId="ADAL" clId="{3438F4FC-D214-4A35-B915-405844213C8B}" dt="2026-07-18T12:46:54.500" v="62" actId="790"/>
+          <ac:spMkLst>
+            <pc:docMk/>
+            <pc:sldMk cId="2230748882" sldId="271"/>
+            <ac:spMk id="5" creationId="{0D8DE8B4-7BAB-4C18-A0E5-01D3A11D374F}"/>
+          </ac:spMkLst>
+        </pc:spChg>
+        <pc:spChg chg="mod">
+          <ac:chgData name="Marcus Ihlar" userId="3466507a-8f95-47f2-ae1b-ce7d6ca611a4" providerId="ADAL" clId="{3438F4FC-D214-4A35-B915-405844213C8B}" dt="2026-07-18T12:46:54.500" v="63" actId="790"/>
+          <ac:spMkLst>
+            <pc:docMk/>
+            <pc:sldMk cId="2230748882" sldId="271"/>
+            <ac:spMk id="6" creationId="{327EB691-17C6-4220-AA5E-2F3518AF8CC2}"/>
+          </ac:spMkLst>
+        </pc:spChg>
+        <pc:spChg chg="mod">
+          <ac:chgData name="Marcus Ihlar" userId="3466507a-8f95-47f2-ae1b-ce7d6ca611a4" providerId="ADAL" clId="{3438F4FC-D214-4A35-B915-405844213C8B}" dt="2026-07-18T12:46:54.502" v="64" actId="790"/>
+          <ac:spMkLst>
+            <pc:docMk/>
+            <pc:sldMk cId="2230748882" sldId="271"/>
+            <ac:spMk id="7" creationId="{0BF70DC3-66C9-451C-917E-BA44956D1DBD}"/>
+          </ac:spMkLst>
+        </pc:spChg>
+      </pc:sldChg>
+      <pc:sldChg chg="modSp mod">
+        <pc:chgData name="Marcus Ihlar" userId="3466507a-8f95-47f2-ae1b-ce7d6ca611a4" providerId="ADAL" clId="{3438F4FC-D214-4A35-B915-405844213C8B}" dt="2026-07-18T12:46:54.546" v="90" actId="790"/>
+        <pc:sldMkLst>
+          <pc:docMk/>
+          <pc:sldMk cId="2604203220" sldId="272"/>
+        </pc:sldMkLst>
+        <pc:spChg chg="mod">
+          <ac:chgData name="Marcus Ihlar" userId="3466507a-8f95-47f2-ae1b-ce7d6ca611a4" providerId="ADAL" clId="{3438F4FC-D214-4A35-B915-405844213C8B}" dt="2026-07-18T12:46:54.544" v="89" actId="790"/>
+          <ac:spMkLst>
+            <pc:docMk/>
+            <pc:sldMk cId="2604203220" sldId="272"/>
+            <ac:spMk id="4" creationId="{306D82EC-811D-454E-9DFF-2EEC63AD50B4}"/>
+          </ac:spMkLst>
+        </pc:spChg>
+        <pc:spChg chg="mod">
+          <ac:chgData name="Marcus Ihlar" userId="3466507a-8f95-47f2-ae1b-ce7d6ca611a4" providerId="ADAL" clId="{3438F4FC-D214-4A35-B915-405844213C8B}" dt="2026-07-18T12:46:54.546" v="90" actId="790"/>
+          <ac:spMkLst>
+            <pc:docMk/>
+            <pc:sldMk cId="2604203220" sldId="272"/>
+            <ac:spMk id="5" creationId="{80CFE1E9-2446-4327-A152-D121E1DA7E83}"/>
+          </ac:spMkLst>
+        </pc:spChg>
+      </pc:sldChg>
+      <pc:sldChg chg="modSp mod">
+        <pc:chgData name="Marcus Ihlar" userId="3466507a-8f95-47f2-ae1b-ce7d6ca611a4" providerId="ADAL" clId="{3438F4FC-D214-4A35-B915-405844213C8B}" dt="2026-07-18T12:46:54.504" v="68" actId="790"/>
+        <pc:sldMkLst>
+          <pc:docMk/>
+          <pc:sldMk cId="3701326332" sldId="273"/>
+        </pc:sldMkLst>
+        <pc:spChg chg="mod">
+          <ac:chgData name="Marcus Ihlar" userId="3466507a-8f95-47f2-ae1b-ce7d6ca611a4" providerId="ADAL" clId="{3438F4FC-D214-4A35-B915-405844213C8B}" dt="2026-07-18T12:46:54.504" v="67" actId="790"/>
+          <ac:spMkLst>
+            <pc:docMk/>
+            <pc:sldMk cId="3701326332" sldId="273"/>
+            <ac:spMk id="2" creationId="{92653488-02BE-D14E-3FBF-371B08482954}"/>
+          </ac:spMkLst>
+        </pc:spChg>
+        <pc:spChg chg="mod">
+          <ac:chgData name="Marcus Ihlar" userId="3466507a-8f95-47f2-ae1b-ce7d6ca611a4" providerId="ADAL" clId="{3438F4FC-D214-4A35-B915-405844213C8B}" dt="2026-07-18T12:46:54.504" v="68" actId="790"/>
+          <ac:spMkLst>
+            <pc:docMk/>
+            <pc:sldMk cId="3701326332" sldId="273"/>
+            <ac:spMk id="4" creationId="{7DFDB2E9-A5D0-60E8-6F31-EC95BA9C0AA3}"/>
+          </ac:spMkLst>
+        </pc:spChg>
+      </pc:sldChg>
+      <pc:sldChg chg="modSp mod">
+        <pc:chgData name="Marcus Ihlar" userId="3466507a-8f95-47f2-ae1b-ce7d6ca611a4" providerId="ADAL" clId="{3438F4FC-D214-4A35-B915-405844213C8B}" dt="2026-07-18T12:46:54.536" v="72" actId="790"/>
+        <pc:sldMkLst>
+          <pc:docMk/>
+          <pc:sldMk cId="2124198194" sldId="274"/>
+        </pc:sldMkLst>
+        <pc:spChg chg="mod">
+          <ac:chgData name="Marcus Ihlar" userId="3466507a-8f95-47f2-ae1b-ce7d6ca611a4" providerId="ADAL" clId="{3438F4FC-D214-4A35-B915-405844213C8B}" dt="2026-07-18T12:46:54.504" v="69" actId="790"/>
+          <ac:spMkLst>
+            <pc:docMk/>
+            <pc:sldMk cId="2124198194" sldId="274"/>
+            <ac:spMk id="2" creationId="{C7E44E2A-CD41-AB2A-F361-625CA596C764}"/>
+          </ac:spMkLst>
+        </pc:spChg>
+        <pc:spChg chg="mod">
+          <ac:chgData name="Marcus Ihlar" userId="3466507a-8f95-47f2-ae1b-ce7d6ca611a4" providerId="ADAL" clId="{3438F4FC-D214-4A35-B915-405844213C8B}" dt="2026-07-18T12:46:54.525" v="70" actId="790"/>
+          <ac:spMkLst>
+            <pc:docMk/>
+            <pc:sldMk cId="2124198194" sldId="274"/>
+            <ac:spMk id="4" creationId="{314A80B3-1CF1-518A-C35B-B27359B70B41}"/>
+          </ac:spMkLst>
+        </pc:spChg>
+        <pc:spChg chg="mod">
+          <ac:chgData name="Marcus Ihlar" userId="3466507a-8f95-47f2-ae1b-ce7d6ca611a4" providerId="ADAL" clId="{3438F4FC-D214-4A35-B915-405844213C8B}" dt="2026-07-18T12:46:54.525" v="71" actId="790"/>
+          <ac:spMkLst>
+            <pc:docMk/>
+            <pc:sldMk cId="2124198194" sldId="274"/>
+            <ac:spMk id="9" creationId="{4BDA47E8-EBD1-F2FA-9AAE-B2DF174F7608}"/>
+          </ac:spMkLst>
+        </pc:spChg>
+        <pc:spChg chg="mod">
+          <ac:chgData name="Marcus Ihlar" userId="3466507a-8f95-47f2-ae1b-ce7d6ca611a4" providerId="ADAL" clId="{3438F4FC-D214-4A35-B915-405844213C8B}" dt="2026-07-18T12:46:54.536" v="72" actId="790"/>
+          <ac:spMkLst>
+            <pc:docMk/>
+            <pc:sldMk cId="2124198194" sldId="274"/>
+            <ac:spMk id="11" creationId="{7DFC4256-2ECB-FFED-7B57-8A4E40F96507}"/>
+          </ac:spMkLst>
+        </pc:spChg>
+      </pc:sldChg>
+      <pc:sldChg chg="modSp mod">
+        <pc:chgData name="Marcus Ihlar" userId="3466507a-8f95-47f2-ae1b-ce7d6ca611a4" providerId="ADAL" clId="{3438F4FC-D214-4A35-B915-405844213C8B}" dt="2026-07-18T12:46:54.544" v="88" actId="790"/>
+        <pc:sldMkLst>
+          <pc:docMk/>
+          <pc:sldMk cId="2764015099" sldId="275"/>
+        </pc:sldMkLst>
+        <pc:spChg chg="mod">
+          <ac:chgData name="Marcus Ihlar" userId="3466507a-8f95-47f2-ae1b-ce7d6ca611a4" providerId="ADAL" clId="{3438F4FC-D214-4A35-B915-405844213C8B}" dt="2026-07-18T12:46:54.536" v="74" actId="790"/>
+          <ac:spMkLst>
+            <pc:docMk/>
+            <pc:sldMk cId="2764015099" sldId="275"/>
+            <ac:spMk id="2" creationId="{D4384A3F-58F1-A256-83EA-743903115B60}"/>
+          </ac:spMkLst>
+        </pc:spChg>
+        <pc:spChg chg="mod">
+          <ac:chgData name="Marcus Ihlar" userId="3466507a-8f95-47f2-ae1b-ce7d6ca611a4" providerId="ADAL" clId="{3438F4FC-D214-4A35-B915-405844213C8B}" dt="2026-07-18T12:46:54.536" v="75" actId="790"/>
+          <ac:spMkLst>
+            <pc:docMk/>
+            <pc:sldMk cId="2764015099" sldId="275"/>
+            <ac:spMk id="5" creationId="{960C9FF5-1894-156C-43F6-643A7F7A1C7D}"/>
+          </ac:spMkLst>
+        </pc:spChg>
+        <pc:spChg chg="mod">
+          <ac:chgData name="Marcus Ihlar" userId="3466507a-8f95-47f2-ae1b-ce7d6ca611a4" providerId="ADAL" clId="{3438F4FC-D214-4A35-B915-405844213C8B}" dt="2026-07-18T12:46:54.536" v="76" actId="790"/>
+          <ac:spMkLst>
+            <pc:docMk/>
+            <pc:sldMk cId="2764015099" sldId="275"/>
+            <ac:spMk id="6" creationId="{6920695F-6167-1262-6642-25DA132DE3A5}"/>
+          </ac:spMkLst>
+        </pc:spChg>
+        <pc:spChg chg="mod">
+          <ac:chgData name="Marcus Ihlar" userId="3466507a-8f95-47f2-ae1b-ce7d6ca611a4" providerId="ADAL" clId="{3438F4FC-D214-4A35-B915-405844213C8B}" dt="2026-07-18T12:46:54.536" v="77" actId="790"/>
+          <ac:spMkLst>
+            <pc:docMk/>
+            <pc:sldMk cId="2764015099" sldId="275"/>
+            <ac:spMk id="7" creationId="{BC97D6A3-2A1B-B7B5-18F3-AAE6753DE9A0}"/>
+          </ac:spMkLst>
+        </pc:spChg>
+        <pc:spChg chg="mod">
+          <ac:chgData name="Marcus Ihlar" userId="3466507a-8f95-47f2-ae1b-ce7d6ca611a4" providerId="ADAL" clId="{3438F4FC-D214-4A35-B915-405844213C8B}" dt="2026-07-18T12:46:54.536" v="78" actId="790"/>
+          <ac:spMkLst>
+            <pc:docMk/>
+            <pc:sldMk cId="2764015099" sldId="275"/>
+            <ac:spMk id="8" creationId="{6202CA28-A970-9BB6-1439-5404CEEE2A76}"/>
+          </ac:spMkLst>
+        </pc:spChg>
+        <pc:spChg chg="mod">
+          <ac:chgData name="Marcus Ihlar" userId="3466507a-8f95-47f2-ae1b-ce7d6ca611a4" providerId="ADAL" clId="{3438F4FC-D214-4A35-B915-405844213C8B}" dt="2026-07-18T12:46:54.536" v="79" actId="790"/>
+          <ac:spMkLst>
+            <pc:docMk/>
+            <pc:sldMk cId="2764015099" sldId="275"/>
+            <ac:spMk id="9" creationId="{DCF902B9-5E69-31D7-25EC-752D13E3EFDD}"/>
+          </ac:spMkLst>
+        </pc:spChg>
+        <pc:spChg chg="mod">
+          <ac:chgData name="Marcus Ihlar" userId="3466507a-8f95-47f2-ae1b-ce7d6ca611a4" providerId="ADAL" clId="{3438F4FC-D214-4A35-B915-405844213C8B}" dt="2026-07-18T12:46:54.536" v="80" actId="790"/>
+          <ac:spMkLst>
+            <pc:docMk/>
+            <pc:sldMk cId="2764015099" sldId="275"/>
+            <ac:spMk id="10" creationId="{B17F953D-E0FC-FBDA-737C-61CEA30CA4DB}"/>
+          </ac:spMkLst>
+        </pc:spChg>
+        <pc:spChg chg="mod">
+          <ac:chgData name="Marcus Ihlar" userId="3466507a-8f95-47f2-ae1b-ce7d6ca611a4" providerId="ADAL" clId="{3438F4FC-D214-4A35-B915-405844213C8B}" dt="2026-07-18T12:46:54.536" v="81" actId="790"/>
+          <ac:spMkLst>
+            <pc:docMk/>
+            <pc:sldMk cId="2764015099" sldId="275"/>
+            <ac:spMk id="11" creationId="{97434ACE-2B30-7758-3426-90110AA28D16}"/>
+          </ac:spMkLst>
+        </pc:spChg>
+        <pc:spChg chg="mod">
+          <ac:chgData name="Marcus Ihlar" userId="3466507a-8f95-47f2-ae1b-ce7d6ca611a4" providerId="ADAL" clId="{3438F4FC-D214-4A35-B915-405844213C8B}" dt="2026-07-18T12:46:54.542" v="82" actId="790"/>
+          <ac:spMkLst>
+            <pc:docMk/>
+            <pc:sldMk cId="2764015099" sldId="275"/>
+            <ac:spMk id="12" creationId="{0928E274-EB18-9086-75DE-0848F4DFBF52}"/>
+          </ac:spMkLst>
+        </pc:spChg>
+        <pc:spChg chg="mod">
+          <ac:chgData name="Marcus Ihlar" userId="3466507a-8f95-47f2-ae1b-ce7d6ca611a4" providerId="ADAL" clId="{3438F4FC-D214-4A35-B915-405844213C8B}" dt="2026-07-18T12:46:54.542" v="83" actId="790"/>
+          <ac:spMkLst>
+            <pc:docMk/>
+            <pc:sldMk cId="2764015099" sldId="275"/>
+            <ac:spMk id="16" creationId="{25F5E3B6-5C68-5F61-ECAD-EAF05BEF9815}"/>
+          </ac:spMkLst>
+        </pc:spChg>
+        <pc:spChg chg="mod">
+          <ac:chgData name="Marcus Ihlar" userId="3466507a-8f95-47f2-ae1b-ce7d6ca611a4" providerId="ADAL" clId="{3438F4FC-D214-4A35-B915-405844213C8B}" dt="2026-07-18T12:46:54.542" v="84" actId="790"/>
+          <ac:spMkLst>
+            <pc:docMk/>
+            <pc:sldMk cId="2764015099" sldId="275"/>
+            <ac:spMk id="18" creationId="{24A11324-0020-D7C3-051E-64471B9C5F6F}"/>
+          </ac:spMkLst>
+        </pc:spChg>
+        <pc:spChg chg="mod">
+          <ac:chgData name="Marcus Ihlar" userId="3466507a-8f95-47f2-ae1b-ce7d6ca611a4" providerId="ADAL" clId="{3438F4FC-D214-4A35-B915-405844213C8B}" dt="2026-07-18T12:46:54.542" v="85" actId="790"/>
+          <ac:spMkLst>
+            <pc:docMk/>
+            <pc:sldMk cId="2764015099" sldId="275"/>
+            <ac:spMk id="19" creationId="{C9AB8C0C-3ECB-1EC9-1916-6A4873A83BAD}"/>
+          </ac:spMkLst>
+        </pc:spChg>
+        <pc:spChg chg="mod">
+          <ac:chgData name="Marcus Ihlar" userId="3466507a-8f95-47f2-ae1b-ce7d6ca611a4" providerId="ADAL" clId="{3438F4FC-D214-4A35-B915-405844213C8B}" dt="2026-07-18T12:46:54.536" v="73" actId="790"/>
+          <ac:spMkLst>
+            <pc:docMk/>
+            <pc:sldMk cId="2764015099" sldId="275"/>
+            <ac:spMk id="21" creationId="{D86059CB-0938-6DE5-777D-0C8BDEED76D9}"/>
+          </ac:spMkLst>
+        </pc:spChg>
+        <pc:spChg chg="mod">
+          <ac:chgData name="Marcus Ihlar" userId="3466507a-8f95-47f2-ae1b-ce7d6ca611a4" providerId="ADAL" clId="{3438F4FC-D214-4A35-B915-405844213C8B}" dt="2026-07-18T12:46:54.542" v="86" actId="790"/>
+          <ac:spMkLst>
+            <pc:docMk/>
+            <pc:sldMk cId="2764015099" sldId="275"/>
+            <ac:spMk id="22" creationId="{FAC3E9BB-C227-E96B-3FEB-9ABF5D4273B9}"/>
+          </ac:spMkLst>
+        </pc:spChg>
+        <pc:spChg chg="mod">
+          <ac:chgData name="Marcus Ihlar" userId="3466507a-8f95-47f2-ae1b-ce7d6ca611a4" providerId="ADAL" clId="{3438F4FC-D214-4A35-B915-405844213C8B}" dt="2026-07-18T12:46:54.544" v="87" actId="790"/>
+          <ac:spMkLst>
+            <pc:docMk/>
+            <pc:sldMk cId="2764015099" sldId="275"/>
+            <ac:spMk id="24" creationId="{094B2021-F91A-99ED-75B0-508368A658F3}"/>
+          </ac:spMkLst>
+        </pc:spChg>
+        <pc:spChg chg="mod">
+          <ac:chgData name="Marcus Ihlar" userId="3466507a-8f95-47f2-ae1b-ce7d6ca611a4" providerId="ADAL" clId="{3438F4FC-D214-4A35-B915-405844213C8B}" dt="2026-07-18T12:46:54.544" v="88" actId="790"/>
+          <ac:spMkLst>
+            <pc:docMk/>
+            <pc:sldMk cId="2764015099" sldId="275"/>
+            <ac:spMk id="28" creationId="{BD07DC36-2136-521A-C5A7-4E3964B6C76C}"/>
+          </ac:spMkLst>
+        </pc:spChg>
+      </pc:sldChg>
+      <pc:sldChg chg="modSp mod">
+        <pc:chgData name="Marcus Ihlar" userId="3466507a-8f95-47f2-ae1b-ce7d6ca611a4" providerId="ADAL" clId="{3438F4FC-D214-4A35-B915-405844213C8B}" dt="2026-07-18T12:46:54.547" v="92" actId="790"/>
+        <pc:sldMkLst>
+          <pc:docMk/>
+          <pc:sldMk cId="1304617088" sldId="276"/>
+        </pc:sldMkLst>
+        <pc:spChg chg="mod">
+          <ac:chgData name="Marcus Ihlar" userId="3466507a-8f95-47f2-ae1b-ce7d6ca611a4" providerId="ADAL" clId="{3438F4FC-D214-4A35-B915-405844213C8B}" dt="2026-07-18T12:46:54.546" v="91" actId="790"/>
+          <ac:spMkLst>
+            <pc:docMk/>
+            <pc:sldMk cId="1304617088" sldId="276"/>
+            <ac:spMk id="2" creationId="{0B636F9B-0102-026E-C2CA-976ADA350919}"/>
+          </ac:spMkLst>
+        </pc:spChg>
+        <pc:spChg chg="mod">
+          <ac:chgData name="Marcus Ihlar" userId="3466507a-8f95-47f2-ae1b-ce7d6ca611a4" providerId="ADAL" clId="{3438F4FC-D214-4A35-B915-405844213C8B}" dt="2026-07-18T12:46:54.547" v="92" actId="790"/>
+          <ac:spMkLst>
+            <pc:docMk/>
+            <pc:sldMk cId="1304617088" sldId="276"/>
+            <ac:spMk id="3" creationId="{A34535F1-01E7-D3B7-FF34-E094F215875B}"/>
+          </ac:spMkLst>
+        </pc:spChg>
+      </pc:sldChg>
+      <pc:sldChg chg="modSp mod">
+        <pc:chgData name="Marcus Ihlar" userId="3466507a-8f95-47f2-ae1b-ce7d6ca611a4" providerId="ADAL" clId="{3438F4FC-D214-4A35-B915-405844213C8B}" dt="2026-07-18T12:46:54.549" v="94" actId="790"/>
+        <pc:sldMkLst>
+          <pc:docMk/>
+          <pc:sldMk cId="161554356" sldId="277"/>
+        </pc:sldMkLst>
+        <pc:spChg chg="mod">
+          <ac:chgData name="Marcus Ihlar" userId="3466507a-8f95-47f2-ae1b-ce7d6ca611a4" providerId="ADAL" clId="{3438F4FC-D214-4A35-B915-405844213C8B}" dt="2026-07-18T12:46:54.547" v="93" actId="790"/>
+          <ac:spMkLst>
+            <pc:docMk/>
+            <pc:sldMk cId="161554356" sldId="277"/>
+            <ac:spMk id="2" creationId="{6F2CC43D-F545-4DCB-8B43-E8EAFF8E4D4B}"/>
+          </ac:spMkLst>
+        </pc:spChg>
+        <pc:spChg chg="mod">
+          <ac:chgData name="Marcus Ihlar" userId="3466507a-8f95-47f2-ae1b-ce7d6ca611a4" providerId="ADAL" clId="{3438F4FC-D214-4A35-B915-405844213C8B}" dt="2026-07-18T12:46:54.549" v="94" actId="790"/>
+          <ac:spMkLst>
+            <pc:docMk/>
+            <pc:sldMk cId="161554356" sldId="277"/>
+            <ac:spMk id="3" creationId="{3FFE951D-D3C4-01B3-8CA5-D6CC1E7B8472}"/>
+          </ac:spMkLst>
+        </pc:spChg>
+      </pc:sldChg>
+      <pc:sldMasterChg chg="modSp mod modSldLayout">
+        <pc:chgData name="Marcus Ihlar" userId="3466507a-8f95-47f2-ae1b-ce7d6ca611a4" providerId="ADAL" clId="{3438F4FC-D214-4A35-B915-405844213C8B}" dt="2026-07-18T12:46:55.206" v="263"/>
+        <pc:sldMasterMkLst>
+          <pc:docMk/>
+          <pc:sldMasterMk cId="2523064765" sldId="2147483660"/>
+        </pc:sldMasterMkLst>
+        <pc:spChg chg="mod">
+          <ac:chgData name="Marcus Ihlar" userId="3466507a-8f95-47f2-ae1b-ce7d6ca611a4" providerId="ADAL" clId="{3438F4FC-D214-4A35-B915-405844213C8B}" dt="2026-07-18T12:46:55.066" v="203" actId="790"/>
+          <ac:spMkLst>
+            <pc:docMk/>
+            <pc:sldMasterMk cId="2523064765" sldId="2147483660"/>
+            <ac:spMk id="8" creationId="{483145CE-A2DE-4236-A4F9-8AE088671CA5}"/>
+          </ac:spMkLst>
+        </pc:spChg>
+        <pc:spChg chg="mod">
+          <ac:chgData name="Marcus Ihlar" userId="3466507a-8f95-47f2-ae1b-ce7d6ca611a4" providerId="ADAL" clId="{3438F4FC-D214-4A35-B915-405844213C8B}" dt="2026-07-18T12:46:55.040" v="202" actId="790"/>
+          <ac:spMkLst>
+            <pc:docMk/>
+            <pc:sldMasterMk cId="2523064765" sldId="2147483660"/>
+            <ac:spMk id="21506" creationId="{00000000-0000-0000-0000-000000000000}"/>
+          </ac:spMkLst>
+        </pc:spChg>
+        <pc:sldLayoutChg chg="modSp mod">
+          <pc:chgData name="Marcus Ihlar" userId="3466507a-8f95-47f2-ae1b-ce7d6ca611a4" providerId="ADAL" clId="{3438F4FC-D214-4A35-B915-405844213C8B}" dt="2026-07-18T12:46:55.109" v="206"/>
+          <pc:sldLayoutMkLst>
+            <pc:docMk/>
+            <pc:sldMasterMk cId="2523064765" sldId="2147483660"/>
+            <pc:sldLayoutMk cId="1374575616" sldId="2147483661"/>
+          </pc:sldLayoutMkLst>
+          <pc:spChg chg="mod">
+            <ac:chgData name="Marcus Ihlar" userId="3466507a-8f95-47f2-ae1b-ce7d6ca611a4" providerId="ADAL" clId="{3438F4FC-D214-4A35-B915-405844213C8B}" dt="2026-07-18T12:46:54.554" v="98" actId="790"/>
+            <ac:spMkLst>
+              <pc:docMk/>
+              <pc:sldMasterMk cId="2523064765" sldId="2147483660"/>
+              <pc:sldLayoutMk cId="1374575616" sldId="2147483661"/>
+              <ac:spMk id="3" creationId="{00000000-0000-0000-0000-000000000000}"/>
+            </ac:spMkLst>
+          </pc:spChg>
+          <pc:spChg chg="mod">
+            <ac:chgData name="Marcus Ihlar" userId="3466507a-8f95-47f2-ae1b-ce7d6ca611a4" providerId="ADAL" clId="{3438F4FC-D214-4A35-B915-405844213C8B}" dt="2026-07-18T12:46:55.109" v="206"/>
+            <ac:spMkLst>
+              <pc:docMk/>
+              <pc:sldMasterMk cId="2523064765" sldId="2147483660"/>
+              <pc:sldLayoutMk cId="1374575616" sldId="2147483661"/>
+              <ac:spMk id="9" creationId="{72C1EE1F-EF94-4EBA-A010-8BC3D2F38C39}"/>
+            </ac:spMkLst>
+          </pc:spChg>
+          <pc:spChg chg="mod">
+            <ac:chgData name="Marcus Ihlar" userId="3466507a-8f95-47f2-ae1b-ce7d6ca611a4" providerId="ADAL" clId="{3438F4FC-D214-4A35-B915-405844213C8B}" dt="2026-07-18T12:46:54.554" v="99" actId="790"/>
+            <ac:spMkLst>
+              <pc:docMk/>
+              <pc:sldMasterMk cId="2523064765" sldId="2147483660"/>
+              <pc:sldLayoutMk cId="1374575616" sldId="2147483661"/>
+              <ac:spMk id="12" creationId="{00000000-0000-0000-0000-000000000000}"/>
+            </ac:spMkLst>
+          </pc:spChg>
+          <pc:spChg chg="mod">
+            <ac:chgData name="Marcus Ihlar" userId="3466507a-8f95-47f2-ae1b-ce7d6ca611a4" providerId="ADAL" clId="{3438F4FC-D214-4A35-B915-405844213C8B}" dt="2026-07-18T12:46:54.554" v="100" actId="790"/>
+            <ac:spMkLst>
+              <pc:docMk/>
+              <pc:sldMasterMk cId="2523064765" sldId="2147483660"/>
+              <pc:sldLayoutMk cId="1374575616" sldId="2147483661"/>
+              <ac:spMk id="15" creationId="{00000000-0000-0000-0000-000000000000}"/>
+            </ac:spMkLst>
+          </pc:spChg>
+          <pc:spChg chg="mod">
+            <ac:chgData name="Marcus Ihlar" userId="3466507a-8f95-47f2-ae1b-ce7d6ca611a4" providerId="ADAL" clId="{3438F4FC-D214-4A35-B915-405844213C8B}" dt="2026-07-18T12:46:54.552" v="97" actId="790"/>
+            <ac:spMkLst>
+              <pc:docMk/>
+              <pc:sldMasterMk cId="2523064765" sldId="2147483660"/>
+              <pc:sldLayoutMk cId="1374575616" sldId="2147483661"/>
+              <ac:spMk id="22530" creationId="{00000000-0000-0000-0000-000000000000}"/>
+            </ac:spMkLst>
+          </pc:spChg>
+          <pc:spChg chg="mod">
+            <ac:chgData name="Marcus Ihlar" userId="3466507a-8f95-47f2-ae1b-ce7d6ca611a4" providerId="ADAL" clId="{3438F4FC-D214-4A35-B915-405844213C8B}" dt="2026-07-18T12:46:54.551" v="96" actId="790"/>
+            <ac:spMkLst>
+              <pc:docMk/>
+              <pc:sldMasterMk cId="2523064765" sldId="2147483660"/>
+              <pc:sldLayoutMk cId="1374575616" sldId="2147483661"/>
+              <ac:spMk id="22531" creationId="{00000000-0000-0000-0000-000000000000}"/>
+            </ac:spMkLst>
+          </pc:spChg>
+        </pc:sldLayoutChg>
+        <pc:sldLayoutChg chg="modSp mod">
+          <pc:chgData name="Marcus Ihlar" userId="3466507a-8f95-47f2-ae1b-ce7d6ca611a4" providerId="ADAL" clId="{3438F4FC-D214-4A35-B915-405844213C8B}" dt="2026-07-18T12:46:55.153" v="218"/>
+          <pc:sldLayoutMkLst>
+            <pc:docMk/>
+            <pc:sldMasterMk cId="2523064765" sldId="2147483660"/>
+            <pc:sldLayoutMk cId="3415456144" sldId="2147483673"/>
+          </pc:sldLayoutMkLst>
+          <pc:spChg chg="mod">
+            <ac:chgData name="Marcus Ihlar" userId="3466507a-8f95-47f2-ae1b-ce7d6ca611a4" providerId="ADAL" clId="{3438F4FC-D214-4A35-B915-405844213C8B}" dt="2026-07-18T12:46:55.153" v="218"/>
+            <ac:spMkLst>
+              <pc:docMk/>
+              <pc:sldMasterMk cId="2523064765" sldId="2147483660"/>
+              <pc:sldLayoutMk cId="3415456144" sldId="2147483673"/>
+              <ac:spMk id="3" creationId="{C44ECCE6-4D94-443E-8C20-CA233A5C0572}"/>
+            </ac:spMkLst>
+          </pc:spChg>
+          <pc:spChg chg="mod">
+            <ac:chgData name="Marcus Ihlar" userId="3466507a-8f95-47f2-ae1b-ce7d6ca611a4" providerId="ADAL" clId="{3438F4FC-D214-4A35-B915-405844213C8B}" dt="2026-07-18T12:46:54.557" v="112" actId="790"/>
+            <ac:spMkLst>
+              <pc:docMk/>
+              <pc:sldMasterMk cId="2523064765" sldId="2147483660"/>
+              <pc:sldLayoutMk cId="3415456144" sldId="2147483673"/>
+              <ac:spMk id="4" creationId="{00000000-0000-0000-0000-000000000000}"/>
+            </ac:spMkLst>
+          </pc:spChg>
+        </pc:sldLayoutChg>
+        <pc:sldLayoutChg chg="modSp mod">
+          <pc:chgData name="Marcus Ihlar" userId="3466507a-8f95-47f2-ae1b-ce7d6ca611a4" providerId="ADAL" clId="{3438F4FC-D214-4A35-B915-405844213C8B}" dt="2026-07-18T12:46:55.175" v="236"/>
+          <pc:sldLayoutMkLst>
+            <pc:docMk/>
+            <pc:sldMasterMk cId="2523064765" sldId="2147483660"/>
+            <pc:sldLayoutMk cId="675883818" sldId="2147483675"/>
+          </pc:sldLayoutMkLst>
+          <pc:spChg chg="mod">
+            <ac:chgData name="Marcus Ihlar" userId="3466507a-8f95-47f2-ae1b-ce7d6ca611a4" providerId="ADAL" clId="{3438F4FC-D214-4A35-B915-405844213C8B}" dt="2026-07-18T12:46:54.588" v="132" actId="790"/>
+            <ac:spMkLst>
+              <pc:docMk/>
+              <pc:sldMasterMk cId="2523064765" sldId="2147483660"/>
+              <pc:sldLayoutMk cId="675883818" sldId="2147483675"/>
+              <ac:spMk id="3" creationId="{00000000-0000-0000-0000-000000000000}"/>
+            </ac:spMkLst>
+          </pc:spChg>
+          <pc:spChg chg="mod">
+            <ac:chgData name="Marcus Ihlar" userId="3466507a-8f95-47f2-ae1b-ce7d6ca611a4" providerId="ADAL" clId="{3438F4FC-D214-4A35-B915-405844213C8B}" dt="2026-07-18T12:46:54.588" v="133" actId="790"/>
+            <ac:spMkLst>
+              <pc:docMk/>
+              <pc:sldMasterMk cId="2523064765" sldId="2147483660"/>
+              <pc:sldLayoutMk cId="675883818" sldId="2147483675"/>
+              <ac:spMk id="5" creationId="{00000000-0000-0000-0000-000000000000}"/>
+            </ac:spMkLst>
+          </pc:spChg>
+          <pc:spChg chg="mod">
+            <ac:chgData name="Marcus Ihlar" userId="3466507a-8f95-47f2-ae1b-ce7d6ca611a4" providerId="ADAL" clId="{3438F4FC-D214-4A35-B915-405844213C8B}" dt="2026-07-18T12:46:54.588" v="131" actId="790"/>
+            <ac:spMkLst>
+              <pc:docMk/>
+              <pc:sldMasterMk cId="2523064765" sldId="2147483660"/>
+              <pc:sldLayoutMk cId="675883818" sldId="2147483675"/>
+              <ac:spMk id="6" creationId="{891BF4C4-9DF9-4D9F-A738-37FBCD45AA68}"/>
+            </ac:spMkLst>
+          </pc:spChg>
+          <pc:spChg chg="mod">
+            <ac:chgData name="Marcus Ihlar" userId="3466507a-8f95-47f2-ae1b-ce7d6ca611a4" providerId="ADAL" clId="{3438F4FC-D214-4A35-B915-405844213C8B}" dt="2026-07-18T12:46:55.175" v="236"/>
+            <ac:spMkLst>
+              <pc:docMk/>
+              <pc:sldMasterMk cId="2523064765" sldId="2147483660"/>
+              <pc:sldLayoutMk cId="675883818" sldId="2147483675"/>
+              <ac:spMk id="8" creationId="{53797230-5A6C-4718-8C90-CB9F2709B382}"/>
+            </ac:spMkLst>
+          </pc:spChg>
+        </pc:sldLayoutChg>
+        <pc:sldLayoutChg chg="modSp mod">
+          <pc:chgData name="Marcus Ihlar" userId="3466507a-8f95-47f2-ae1b-ce7d6ca611a4" providerId="ADAL" clId="{3438F4FC-D214-4A35-B915-405844213C8B}" dt="2026-07-18T12:46:55.188" v="248"/>
+          <pc:sldLayoutMkLst>
+            <pc:docMk/>
+            <pc:sldMasterMk cId="2523064765" sldId="2147483660"/>
+            <pc:sldLayoutMk cId="2275899235" sldId="2147483678"/>
+          </pc:sldLayoutMkLst>
+          <pc:spChg chg="mod">
+            <ac:chgData name="Marcus Ihlar" userId="3466507a-8f95-47f2-ae1b-ce7d6ca611a4" providerId="ADAL" clId="{3438F4FC-D214-4A35-B915-405844213C8B}" dt="2026-07-18T12:46:54.619" v="152" actId="790"/>
+            <ac:spMkLst>
+              <pc:docMk/>
+              <pc:sldMasterMk cId="2523064765" sldId="2147483660"/>
+              <pc:sldLayoutMk cId="2275899235" sldId="2147483678"/>
+              <ac:spMk id="4" creationId="{00000000-0000-0000-0000-000000000000}"/>
+            </ac:spMkLst>
+          </pc:spChg>
+          <pc:spChg chg="mod">
+            <ac:chgData name="Marcus Ihlar" userId="3466507a-8f95-47f2-ae1b-ce7d6ca611a4" providerId="ADAL" clId="{3438F4FC-D214-4A35-B915-405844213C8B}" dt="2026-07-18T12:46:54.619" v="153" actId="790"/>
+            <ac:spMkLst>
+              <pc:docMk/>
+              <pc:sldMasterMk cId="2523064765" sldId="2147483660"/>
+              <pc:sldLayoutMk cId="2275899235" sldId="2147483678"/>
+              <ac:spMk id="6" creationId="{00000000-0000-0000-0000-000000000000}"/>
+            </ac:spMkLst>
+          </pc:spChg>
+          <pc:spChg chg="mod">
+            <ac:chgData name="Marcus Ihlar" userId="3466507a-8f95-47f2-ae1b-ce7d6ca611a4" providerId="ADAL" clId="{3438F4FC-D214-4A35-B915-405844213C8B}" dt="2026-07-18T12:46:54.614" v="151" actId="790"/>
+            <ac:spMkLst>
+              <pc:docMk/>
+              <pc:sldMasterMk cId="2523064765" sldId="2147483660"/>
+              <pc:sldLayoutMk cId="2275899235" sldId="2147483678"/>
+              <ac:spMk id="7" creationId="{F4D71A67-F349-4E68-B7B8-D53CE323A764}"/>
+            </ac:spMkLst>
+          </pc:spChg>
+          <pc:spChg chg="mod">
+            <ac:chgData name="Marcus Ihlar" userId="3466507a-8f95-47f2-ae1b-ce7d6ca611a4" providerId="ADAL" clId="{3438F4FC-D214-4A35-B915-405844213C8B}" dt="2026-07-18T12:46:54.619" v="154" actId="790"/>
+            <ac:spMkLst>
+              <pc:docMk/>
+              <pc:sldMasterMk cId="2523064765" sldId="2147483660"/>
+              <pc:sldLayoutMk cId="2275899235" sldId="2147483678"/>
+              <ac:spMk id="8" creationId="{00000000-0000-0000-0000-000000000000}"/>
+            </ac:spMkLst>
+          </pc:spChg>
+          <pc:spChg chg="mod">
+            <ac:chgData name="Marcus Ihlar" userId="3466507a-8f95-47f2-ae1b-ce7d6ca611a4" providerId="ADAL" clId="{3438F4FC-D214-4A35-B915-405844213C8B}" dt="2026-07-18T12:46:54.619" v="155" actId="790"/>
+            <ac:spMkLst>
+              <pc:docMk/>
+              <pc:sldMasterMk cId="2523064765" sldId="2147483660"/>
+              <pc:sldLayoutMk cId="2275899235" sldId="2147483678"/>
+              <ac:spMk id="9" creationId="{00000000-0000-0000-0000-000000000000}"/>
+            </ac:spMkLst>
+          </pc:spChg>
+          <pc:spChg chg="mod">
+            <ac:chgData name="Marcus Ihlar" userId="3466507a-8f95-47f2-ae1b-ce7d6ca611a4" providerId="ADAL" clId="{3438F4FC-D214-4A35-B915-405844213C8B}" dt="2026-07-18T12:46:55.188" v="248"/>
+            <ac:spMkLst>
+              <pc:docMk/>
+              <pc:sldMasterMk cId="2523064765" sldId="2147483660"/>
+              <pc:sldLayoutMk cId="2275899235" sldId="2147483678"/>
+              <ac:spMk id="11" creationId="{A55C34B4-681E-4FDA-A9BB-6BC31D94C8D6}"/>
+            </ac:spMkLst>
+          </pc:spChg>
+        </pc:sldLayoutChg>
+        <pc:sldLayoutChg chg="modSp mod">
+          <pc:chgData name="Marcus Ihlar" userId="3466507a-8f95-47f2-ae1b-ce7d6ca611a4" providerId="ADAL" clId="{3438F4FC-D214-4A35-B915-405844213C8B}" dt="2026-07-18T12:46:55.202" v="260"/>
+          <pc:sldLayoutMkLst>
+            <pc:docMk/>
+            <pc:sldMasterMk cId="2523064765" sldId="2147483660"/>
+            <pc:sldLayoutMk cId="1436988196" sldId="2147483681"/>
+          </pc:sldLayoutMkLst>
+          <pc:spChg chg="mod">
+            <ac:chgData name="Marcus Ihlar" userId="3466507a-8f95-47f2-ae1b-ce7d6ca611a4" providerId="ADAL" clId="{3438F4FC-D214-4A35-B915-405844213C8B}" dt="2026-07-18T12:46:54.651" v="178" actId="790"/>
+            <ac:spMkLst>
+              <pc:docMk/>
+              <pc:sldMasterMk cId="2523064765" sldId="2147483660"/>
+              <pc:sldLayoutMk cId="1436988196" sldId="2147483681"/>
+              <ac:spMk id="3" creationId="{00000000-0000-0000-0000-000000000000}"/>
+            </ac:spMkLst>
+          </pc:spChg>
+          <pc:spChg chg="mod">
+            <ac:chgData name="Marcus Ihlar" userId="3466507a-8f95-47f2-ae1b-ce7d6ca611a4" providerId="ADAL" clId="{3438F4FC-D214-4A35-B915-405844213C8B}" dt="2026-07-18T12:46:54.651" v="179" actId="790"/>
+            <ac:spMkLst>
+              <pc:docMk/>
+              <pc:sldMasterMk cId="2523064765" sldId="2147483660"/>
+              <pc:sldLayoutMk cId="1436988196" sldId="2147483681"/>
+              <ac:spMk id="4" creationId="{00000000-0000-0000-0000-000000000000}"/>
+            </ac:spMkLst>
+          </pc:spChg>
+          <pc:spChg chg="mod">
+            <ac:chgData name="Marcus Ihlar" userId="3466507a-8f95-47f2-ae1b-ce7d6ca611a4" providerId="ADAL" clId="{3438F4FC-D214-4A35-B915-405844213C8B}" dt="2026-07-18T12:46:54.651" v="180" actId="790"/>
+            <ac:spMkLst>
+              <pc:docMk/>
+              <pc:sldMasterMk cId="2523064765" sldId="2147483660"/>
+              <pc:sldLayoutMk cId="1436988196" sldId="2147483681"/>
+              <ac:spMk id="5" creationId="{00000000-0000-0000-0000-000000000000}"/>
+            </ac:spMkLst>
+          </pc:spChg>
+          <pc:spChg chg="mod">
+            <ac:chgData name="Marcus Ihlar" userId="3466507a-8f95-47f2-ae1b-ce7d6ca611a4" providerId="ADAL" clId="{3438F4FC-D214-4A35-B915-405844213C8B}" dt="2026-07-18T12:46:54.661" v="181" actId="790"/>
+            <ac:spMkLst>
+              <pc:docMk/>
+              <pc:sldMasterMk cId="2523064765" sldId="2147483660"/>
+              <pc:sldLayoutMk cId="1436988196" sldId="2147483681"/>
+              <ac:spMk id="6" creationId="{00000000-0000-0000-0000-000000000000}"/>
+            </ac:spMkLst>
+          </pc:spChg>
+          <pc:spChg chg="mod">
+            <ac:chgData name="Marcus Ihlar" userId="3466507a-8f95-47f2-ae1b-ce7d6ca611a4" providerId="ADAL" clId="{3438F4FC-D214-4A35-B915-405844213C8B}" dt="2026-07-18T12:46:54.661" v="183" actId="790"/>
+            <ac:spMkLst>
+              <pc:docMk/>
+              <pc:sldMasterMk cId="2523064765" sldId="2147483660"/>
+              <pc:sldLayoutMk cId="1436988196" sldId="2147483681"/>
+              <ac:spMk id="8" creationId="{00000000-0000-0000-0000-000000000000}"/>
+            </ac:spMkLst>
+          </pc:spChg>
+          <pc:spChg chg="mod">
+            <ac:chgData name="Marcus Ihlar" userId="3466507a-8f95-47f2-ae1b-ce7d6ca611a4" providerId="ADAL" clId="{3438F4FC-D214-4A35-B915-405844213C8B}" dt="2026-07-18T12:46:54.661" v="182" actId="790"/>
+            <ac:spMkLst>
+              <pc:docMk/>
+              <pc:sldMasterMk cId="2523064765" sldId="2147483660"/>
+              <pc:sldLayoutMk cId="1436988196" sldId="2147483681"/>
+              <ac:spMk id="9" creationId="{00000000-0000-0000-0000-000000000000}"/>
+            </ac:spMkLst>
+          </pc:spChg>
+          <pc:spChg chg="mod">
+            <ac:chgData name="Marcus Ihlar" userId="3466507a-8f95-47f2-ae1b-ce7d6ca611a4" providerId="ADAL" clId="{3438F4FC-D214-4A35-B915-405844213C8B}" dt="2026-07-18T12:46:54.661" v="185" actId="790"/>
+            <ac:spMkLst>
+              <pc:docMk/>
+              <pc:sldMasterMk cId="2523064765" sldId="2147483660"/>
+              <pc:sldLayoutMk cId="1436988196" sldId="2147483681"/>
+              <ac:spMk id="10" creationId="{00000000-0000-0000-0000-000000000000}"/>
+            </ac:spMkLst>
+          </pc:spChg>
+          <pc:spChg chg="mod">
+            <ac:chgData name="Marcus Ihlar" userId="3466507a-8f95-47f2-ae1b-ce7d6ca611a4" providerId="ADAL" clId="{3438F4FC-D214-4A35-B915-405844213C8B}" dt="2026-07-18T12:46:54.661" v="184" actId="790"/>
+            <ac:spMkLst>
+              <pc:docMk/>
+              <pc:sldMasterMk cId="2523064765" sldId="2147483660"/>
+              <pc:sldLayoutMk cId="1436988196" sldId="2147483681"/>
+              <ac:spMk id="11" creationId="{00000000-0000-0000-0000-000000000000}"/>
+            </ac:spMkLst>
+          </pc:spChg>
+          <pc:spChg chg="mod">
+            <ac:chgData name="Marcus Ihlar" userId="3466507a-8f95-47f2-ae1b-ce7d6ca611a4" providerId="ADAL" clId="{3438F4FC-D214-4A35-B915-405844213C8B}" dt="2026-07-18T12:46:54.651" v="177" actId="790"/>
+            <ac:spMkLst>
+              <pc:docMk/>
+              <pc:sldMasterMk cId="2523064765" sldId="2147483660"/>
+              <pc:sldLayoutMk cId="1436988196" sldId="2147483681"/>
+              <ac:spMk id="13" creationId="{99858DC4-E787-41D2-A613-961D60F89117}"/>
+            </ac:spMkLst>
+          </pc:spChg>
+          <pc:spChg chg="mod">
+            <ac:chgData name="Marcus Ihlar" userId="3466507a-8f95-47f2-ae1b-ce7d6ca611a4" providerId="ADAL" clId="{3438F4FC-D214-4A35-B915-405844213C8B}" dt="2026-07-18T12:46:55.202" v="260"/>
+            <ac:spMkLst>
+              <pc:docMk/>
+              <pc:sldMasterMk cId="2523064765" sldId="2147483660"/>
+              <pc:sldLayoutMk cId="1436988196" sldId="2147483681"/>
+              <ac:spMk id="14" creationId="{089CBEB5-348B-49F3-8F8B-FDEE08950E37}"/>
+            </ac:spMkLst>
+          </pc:spChg>
+        </pc:sldLayoutChg>
+        <pc:sldLayoutChg chg="modSp mod">
+          <pc:chgData name="Marcus Ihlar" userId="3466507a-8f95-47f2-ae1b-ce7d6ca611a4" providerId="ADAL" clId="{3438F4FC-D214-4A35-B915-405844213C8B}" dt="2026-07-18T12:46:55.195" v="254"/>
+          <pc:sldLayoutMkLst>
+            <pc:docMk/>
+            <pc:sldMasterMk cId="2523064765" sldId="2147483660"/>
+            <pc:sldLayoutMk cId="2548612008" sldId="2147483690"/>
+          </pc:sldLayoutMkLst>
+          <pc:spChg chg="mod">
+            <ac:chgData name="Marcus Ihlar" userId="3466507a-8f95-47f2-ae1b-ce7d6ca611a4" providerId="ADAL" clId="{3438F4FC-D214-4A35-B915-405844213C8B}" dt="2026-07-18T12:46:54.630" v="165" actId="790"/>
+            <ac:spMkLst>
+              <pc:docMk/>
+              <pc:sldMasterMk cId="2523064765" sldId="2147483660"/>
+              <pc:sldLayoutMk cId="2548612008" sldId="2147483690"/>
+              <ac:spMk id="3" creationId="{00000000-0000-0000-0000-000000000000}"/>
+            </ac:spMkLst>
+          </pc:spChg>
+          <pc:spChg chg="mod">
+            <ac:chgData name="Marcus Ihlar" userId="3466507a-8f95-47f2-ae1b-ce7d6ca611a4" providerId="ADAL" clId="{3438F4FC-D214-4A35-B915-405844213C8B}" dt="2026-07-18T12:46:54.640" v="166" actId="790"/>
+            <ac:spMkLst>
+              <pc:docMk/>
+              <pc:sldMasterMk cId="2523064765" sldId="2147483660"/>
+              <pc:sldLayoutMk cId="2548612008" sldId="2147483690"/>
+              <ac:spMk id="4" creationId="{00000000-0000-0000-0000-000000000000}"/>
+            </ac:spMkLst>
+          </pc:spChg>
+          <pc:spChg chg="mod">
+            <ac:chgData name="Marcus Ihlar" userId="3466507a-8f95-47f2-ae1b-ce7d6ca611a4" providerId="ADAL" clId="{3438F4FC-D214-4A35-B915-405844213C8B}" dt="2026-07-18T12:46:54.640" v="167" actId="790"/>
+            <ac:spMkLst>
+              <pc:docMk/>
+              <pc:sldMasterMk cId="2523064765" sldId="2147483660"/>
+              <pc:sldLayoutMk cId="2548612008" sldId="2147483690"/>
+              <ac:spMk id="6" creationId="{00000000-0000-0000-0000-000000000000}"/>
+            </ac:spMkLst>
+          </pc:spChg>
+          <pc:spChg chg="mod">
+            <ac:chgData name="Marcus Ihlar" userId="3466507a-8f95-47f2-ae1b-ce7d6ca611a4" providerId="ADAL" clId="{3438F4FC-D214-4A35-B915-405844213C8B}" dt="2026-07-18T12:46:54.640" v="168" actId="790"/>
+            <ac:spMkLst>
+              <pc:docMk/>
+              <pc:sldMasterMk cId="2523064765" sldId="2147483660"/>
+              <pc:sldLayoutMk cId="2548612008" sldId="2147483690"/>
+              <ac:spMk id="7" creationId="{5BD2C41D-0700-4885-AB77-25AFFE4E1FDA}"/>
+            </ac:spMkLst>
+          </pc:spChg>
+          <pc:spChg chg="mod">
+            <ac:chgData name="Marcus Ihlar" userId="3466507a-8f95-47f2-ae1b-ce7d6ca611a4" providerId="ADAL" clId="{3438F4FC-D214-4A35-B915-405844213C8B}" dt="2026-07-18T12:46:54.630" v="164" actId="790"/>
+            <ac:spMkLst>
+              <pc:docMk/>
+              <pc:sldMasterMk cId="2523064765" sldId="2147483660"/>
+              <pc:sldLayoutMk cId="2548612008" sldId="2147483690"/>
+              <ac:spMk id="9" creationId="{2C948968-FB06-45CC-8259-6BDE4430EACB}"/>
+            </ac:spMkLst>
+          </pc:spChg>
+          <pc:spChg chg="mod">
+            <ac:chgData name="Marcus Ihlar" userId="3466507a-8f95-47f2-ae1b-ce7d6ca611a4" providerId="ADAL" clId="{3438F4FC-D214-4A35-B915-405844213C8B}" dt="2026-07-18T12:46:55.195" v="254"/>
+            <ac:spMkLst>
+              <pc:docMk/>
+              <pc:sldMasterMk cId="2523064765" sldId="2147483660"/>
+              <pc:sldLayoutMk cId="2548612008" sldId="2147483690"/>
+              <ac:spMk id="10" creationId="{549048C1-340D-44C4-857B-1B201EC9A7E7}"/>
+            </ac:spMkLst>
+          </pc:spChg>
+        </pc:sldLayoutChg>
+        <pc:sldLayoutChg chg="modSp mod">
+          <pc:chgData name="Marcus Ihlar" userId="3466507a-8f95-47f2-ae1b-ce7d6ca611a4" providerId="ADAL" clId="{3438F4FC-D214-4A35-B915-405844213C8B}" dt="2026-07-18T12:46:54.688" v="198" actId="790"/>
+          <pc:sldLayoutMkLst>
+            <pc:docMk/>
+            <pc:sldMasterMk cId="2523064765" sldId="2147483660"/>
+            <pc:sldLayoutMk cId="576168519" sldId="2147483692"/>
+          </pc:sldLayoutMkLst>
+          <pc:spChg chg="mod">
+            <ac:chgData name="Marcus Ihlar" userId="3466507a-8f95-47f2-ae1b-ce7d6ca611a4" providerId="ADAL" clId="{3438F4FC-D214-4A35-B915-405844213C8B}" dt="2026-07-18T12:46:54.688" v="198" actId="790"/>
+            <ac:spMkLst>
+              <pc:docMk/>
+              <pc:sldMasterMk cId="2523064765" sldId="2147483660"/>
+              <pc:sldLayoutMk cId="576168519" sldId="2147483692"/>
+              <ac:spMk id="9" creationId="{B200748E-0B61-48E1-8B47-504C30250995}"/>
+            </ac:spMkLst>
+          </pc:spChg>
+        </pc:sldLayoutChg>
+        <pc:sldLayoutChg chg="modSp mod">
+          <pc:chgData name="Marcus Ihlar" userId="3466507a-8f95-47f2-ae1b-ce7d6ca611a4" providerId="ADAL" clId="{3438F4FC-D214-4A35-B915-405844213C8B}" dt="2026-07-18T12:46:55.167" v="230"/>
+          <pc:sldLayoutMkLst>
+            <pc:docMk/>
+            <pc:sldMasterMk cId="2523064765" sldId="2147483660"/>
+            <pc:sldLayoutMk cId="3607999529" sldId="2147483694"/>
+          </pc:sldLayoutMkLst>
+          <pc:spChg chg="mod">
+            <ac:chgData name="Marcus Ihlar" userId="3466507a-8f95-47f2-ae1b-ce7d6ca611a4" providerId="ADAL" clId="{3438F4FC-D214-4A35-B915-405844213C8B}" dt="2026-07-18T12:46:54.577" v="125" actId="790"/>
+            <ac:spMkLst>
+              <pc:docMk/>
+              <pc:sldMasterMk cId="2523064765" sldId="2147483660"/>
+              <pc:sldLayoutMk cId="3607999529" sldId="2147483694"/>
+              <ac:spMk id="4" creationId="{784F54AF-EED6-486A-9ACA-42061F4AAE9A}"/>
+            </ac:spMkLst>
+          </pc:spChg>
+          <pc:spChg chg="mod">
+            <ac:chgData name="Marcus Ihlar" userId="3466507a-8f95-47f2-ae1b-ce7d6ca611a4" providerId="ADAL" clId="{3438F4FC-D214-4A35-B915-405844213C8B}" dt="2026-07-18T12:46:54.577" v="124" actId="790"/>
+            <ac:spMkLst>
+              <pc:docMk/>
+              <pc:sldMasterMk cId="2523064765" sldId="2147483660"/>
+              <pc:sldLayoutMk cId="3607999529" sldId="2147483694"/>
+              <ac:spMk id="6" creationId="{3F4EF873-DC0F-4698-BEC2-502DB043AA5C}"/>
+            </ac:spMkLst>
+          </pc:spChg>
+          <pc:spChg chg="mod">
+            <ac:chgData name="Marcus Ihlar" userId="3466507a-8f95-47f2-ae1b-ce7d6ca611a4" providerId="ADAL" clId="{3438F4FC-D214-4A35-B915-405844213C8B}" dt="2026-07-18T12:46:55.167" v="230"/>
+            <ac:spMkLst>
+              <pc:docMk/>
+              <pc:sldMasterMk cId="2523064765" sldId="2147483660"/>
+              <pc:sldLayoutMk cId="3607999529" sldId="2147483694"/>
+              <ac:spMk id="7" creationId="{DB8BC610-C1B0-4C6A-B5C2-80DA487CE5DE}"/>
+            </ac:spMkLst>
+          </pc:spChg>
+        </pc:sldLayoutChg>
+        <pc:sldLayoutChg chg="modSp mod">
+          <pc:chgData name="Marcus Ihlar" userId="3466507a-8f95-47f2-ae1b-ce7d6ca611a4" providerId="ADAL" clId="{3438F4FC-D214-4A35-B915-405844213C8B}" dt="2026-07-18T12:46:55.181" v="242"/>
+          <pc:sldLayoutMkLst>
+            <pc:docMk/>
+            <pc:sldMasterMk cId="2523064765" sldId="2147483660"/>
+            <pc:sldLayoutMk cId="3545725332" sldId="2147483696"/>
+          </pc:sldLayoutMkLst>
+          <pc:spChg chg="mod">
+            <ac:chgData name="Marcus Ihlar" userId="3466507a-8f95-47f2-ae1b-ce7d6ca611a4" providerId="ADAL" clId="{3438F4FC-D214-4A35-B915-405844213C8B}" dt="2026-07-18T12:46:54.598" v="141" actId="790"/>
+            <ac:spMkLst>
+              <pc:docMk/>
+              <pc:sldMasterMk cId="2523064765" sldId="2147483660"/>
+              <pc:sldLayoutMk cId="3545725332" sldId="2147483696"/>
+              <ac:spMk id="6" creationId="{00000000-0000-0000-0000-000000000000}"/>
+            </ac:spMkLst>
+          </pc:spChg>
+          <pc:spChg chg="mod">
+            <ac:chgData name="Marcus Ihlar" userId="3466507a-8f95-47f2-ae1b-ce7d6ca611a4" providerId="ADAL" clId="{3438F4FC-D214-4A35-B915-405844213C8B}" dt="2026-07-18T12:46:54.598" v="143" actId="790"/>
+            <ac:spMkLst>
+              <pc:docMk/>
+              <pc:sldMasterMk cId="2523064765" sldId="2147483660"/>
+              <pc:sldLayoutMk cId="3545725332" sldId="2147483696"/>
+              <ac:spMk id="7" creationId="{8E3794F8-471D-4987-945F-3C29BB03AB49}"/>
+            </ac:spMkLst>
+          </pc:spChg>
+          <pc:spChg chg="mod">
+            <ac:chgData name="Marcus Ihlar" userId="3466507a-8f95-47f2-ae1b-ce7d6ca611a4" providerId="ADAL" clId="{3438F4FC-D214-4A35-B915-405844213C8B}" dt="2026-07-18T12:46:54.598" v="142" actId="790"/>
+            <ac:spMkLst>
+              <pc:docMk/>
+              <pc:sldMasterMk cId="2523064765" sldId="2147483660"/>
+              <pc:sldLayoutMk cId="3545725332" sldId="2147483696"/>
+              <ac:spMk id="8" creationId="{00000000-0000-0000-0000-000000000000}"/>
+            </ac:spMkLst>
+          </pc:spChg>
+          <pc:spChg chg="mod">
+            <ac:chgData name="Marcus Ihlar" userId="3466507a-8f95-47f2-ae1b-ce7d6ca611a4" providerId="ADAL" clId="{3438F4FC-D214-4A35-B915-405844213C8B}" dt="2026-07-18T12:46:55.181" v="242"/>
+            <ac:spMkLst>
+              <pc:docMk/>
+              <pc:sldMasterMk cId="2523064765" sldId="2147483660"/>
+              <pc:sldLayoutMk cId="3545725332" sldId="2147483696"/>
+              <ac:spMk id="9" creationId="{2C8570FA-FAA3-4EFA-A4F1-01C285AE39DE}"/>
+            </ac:spMkLst>
+          </pc:spChg>
+          <pc:spChg chg="mod">
+            <ac:chgData name="Marcus Ihlar" userId="3466507a-8f95-47f2-ae1b-ce7d6ca611a4" providerId="ADAL" clId="{3438F4FC-D214-4A35-B915-405844213C8B}" dt="2026-07-18T12:46:54.598" v="140" actId="790"/>
+            <ac:spMkLst>
+              <pc:docMk/>
+              <pc:sldMasterMk cId="2523064765" sldId="2147483660"/>
+              <pc:sldLayoutMk cId="3545725332" sldId="2147483696"/>
+              <ac:spMk id="10" creationId="{6B686A21-AA96-4B0A-B7CE-F4C6D5D31B32}"/>
+            </ac:spMkLst>
+          </pc:spChg>
+        </pc:sldLayoutChg>
+        <pc:sldLayoutChg chg="modSp mod">
+          <pc:chgData name="Marcus Ihlar" userId="3466507a-8f95-47f2-ae1b-ce7d6ca611a4" providerId="ADAL" clId="{3438F4FC-D214-4A35-B915-405844213C8B}" dt="2026-07-18T12:46:55.040" v="201" actId="790"/>
+          <pc:sldLayoutMkLst>
+            <pc:docMk/>
+            <pc:sldMasterMk cId="2523064765" sldId="2147483660"/>
+            <pc:sldLayoutMk cId="1410470591" sldId="2147483705"/>
+          </pc:sldLayoutMkLst>
+          <pc:spChg chg="mod">
+            <ac:chgData name="Marcus Ihlar" userId="3466507a-8f95-47f2-ae1b-ce7d6ca611a4" providerId="ADAL" clId="{3438F4FC-D214-4A35-B915-405844213C8B}" dt="2026-07-18T12:46:55.040" v="201" actId="790"/>
+            <ac:spMkLst>
+              <pc:docMk/>
+              <pc:sldMasterMk cId="2523064765" sldId="2147483660"/>
+              <pc:sldLayoutMk cId="1410470591" sldId="2147483705"/>
+              <ac:spMk id="5" creationId="{99AF35DD-3E5E-42CB-AFA5-5E09E14F72A4}"/>
+            </ac:spMkLst>
+          </pc:spChg>
+        </pc:sldLayoutChg>
+        <pc:sldLayoutChg chg="modSp mod">
+          <pc:chgData name="Marcus Ihlar" userId="3466507a-8f95-47f2-ae1b-ce7d6ca611a4" providerId="ADAL" clId="{3438F4FC-D214-4A35-B915-405844213C8B}" dt="2026-07-18T12:46:55.161" v="224"/>
+          <pc:sldLayoutMkLst>
+            <pc:docMk/>
+            <pc:sldMasterMk cId="2523064765" sldId="2147483660"/>
+            <pc:sldLayoutMk cId="3443338964" sldId="2147483706"/>
+          </pc:sldLayoutMkLst>
+          <pc:spChg chg="mod">
+            <ac:chgData name="Marcus Ihlar" userId="3466507a-8f95-47f2-ae1b-ce7d6ca611a4" providerId="ADAL" clId="{3438F4FC-D214-4A35-B915-405844213C8B}" dt="2026-07-18T12:46:54.567" v="118" actId="790"/>
+            <ac:spMkLst>
+              <pc:docMk/>
+              <pc:sldMasterMk cId="2523064765" sldId="2147483660"/>
+              <pc:sldLayoutMk cId="3443338964" sldId="2147483706"/>
+              <ac:spMk id="3" creationId="{810CFEFC-6AC8-4817-A0D3-6029D48BD293}"/>
+            </ac:spMkLst>
+          </pc:spChg>
+          <pc:spChg chg="mod">
+            <ac:chgData name="Marcus Ihlar" userId="3466507a-8f95-47f2-ae1b-ce7d6ca611a4" providerId="ADAL" clId="{3438F4FC-D214-4A35-B915-405844213C8B}" dt="2026-07-18T12:46:54.567" v="117" actId="790"/>
+            <ac:spMkLst>
+              <pc:docMk/>
+              <pc:sldMasterMk cId="2523064765" sldId="2147483660"/>
+              <pc:sldLayoutMk cId="3443338964" sldId="2147483706"/>
+              <ac:spMk id="5" creationId="{00000000-0000-0000-0000-000000000000}"/>
+            </ac:spMkLst>
+          </pc:spChg>
+          <pc:spChg chg="mod">
+            <ac:chgData name="Marcus Ihlar" userId="3466507a-8f95-47f2-ae1b-ce7d6ca611a4" providerId="ADAL" clId="{3438F4FC-D214-4A35-B915-405844213C8B}" dt="2026-07-18T12:46:55.161" v="224"/>
+            <ac:spMkLst>
+              <pc:docMk/>
+              <pc:sldMasterMk cId="2523064765" sldId="2147483660"/>
+              <pc:sldLayoutMk cId="3443338964" sldId="2147483706"/>
+              <ac:spMk id="8" creationId="{C2AD0284-E6BA-49D8-AB3F-D94DBB1D54F0}"/>
+            </ac:spMkLst>
+          </pc:spChg>
+        </pc:sldLayoutChg>
+        <pc:sldLayoutChg chg="modSp mod">
+          <pc:chgData name="Marcus Ihlar" userId="3466507a-8f95-47f2-ae1b-ce7d6ca611a4" providerId="ADAL" clId="{3438F4FC-D214-4A35-B915-405844213C8B}" dt="2026-07-18T12:46:55.144" v="212"/>
+          <pc:sldLayoutMkLst>
+            <pc:docMk/>
+            <pc:sldMasterMk cId="2523064765" sldId="2147483660"/>
+            <pc:sldLayoutMk cId="395415313" sldId="2147483707"/>
+          </pc:sldLayoutMkLst>
+          <pc:spChg chg="mod">
+            <ac:chgData name="Marcus Ihlar" userId="3466507a-8f95-47f2-ae1b-ce7d6ca611a4" providerId="ADAL" clId="{3438F4FC-D214-4A35-B915-405844213C8B}" dt="2026-07-18T12:46:55.144" v="212"/>
+            <ac:spMkLst>
+              <pc:docMk/>
+              <pc:sldMasterMk cId="2523064765" sldId="2147483660"/>
+              <pc:sldLayoutMk cId="395415313" sldId="2147483707"/>
+              <ac:spMk id="2" creationId="{69F42FFA-3DFB-4DB2-A942-F02200203C82}"/>
+            </ac:spMkLst>
+          </pc:spChg>
+        </pc:sldLayoutChg>
+        <pc:sldLayoutChg chg="modSp mod">
+          <pc:chgData name="Marcus Ihlar" userId="3466507a-8f95-47f2-ae1b-ce7d6ca611a4" providerId="ADAL" clId="{3438F4FC-D214-4A35-B915-405844213C8B}" dt="2026-07-18T12:46:55.149" v="215"/>
+          <pc:sldLayoutMkLst>
+            <pc:docMk/>
+            <pc:sldMasterMk cId="2523064765" sldId="2147483660"/>
+            <pc:sldLayoutMk cId="3084474769" sldId="2147483709"/>
+          </pc:sldLayoutMkLst>
+          <pc:spChg chg="mod">
+            <ac:chgData name="Marcus Ihlar" userId="3466507a-8f95-47f2-ae1b-ce7d6ca611a4" providerId="ADAL" clId="{3438F4FC-D214-4A35-B915-405844213C8B}" dt="2026-07-18T12:46:54.557" v="110" actId="790"/>
+            <ac:spMkLst>
+              <pc:docMk/>
+              <pc:sldMasterMk cId="2523064765" sldId="2147483660"/>
+              <pc:sldLayoutMk cId="3084474769" sldId="2147483709"/>
+              <ac:spMk id="3" creationId="{E6869961-F931-4F1E-9FB3-8587EBA3F36F}"/>
+            </ac:spMkLst>
+          </pc:spChg>
+          <pc:spChg chg="mod">
+            <ac:chgData name="Marcus Ihlar" userId="3466507a-8f95-47f2-ae1b-ce7d6ca611a4" providerId="ADAL" clId="{3438F4FC-D214-4A35-B915-405844213C8B}" dt="2026-07-18T12:46:55.149" v="215"/>
+            <ac:spMkLst>
+              <pc:docMk/>
+              <pc:sldMasterMk cId="2523064765" sldId="2147483660"/>
+              <pc:sldLayoutMk cId="3084474769" sldId="2147483709"/>
+              <ac:spMk id="5" creationId="{203FD5EF-20DB-46AB-B412-DF9112353719}"/>
+            </ac:spMkLst>
+          </pc:spChg>
+        </pc:sldLayoutChg>
+        <pc:sldLayoutChg chg="modSp mod">
+          <pc:chgData name="Marcus Ihlar" userId="3466507a-8f95-47f2-ae1b-ce7d6ca611a4" providerId="ADAL" clId="{3438F4FC-D214-4A35-B915-405844213C8B}" dt="2026-07-18T12:46:55.138" v="209"/>
+          <pc:sldLayoutMkLst>
+            <pc:docMk/>
+            <pc:sldMasterMk cId="2523064765" sldId="2147483660"/>
+            <pc:sldLayoutMk cId="1482301504" sldId="2147483710"/>
+          </pc:sldLayoutMkLst>
+          <pc:spChg chg="mod">
+            <ac:chgData name="Marcus Ihlar" userId="3466507a-8f95-47f2-ae1b-ce7d6ca611a4" providerId="ADAL" clId="{3438F4FC-D214-4A35-B915-405844213C8B}" dt="2026-07-18T12:46:54.557" v="105" actId="790"/>
+            <ac:spMkLst>
+              <pc:docMk/>
+              <pc:sldMasterMk cId="2523064765" sldId="2147483660"/>
+              <pc:sldLayoutMk cId="1482301504" sldId="2147483710"/>
+              <ac:spMk id="3" creationId="{00000000-0000-0000-0000-000000000000}"/>
+            </ac:spMkLst>
+          </pc:spChg>
+          <pc:spChg chg="mod">
+            <ac:chgData name="Marcus Ihlar" userId="3466507a-8f95-47f2-ae1b-ce7d6ca611a4" providerId="ADAL" clId="{3438F4FC-D214-4A35-B915-405844213C8B}" dt="2026-07-18T12:46:54.557" v="102" actId="790"/>
+            <ac:spMkLst>
+              <pc:docMk/>
+              <pc:sldMasterMk cId="2523064765" sldId="2147483660"/>
+              <pc:sldLayoutMk cId="1482301504" sldId="2147483710"/>
+              <ac:spMk id="4" creationId="{A103FF1A-D345-1C56-590F-D823A889B028}"/>
+            </ac:spMkLst>
+          </pc:spChg>
+          <pc:spChg chg="mod">
+            <ac:chgData name="Marcus Ihlar" userId="3466507a-8f95-47f2-ae1b-ce7d6ca611a4" providerId="ADAL" clId="{3438F4FC-D214-4A35-B915-405844213C8B}" dt="2026-07-18T12:46:55.138" v="209"/>
+            <ac:spMkLst>
+              <pc:docMk/>
+              <pc:sldMasterMk cId="2523064765" sldId="2147483660"/>
+              <pc:sldLayoutMk cId="1482301504" sldId="2147483710"/>
+              <ac:spMk id="9" creationId="{72C1EE1F-EF94-4EBA-A010-8BC3D2F38C39}"/>
+            </ac:spMkLst>
+          </pc:spChg>
+          <pc:spChg chg="mod">
+            <ac:chgData name="Marcus Ihlar" userId="3466507a-8f95-47f2-ae1b-ce7d6ca611a4" providerId="ADAL" clId="{3438F4FC-D214-4A35-B915-405844213C8B}" dt="2026-07-18T12:46:54.557" v="106" actId="790"/>
+            <ac:spMkLst>
+              <pc:docMk/>
+              <pc:sldMasterMk cId="2523064765" sldId="2147483660"/>
+              <pc:sldLayoutMk cId="1482301504" sldId="2147483710"/>
+              <ac:spMk id="12" creationId="{00000000-0000-0000-0000-000000000000}"/>
+            </ac:spMkLst>
+          </pc:spChg>
+          <pc:spChg chg="mod">
+            <ac:chgData name="Marcus Ihlar" userId="3466507a-8f95-47f2-ae1b-ce7d6ca611a4" providerId="ADAL" clId="{3438F4FC-D214-4A35-B915-405844213C8B}" dt="2026-07-18T12:46:54.557" v="107" actId="790"/>
+            <ac:spMkLst>
+              <pc:docMk/>
+              <pc:sldMasterMk cId="2523064765" sldId="2147483660"/>
+              <pc:sldLayoutMk cId="1482301504" sldId="2147483710"/>
+              <ac:spMk id="15" creationId="{00000000-0000-0000-0000-000000000000}"/>
+            </ac:spMkLst>
+          </pc:spChg>
+          <pc:spChg chg="mod">
+            <ac:chgData name="Marcus Ihlar" userId="3466507a-8f95-47f2-ae1b-ce7d6ca611a4" providerId="ADAL" clId="{3438F4FC-D214-4A35-B915-405844213C8B}" dt="2026-07-18T12:46:54.557" v="104" actId="790"/>
+            <ac:spMkLst>
+              <pc:docMk/>
+              <pc:sldMasterMk cId="2523064765" sldId="2147483660"/>
+              <pc:sldLayoutMk cId="1482301504" sldId="2147483710"/>
+              <ac:spMk id="22530" creationId="{00000000-0000-0000-0000-000000000000}"/>
+            </ac:spMkLst>
+          </pc:spChg>
+          <pc:spChg chg="mod">
+            <ac:chgData name="Marcus Ihlar" userId="3466507a-8f95-47f2-ae1b-ce7d6ca611a4" providerId="ADAL" clId="{3438F4FC-D214-4A35-B915-405844213C8B}" dt="2026-07-18T12:46:54.557" v="103" actId="790"/>
+            <ac:spMkLst>
+              <pc:docMk/>
+              <pc:sldMasterMk cId="2523064765" sldId="2147483660"/>
+              <pc:sldLayoutMk cId="1482301504" sldId="2147483710"/>
+              <ac:spMk id="22531" creationId="{00000000-0000-0000-0000-000000000000}"/>
+            </ac:spMkLst>
+          </pc:spChg>
+        </pc:sldLayoutChg>
+        <pc:sldLayoutChg chg="modSp mod">
+          <pc:chgData name="Marcus Ihlar" userId="3466507a-8f95-47f2-ae1b-ce7d6ca611a4" providerId="ADAL" clId="{3438F4FC-D214-4A35-B915-405844213C8B}" dt="2026-07-18T12:46:55.157" v="221"/>
+          <pc:sldLayoutMkLst>
+            <pc:docMk/>
+            <pc:sldMasterMk cId="2523064765" sldId="2147483660"/>
+            <pc:sldLayoutMk cId="1686204470" sldId="2147483712"/>
+          </pc:sldLayoutMkLst>
+          <pc:spChg chg="mod">
+            <ac:chgData name="Marcus Ihlar" userId="3466507a-8f95-47f2-ae1b-ce7d6ca611a4" providerId="ADAL" clId="{3438F4FC-D214-4A35-B915-405844213C8B}" dt="2026-07-18T12:46:54.567" v="114" actId="790"/>
+            <ac:spMkLst>
+              <pc:docMk/>
+              <pc:sldMasterMk cId="2523064765" sldId="2147483660"/>
+              <pc:sldLayoutMk cId="1686204470" sldId="2147483712"/>
+              <ac:spMk id="2" creationId="{D9A6888F-AC26-BA8F-0055-E808E294C9D7}"/>
+            </ac:spMkLst>
+          </pc:spChg>
+          <pc:spChg chg="mod">
+            <ac:chgData name="Marcus Ihlar" userId="3466507a-8f95-47f2-ae1b-ce7d6ca611a4" providerId="ADAL" clId="{3438F4FC-D214-4A35-B915-405844213C8B}" dt="2026-07-18T12:46:55.157" v="221"/>
+            <ac:spMkLst>
+              <pc:docMk/>
+              <pc:sldMasterMk cId="2523064765" sldId="2147483660"/>
+              <pc:sldLayoutMk cId="1686204470" sldId="2147483712"/>
+              <ac:spMk id="3" creationId="{C44ECCE6-4D94-443E-8C20-CA233A5C0572}"/>
+            </ac:spMkLst>
+          </pc:spChg>
+          <pc:spChg chg="mod">
+            <ac:chgData name="Marcus Ihlar" userId="3466507a-8f95-47f2-ae1b-ce7d6ca611a4" providerId="ADAL" clId="{3438F4FC-D214-4A35-B915-405844213C8B}" dt="2026-07-18T12:46:54.567" v="115" actId="790"/>
+            <ac:spMkLst>
+              <pc:docMk/>
+              <pc:sldMasterMk cId="2523064765" sldId="2147483660"/>
+              <pc:sldLayoutMk cId="1686204470" sldId="2147483712"/>
+              <ac:spMk id="4" creationId="{00000000-0000-0000-0000-000000000000}"/>
+            </ac:spMkLst>
+          </pc:spChg>
+        </pc:sldLayoutChg>
+        <pc:sldLayoutChg chg="modSp mod">
+          <pc:chgData name="Marcus Ihlar" userId="3466507a-8f95-47f2-ae1b-ce7d6ca611a4" providerId="ADAL" clId="{3438F4FC-D214-4A35-B915-405844213C8B}" dt="2026-07-18T12:46:55.165" v="227"/>
+          <pc:sldLayoutMkLst>
+            <pc:docMk/>
+            <pc:sldMasterMk cId="2523064765" sldId="2147483660"/>
+            <pc:sldLayoutMk cId="2362386503" sldId="2147483713"/>
+          </pc:sldLayoutMkLst>
+          <pc:spChg chg="mod">
+            <ac:chgData name="Marcus Ihlar" userId="3466507a-8f95-47f2-ae1b-ce7d6ca611a4" providerId="ADAL" clId="{3438F4FC-D214-4A35-B915-405844213C8B}" dt="2026-07-18T12:46:54.567" v="120" actId="790"/>
+            <ac:spMkLst>
+              <pc:docMk/>
+              <pc:sldMasterMk cId="2523064765" sldId="2147483660"/>
+              <pc:sldLayoutMk cId="2362386503" sldId="2147483713"/>
+              <ac:spMk id="2" creationId="{17697191-0A85-B8C8-9EEC-2BBBCA05BA94}"/>
+            </ac:spMkLst>
+          </pc:spChg>
+          <pc:spChg chg="mod">
+            <ac:chgData name="Marcus Ihlar" userId="3466507a-8f95-47f2-ae1b-ce7d6ca611a4" providerId="ADAL" clId="{3438F4FC-D214-4A35-B915-405844213C8B}" dt="2026-07-18T12:46:54.577" v="122" actId="790"/>
+            <ac:spMkLst>
+              <pc:docMk/>
+              <pc:sldMasterMk cId="2523064765" sldId="2147483660"/>
+              <pc:sldLayoutMk cId="2362386503" sldId="2147483713"/>
+              <ac:spMk id="3" creationId="{810CFEFC-6AC8-4817-A0D3-6029D48BD293}"/>
+            </ac:spMkLst>
+          </pc:spChg>
+          <pc:spChg chg="mod">
+            <ac:chgData name="Marcus Ihlar" userId="3466507a-8f95-47f2-ae1b-ce7d6ca611a4" providerId="ADAL" clId="{3438F4FC-D214-4A35-B915-405844213C8B}" dt="2026-07-18T12:46:54.567" v="121" actId="790"/>
+            <ac:spMkLst>
+              <pc:docMk/>
+              <pc:sldMasterMk cId="2523064765" sldId="2147483660"/>
+              <pc:sldLayoutMk cId="2362386503" sldId="2147483713"/>
+              <ac:spMk id="5" creationId="{00000000-0000-0000-0000-000000000000}"/>
+            </ac:spMkLst>
+          </pc:spChg>
+          <pc:spChg chg="mod">
+            <ac:chgData name="Marcus Ihlar" userId="3466507a-8f95-47f2-ae1b-ce7d6ca611a4" providerId="ADAL" clId="{3438F4FC-D214-4A35-B915-405844213C8B}" dt="2026-07-18T12:46:55.165" v="227"/>
+            <ac:spMkLst>
+              <pc:docMk/>
+              <pc:sldMasterMk cId="2523064765" sldId="2147483660"/>
+              <pc:sldLayoutMk cId="2362386503" sldId="2147483713"/>
+              <ac:spMk id="8" creationId="{C2AD0284-E6BA-49D8-AB3F-D94DBB1D54F0}"/>
+            </ac:spMkLst>
+          </pc:spChg>
+        </pc:sldLayoutChg>
+        <pc:sldLayoutChg chg="modSp mod">
+          <pc:chgData name="Marcus Ihlar" userId="3466507a-8f95-47f2-ae1b-ce7d6ca611a4" providerId="ADAL" clId="{3438F4FC-D214-4A35-B915-405844213C8B}" dt="2026-07-18T12:46:55.170" v="233"/>
+          <pc:sldLayoutMkLst>
+            <pc:docMk/>
+            <pc:sldMasterMk cId="2523064765" sldId="2147483660"/>
+            <pc:sldLayoutMk cId="1662761648" sldId="2147483714"/>
+          </pc:sldLayoutMkLst>
+          <pc:spChg chg="mod">
+            <ac:chgData name="Marcus Ihlar" userId="3466507a-8f95-47f2-ae1b-ce7d6ca611a4" providerId="ADAL" clId="{3438F4FC-D214-4A35-B915-405844213C8B}" dt="2026-07-18T12:46:54.583" v="127" actId="790"/>
+            <ac:spMkLst>
+              <pc:docMk/>
+              <pc:sldMasterMk cId="2523064765" sldId="2147483660"/>
+              <pc:sldLayoutMk cId="1662761648" sldId="2147483714"/>
+              <ac:spMk id="2" creationId="{C8FC9BDE-AACF-FAD9-0569-2308D75B1812}"/>
+            </ac:spMkLst>
+          </pc:spChg>
+          <pc:spChg chg="mod">
+            <ac:chgData name="Marcus Ihlar" userId="3466507a-8f95-47f2-ae1b-ce7d6ca611a4" providerId="ADAL" clId="{3438F4FC-D214-4A35-B915-405844213C8B}" dt="2026-07-18T12:46:54.583" v="129" actId="790"/>
+            <ac:spMkLst>
+              <pc:docMk/>
+              <pc:sldMasterMk cId="2523064765" sldId="2147483660"/>
+              <pc:sldLayoutMk cId="1662761648" sldId="2147483714"/>
+              <ac:spMk id="4" creationId="{784F54AF-EED6-486A-9ACA-42061F4AAE9A}"/>
+            </ac:spMkLst>
+          </pc:spChg>
+          <pc:spChg chg="mod">
+            <ac:chgData name="Marcus Ihlar" userId="3466507a-8f95-47f2-ae1b-ce7d6ca611a4" providerId="ADAL" clId="{3438F4FC-D214-4A35-B915-405844213C8B}" dt="2026-07-18T12:46:54.583" v="128" actId="790"/>
+            <ac:spMkLst>
+              <pc:docMk/>
+              <pc:sldMasterMk cId="2523064765" sldId="2147483660"/>
+              <pc:sldLayoutMk cId="1662761648" sldId="2147483714"/>
+              <ac:spMk id="6" creationId="{3F4EF873-DC0F-4698-BEC2-502DB043AA5C}"/>
+            </ac:spMkLst>
+          </pc:spChg>
+          <pc:spChg chg="mod">
+            <ac:chgData name="Marcus Ihlar" userId="3466507a-8f95-47f2-ae1b-ce7d6ca611a4" providerId="ADAL" clId="{3438F4FC-D214-4A35-B915-405844213C8B}" dt="2026-07-18T12:46:55.170" v="233"/>
+            <ac:spMkLst>
+              <pc:docMk/>
+              <pc:sldMasterMk cId="2523064765" sldId="2147483660"/>
+              <pc:sldLayoutMk cId="1662761648" sldId="2147483714"/>
+              <ac:spMk id="7" creationId="{DB8BC610-C1B0-4C6A-B5C2-80DA487CE5DE}"/>
+            </ac:spMkLst>
+          </pc:spChg>
+        </pc:sldLayoutChg>
+        <pc:sldLayoutChg chg="modSp mod">
+          <pc:chgData name="Marcus Ihlar" userId="3466507a-8f95-47f2-ae1b-ce7d6ca611a4" providerId="ADAL" clId="{3438F4FC-D214-4A35-B915-405844213C8B}" dt="2026-07-18T12:46:55.185" v="245"/>
+          <pc:sldLayoutMkLst>
+            <pc:docMk/>
+            <pc:sldMasterMk cId="2523064765" sldId="2147483660"/>
+            <pc:sldLayoutMk cId="3539499238" sldId="2147483715"/>
+          </pc:sldLayoutMkLst>
+          <pc:spChg chg="mod">
+            <ac:chgData name="Marcus Ihlar" userId="3466507a-8f95-47f2-ae1b-ce7d6ca611a4" providerId="ADAL" clId="{3438F4FC-D214-4A35-B915-405844213C8B}" dt="2026-07-18T12:46:54.607" v="145" actId="790"/>
+            <ac:spMkLst>
+              <pc:docMk/>
+              <pc:sldMasterMk cId="2523064765" sldId="2147483660"/>
+              <pc:sldLayoutMk cId="3539499238" sldId="2147483715"/>
+              <ac:spMk id="2" creationId="{09FDE7F6-BBC9-8CC3-CB40-B28724FF07BC}"/>
+            </ac:spMkLst>
+          </pc:spChg>
+          <pc:spChg chg="mod">
+            <ac:chgData name="Marcus Ihlar" userId="3466507a-8f95-47f2-ae1b-ce7d6ca611a4" providerId="ADAL" clId="{3438F4FC-D214-4A35-B915-405844213C8B}" dt="2026-07-18T12:46:54.609" v="147" actId="790"/>
+            <ac:spMkLst>
+              <pc:docMk/>
+              <pc:sldMasterMk cId="2523064765" sldId="2147483660"/>
+              <pc:sldLayoutMk cId="3539499238" sldId="2147483715"/>
+              <ac:spMk id="6" creationId="{00000000-0000-0000-0000-000000000000}"/>
+            </ac:spMkLst>
+          </pc:spChg>
+          <pc:spChg chg="mod">
+            <ac:chgData name="Marcus Ihlar" userId="3466507a-8f95-47f2-ae1b-ce7d6ca611a4" providerId="ADAL" clId="{3438F4FC-D214-4A35-B915-405844213C8B}" dt="2026-07-18T12:46:54.614" v="149" actId="790"/>
+            <ac:spMkLst>
+              <pc:docMk/>
+              <pc:sldMasterMk cId="2523064765" sldId="2147483660"/>
+              <pc:sldLayoutMk cId="3539499238" sldId="2147483715"/>
+              <ac:spMk id="7" creationId="{8E3794F8-471D-4987-945F-3C29BB03AB49}"/>
+            </ac:spMkLst>
+          </pc:spChg>
+          <pc:spChg chg="mod">
+            <ac:chgData name="Marcus Ihlar" userId="3466507a-8f95-47f2-ae1b-ce7d6ca611a4" providerId="ADAL" clId="{3438F4FC-D214-4A35-B915-405844213C8B}" dt="2026-07-18T12:46:54.609" v="148" actId="790"/>
+            <ac:spMkLst>
+              <pc:docMk/>
+              <pc:sldMasterMk cId="2523064765" sldId="2147483660"/>
+              <pc:sldLayoutMk cId="3539499238" sldId="2147483715"/>
+              <ac:spMk id="8" creationId="{00000000-0000-0000-0000-000000000000}"/>
+            </ac:spMkLst>
+          </pc:spChg>
+          <pc:spChg chg="mod">
+            <ac:chgData name="Marcus Ihlar" userId="3466507a-8f95-47f2-ae1b-ce7d6ca611a4" providerId="ADAL" clId="{3438F4FC-D214-4A35-B915-405844213C8B}" dt="2026-07-18T12:46:55.185" v="245"/>
+            <ac:spMkLst>
+              <pc:docMk/>
+              <pc:sldMasterMk cId="2523064765" sldId="2147483660"/>
+              <pc:sldLayoutMk cId="3539499238" sldId="2147483715"/>
+              <ac:spMk id="9" creationId="{2C8570FA-FAA3-4EFA-A4F1-01C285AE39DE}"/>
+            </ac:spMkLst>
+          </pc:spChg>
+          <pc:spChg chg="mod">
+            <ac:chgData name="Marcus Ihlar" userId="3466507a-8f95-47f2-ae1b-ce7d6ca611a4" providerId="ADAL" clId="{3438F4FC-D214-4A35-B915-405844213C8B}" dt="2026-07-18T12:46:54.609" v="146" actId="790"/>
+            <ac:spMkLst>
+              <pc:docMk/>
+              <pc:sldMasterMk cId="2523064765" sldId="2147483660"/>
+              <pc:sldLayoutMk cId="3539499238" sldId="2147483715"/>
+              <ac:spMk id="10" creationId="{6B686A21-AA96-4B0A-B7CE-F4C6D5D31B32}"/>
+            </ac:spMkLst>
+          </pc:spChg>
+        </pc:sldLayoutChg>
+        <pc:sldLayoutChg chg="modSp mod">
+          <pc:chgData name="Marcus Ihlar" userId="3466507a-8f95-47f2-ae1b-ce7d6ca611a4" providerId="ADAL" clId="{3438F4FC-D214-4A35-B915-405844213C8B}" dt="2026-07-18T12:46:55.179" v="239"/>
+          <pc:sldLayoutMkLst>
+            <pc:docMk/>
+            <pc:sldMasterMk cId="2523064765" sldId="2147483660"/>
+            <pc:sldLayoutMk cId="488662847" sldId="2147483716"/>
+          </pc:sldLayoutMkLst>
+          <pc:spChg chg="mod">
+            <ac:chgData name="Marcus Ihlar" userId="3466507a-8f95-47f2-ae1b-ce7d6ca611a4" providerId="ADAL" clId="{3438F4FC-D214-4A35-B915-405844213C8B}" dt="2026-07-18T12:46:54.588" v="135" actId="790"/>
+            <ac:spMkLst>
+              <pc:docMk/>
+              <pc:sldMasterMk cId="2523064765" sldId="2147483660"/>
+              <pc:sldLayoutMk cId="488662847" sldId="2147483716"/>
+              <ac:spMk id="2" creationId="{105FD79D-9BC3-0408-DF33-0CA55CC3DCDA}"/>
+            </ac:spMkLst>
+          </pc:spChg>
+          <pc:spChg chg="mod">
+            <ac:chgData name="Marcus Ihlar" userId="3466507a-8f95-47f2-ae1b-ce7d6ca611a4" providerId="ADAL" clId="{3438F4FC-D214-4A35-B915-405844213C8B}" dt="2026-07-18T12:46:54.588" v="137" actId="790"/>
+            <ac:spMkLst>
+              <pc:docMk/>
+              <pc:sldMasterMk cId="2523064765" sldId="2147483660"/>
+              <pc:sldLayoutMk cId="488662847" sldId="2147483716"/>
+              <ac:spMk id="3" creationId="{00000000-0000-0000-0000-000000000000}"/>
+            </ac:spMkLst>
+          </pc:spChg>
+          <pc:spChg chg="mod">
+            <ac:chgData name="Marcus Ihlar" userId="3466507a-8f95-47f2-ae1b-ce7d6ca611a4" providerId="ADAL" clId="{3438F4FC-D214-4A35-B915-405844213C8B}" dt="2026-07-18T12:46:54.598" v="138" actId="790"/>
+            <ac:spMkLst>
+              <pc:docMk/>
+              <pc:sldMasterMk cId="2523064765" sldId="2147483660"/>
+              <pc:sldLayoutMk cId="488662847" sldId="2147483716"/>
+              <ac:spMk id="5" creationId="{00000000-0000-0000-0000-000000000000}"/>
+            </ac:spMkLst>
+          </pc:spChg>
+          <pc:spChg chg="mod">
+            <ac:chgData name="Marcus Ihlar" userId="3466507a-8f95-47f2-ae1b-ce7d6ca611a4" providerId="ADAL" clId="{3438F4FC-D214-4A35-B915-405844213C8B}" dt="2026-07-18T12:46:54.588" v="136" actId="790"/>
+            <ac:spMkLst>
+              <pc:docMk/>
+              <pc:sldMasterMk cId="2523064765" sldId="2147483660"/>
+              <pc:sldLayoutMk cId="488662847" sldId="2147483716"/>
+              <ac:spMk id="6" creationId="{891BF4C4-9DF9-4D9F-A738-37FBCD45AA68}"/>
+            </ac:spMkLst>
+          </pc:spChg>
+          <pc:spChg chg="mod">
+            <ac:chgData name="Marcus Ihlar" userId="3466507a-8f95-47f2-ae1b-ce7d6ca611a4" providerId="ADAL" clId="{3438F4FC-D214-4A35-B915-405844213C8B}" dt="2026-07-18T12:46:55.179" v="239"/>
+            <ac:spMkLst>
+              <pc:docMk/>
+              <pc:sldMasterMk cId="2523064765" sldId="2147483660"/>
+              <pc:sldLayoutMk cId="488662847" sldId="2147483716"/>
+              <ac:spMk id="8" creationId="{53797230-5A6C-4718-8C90-CB9F2709B382}"/>
+            </ac:spMkLst>
+          </pc:spChg>
+        </pc:sldLayoutChg>
+        <pc:sldLayoutChg chg="modSp mod">
+          <pc:chgData name="Marcus Ihlar" userId="3466507a-8f95-47f2-ae1b-ce7d6ca611a4" providerId="ADAL" clId="{3438F4FC-D214-4A35-B915-405844213C8B}" dt="2026-07-18T12:46:55.189" v="251"/>
+          <pc:sldLayoutMkLst>
+            <pc:docMk/>
+            <pc:sldMasterMk cId="2523064765" sldId="2147483660"/>
+            <pc:sldLayoutMk cId="3044934467" sldId="2147483717"/>
+          </pc:sldLayoutMkLst>
+          <pc:spChg chg="mod">
+            <ac:chgData name="Marcus Ihlar" userId="3466507a-8f95-47f2-ae1b-ce7d6ca611a4" providerId="ADAL" clId="{3438F4FC-D214-4A35-B915-405844213C8B}" dt="2026-07-18T12:46:54.619" v="157" actId="790"/>
+            <ac:spMkLst>
+              <pc:docMk/>
+              <pc:sldMasterMk cId="2523064765" sldId="2147483660"/>
+              <pc:sldLayoutMk cId="3044934467" sldId="2147483717"/>
+              <ac:spMk id="2" creationId="{D44FC84B-7E22-F949-A48C-665D3900E6CC}"/>
+            </ac:spMkLst>
+          </pc:spChg>
+          <pc:spChg chg="mod">
+            <ac:chgData name="Marcus Ihlar" userId="3466507a-8f95-47f2-ae1b-ce7d6ca611a4" providerId="ADAL" clId="{3438F4FC-D214-4A35-B915-405844213C8B}" dt="2026-07-18T12:46:54.630" v="159" actId="790"/>
+            <ac:spMkLst>
+              <pc:docMk/>
+              <pc:sldMasterMk cId="2523064765" sldId="2147483660"/>
+              <pc:sldLayoutMk cId="3044934467" sldId="2147483717"/>
+              <ac:spMk id="4" creationId="{00000000-0000-0000-0000-000000000000}"/>
+            </ac:spMkLst>
+          </pc:spChg>
+          <pc:spChg chg="mod">
+            <ac:chgData name="Marcus Ihlar" userId="3466507a-8f95-47f2-ae1b-ce7d6ca611a4" providerId="ADAL" clId="{3438F4FC-D214-4A35-B915-405844213C8B}" dt="2026-07-18T12:46:54.630" v="160" actId="790"/>
+            <ac:spMkLst>
+              <pc:docMk/>
+              <pc:sldMasterMk cId="2523064765" sldId="2147483660"/>
+              <pc:sldLayoutMk cId="3044934467" sldId="2147483717"/>
+              <ac:spMk id="6" creationId="{00000000-0000-0000-0000-000000000000}"/>
+            </ac:spMkLst>
+          </pc:spChg>
+          <pc:spChg chg="mod">
+            <ac:chgData name="Marcus Ihlar" userId="3466507a-8f95-47f2-ae1b-ce7d6ca611a4" providerId="ADAL" clId="{3438F4FC-D214-4A35-B915-405844213C8B}" dt="2026-07-18T12:46:54.619" v="158" actId="790"/>
+            <ac:spMkLst>
+              <pc:docMk/>
+              <pc:sldMasterMk cId="2523064765" sldId="2147483660"/>
+              <pc:sldLayoutMk cId="3044934467" sldId="2147483717"/>
+              <ac:spMk id="7" creationId="{F4D71A67-F349-4E68-B7B8-D53CE323A764}"/>
+            </ac:spMkLst>
+          </pc:spChg>
+          <pc:spChg chg="mod">
+            <ac:chgData name="Marcus Ihlar" userId="3466507a-8f95-47f2-ae1b-ce7d6ca611a4" providerId="ADAL" clId="{3438F4FC-D214-4A35-B915-405844213C8B}" dt="2026-07-18T12:46:54.630" v="161" actId="790"/>
+            <ac:spMkLst>
+              <pc:docMk/>
+              <pc:sldMasterMk cId="2523064765" sldId="2147483660"/>
+              <pc:sldLayoutMk cId="3044934467" sldId="2147483717"/>
+              <ac:spMk id="8" creationId="{00000000-0000-0000-0000-000000000000}"/>
+            </ac:spMkLst>
+          </pc:spChg>
+          <pc:spChg chg="mod">
+            <ac:chgData name="Marcus Ihlar" userId="3466507a-8f95-47f2-ae1b-ce7d6ca611a4" providerId="ADAL" clId="{3438F4FC-D214-4A35-B915-405844213C8B}" dt="2026-07-18T12:46:54.630" v="162" actId="790"/>
+            <ac:spMkLst>
+              <pc:docMk/>
+              <pc:sldMasterMk cId="2523064765" sldId="2147483660"/>
+              <pc:sldLayoutMk cId="3044934467" sldId="2147483717"/>
+              <ac:spMk id="9" creationId="{00000000-0000-0000-0000-000000000000}"/>
+            </ac:spMkLst>
+          </pc:spChg>
+          <pc:spChg chg="mod">
+            <ac:chgData name="Marcus Ihlar" userId="3466507a-8f95-47f2-ae1b-ce7d6ca611a4" providerId="ADAL" clId="{3438F4FC-D214-4A35-B915-405844213C8B}" dt="2026-07-18T12:46:55.189" v="251"/>
+            <ac:spMkLst>
+              <pc:docMk/>
+              <pc:sldMasterMk cId="2523064765" sldId="2147483660"/>
+              <pc:sldLayoutMk cId="3044934467" sldId="2147483717"/>
+              <ac:spMk id="11" creationId="{A55C34B4-681E-4FDA-A9BB-6BC31D94C8D6}"/>
+            </ac:spMkLst>
+          </pc:spChg>
+        </pc:sldLayoutChg>
+        <pc:sldLayoutChg chg="modSp mod">
+          <pc:chgData name="Marcus Ihlar" userId="3466507a-8f95-47f2-ae1b-ce7d6ca611a4" providerId="ADAL" clId="{3438F4FC-D214-4A35-B915-405844213C8B}" dt="2026-07-18T12:46:55.199" v="257"/>
+          <pc:sldLayoutMkLst>
+            <pc:docMk/>
+            <pc:sldMasterMk cId="2523064765" sldId="2147483660"/>
+            <pc:sldLayoutMk cId="3574322202" sldId="2147483718"/>
+          </pc:sldLayoutMkLst>
+          <pc:spChg chg="mod">
+            <ac:chgData name="Marcus Ihlar" userId="3466507a-8f95-47f2-ae1b-ce7d6ca611a4" providerId="ADAL" clId="{3438F4FC-D214-4A35-B915-405844213C8B}" dt="2026-07-18T12:46:54.645" v="170" actId="790"/>
+            <ac:spMkLst>
+              <pc:docMk/>
+              <pc:sldMasterMk cId="2523064765" sldId="2147483660"/>
+              <pc:sldLayoutMk cId="3574322202" sldId="2147483718"/>
+              <ac:spMk id="2" creationId="{DCFC6A99-DACF-36D5-6C3E-4DC5345A9049}"/>
+            </ac:spMkLst>
+          </pc:spChg>
+          <pc:spChg chg="mod">
+            <ac:chgData name="Marcus Ihlar" userId="3466507a-8f95-47f2-ae1b-ce7d6ca611a4" providerId="ADAL" clId="{3438F4FC-D214-4A35-B915-405844213C8B}" dt="2026-07-18T12:46:54.645" v="172" actId="790"/>
+            <ac:spMkLst>
+              <pc:docMk/>
+              <pc:sldMasterMk cId="2523064765" sldId="2147483660"/>
+              <pc:sldLayoutMk cId="3574322202" sldId="2147483718"/>
+              <ac:spMk id="3" creationId="{00000000-0000-0000-0000-000000000000}"/>
+            </ac:spMkLst>
+          </pc:spChg>
+          <pc:spChg chg="mod">
+            <ac:chgData name="Marcus Ihlar" userId="3466507a-8f95-47f2-ae1b-ce7d6ca611a4" providerId="ADAL" clId="{3438F4FC-D214-4A35-B915-405844213C8B}" dt="2026-07-18T12:46:54.651" v="173" actId="790"/>
+            <ac:spMkLst>
+              <pc:docMk/>
+              <pc:sldMasterMk cId="2523064765" sldId="2147483660"/>
+              <pc:sldLayoutMk cId="3574322202" sldId="2147483718"/>
+              <ac:spMk id="4" creationId="{00000000-0000-0000-0000-000000000000}"/>
+            </ac:spMkLst>
+          </pc:spChg>
+          <pc:spChg chg="mod">
+            <ac:chgData name="Marcus Ihlar" userId="3466507a-8f95-47f2-ae1b-ce7d6ca611a4" providerId="ADAL" clId="{3438F4FC-D214-4A35-B915-405844213C8B}" dt="2026-07-18T12:46:54.651" v="174" actId="790"/>
+            <ac:spMkLst>
+              <pc:docMk/>
+              <pc:sldMasterMk cId="2523064765" sldId="2147483660"/>
+              <pc:sldLayoutMk cId="3574322202" sldId="2147483718"/>
+              <ac:spMk id="6" creationId="{00000000-0000-0000-0000-000000000000}"/>
+            </ac:spMkLst>
+          </pc:spChg>
+          <pc:spChg chg="mod">
+            <ac:chgData name="Marcus Ihlar" userId="3466507a-8f95-47f2-ae1b-ce7d6ca611a4" providerId="ADAL" clId="{3438F4FC-D214-4A35-B915-405844213C8B}" dt="2026-07-18T12:46:54.651" v="175" actId="790"/>
+            <ac:spMkLst>
+              <pc:docMk/>
+              <pc:sldMasterMk cId="2523064765" sldId="2147483660"/>
+              <pc:sldLayoutMk cId="3574322202" sldId="2147483718"/>
+              <ac:spMk id="7" creationId="{5BD2C41D-0700-4885-AB77-25AFFE4E1FDA}"/>
+            </ac:spMkLst>
+          </pc:spChg>
+          <pc:spChg chg="mod">
+            <ac:chgData name="Marcus Ihlar" userId="3466507a-8f95-47f2-ae1b-ce7d6ca611a4" providerId="ADAL" clId="{3438F4FC-D214-4A35-B915-405844213C8B}" dt="2026-07-18T12:46:54.645" v="171" actId="790"/>
+            <ac:spMkLst>
+              <pc:docMk/>
+              <pc:sldMasterMk cId="2523064765" sldId="2147483660"/>
+              <pc:sldLayoutMk cId="3574322202" sldId="2147483718"/>
+              <ac:spMk id="9" creationId="{2C948968-FB06-45CC-8259-6BDE4430EACB}"/>
+            </ac:spMkLst>
+          </pc:spChg>
+          <pc:spChg chg="mod">
+            <ac:chgData name="Marcus Ihlar" userId="3466507a-8f95-47f2-ae1b-ce7d6ca611a4" providerId="ADAL" clId="{3438F4FC-D214-4A35-B915-405844213C8B}" dt="2026-07-18T12:46:55.199" v="257"/>
+            <ac:spMkLst>
+              <pc:docMk/>
+              <pc:sldMasterMk cId="2523064765" sldId="2147483660"/>
+              <pc:sldLayoutMk cId="3574322202" sldId="2147483718"/>
+              <ac:spMk id="10" creationId="{549048C1-340D-44C4-857B-1B201EC9A7E7}"/>
+            </ac:spMkLst>
+          </pc:spChg>
+        </pc:sldLayoutChg>
+        <pc:sldLayoutChg chg="modSp mod">
+          <pc:chgData name="Marcus Ihlar" userId="3466507a-8f95-47f2-ae1b-ce7d6ca611a4" providerId="ADAL" clId="{3438F4FC-D214-4A35-B915-405844213C8B}" dt="2026-07-18T12:46:55.206" v="263"/>
+          <pc:sldLayoutMkLst>
+            <pc:docMk/>
+            <pc:sldMasterMk cId="2523064765" sldId="2147483660"/>
+            <pc:sldLayoutMk cId="3422095206" sldId="2147483719"/>
+          </pc:sldLayoutMkLst>
+          <pc:spChg chg="mod">
+            <ac:chgData name="Marcus Ihlar" userId="3466507a-8f95-47f2-ae1b-ce7d6ca611a4" providerId="ADAL" clId="{3438F4FC-D214-4A35-B915-405844213C8B}" dt="2026-07-18T12:46:54.661" v="187" actId="790"/>
+            <ac:spMkLst>
+              <pc:docMk/>
+              <pc:sldMasterMk cId="2523064765" sldId="2147483660"/>
+              <pc:sldLayoutMk cId="3422095206" sldId="2147483719"/>
+              <ac:spMk id="2" creationId="{3573FEDA-98AE-F7E3-43DF-75A830443C4A}"/>
+            </ac:spMkLst>
+          </pc:spChg>
+          <pc:spChg chg="mod">
+            <ac:chgData name="Marcus Ihlar" userId="3466507a-8f95-47f2-ae1b-ce7d6ca611a4" providerId="ADAL" clId="{3438F4FC-D214-4A35-B915-405844213C8B}" dt="2026-07-18T12:46:54.672" v="189" actId="790"/>
+            <ac:spMkLst>
+              <pc:docMk/>
+              <pc:sldMasterMk cId="2523064765" sldId="2147483660"/>
+              <pc:sldLayoutMk cId="3422095206" sldId="2147483719"/>
+              <ac:spMk id="3" creationId="{00000000-0000-0000-0000-000000000000}"/>
+            </ac:spMkLst>
+          </pc:spChg>
+          <pc:spChg chg="mod">
+            <ac:chgData name="Marcus Ihlar" userId="3466507a-8f95-47f2-ae1b-ce7d6ca611a4" providerId="ADAL" clId="{3438F4FC-D214-4A35-B915-405844213C8B}" dt="2026-07-18T12:46:54.674" v="190" actId="790"/>
+            <ac:spMkLst>
+              <pc:docMk/>
+              <pc:sldMasterMk cId="2523064765" sldId="2147483660"/>
+              <pc:sldLayoutMk cId="3422095206" sldId="2147483719"/>
+              <ac:spMk id="4" creationId="{00000000-0000-0000-0000-000000000000}"/>
+            </ac:spMkLst>
+          </pc:spChg>
+          <pc:spChg chg="mod">
+            <ac:chgData name="Marcus Ihlar" userId="3466507a-8f95-47f2-ae1b-ce7d6ca611a4" providerId="ADAL" clId="{3438F4FC-D214-4A35-B915-405844213C8B}" dt="2026-07-18T12:46:54.676" v="191" actId="790"/>
+            <ac:spMkLst>
+              <pc:docMk/>
+              <pc:sldMasterMk cId="2523064765" sldId="2147483660"/>
+              <pc:sldLayoutMk cId="3422095206" sldId="2147483719"/>
+              <ac:spMk id="5" creationId="{00000000-0000-0000-0000-000000000000}"/>
+            </ac:spMkLst>
+          </pc:spChg>
+          <pc:spChg chg="mod">
+            <ac:chgData name="Marcus Ihlar" userId="3466507a-8f95-47f2-ae1b-ce7d6ca611a4" providerId="ADAL" clId="{3438F4FC-D214-4A35-B915-405844213C8B}" dt="2026-07-18T12:46:54.677" v="192" actId="790"/>
+            <ac:spMkLst>
+              <pc:docMk/>
+              <pc:sldMasterMk cId="2523064765" sldId="2147483660"/>
+              <pc:sldLayoutMk cId="3422095206" sldId="2147483719"/>
+              <ac:spMk id="6" creationId="{00000000-0000-0000-0000-000000000000}"/>
+            </ac:spMkLst>
+          </pc:spChg>
+          <pc:spChg chg="mod">
+            <ac:chgData name="Marcus Ihlar" userId="3466507a-8f95-47f2-ae1b-ce7d6ca611a4" providerId="ADAL" clId="{3438F4FC-D214-4A35-B915-405844213C8B}" dt="2026-07-18T12:46:54.682" v="194" actId="790"/>
+            <ac:spMkLst>
+              <pc:docMk/>
+              <pc:sldMasterMk cId="2523064765" sldId="2147483660"/>
+              <pc:sldLayoutMk cId="3422095206" sldId="2147483719"/>
+              <ac:spMk id="8" creationId="{00000000-0000-0000-0000-000000000000}"/>
+            </ac:spMkLst>
+          </pc:spChg>
+          <pc:spChg chg="mod">
+            <ac:chgData name="Marcus Ihlar" userId="3466507a-8f95-47f2-ae1b-ce7d6ca611a4" providerId="ADAL" clId="{3438F4FC-D214-4A35-B915-405844213C8B}" dt="2026-07-18T12:46:54.679" v="193" actId="790"/>
+            <ac:spMkLst>
+              <pc:docMk/>
+              <pc:sldMasterMk cId="2523064765" sldId="2147483660"/>
+              <pc:sldLayoutMk cId="3422095206" sldId="2147483719"/>
+              <ac:spMk id="9" creationId="{00000000-0000-0000-0000-000000000000}"/>
+            </ac:spMkLst>
+          </pc:spChg>
+          <pc:spChg chg="mod">
+            <ac:chgData name="Marcus Ihlar" userId="3466507a-8f95-47f2-ae1b-ce7d6ca611a4" providerId="ADAL" clId="{3438F4FC-D214-4A35-B915-405844213C8B}" dt="2026-07-18T12:46:54.688" v="196" actId="790"/>
+            <ac:spMkLst>
+              <pc:docMk/>
+              <pc:sldMasterMk cId="2523064765" sldId="2147483660"/>
+              <pc:sldLayoutMk cId="3422095206" sldId="2147483719"/>
+              <ac:spMk id="10" creationId="{00000000-0000-0000-0000-000000000000}"/>
+            </ac:spMkLst>
+          </pc:spChg>
+          <pc:spChg chg="mod">
+            <ac:chgData name="Marcus Ihlar" userId="3466507a-8f95-47f2-ae1b-ce7d6ca611a4" providerId="ADAL" clId="{3438F4FC-D214-4A35-B915-405844213C8B}" dt="2026-07-18T12:46:54.684" v="195" actId="790"/>
+            <ac:spMkLst>
+              <pc:docMk/>
+              <pc:sldMasterMk cId="2523064765" sldId="2147483660"/>
+              <pc:sldLayoutMk cId="3422095206" sldId="2147483719"/>
+              <ac:spMk id="11" creationId="{00000000-0000-0000-0000-000000000000}"/>
+            </ac:spMkLst>
+          </pc:spChg>
+          <pc:spChg chg="mod">
+            <ac:chgData name="Marcus Ihlar" userId="3466507a-8f95-47f2-ae1b-ce7d6ca611a4" providerId="ADAL" clId="{3438F4FC-D214-4A35-B915-405844213C8B}" dt="2026-07-18T12:46:54.661" v="188" actId="790"/>
+            <ac:spMkLst>
+              <pc:docMk/>
+              <pc:sldMasterMk cId="2523064765" sldId="2147483660"/>
+              <pc:sldLayoutMk cId="3422095206" sldId="2147483719"/>
+              <ac:spMk id="13" creationId="{99858DC4-E787-41D2-A613-961D60F89117}"/>
+            </ac:spMkLst>
+          </pc:spChg>
+          <pc:spChg chg="mod">
+            <ac:chgData name="Marcus Ihlar" userId="3466507a-8f95-47f2-ae1b-ce7d6ca611a4" providerId="ADAL" clId="{3438F4FC-D214-4A35-B915-405844213C8B}" dt="2026-07-18T12:46:55.206" v="263"/>
+            <ac:spMkLst>
+              <pc:docMk/>
+              <pc:sldMasterMk cId="2523064765" sldId="2147483660"/>
+              <pc:sldLayoutMk cId="3422095206" sldId="2147483719"/>
+              <ac:spMk id="14" creationId="{089CBEB5-348B-49F3-8F8B-FDEE08950E37}"/>
+            </ac:spMkLst>
+          </pc:spChg>
+        </pc:sldLayoutChg>
+        <pc:sldLayoutChg chg="modSp mod">
+          <pc:chgData name="Marcus Ihlar" userId="3466507a-8f95-47f2-ae1b-ce7d6ca611a4" providerId="ADAL" clId="{3438F4FC-D214-4A35-B915-405844213C8B}" dt="2026-07-18T12:46:54.688" v="200" actId="790"/>
+          <pc:sldLayoutMkLst>
+            <pc:docMk/>
+            <pc:sldMasterMk cId="2523064765" sldId="2147483660"/>
+            <pc:sldLayoutMk cId="3027148209" sldId="2147483720"/>
+          </pc:sldLayoutMkLst>
+          <pc:spChg chg="mod">
+            <ac:chgData name="Marcus Ihlar" userId="3466507a-8f95-47f2-ae1b-ce7d6ca611a4" providerId="ADAL" clId="{3438F4FC-D214-4A35-B915-405844213C8B}" dt="2026-07-18T12:46:54.688" v="200" actId="790"/>
+            <ac:spMkLst>
+              <pc:docMk/>
+              <pc:sldMasterMk cId="2523064765" sldId="2147483660"/>
+              <pc:sldLayoutMk cId="3027148209" sldId="2147483720"/>
+              <ac:spMk id="2" creationId="{FCF1ABC6-0A4C-6C18-E8A5-415153FD00B6}"/>
+            </ac:spMkLst>
+          </pc:spChg>
+          <pc:spChg chg="mod">
+            <ac:chgData name="Marcus Ihlar" userId="3466507a-8f95-47f2-ae1b-ce7d6ca611a4" providerId="ADAL" clId="{3438F4FC-D214-4A35-B915-405844213C8B}" dt="2026-07-18T12:46:54.688" v="199" actId="790"/>
+            <ac:spMkLst>
+              <pc:docMk/>
+              <pc:sldMasterMk cId="2523064765" sldId="2147483660"/>
+              <pc:sldLayoutMk cId="3027148209" sldId="2147483720"/>
+              <ac:spMk id="3" creationId="{000C8FCC-57E5-3E43-E21A-B3EDA1DB3E60}"/>
+            </ac:spMkLst>
+          </pc:spChg>
+        </pc:sldLayoutChg>
+      </pc:sldMasterChg>
+    </pc:docChg>
+  </pc:docChgLst>
   <pc:docChgLst>
     <pc:chgData name="Magnus Westerlund" userId="d1f911fd-f2d9-4af0-9810-372c2434ea9e" providerId="ADAL" clId="{7C0B1DB3-C1BB-5C7B-ADA6-81A78F8132A4}"/>
     <pc:docChg chg="custSel modSld">
@@ -172,61 +1751,6 @@
       </pc:sldChg>
     </pc:docChg>
   </pc:docChgLst>
-  <pc:docChgLst>
-    <pc:chgData name="John Mattsson" userId="af1d955f-31b2-4b66-a94f-49d4d7f7d266" providerId="ADAL" clId="{CEB9C44D-A79E-5021-A295-4255D07D6C4D}"/>
-    <pc:docChg chg="modSld">
-      <pc:chgData name="John Mattsson" userId="af1d955f-31b2-4b66-a94f-49d4d7f7d266" providerId="ADAL" clId="{CEB9C44D-A79E-5021-A295-4255D07D6C4D}" dt="2026-07-18T12:22:09.255" v="4" actId="2"/>
-      <pc:docMkLst>
-        <pc:docMk/>
-      </pc:docMkLst>
-      <pc:sldChg chg="modSp mod">
-        <pc:chgData name="John Mattsson" userId="af1d955f-31b2-4b66-a94f-49d4d7f7d266" providerId="ADAL" clId="{CEB9C44D-A79E-5021-A295-4255D07D6C4D}" dt="2026-07-18T12:22:09.255" v="4" actId="2"/>
-        <pc:sldMkLst>
-          <pc:docMk/>
-          <pc:sldMk cId="2604203220" sldId="272"/>
-        </pc:sldMkLst>
-        <pc:spChg chg="mod">
-          <ac:chgData name="John Mattsson" userId="af1d955f-31b2-4b66-a94f-49d4d7f7d266" providerId="ADAL" clId="{CEB9C44D-A79E-5021-A295-4255D07D6C4D}" dt="2026-07-18T12:22:09.255" v="4" actId="2"/>
-          <ac:spMkLst>
-            <pc:docMk/>
-            <pc:sldMk cId="2604203220" sldId="272"/>
-            <ac:spMk id="5" creationId="{80CFE1E9-2446-4327-A152-D121E1DA7E83}"/>
-          </ac:spMkLst>
-        </pc:spChg>
-      </pc:sldChg>
-      <pc:sldChg chg="modSp mod">
-        <pc:chgData name="John Mattsson" userId="af1d955f-31b2-4b66-a94f-49d4d7f7d266" providerId="ADAL" clId="{CEB9C44D-A79E-5021-A295-4255D07D6C4D}" dt="2026-07-18T12:22:04.383" v="2" actId="2"/>
-        <pc:sldMkLst>
-          <pc:docMk/>
-          <pc:sldMk cId="2764015099" sldId="275"/>
-        </pc:sldMkLst>
-        <pc:spChg chg="mod">
-          <ac:chgData name="John Mattsson" userId="af1d955f-31b2-4b66-a94f-49d4d7f7d266" providerId="ADAL" clId="{CEB9C44D-A79E-5021-A295-4255D07D6C4D}" dt="2026-07-18T12:22:02.332" v="0" actId="2"/>
-          <ac:spMkLst>
-            <pc:docMk/>
-            <pc:sldMk cId="2764015099" sldId="275"/>
-            <ac:spMk id="5" creationId="{960C9FF5-1894-156C-43F6-643A7F7A1C7D}"/>
-          </ac:spMkLst>
-        </pc:spChg>
-        <pc:spChg chg="mod">
-          <ac:chgData name="John Mattsson" userId="af1d955f-31b2-4b66-a94f-49d4d7f7d266" providerId="ADAL" clId="{CEB9C44D-A79E-5021-A295-4255D07D6C4D}" dt="2026-07-18T12:22:03.706" v="1" actId="2"/>
-          <ac:spMkLst>
-            <pc:docMk/>
-            <pc:sldMk cId="2764015099" sldId="275"/>
-            <ac:spMk id="22" creationId="{FAC3E9BB-C227-E96B-3FEB-9ABF5D4273B9}"/>
-          </ac:spMkLst>
-        </pc:spChg>
-        <pc:spChg chg="mod">
-          <ac:chgData name="John Mattsson" userId="af1d955f-31b2-4b66-a94f-49d4d7f7d266" providerId="ADAL" clId="{CEB9C44D-A79E-5021-A295-4255D07D6C4D}" dt="2026-07-18T12:22:04.383" v="2" actId="2"/>
-          <ac:spMkLst>
-            <pc:docMk/>
-            <pc:sldMk cId="2764015099" sldId="275"/>
-            <ac:spMk id="24" creationId="{094B2021-F91A-99ED-75B0-508368A658F3}"/>
-          </ac:spMkLst>
-        </pc:spChg>
-      </pc:sldChg>
-    </pc:docChg>
-  </pc:docChgLst>
 </pc:chgInfo>
 </file>
 
@@ -486,7 +2010,7 @@
             </a:lvl1pPr>
           </a:lstStyle>
           <a:p>
-            <a:endParaRPr lang="en-US" dirty="0"/>
+            <a:endParaRPr lang="en-US"/>
           </a:p>
         </p:txBody>
       </p:sp>
@@ -523,7 +2047,6 @@
               <a:rPr lang="en-US"/>
               <a:t> </a:t>
             </a:r>
-            <a:endParaRPr lang="en-US" dirty="0"/>
           </a:p>
         </p:txBody>
       </p:sp>
@@ -556,7 +2079,7 @@
           <a:bodyPr vert="horz" lIns="91440" tIns="45720" rIns="91440" bIns="45720" rtlCol="0" anchor="ctr"/>
           <a:lstStyle/>
           <a:p>
-            <a:endParaRPr lang="en-US" dirty="0"/>
+            <a:endParaRPr lang="en-US"/>
           </a:p>
         </p:txBody>
       </p:sp>
@@ -585,35 +2108,35 @@
           <a:p>
             <a:pPr lvl="0"/>
             <a:r>
-              <a:rPr lang="en-US" dirty="0"/>
+              <a:rPr lang="en-US"/>
               <a:t>Edit Master text styles</a:t>
             </a:r>
           </a:p>
           <a:p>
             <a:pPr lvl="1"/>
             <a:r>
-              <a:rPr lang="en-US" dirty="0"/>
+              <a:rPr lang="en-US"/>
               <a:t>Second level</a:t>
             </a:r>
           </a:p>
           <a:p>
             <a:pPr lvl="2"/>
             <a:r>
-              <a:rPr lang="en-US" dirty="0"/>
+              <a:rPr lang="en-US"/>
               <a:t>Third level</a:t>
             </a:r>
           </a:p>
           <a:p>
             <a:pPr lvl="3"/>
             <a:r>
-              <a:rPr lang="en-US" dirty="0"/>
+              <a:rPr lang="en-US"/>
               <a:t>Fourth level</a:t>
             </a:r>
           </a:p>
           <a:p>
             <a:pPr lvl="4"/>
             <a:r>
-              <a:rPr lang="en-US" dirty="0"/>
+              <a:rPr lang="en-US"/>
               <a:t>Fifth level</a:t>
             </a:r>
           </a:p>
@@ -648,7 +2171,7 @@
             </a:lvl1pPr>
           </a:lstStyle>
           <a:p>
-            <a:endParaRPr lang="en-US" dirty="0"/>
+            <a:endParaRPr lang="en-US"/>
           </a:p>
         </p:txBody>
       </p:sp>
@@ -686,7 +2209,7 @@
               <a:pPr/>
               <a:t>‹#›</a:t>
             </a:fld>
-            <a:endParaRPr lang="en-US" dirty="0"/>
+            <a:endParaRPr lang="en-US"/>
           </a:p>
         </p:txBody>
       </p:sp>
@@ -854,7 +2377,7 @@
           <a:bodyPr/>
           <a:lstStyle/>
           <a:p>
-            <a:endParaRPr lang="en-US" dirty="0"/>
+            <a:endParaRPr lang="en-US"/>
           </a:p>
         </p:txBody>
       </p:sp>
@@ -873,7 +2396,7 @@
           <a:bodyPr/>
           <a:lstStyle/>
           <a:p>
-            <a:endParaRPr lang="en-US" dirty="0"/>
+            <a:endParaRPr lang="en-US"/>
           </a:p>
         </p:txBody>
       </p:sp>
@@ -893,7 +2416,7 @@
           <a:lstStyle/>
           <a:p>
             <a:r>
-              <a:rPr lang="en-US" dirty="0"/>
+              <a:rPr lang="en-US"/>
               <a:t> </a:t>
             </a:r>
           </a:p>
@@ -914,7 +2437,7 @@
           <a:bodyPr/>
           <a:lstStyle/>
           <a:p>
-            <a:endParaRPr lang="en-US" dirty="0"/>
+            <a:endParaRPr lang="en-US"/>
           </a:p>
         </p:txBody>
       </p:sp>
@@ -938,7 +2461,7 @@
               <a:pPr/>
               <a:t>1</a:t>
             </a:fld>
-            <a:endParaRPr lang="en-US" dirty="0"/>
+            <a:endParaRPr lang="en-US"/>
           </a:p>
         </p:txBody>
       </p:sp>
@@ -999,7 +2522,7 @@
           <a:bodyPr/>
           <a:lstStyle/>
           <a:p>
-            <a:endParaRPr lang="en-US" dirty="0"/>
+            <a:endParaRPr lang="en-US"/>
           </a:p>
         </p:txBody>
       </p:sp>
@@ -1018,7 +2541,7 @@
           <a:bodyPr/>
           <a:lstStyle/>
           <a:p>
-            <a:endParaRPr lang="en-US" dirty="0"/>
+            <a:endParaRPr lang="en-US"/>
           </a:p>
         </p:txBody>
       </p:sp>
@@ -1038,7 +2561,7 @@
           <a:lstStyle/>
           <a:p>
             <a:r>
-              <a:rPr lang="en-US" dirty="0"/>
+              <a:rPr lang="en-US"/>
               <a:t> </a:t>
             </a:r>
           </a:p>
@@ -1059,7 +2582,7 @@
           <a:bodyPr/>
           <a:lstStyle/>
           <a:p>
-            <a:endParaRPr lang="en-US" dirty="0"/>
+            <a:endParaRPr lang="en-US"/>
           </a:p>
         </p:txBody>
       </p:sp>
@@ -1083,7 +2606,7 @@
               <a:pPr/>
               <a:t>2</a:t>
             </a:fld>
-            <a:endParaRPr lang="en-US" dirty="0"/>
+            <a:endParaRPr lang="en-US"/>
           </a:p>
         </p:txBody>
       </p:sp>
@@ -1144,7 +2667,7 @@
           <a:bodyPr/>
           <a:lstStyle/>
           <a:p>
-            <a:endParaRPr lang="en-US" dirty="0"/>
+            <a:endParaRPr lang="en-US"/>
           </a:p>
         </p:txBody>
       </p:sp>
@@ -1163,7 +2686,7 @@
           <a:bodyPr/>
           <a:lstStyle/>
           <a:p>
-            <a:endParaRPr lang="en-US" dirty="0"/>
+            <a:endParaRPr lang="en-US"/>
           </a:p>
         </p:txBody>
       </p:sp>
@@ -1183,7 +2706,7 @@
           <a:lstStyle/>
           <a:p>
             <a:r>
-              <a:rPr lang="en-US" dirty="0"/>
+              <a:rPr lang="en-US"/>
               <a:t> </a:t>
             </a:r>
           </a:p>
@@ -1204,7 +2727,7 @@
           <a:bodyPr/>
           <a:lstStyle/>
           <a:p>
-            <a:endParaRPr lang="en-US" dirty="0"/>
+            <a:endParaRPr lang="en-US"/>
           </a:p>
         </p:txBody>
       </p:sp>
@@ -1228,7 +2751,7 @@
               <a:pPr/>
               <a:t>6</a:t>
             </a:fld>
-            <a:endParaRPr lang="en-US" dirty="0"/>
+            <a:endParaRPr lang="en-US"/>
           </a:p>
         </p:txBody>
       </p:sp>
@@ -1289,7 +2812,7 @@
           <a:bodyPr/>
           <a:lstStyle/>
           <a:p>
-            <a:endParaRPr lang="en-US" dirty="0"/>
+            <a:endParaRPr lang="en-US"/>
           </a:p>
         </p:txBody>
       </p:sp>
@@ -1308,7 +2831,7 @@
           <a:bodyPr/>
           <a:lstStyle/>
           <a:p>
-            <a:endParaRPr lang="en-US" dirty="0"/>
+            <a:endParaRPr lang="en-US"/>
           </a:p>
         </p:txBody>
       </p:sp>
@@ -1331,7 +2854,6 @@
               <a:rPr lang="en-US"/>
               <a:t> </a:t>
             </a:r>
-            <a:endParaRPr lang="en-US" dirty="0"/>
           </a:p>
         </p:txBody>
       </p:sp>
@@ -1350,7 +2872,7 @@
           <a:bodyPr/>
           <a:lstStyle/>
           <a:p>
-            <a:endParaRPr lang="en-US" dirty="0"/>
+            <a:endParaRPr lang="en-US"/>
           </a:p>
         </p:txBody>
       </p:sp>
@@ -1373,7 +2895,7 @@
               <a:rPr lang="en-US" smtClean="0"/>
               <a:t>9</a:t>
             </a:fld>
-            <a:endParaRPr lang="en-US" dirty="0"/>
+            <a:endParaRPr lang="en-US"/>
           </a:p>
         </p:txBody>
       </p:sp>
@@ -1440,10 +2962,9 @@
           </a:lstStyle>
           <a:p>
             <a:r>
-              <a:rPr lang="en-US" dirty="0"/>
+              <a:rPr lang="en-US"/>
               <a:t>Title/cover page,   Ericsson Hilda Light 80pt, max 3-lines</a:t>
             </a:r>
-            <a:endParaRPr lang="en-US"/>
           </a:p>
         </p:txBody>
       </p:sp>
@@ -1488,17 +3009,16 @@
           </a:lstStyle>
           <a:p>
             <a:r>
-              <a:rPr lang="en-US" dirty="0"/>
+              <a:rPr lang="en-US"/>
               <a:t>Description/subtitle/speaker…</a:t>
             </a:r>
             <a:br>
-              <a:rPr lang="en-US" dirty="0"/>
+              <a:rPr lang="en-US"/>
             </a:br>
             <a:r>
-              <a:rPr lang="en-US" dirty="0"/>
+              <a:rPr lang="en-US"/>
               <a:t>Ericsson Hilda Black 20pt</a:t>
             </a:r>
-            <a:endParaRPr lang="en-US"/>
           </a:p>
         </p:txBody>
       </p:sp>
@@ -1536,10 +3056,9 @@
           </a:lstStyle>
           <a:p>
             <a:r>
-              <a:rPr lang="en-US" dirty="0"/>
+              <a:rPr lang="en-US"/>
               <a:t>Speaker name</a:t>
             </a:r>
-            <a:endParaRPr lang="en-US"/>
           </a:p>
         </p:txBody>
       </p:sp>
@@ -1584,10 +3103,9 @@
           </a:lstStyle>
           <a:p>
             <a:r>
-              <a:rPr lang="en-US" dirty="0"/>
+              <a:rPr lang="en-US"/>
               <a:t>Organization</a:t>
             </a:r>
-            <a:endParaRPr lang="en-US"/>
           </a:p>
         </p:txBody>
       </p:sp>
@@ -1633,10 +3151,9 @@
           <a:p>
             <a:pPr lvl="0"/>
             <a:r>
-              <a:rPr lang="en-US" dirty="0"/>
+              <a:rPr lang="en-US"/>
               <a:t>YYYY-MM-DD</a:t>
             </a:r>
-            <a:endParaRPr lang="en-US"/>
           </a:p>
         </p:txBody>
       </p:sp>
@@ -1655,7 +3172,7 @@
         <p:spPr>
           <a:xfrm>
             <a:off x="421638" y="6524625"/>
-            <a:ext cx="65" cy="123111"/>
+            <a:ext cx="3064942" cy="123111"/>
           </a:xfrm>
           <a:prstGeom prst="rect">
             <a:avLst/>
@@ -1672,7 +3189,25 @@
               <a:buFontTx/>
               <a:buNone/>
             </a:pPr>
-            <a:endParaRPr lang="en-US" sz="800" b="0" i="0" u="none" dirty="0">
+            <a:r>
+              <a:rPr lang="en-US" sz="800" b="0" i="0" u="none">
+                <a:solidFill>
+                  <a:schemeClr val="tx1"/>
+                </a:solidFill>
+                <a:latin typeface="+mn-lt"/>
+              </a:rPr>
+              <a:t>  |  ERAMSWD Magnus Westerlund  |  2026-07-16  |  Open  |  Page </a:t>
+            </a:r>
+            <a:fld id="{EA536A49-17DD-4A07-850E-1EAF96BC02B3}" type="slidenum">
+              <a:rPr lang="en-US" sz="800" b="0" i="0" u="none" smtClean="0">
+                <a:solidFill>
+                  <a:schemeClr val="tx1"/>
+                </a:solidFill>
+                <a:latin typeface="+mn-lt"/>
+              </a:rPr>
+              <a:t>‹#›</a:t>
+            </a:fld>
+            <a:endParaRPr lang="en-US" sz="800" b="0" i="0" u="none">
               <a:solidFill>
                 <a:schemeClr val="tx1"/>
               </a:solidFill>
@@ -1692,11 +3227,6 @@
     <a:masterClrMapping/>
   </p:clrMapOvr>
   <p:hf sldNum="0" hdr="0" ftr="0"/>
-  <p:extLst>
-    <p:ext uri="{DCECCB84-F9BA-43D5-87BE-67443E8EF086}">
-      <p15:sldGuideLst xmlns:p15="http://schemas.microsoft.com/office/powerpoint/2012/main"/>
-    </p:ext>
-  </p:extLst>
 </p:sldLayout>
 </file>
 
@@ -1772,7 +3302,7 @@
               <a:buFont typeface="Ericsson Hilda" panose="00000500000000000000" pitchFamily="2" charset="0"/>
               <a:buChar char="●"/>
             </a:pPr>
-            <a:endParaRPr lang="en-US" dirty="0">
+            <a:endParaRPr lang="en-US">
               <a:solidFill>
                 <a:schemeClr val="bg1"/>
               </a:solidFill>
@@ -1868,10 +3398,9 @@
           <a:p>
             <a:pPr lvl="0"/>
             <a:r>
-              <a:rPr lang="en-US" dirty="0"/>
+              <a:rPr lang="en-US"/>
               <a:t>Use this layout for presentations using short and crisp headings</a:t>
             </a:r>
-            <a:endParaRPr lang="en-US"/>
           </a:p>
         </p:txBody>
       </p:sp>
@@ -1938,42 +3467,37 @@
           <a:p>
             <a:pPr lvl="0"/>
             <a:r>
-              <a:rPr lang="en-US" dirty="0"/>
+              <a:rPr lang="en-US"/>
               <a:t>For heading, use Ericsson Hilda in bold. For copy and bullets, use Ericsson Hilda.</a:t>
             </a:r>
-            <a:endParaRPr lang="en-US"/>
           </a:p>
           <a:p>
             <a:pPr lvl="0"/>
             <a:r>
-              <a:rPr lang="en-US" dirty="0"/>
+              <a:rPr lang="en-US"/>
               <a:t>First level</a:t>
             </a:r>
-            <a:endParaRPr lang="en-US"/>
           </a:p>
           <a:p>
             <a:pPr lvl="1"/>
             <a:r>
-              <a:rPr lang="en-US" dirty="0"/>
+              <a:rPr lang="en-US"/>
               <a:t>Second level</a:t>
             </a:r>
-            <a:endParaRPr lang="en-US"/>
           </a:p>
           <a:p>
             <a:pPr lvl="2"/>
             <a:r>
-              <a:rPr lang="en-US" dirty="0"/>
+              <a:rPr lang="en-US"/>
               <a:t>Third level</a:t>
             </a:r>
-            <a:endParaRPr lang="en-US"/>
           </a:p>
           <a:p>
             <a:pPr lvl="3"/>
             <a:r>
-              <a:rPr lang="en-US" dirty="0"/>
+              <a:rPr lang="en-US"/>
               <a:t>Fourth level</a:t>
             </a:r>
-            <a:endParaRPr lang="en-US"/>
           </a:p>
         </p:txBody>
       </p:sp>
@@ -1992,7 +3516,7 @@
         <p:spPr>
           <a:xfrm>
             <a:off x="421638" y="6524625"/>
-            <a:ext cx="65" cy="123111"/>
+            <a:ext cx="3064942" cy="123111"/>
           </a:xfrm>
           <a:prstGeom prst="rect">
             <a:avLst/>
@@ -2009,7 +3533,25 @@
               <a:buFontTx/>
               <a:buNone/>
             </a:pPr>
-            <a:endParaRPr lang="en-US" sz="800" b="0" i="0" u="none" dirty="0">
+            <a:r>
+              <a:rPr lang="en-US" sz="800" b="0" i="0" u="none">
+                <a:solidFill>
+                  <a:schemeClr val="tx1"/>
+                </a:solidFill>
+                <a:latin typeface="+mn-lt"/>
+              </a:rPr>
+              <a:t>  |  ERAMSWD Magnus Westerlund  |  2026-07-16  |  Open  |  Page </a:t>
+            </a:r>
+            <a:fld id="{46A0D3BB-2CC8-4D13-9DAC-37B3DE2EBBAC}" type="slidenum">
+              <a:rPr lang="en-US" sz="800" b="0" i="0" u="none" smtClean="0">
+                <a:solidFill>
+                  <a:schemeClr val="tx1"/>
+                </a:solidFill>
+                <a:latin typeface="+mn-lt"/>
+              </a:rPr>
+              <a:t>‹#›</a:t>
+            </a:fld>
+            <a:endParaRPr lang="en-US" sz="800" b="0" i="0" u="none">
               <a:solidFill>
                 <a:schemeClr val="tx1"/>
               </a:solidFill>
@@ -2099,10 +3641,9 @@
           <a:p>
             <a:pPr lvl="0"/>
             <a:r>
-              <a:rPr lang="en-US" dirty="0"/>
+              <a:rPr lang="en-US"/>
               <a:t>Slide title, Ericsson Hilda Light 40pt, Ericsson Black, max 2-lines</a:t>
             </a:r>
-            <a:endParaRPr lang="en-US"/>
           </a:p>
         </p:txBody>
       </p:sp>
@@ -2163,42 +3704,37 @@
           <a:p>
             <a:pPr lvl="0"/>
             <a:r>
-              <a:rPr lang="en-US" dirty="0"/>
+              <a:rPr lang="en-US"/>
               <a:t>For heading, use Ericsson Hilda in bold. For copy and bullets, use Ericsson Hilda.</a:t>
             </a:r>
-            <a:endParaRPr lang="en-US"/>
           </a:p>
           <a:p>
             <a:pPr lvl="0"/>
             <a:r>
-              <a:rPr lang="en-US" dirty="0"/>
+              <a:rPr lang="en-US"/>
               <a:t>First level</a:t>
             </a:r>
-            <a:endParaRPr lang="en-US"/>
           </a:p>
           <a:p>
             <a:pPr lvl="1"/>
             <a:r>
-              <a:rPr lang="en-US" dirty="0"/>
+              <a:rPr lang="en-US"/>
               <a:t>Second level</a:t>
             </a:r>
-            <a:endParaRPr lang="en-US"/>
           </a:p>
           <a:p>
             <a:pPr lvl="2"/>
             <a:r>
-              <a:rPr lang="en-US" dirty="0"/>
+              <a:rPr lang="en-US"/>
               <a:t>Third level</a:t>
             </a:r>
-            <a:endParaRPr lang="en-US"/>
           </a:p>
           <a:p>
             <a:pPr lvl="3"/>
             <a:r>
-              <a:rPr lang="en-US" dirty="0"/>
+              <a:rPr lang="en-US"/>
               <a:t>Fourth level</a:t>
             </a:r>
-            <a:endParaRPr lang="en-US"/>
           </a:p>
         </p:txBody>
       </p:sp>
@@ -2259,42 +3795,37 @@
           <a:p>
             <a:pPr lvl="0"/>
             <a:r>
-              <a:rPr lang="en-US" dirty="0"/>
+              <a:rPr lang="en-US"/>
               <a:t>For heading, use Ericsson Hilda in bold. For copy and bullets, use Ericsson Hilda.</a:t>
             </a:r>
-            <a:endParaRPr lang="en-US"/>
           </a:p>
           <a:p>
             <a:pPr lvl="0"/>
             <a:r>
-              <a:rPr lang="en-US" dirty="0"/>
+              <a:rPr lang="en-US"/>
               <a:t>First level</a:t>
             </a:r>
-            <a:endParaRPr lang="en-US"/>
           </a:p>
           <a:p>
             <a:pPr lvl="1"/>
             <a:r>
-              <a:rPr lang="en-US" dirty="0"/>
+              <a:rPr lang="en-US"/>
               <a:t>Second level</a:t>
             </a:r>
-            <a:endParaRPr lang="en-US"/>
           </a:p>
           <a:p>
             <a:pPr lvl="2"/>
             <a:r>
-              <a:rPr lang="en-US" dirty="0"/>
+              <a:rPr lang="en-US"/>
               <a:t>Third level</a:t>
             </a:r>
-            <a:endParaRPr lang="en-US"/>
           </a:p>
           <a:p>
             <a:pPr lvl="3"/>
             <a:r>
-              <a:rPr lang="en-US" dirty="0"/>
+              <a:rPr lang="en-US"/>
               <a:t>Fourth level</a:t>
             </a:r>
-            <a:endParaRPr lang="en-US"/>
           </a:p>
         </p:txBody>
       </p:sp>
@@ -2313,7 +3844,7 @@
         <p:spPr>
           <a:xfrm>
             <a:off x="421638" y="6524625"/>
-            <a:ext cx="65" cy="123111"/>
+            <a:ext cx="3064942" cy="123111"/>
           </a:xfrm>
           <a:prstGeom prst="rect">
             <a:avLst/>
@@ -2330,7 +3861,25 @@
               <a:buFontTx/>
               <a:buNone/>
             </a:pPr>
-            <a:endParaRPr lang="en-US" sz="800" b="0" i="0" u="none" dirty="0">
+            <a:r>
+              <a:rPr lang="en-US" sz="800" b="0" i="0" u="none">
+                <a:solidFill>
+                  <a:schemeClr val="tx1"/>
+                </a:solidFill>
+                <a:latin typeface="+mn-lt"/>
+              </a:rPr>
+              <a:t>  |  ERAMSWD Magnus Westerlund  |  2026-07-16  |  Open  |  Page </a:t>
+            </a:r>
+            <a:fld id="{1114553B-2B32-4B14-BFC1-27E88B7265CF}" type="slidenum">
+              <a:rPr lang="en-US" sz="800" b="0" i="0" u="none" smtClean="0">
+                <a:solidFill>
+                  <a:schemeClr val="tx1"/>
+                </a:solidFill>
+                <a:latin typeface="+mn-lt"/>
+              </a:rPr>
+              <a:t>‹#›</a:t>
+            </a:fld>
+            <a:endParaRPr lang="en-US" sz="800" b="0" i="0" u="none">
               <a:solidFill>
                 <a:schemeClr val="tx1"/>
               </a:solidFill>
@@ -2424,7 +3973,7 @@
               <a:buFont typeface="Ericsson Hilda" panose="00000500000000000000" pitchFamily="2" charset="0"/>
               <a:buChar char="●"/>
             </a:pPr>
-            <a:endParaRPr lang="en-US" dirty="0">
+            <a:endParaRPr lang="en-US">
               <a:solidFill>
                 <a:schemeClr val="bg1"/>
               </a:solidFill>
@@ -2520,10 +4069,9 @@
           <a:p>
             <a:pPr lvl="0"/>
             <a:r>
-              <a:rPr lang="en-US" dirty="0"/>
+              <a:rPr lang="en-US"/>
               <a:t>Slide title, Ericsson Hilda Light 40pt, Ericsson Black, max 2-lines</a:t>
             </a:r>
-            <a:endParaRPr lang="en-US"/>
           </a:p>
         </p:txBody>
       </p:sp>
@@ -2584,42 +4132,37 @@
           <a:p>
             <a:pPr lvl="0"/>
             <a:r>
-              <a:rPr lang="en-US" dirty="0"/>
+              <a:rPr lang="en-US"/>
               <a:t>For heading, use Ericsson Hilda in bold. For copy and bullets, use Ericsson Hilda.</a:t>
             </a:r>
-            <a:endParaRPr lang="en-US"/>
           </a:p>
           <a:p>
             <a:pPr lvl="0"/>
             <a:r>
-              <a:rPr lang="en-US" dirty="0"/>
+              <a:rPr lang="en-US"/>
               <a:t>First level</a:t>
             </a:r>
-            <a:endParaRPr lang="en-US"/>
           </a:p>
           <a:p>
             <a:pPr lvl="1"/>
             <a:r>
-              <a:rPr lang="en-US" dirty="0"/>
+              <a:rPr lang="en-US"/>
               <a:t>Second level</a:t>
             </a:r>
-            <a:endParaRPr lang="en-US"/>
           </a:p>
           <a:p>
             <a:pPr lvl="2"/>
             <a:r>
-              <a:rPr lang="en-US" dirty="0"/>
+              <a:rPr lang="en-US"/>
               <a:t>Third level</a:t>
             </a:r>
-            <a:endParaRPr lang="en-US"/>
           </a:p>
           <a:p>
             <a:pPr lvl="3"/>
             <a:r>
-              <a:rPr lang="en-US" dirty="0"/>
+              <a:rPr lang="en-US"/>
               <a:t>Fourth level</a:t>
             </a:r>
-            <a:endParaRPr lang="en-US"/>
           </a:p>
         </p:txBody>
       </p:sp>
@@ -2680,42 +4223,37 @@
           <a:p>
             <a:pPr lvl="0"/>
             <a:r>
-              <a:rPr lang="en-US" dirty="0"/>
+              <a:rPr lang="en-US"/>
               <a:t>For heading, use Ericsson Hilda in bold. For copy and bullets, use Ericsson Hilda.</a:t>
             </a:r>
-            <a:endParaRPr lang="en-US"/>
           </a:p>
           <a:p>
             <a:pPr lvl="0"/>
             <a:r>
-              <a:rPr lang="en-US" dirty="0"/>
+              <a:rPr lang="en-US"/>
               <a:t>First level</a:t>
             </a:r>
-            <a:endParaRPr lang="en-US"/>
           </a:p>
           <a:p>
             <a:pPr lvl="1"/>
             <a:r>
-              <a:rPr lang="en-US" dirty="0"/>
+              <a:rPr lang="en-US"/>
               <a:t>Second level</a:t>
             </a:r>
-            <a:endParaRPr lang="en-US"/>
           </a:p>
           <a:p>
             <a:pPr lvl="2"/>
             <a:r>
-              <a:rPr lang="en-US" dirty="0"/>
+              <a:rPr lang="en-US"/>
               <a:t>Third level</a:t>
             </a:r>
-            <a:endParaRPr lang="en-US"/>
           </a:p>
           <a:p>
             <a:pPr lvl="3"/>
             <a:r>
-              <a:rPr lang="en-US" dirty="0"/>
+              <a:rPr lang="en-US"/>
               <a:t>Fourth level</a:t>
             </a:r>
-            <a:endParaRPr lang="en-US"/>
           </a:p>
         </p:txBody>
       </p:sp>
@@ -2734,7 +4272,7 @@
         <p:spPr>
           <a:xfrm>
             <a:off x="421638" y="6524625"/>
-            <a:ext cx="65" cy="123111"/>
+            <a:ext cx="3064942" cy="123111"/>
           </a:xfrm>
           <a:prstGeom prst="rect">
             <a:avLst/>
@@ -2751,7 +4289,25 @@
               <a:buFontTx/>
               <a:buNone/>
             </a:pPr>
-            <a:endParaRPr lang="en-US" sz="800" b="0" i="0" u="none" dirty="0">
+            <a:r>
+              <a:rPr lang="en-US" sz="800" b="0" i="0" u="none">
+                <a:solidFill>
+                  <a:schemeClr val="tx1"/>
+                </a:solidFill>
+                <a:latin typeface="+mn-lt"/>
+              </a:rPr>
+              <a:t>  |  ERAMSWD Magnus Westerlund  |  2026-07-16  |  Open  |  Page </a:t>
+            </a:r>
+            <a:fld id="{C489BF10-8C5F-4A00-BAA6-AEF7957AF166}" type="slidenum">
+              <a:rPr lang="en-US" sz="800" b="0" i="0" u="none" smtClean="0">
+                <a:solidFill>
+                  <a:schemeClr val="tx1"/>
+                </a:solidFill>
+                <a:latin typeface="+mn-lt"/>
+              </a:rPr>
+              <a:t>‹#›</a:t>
+            </a:fld>
+            <a:endParaRPr lang="en-US" sz="800" b="0" i="0" u="none">
               <a:solidFill>
                 <a:schemeClr val="tx1"/>
               </a:solidFill>
@@ -2841,10 +4397,9 @@
           <a:p>
             <a:pPr lvl="0"/>
             <a:r>
-              <a:rPr lang="en-US" dirty="0"/>
+              <a:rPr lang="en-US"/>
               <a:t>Slide title, Ericsson Hilda Light 40pt, Ericsson Black, max 2-lines</a:t>
             </a:r>
-            <a:endParaRPr lang="en-US"/>
           </a:p>
         </p:txBody>
       </p:sp>
@@ -2901,34 +4456,30 @@
           <a:p>
             <a:pPr lvl="0"/>
             <a:r>
-              <a:rPr lang="en-US" dirty="0"/>
+              <a:rPr lang="en-US"/>
               <a:t>For heading, use Ericsson Hilda in bold. For copy and bullets, use Ericsson Hilda.</a:t>
             </a:r>
-            <a:endParaRPr lang="en-US"/>
           </a:p>
           <a:p>
             <a:pPr lvl="0"/>
             <a:r>
-              <a:rPr lang="en-US" dirty="0"/>
+              <a:rPr lang="en-US"/>
               <a:t>First level</a:t>
             </a:r>
-            <a:endParaRPr lang="en-US"/>
           </a:p>
           <a:p>
             <a:pPr lvl="1"/>
             <a:r>
-              <a:rPr lang="en-US" dirty="0"/>
+              <a:rPr lang="en-US"/>
               <a:t>Second level</a:t>
             </a:r>
-            <a:endParaRPr lang="en-US"/>
           </a:p>
           <a:p>
             <a:pPr lvl="2"/>
             <a:r>
-              <a:rPr lang="en-US" dirty="0"/>
+              <a:rPr lang="en-US"/>
               <a:t>Third level</a:t>
             </a:r>
-            <a:endParaRPr lang="en-US"/>
           </a:p>
         </p:txBody>
       </p:sp>
@@ -2985,34 +4536,30 @@
           <a:p>
             <a:pPr lvl="0"/>
             <a:r>
-              <a:rPr lang="en-US" dirty="0"/>
+              <a:rPr lang="en-US"/>
               <a:t>For heading, use Ericsson Hilda in bold. For copy and bullets, use Ericsson Hilda.</a:t>
             </a:r>
-            <a:endParaRPr lang="en-US"/>
           </a:p>
           <a:p>
             <a:pPr lvl="0"/>
             <a:r>
-              <a:rPr lang="en-US" dirty="0"/>
+              <a:rPr lang="en-US"/>
               <a:t>First level</a:t>
             </a:r>
-            <a:endParaRPr lang="en-US"/>
           </a:p>
           <a:p>
             <a:pPr lvl="1"/>
             <a:r>
-              <a:rPr lang="en-US" dirty="0"/>
+              <a:rPr lang="en-US"/>
               <a:t>Second level</a:t>
             </a:r>
-            <a:endParaRPr lang="en-US"/>
           </a:p>
           <a:p>
             <a:pPr lvl="2"/>
             <a:r>
-              <a:rPr lang="en-US" dirty="0"/>
+              <a:rPr lang="en-US"/>
               <a:t>Third level</a:t>
             </a:r>
-            <a:endParaRPr lang="en-US"/>
           </a:p>
         </p:txBody>
       </p:sp>
@@ -3075,34 +4622,30 @@
           <a:p>
             <a:pPr lvl="0"/>
             <a:r>
-              <a:rPr lang="en-US" dirty="0"/>
+              <a:rPr lang="en-US"/>
               <a:t>For heading, use Ericsson Hilda in bold. For copy and bullets, use Ericsson Hilda.</a:t>
             </a:r>
-            <a:endParaRPr lang="en-US"/>
           </a:p>
           <a:p>
             <a:pPr lvl="0"/>
             <a:r>
-              <a:rPr lang="en-US" dirty="0"/>
+              <a:rPr lang="en-US"/>
               <a:t>First level</a:t>
             </a:r>
-            <a:endParaRPr lang="en-US"/>
           </a:p>
           <a:p>
             <a:pPr lvl="1"/>
             <a:r>
-              <a:rPr lang="en-US" dirty="0"/>
+              <a:rPr lang="en-US"/>
               <a:t>Second level</a:t>
             </a:r>
-            <a:endParaRPr lang="en-US"/>
           </a:p>
           <a:p>
             <a:pPr lvl="2"/>
             <a:r>
-              <a:rPr lang="en-US" dirty="0"/>
+              <a:rPr lang="en-US"/>
               <a:t>Third level</a:t>
             </a:r>
-            <a:endParaRPr lang="en-US"/>
           </a:p>
         </p:txBody>
       </p:sp>
@@ -3121,7 +4664,7 @@
         <p:spPr>
           <a:xfrm>
             <a:off x="421638" y="6524625"/>
-            <a:ext cx="65" cy="123111"/>
+            <a:ext cx="3064942" cy="123111"/>
           </a:xfrm>
           <a:prstGeom prst="rect">
             <a:avLst/>
@@ -3138,7 +4681,25 @@
               <a:buFontTx/>
               <a:buNone/>
             </a:pPr>
-            <a:endParaRPr lang="en-US" sz="800" b="0" i="0" u="none" dirty="0">
+            <a:r>
+              <a:rPr lang="en-US" sz="800" b="0" i="0" u="none">
+                <a:solidFill>
+                  <a:schemeClr val="tx1"/>
+                </a:solidFill>
+                <a:latin typeface="+mn-lt"/>
+              </a:rPr>
+              <a:t>  |  ERAMSWD Magnus Westerlund  |  2026-07-16  |  Open  |  Page </a:t>
+            </a:r>
+            <a:fld id="{985A9306-C299-4894-9DDD-1B8F8FDEA8EB}" type="slidenum">
+              <a:rPr lang="en-US" sz="800" b="0" i="0" u="none" smtClean="0">
+                <a:solidFill>
+                  <a:schemeClr val="tx1"/>
+                </a:solidFill>
+                <a:latin typeface="+mn-lt"/>
+              </a:rPr>
+              <a:t>‹#›</a:t>
+            </a:fld>
+            <a:endParaRPr lang="en-US" sz="800" b="0" i="0" u="none">
               <a:solidFill>
                 <a:schemeClr val="tx1"/>
               </a:solidFill>
@@ -3232,7 +4793,7 @@
               <a:buFont typeface="Ericsson Hilda" panose="00000500000000000000" pitchFamily="2" charset="0"/>
               <a:buChar char="●"/>
             </a:pPr>
-            <a:endParaRPr lang="en-US" dirty="0">
+            <a:endParaRPr lang="en-US">
               <a:solidFill>
                 <a:schemeClr val="bg1"/>
               </a:solidFill>
@@ -3328,10 +4889,9 @@
           <a:p>
             <a:pPr lvl="0"/>
             <a:r>
-              <a:rPr lang="en-US" dirty="0"/>
+              <a:rPr lang="en-US"/>
               <a:t>Slide title, Ericsson Hilda Light 40pt, Ericsson Black, max 2-lines</a:t>
             </a:r>
-            <a:endParaRPr lang="en-US"/>
           </a:p>
         </p:txBody>
       </p:sp>
@@ -3388,34 +4948,30 @@
           <a:p>
             <a:pPr lvl="0"/>
             <a:r>
-              <a:rPr lang="en-US" dirty="0"/>
+              <a:rPr lang="en-US"/>
               <a:t>For heading, use Ericsson Hilda in bold. For copy and bullets, use Ericsson Hilda.</a:t>
             </a:r>
-            <a:endParaRPr lang="en-US"/>
           </a:p>
           <a:p>
             <a:pPr lvl="0"/>
             <a:r>
-              <a:rPr lang="en-US" dirty="0"/>
+              <a:rPr lang="en-US"/>
               <a:t>First level</a:t>
             </a:r>
-            <a:endParaRPr lang="en-US"/>
           </a:p>
           <a:p>
             <a:pPr lvl="1"/>
             <a:r>
-              <a:rPr lang="en-US" dirty="0"/>
+              <a:rPr lang="en-US"/>
               <a:t>Second level</a:t>
             </a:r>
-            <a:endParaRPr lang="en-US"/>
           </a:p>
           <a:p>
             <a:pPr lvl="2"/>
             <a:r>
-              <a:rPr lang="en-US" dirty="0"/>
+              <a:rPr lang="en-US"/>
               <a:t>Third level</a:t>
             </a:r>
-            <a:endParaRPr lang="en-US"/>
           </a:p>
         </p:txBody>
       </p:sp>
@@ -3472,34 +5028,30 @@
           <a:p>
             <a:pPr lvl="0"/>
             <a:r>
-              <a:rPr lang="en-US" dirty="0"/>
+              <a:rPr lang="en-US"/>
               <a:t>For heading, use Ericsson Hilda in bold. For copy and bullets, use Ericsson Hilda.</a:t>
             </a:r>
-            <a:endParaRPr lang="en-US"/>
           </a:p>
           <a:p>
             <a:pPr lvl="0"/>
             <a:r>
-              <a:rPr lang="en-US" dirty="0"/>
+              <a:rPr lang="en-US"/>
               <a:t>First level</a:t>
             </a:r>
-            <a:endParaRPr lang="en-US"/>
           </a:p>
           <a:p>
             <a:pPr lvl="1"/>
             <a:r>
-              <a:rPr lang="en-US" dirty="0"/>
+              <a:rPr lang="en-US"/>
               <a:t>Second level</a:t>
             </a:r>
-            <a:endParaRPr lang="en-US"/>
           </a:p>
           <a:p>
             <a:pPr lvl="2"/>
             <a:r>
-              <a:rPr lang="en-US" dirty="0"/>
+              <a:rPr lang="en-US"/>
               <a:t>Third level</a:t>
             </a:r>
-            <a:endParaRPr lang="en-US"/>
           </a:p>
         </p:txBody>
       </p:sp>
@@ -3562,34 +5114,30 @@
           <a:p>
             <a:pPr lvl="0"/>
             <a:r>
-              <a:rPr lang="en-US" dirty="0"/>
+              <a:rPr lang="en-US"/>
               <a:t>For heading, use Ericsson Hilda in bold. For copy and bullets, use Ericsson Hilda.</a:t>
             </a:r>
-            <a:endParaRPr lang="en-US"/>
           </a:p>
           <a:p>
             <a:pPr lvl="0"/>
             <a:r>
-              <a:rPr lang="en-US" dirty="0"/>
+              <a:rPr lang="en-US"/>
               <a:t>First level</a:t>
             </a:r>
-            <a:endParaRPr lang="en-US"/>
           </a:p>
           <a:p>
             <a:pPr lvl="1"/>
             <a:r>
-              <a:rPr lang="en-US" dirty="0"/>
+              <a:rPr lang="en-US"/>
               <a:t>Second level</a:t>
             </a:r>
-            <a:endParaRPr lang="en-US"/>
           </a:p>
           <a:p>
             <a:pPr lvl="2"/>
             <a:r>
-              <a:rPr lang="en-US" dirty="0"/>
+              <a:rPr lang="en-US"/>
               <a:t>Third level</a:t>
             </a:r>
-            <a:endParaRPr lang="en-US"/>
           </a:p>
         </p:txBody>
       </p:sp>
@@ -3608,7 +5156,7 @@
         <p:spPr>
           <a:xfrm>
             <a:off x="421638" y="6524625"/>
-            <a:ext cx="65" cy="123111"/>
+            <a:ext cx="3064942" cy="123111"/>
           </a:xfrm>
           <a:prstGeom prst="rect">
             <a:avLst/>
@@ -3625,7 +5173,25 @@
               <a:buFontTx/>
               <a:buNone/>
             </a:pPr>
-            <a:endParaRPr lang="en-US" sz="800" b="0" i="0" u="none" dirty="0">
+            <a:r>
+              <a:rPr lang="en-US" sz="800" b="0" i="0" u="none">
+                <a:solidFill>
+                  <a:schemeClr val="tx1"/>
+                </a:solidFill>
+                <a:latin typeface="+mn-lt"/>
+              </a:rPr>
+              <a:t>  |  ERAMSWD Magnus Westerlund  |  2026-07-16  |  Open  |  Page </a:t>
+            </a:r>
+            <a:fld id="{6EC70BC1-5E0F-4E70-ACE6-584B267F23DF}" type="slidenum">
+              <a:rPr lang="en-US" sz="800" b="0" i="0" u="none" smtClean="0">
+                <a:solidFill>
+                  <a:schemeClr val="tx1"/>
+                </a:solidFill>
+                <a:latin typeface="+mn-lt"/>
+              </a:rPr>
+              <a:t>‹#›</a:t>
+            </a:fld>
+            <a:endParaRPr lang="en-US" sz="800" b="0" i="0" u="none">
               <a:solidFill>
                 <a:schemeClr val="tx1"/>
               </a:solidFill>
@@ -3715,10 +5281,9 @@
           <a:p>
             <a:pPr lvl="0"/>
             <a:r>
-              <a:rPr lang="en-US" dirty="0"/>
+              <a:rPr lang="en-US"/>
               <a:t>Slide title, Ericsson Hilda Light 40pt, Ericsson Black, max 2-lines</a:t>
             </a:r>
-            <a:endParaRPr lang="en-US"/>
           </a:p>
         </p:txBody>
       </p:sp>
@@ -3775,34 +5340,30 @@
           <a:p>
             <a:pPr lvl="0"/>
             <a:r>
-              <a:rPr lang="en-US" dirty="0"/>
+              <a:rPr lang="en-US"/>
               <a:t>For heading, use Ericsson Hilda in bold. For copy and bullets, use Ericsson Hilda.</a:t>
             </a:r>
-            <a:endParaRPr lang="en-US"/>
           </a:p>
           <a:p>
             <a:pPr lvl="0"/>
             <a:r>
-              <a:rPr lang="en-US" dirty="0"/>
+              <a:rPr lang="en-US"/>
               <a:t>First level</a:t>
             </a:r>
-            <a:endParaRPr lang="en-US"/>
           </a:p>
           <a:p>
             <a:pPr lvl="1"/>
             <a:r>
-              <a:rPr lang="en-US" dirty="0"/>
+              <a:rPr lang="en-US"/>
               <a:t>Second level</a:t>
             </a:r>
-            <a:endParaRPr lang="en-US"/>
           </a:p>
           <a:p>
             <a:pPr lvl="2"/>
             <a:r>
-              <a:rPr lang="en-US" dirty="0"/>
+              <a:rPr lang="en-US"/>
               <a:t>Third level</a:t>
             </a:r>
-            <a:endParaRPr lang="en-US"/>
           </a:p>
         </p:txBody>
       </p:sp>
@@ -3856,34 +5417,30 @@
           <a:p>
             <a:pPr lvl="0"/>
             <a:r>
-              <a:rPr lang="en-US" dirty="0"/>
+              <a:rPr lang="en-US"/>
               <a:t>For heading, use Ericsson Hilda in bold. For copy and bullets, use Ericsson Hilda.</a:t>
             </a:r>
-            <a:endParaRPr lang="en-US"/>
           </a:p>
           <a:p>
             <a:pPr lvl="0"/>
             <a:r>
-              <a:rPr lang="en-US" dirty="0"/>
+              <a:rPr lang="en-US"/>
               <a:t>First level</a:t>
             </a:r>
-            <a:endParaRPr lang="en-US"/>
           </a:p>
           <a:p>
             <a:pPr lvl="1"/>
             <a:r>
-              <a:rPr lang="en-US" dirty="0"/>
+              <a:rPr lang="en-US"/>
               <a:t>Second level</a:t>
             </a:r>
-            <a:endParaRPr lang="en-US"/>
           </a:p>
           <a:p>
             <a:pPr lvl="2"/>
             <a:r>
-              <a:rPr lang="en-US" dirty="0"/>
+              <a:rPr lang="en-US"/>
               <a:t>Third level</a:t>
             </a:r>
-            <a:endParaRPr lang="en-US"/>
           </a:p>
         </p:txBody>
       </p:sp>
@@ -3937,34 +5494,30 @@
           <a:p>
             <a:pPr lvl="0"/>
             <a:r>
-              <a:rPr lang="en-US" dirty="0"/>
+              <a:rPr lang="en-US"/>
               <a:t>For heading, use Ericsson Hilda in bold. For copy and bullets, use Ericsson Hilda.</a:t>
             </a:r>
-            <a:endParaRPr lang="en-US"/>
           </a:p>
           <a:p>
             <a:pPr lvl="0"/>
             <a:r>
-              <a:rPr lang="en-US" dirty="0"/>
+              <a:rPr lang="en-US"/>
               <a:t>First level</a:t>
             </a:r>
-            <a:endParaRPr lang="en-US"/>
           </a:p>
           <a:p>
             <a:pPr lvl="1"/>
             <a:r>
-              <a:rPr lang="en-US" dirty="0"/>
+              <a:rPr lang="en-US"/>
               <a:t>Second level</a:t>
             </a:r>
-            <a:endParaRPr lang="en-US"/>
           </a:p>
           <a:p>
             <a:pPr lvl="2"/>
             <a:r>
-              <a:rPr lang="en-US" dirty="0"/>
+              <a:rPr lang="en-US"/>
               <a:t>Third level</a:t>
             </a:r>
-            <a:endParaRPr lang="en-US"/>
           </a:p>
         </p:txBody>
       </p:sp>
@@ -4018,34 +5571,30 @@
           <a:p>
             <a:pPr lvl="0"/>
             <a:r>
-              <a:rPr lang="en-US" dirty="0"/>
+              <a:rPr lang="en-US"/>
               <a:t>For heading, use Ericsson Hilda in bold. For copy and bullets, use Ericsson Hilda.</a:t>
             </a:r>
-            <a:endParaRPr lang="en-US"/>
           </a:p>
           <a:p>
             <a:pPr lvl="0"/>
             <a:r>
-              <a:rPr lang="en-US" dirty="0"/>
+              <a:rPr lang="en-US"/>
               <a:t>First level</a:t>
             </a:r>
-            <a:endParaRPr lang="en-US"/>
           </a:p>
           <a:p>
             <a:pPr lvl="1"/>
             <a:r>
-              <a:rPr lang="en-US" dirty="0"/>
+              <a:rPr lang="en-US"/>
               <a:t>Second level</a:t>
             </a:r>
-            <a:endParaRPr lang="en-US"/>
           </a:p>
           <a:p>
             <a:pPr lvl="2"/>
             <a:r>
-              <a:rPr lang="en-US" dirty="0"/>
+              <a:rPr lang="en-US"/>
               <a:t>Third level</a:t>
             </a:r>
-            <a:endParaRPr lang="en-US"/>
           </a:p>
         </p:txBody>
       </p:sp>
@@ -4064,7 +5613,7 @@
         <p:spPr>
           <a:xfrm>
             <a:off x="421638" y="6524625"/>
-            <a:ext cx="65" cy="123111"/>
+            <a:ext cx="3064942" cy="123111"/>
           </a:xfrm>
           <a:prstGeom prst="rect">
             <a:avLst/>
@@ -4081,7 +5630,25 @@
               <a:buFontTx/>
               <a:buNone/>
             </a:pPr>
-            <a:endParaRPr lang="en-US" sz="800" b="0" i="0" u="none" dirty="0">
+            <a:r>
+              <a:rPr lang="en-US" sz="800" b="0" i="0" u="none">
+                <a:solidFill>
+                  <a:schemeClr val="tx1"/>
+                </a:solidFill>
+                <a:latin typeface="+mn-lt"/>
+              </a:rPr>
+              <a:t>  |  ERAMSWD Magnus Westerlund  |  2026-07-16  |  Open  |  Page </a:t>
+            </a:r>
+            <a:fld id="{26B457A4-9F5B-423C-9E94-BFD86AD3C522}" type="slidenum">
+              <a:rPr lang="en-US" sz="800" b="0" i="0" u="none" smtClean="0">
+                <a:solidFill>
+                  <a:schemeClr val="tx1"/>
+                </a:solidFill>
+                <a:latin typeface="+mn-lt"/>
+              </a:rPr>
+              <a:t>‹#›</a:t>
+            </a:fld>
+            <a:endParaRPr lang="en-US" sz="800" b="0" i="0" u="none">
               <a:solidFill>
                 <a:schemeClr val="tx1"/>
               </a:solidFill>
@@ -4175,7 +5742,7 @@
               <a:buFont typeface="Ericsson Hilda" panose="00000500000000000000" pitchFamily="2" charset="0"/>
               <a:buChar char="●"/>
             </a:pPr>
-            <a:endParaRPr lang="en-US" dirty="0">
+            <a:endParaRPr lang="en-US">
               <a:solidFill>
                 <a:schemeClr val="bg1"/>
               </a:solidFill>
@@ -4271,10 +5838,9 @@
           <a:p>
             <a:pPr lvl="0"/>
             <a:r>
-              <a:rPr lang="en-US" dirty="0"/>
+              <a:rPr lang="en-US"/>
               <a:t>Slide title, Ericsson Hilda Light 40pt, Ericsson Black, max 2-lines</a:t>
             </a:r>
-            <a:endParaRPr lang="en-US"/>
           </a:p>
         </p:txBody>
       </p:sp>
@@ -4331,34 +5897,30 @@
           <a:p>
             <a:pPr lvl="0"/>
             <a:r>
-              <a:rPr lang="en-US" dirty="0"/>
+              <a:rPr lang="en-US"/>
               <a:t>For heading, use Ericsson Hilda in bold. For copy and bullets, use Ericsson Hilda.</a:t>
             </a:r>
-            <a:endParaRPr lang="en-US"/>
           </a:p>
           <a:p>
             <a:pPr lvl="0"/>
             <a:r>
-              <a:rPr lang="en-US" dirty="0"/>
+              <a:rPr lang="en-US"/>
               <a:t>First level</a:t>
             </a:r>
-            <a:endParaRPr lang="en-US"/>
           </a:p>
           <a:p>
             <a:pPr lvl="1"/>
             <a:r>
-              <a:rPr lang="en-US" dirty="0"/>
+              <a:rPr lang="en-US"/>
               <a:t>Second level</a:t>
             </a:r>
-            <a:endParaRPr lang="en-US"/>
           </a:p>
           <a:p>
             <a:pPr lvl="2"/>
             <a:r>
-              <a:rPr lang="en-US" dirty="0"/>
+              <a:rPr lang="en-US"/>
               <a:t>Third level</a:t>
             </a:r>
-            <a:endParaRPr lang="en-US"/>
           </a:p>
         </p:txBody>
       </p:sp>
@@ -4412,34 +5974,30 @@
           <a:p>
             <a:pPr lvl="0"/>
             <a:r>
-              <a:rPr lang="en-US" dirty="0"/>
+              <a:rPr lang="en-US"/>
               <a:t>For heading, use Ericsson Hilda in bold. For copy and bullets, use Ericsson Hilda.</a:t>
             </a:r>
-            <a:endParaRPr lang="en-US"/>
           </a:p>
           <a:p>
             <a:pPr lvl="0"/>
             <a:r>
-              <a:rPr lang="en-US" dirty="0"/>
+              <a:rPr lang="en-US"/>
               <a:t>First level</a:t>
             </a:r>
-            <a:endParaRPr lang="en-US"/>
           </a:p>
           <a:p>
             <a:pPr lvl="1"/>
             <a:r>
-              <a:rPr lang="en-US" dirty="0"/>
+              <a:rPr lang="en-US"/>
               <a:t>Second level</a:t>
             </a:r>
-            <a:endParaRPr lang="en-US"/>
           </a:p>
           <a:p>
             <a:pPr lvl="2"/>
             <a:r>
-              <a:rPr lang="en-US" dirty="0"/>
+              <a:rPr lang="en-US"/>
               <a:t>Third level</a:t>
             </a:r>
-            <a:endParaRPr lang="en-US"/>
           </a:p>
         </p:txBody>
       </p:sp>
@@ -4493,34 +6051,30 @@
           <a:p>
             <a:pPr lvl="0"/>
             <a:r>
-              <a:rPr lang="en-US" dirty="0"/>
+              <a:rPr lang="en-US"/>
               <a:t>For heading, use Ericsson Hilda in bold. For copy and bullets, use Ericsson Hilda.</a:t>
             </a:r>
-            <a:endParaRPr lang="en-US"/>
           </a:p>
           <a:p>
             <a:pPr lvl="0"/>
             <a:r>
-              <a:rPr lang="en-US" dirty="0"/>
+              <a:rPr lang="en-US"/>
               <a:t>First level</a:t>
             </a:r>
-            <a:endParaRPr lang="en-US"/>
           </a:p>
           <a:p>
             <a:pPr lvl="1"/>
             <a:r>
-              <a:rPr lang="en-US" dirty="0"/>
+              <a:rPr lang="en-US"/>
               <a:t>Second level</a:t>
             </a:r>
-            <a:endParaRPr lang="en-US"/>
           </a:p>
           <a:p>
             <a:pPr lvl="2"/>
             <a:r>
-              <a:rPr lang="en-US" dirty="0"/>
+              <a:rPr lang="en-US"/>
               <a:t>Third level</a:t>
             </a:r>
-            <a:endParaRPr lang="en-US"/>
           </a:p>
         </p:txBody>
       </p:sp>
@@ -4574,34 +6128,30 @@
           <a:p>
             <a:pPr lvl="0"/>
             <a:r>
-              <a:rPr lang="en-US" dirty="0"/>
+              <a:rPr lang="en-US"/>
               <a:t>For heading, use Ericsson Hilda in bold. For copy and bullets, use Ericsson Hilda.</a:t>
             </a:r>
-            <a:endParaRPr lang="en-US"/>
           </a:p>
           <a:p>
             <a:pPr lvl="0"/>
             <a:r>
-              <a:rPr lang="en-US" dirty="0"/>
+              <a:rPr lang="en-US"/>
               <a:t>First level</a:t>
             </a:r>
-            <a:endParaRPr lang="en-US"/>
           </a:p>
           <a:p>
             <a:pPr lvl="1"/>
             <a:r>
-              <a:rPr lang="en-US" dirty="0"/>
+              <a:rPr lang="en-US"/>
               <a:t>Second level</a:t>
             </a:r>
-            <a:endParaRPr lang="en-US"/>
           </a:p>
           <a:p>
             <a:pPr lvl="2"/>
             <a:r>
-              <a:rPr lang="en-US" dirty="0"/>
+              <a:rPr lang="en-US"/>
               <a:t>Third level</a:t>
             </a:r>
-            <a:endParaRPr lang="en-US"/>
           </a:p>
         </p:txBody>
       </p:sp>
@@ -4620,7 +6170,7 @@
         <p:spPr>
           <a:xfrm>
             <a:off x="421638" y="6524625"/>
-            <a:ext cx="65" cy="123111"/>
+            <a:ext cx="3064942" cy="123111"/>
           </a:xfrm>
           <a:prstGeom prst="rect">
             <a:avLst/>
@@ -4637,7 +6187,25 @@
               <a:buFontTx/>
               <a:buNone/>
             </a:pPr>
-            <a:endParaRPr lang="en-US" sz="800" b="0" i="0" u="none" dirty="0">
+            <a:r>
+              <a:rPr lang="en-US" sz="800" b="0" i="0" u="none">
+                <a:solidFill>
+                  <a:schemeClr val="tx1"/>
+                </a:solidFill>
+                <a:latin typeface="+mn-lt"/>
+              </a:rPr>
+              <a:t>  |  ERAMSWD Magnus Westerlund  |  2026-07-16  |  Open  |  Page </a:t>
+            </a:r>
+            <a:fld id="{3E418195-FCEB-4634-A041-DFF3565D227A}" type="slidenum">
+              <a:rPr lang="en-US" sz="800" b="0" i="0" u="none" smtClean="0">
+                <a:solidFill>
+                  <a:schemeClr val="tx1"/>
+                </a:solidFill>
+                <a:latin typeface="+mn-lt"/>
+              </a:rPr>
+              <a:t>‹#›</a:t>
+            </a:fld>
+            <a:endParaRPr lang="en-US" sz="800" b="0" i="0" u="none">
               <a:solidFill>
                 <a:schemeClr val="tx1"/>
               </a:solidFill>
@@ -4727,10 +6295,9 @@
           <a:p>
             <a:pPr lvl="0"/>
             <a:r>
-              <a:rPr lang="en-US" dirty="0"/>
+              <a:rPr lang="en-US"/>
               <a:t>Slide title, Ericsson Hilda Light 40pt, Ericsson Black, max 2-lines</a:t>
             </a:r>
-            <a:endParaRPr lang="en-US"/>
           </a:p>
         </p:txBody>
       </p:sp>
@@ -4791,42 +6358,37 @@
           <a:p>
             <a:pPr lvl="0"/>
             <a:r>
-              <a:rPr lang="en-US" dirty="0"/>
+              <a:rPr lang="en-US"/>
               <a:t>For heading, use Ericsson Hilda in bold. For copy and bullets, use Ericsson Hilda.</a:t>
             </a:r>
-            <a:endParaRPr lang="en-US"/>
           </a:p>
           <a:p>
             <a:pPr lvl="0"/>
             <a:r>
-              <a:rPr lang="en-US" dirty="0"/>
+              <a:rPr lang="en-US"/>
               <a:t>First level</a:t>
             </a:r>
-            <a:endParaRPr lang="en-US"/>
           </a:p>
           <a:p>
             <a:pPr lvl="1"/>
             <a:r>
-              <a:rPr lang="en-US" dirty="0"/>
+              <a:rPr lang="en-US"/>
               <a:t>Second level</a:t>
             </a:r>
-            <a:endParaRPr lang="en-US"/>
           </a:p>
           <a:p>
             <a:pPr lvl="2"/>
             <a:r>
-              <a:rPr lang="en-US" dirty="0"/>
+              <a:rPr lang="en-US"/>
               <a:t>Third level</a:t>
             </a:r>
-            <a:endParaRPr lang="en-US"/>
           </a:p>
           <a:p>
             <a:pPr lvl="3"/>
             <a:r>
-              <a:rPr lang="en-US" dirty="0"/>
+              <a:rPr lang="en-US"/>
               <a:t>Fourth level</a:t>
             </a:r>
-            <a:endParaRPr lang="en-US"/>
           </a:p>
         </p:txBody>
       </p:sp>
@@ -4887,42 +6449,37 @@
           <a:p>
             <a:pPr lvl="0"/>
             <a:r>
-              <a:rPr lang="en-US" dirty="0"/>
+              <a:rPr lang="en-US"/>
               <a:t>For heading, use Ericsson Hilda in bold. For copy and bullets, use Ericsson Hilda.</a:t>
             </a:r>
-            <a:endParaRPr lang="en-US"/>
           </a:p>
           <a:p>
             <a:pPr lvl="0"/>
             <a:r>
-              <a:rPr lang="en-US" dirty="0"/>
+              <a:rPr lang="en-US"/>
               <a:t>First level</a:t>
             </a:r>
-            <a:endParaRPr lang="en-US"/>
           </a:p>
           <a:p>
             <a:pPr lvl="1"/>
             <a:r>
-              <a:rPr lang="en-US" dirty="0"/>
+              <a:rPr lang="en-US"/>
               <a:t>Second level</a:t>
             </a:r>
-            <a:endParaRPr lang="en-US"/>
           </a:p>
           <a:p>
             <a:pPr lvl="2"/>
             <a:r>
-              <a:rPr lang="en-US" dirty="0"/>
+              <a:rPr lang="en-US"/>
               <a:t>Third level</a:t>
             </a:r>
-            <a:endParaRPr lang="en-US"/>
           </a:p>
           <a:p>
             <a:pPr lvl="3"/>
             <a:r>
-              <a:rPr lang="en-US" dirty="0"/>
+              <a:rPr lang="en-US"/>
               <a:t>Fourth level</a:t>
             </a:r>
-            <a:endParaRPr lang="en-US"/>
           </a:p>
         </p:txBody>
       </p:sp>
@@ -4983,42 +6540,37 @@
           <a:p>
             <a:pPr lvl="0"/>
             <a:r>
-              <a:rPr lang="en-US" dirty="0"/>
+              <a:rPr lang="en-US"/>
               <a:t>For heading, use Ericsson Hilda in bold. For copy and bullets, use Ericsson Hilda.</a:t>
             </a:r>
-            <a:endParaRPr lang="en-US"/>
           </a:p>
           <a:p>
             <a:pPr lvl="0"/>
             <a:r>
-              <a:rPr lang="en-US" dirty="0"/>
+              <a:rPr lang="en-US"/>
               <a:t>First level</a:t>
             </a:r>
-            <a:endParaRPr lang="en-US"/>
           </a:p>
           <a:p>
             <a:pPr lvl="1"/>
             <a:r>
-              <a:rPr lang="en-US" dirty="0"/>
+              <a:rPr lang="en-US"/>
               <a:t>Second level</a:t>
             </a:r>
-            <a:endParaRPr lang="en-US"/>
           </a:p>
           <a:p>
             <a:pPr lvl="2"/>
             <a:r>
-              <a:rPr lang="en-US" dirty="0"/>
+              <a:rPr lang="en-US"/>
               <a:t>Third level</a:t>
             </a:r>
-            <a:endParaRPr lang="en-US"/>
           </a:p>
           <a:p>
             <a:pPr lvl="3"/>
             <a:r>
-              <a:rPr lang="en-US" dirty="0"/>
+              <a:rPr lang="en-US"/>
               <a:t>Fourth level</a:t>
             </a:r>
-            <a:endParaRPr lang="en-US"/>
           </a:p>
         </p:txBody>
       </p:sp>
@@ -5085,42 +6637,37 @@
           <a:p>
             <a:pPr lvl="0"/>
             <a:r>
-              <a:rPr lang="en-US" dirty="0"/>
+              <a:rPr lang="en-US"/>
               <a:t>For heading, use Ericsson Hilda in bold. For copy and bullets, use Ericsson Hilda.</a:t>
             </a:r>
-            <a:endParaRPr lang="en-US"/>
           </a:p>
           <a:p>
             <a:pPr lvl="0"/>
             <a:r>
-              <a:rPr lang="en-US" dirty="0"/>
+              <a:rPr lang="en-US"/>
               <a:t>First level</a:t>
             </a:r>
-            <a:endParaRPr lang="en-US"/>
           </a:p>
           <a:p>
             <a:pPr lvl="1"/>
             <a:r>
-              <a:rPr lang="en-US" dirty="0"/>
+              <a:rPr lang="en-US"/>
               <a:t>Second level</a:t>
             </a:r>
-            <a:endParaRPr lang="en-US"/>
           </a:p>
           <a:p>
             <a:pPr lvl="2"/>
             <a:r>
-              <a:rPr lang="en-US" dirty="0"/>
+              <a:rPr lang="en-US"/>
               <a:t>Third level</a:t>
             </a:r>
-            <a:endParaRPr lang="en-US"/>
           </a:p>
           <a:p>
             <a:pPr lvl="3"/>
             <a:r>
-              <a:rPr lang="en-US" dirty="0"/>
+              <a:rPr lang="en-US"/>
               <a:t>Fourth level</a:t>
             </a:r>
-            <a:endParaRPr lang="en-US"/>
           </a:p>
         </p:txBody>
       </p:sp>
@@ -5139,7 +6686,7 @@
         <p:spPr>
           <a:xfrm>
             <a:off x="421638" y="6524625"/>
-            <a:ext cx="65" cy="123111"/>
+            <a:ext cx="3064942" cy="123111"/>
           </a:xfrm>
           <a:prstGeom prst="rect">
             <a:avLst/>
@@ -5156,7 +6703,25 @@
               <a:buFontTx/>
               <a:buNone/>
             </a:pPr>
-            <a:endParaRPr lang="en-US" sz="800" b="0" i="0" u="none" dirty="0">
+            <a:r>
+              <a:rPr lang="en-US" sz="800" b="0" i="0" u="none">
+                <a:solidFill>
+                  <a:schemeClr val="tx1"/>
+                </a:solidFill>
+                <a:latin typeface="+mn-lt"/>
+              </a:rPr>
+              <a:t>  |  ERAMSWD Magnus Westerlund  |  2026-07-16  |  Open  |  Page </a:t>
+            </a:r>
+            <a:fld id="{5209B2F4-4EA5-4466-A481-629B2DF48F9C}" type="slidenum">
+              <a:rPr lang="en-US" sz="800" b="0" i="0" u="none" smtClean="0">
+                <a:solidFill>
+                  <a:schemeClr val="tx1"/>
+                </a:solidFill>
+                <a:latin typeface="+mn-lt"/>
+              </a:rPr>
+              <a:t>‹#›</a:t>
+            </a:fld>
+            <a:endParaRPr lang="en-US" sz="800" b="0" i="0" u="none">
               <a:solidFill>
                 <a:schemeClr val="tx1"/>
               </a:solidFill>
@@ -5250,7 +6815,7 @@
               <a:buFont typeface="Ericsson Hilda" panose="00000500000000000000" pitchFamily="2" charset="0"/>
               <a:buChar char="●"/>
             </a:pPr>
-            <a:endParaRPr lang="en-US" dirty="0">
+            <a:endParaRPr lang="en-US">
               <a:solidFill>
                 <a:schemeClr val="bg1"/>
               </a:solidFill>
@@ -5346,10 +6911,9 @@
           <a:p>
             <a:pPr lvl="0"/>
             <a:r>
-              <a:rPr lang="en-US" dirty="0"/>
+              <a:rPr lang="en-US"/>
               <a:t>Slide title, Ericsson Hilda Light 40pt, Ericsson Black, max 2-lines</a:t>
             </a:r>
-            <a:endParaRPr lang="en-US"/>
           </a:p>
         </p:txBody>
       </p:sp>
@@ -5410,42 +6974,37 @@
           <a:p>
             <a:pPr lvl="0"/>
             <a:r>
-              <a:rPr lang="en-US" dirty="0"/>
+              <a:rPr lang="en-US"/>
               <a:t>For heading, use Ericsson Hilda in bold. For copy and bullets, use Ericsson Hilda.</a:t>
             </a:r>
-            <a:endParaRPr lang="en-US"/>
           </a:p>
           <a:p>
             <a:pPr lvl="0"/>
             <a:r>
-              <a:rPr lang="en-US" dirty="0"/>
+              <a:rPr lang="en-US"/>
               <a:t>First level</a:t>
             </a:r>
-            <a:endParaRPr lang="en-US"/>
           </a:p>
           <a:p>
             <a:pPr lvl="1"/>
             <a:r>
-              <a:rPr lang="en-US" dirty="0"/>
+              <a:rPr lang="en-US"/>
               <a:t>Second level</a:t>
             </a:r>
-            <a:endParaRPr lang="en-US"/>
           </a:p>
           <a:p>
             <a:pPr lvl="2"/>
             <a:r>
-              <a:rPr lang="en-US" dirty="0"/>
+              <a:rPr lang="en-US"/>
               <a:t>Third level</a:t>
             </a:r>
-            <a:endParaRPr lang="en-US"/>
           </a:p>
           <a:p>
             <a:pPr lvl="3"/>
             <a:r>
-              <a:rPr lang="en-US" dirty="0"/>
+              <a:rPr lang="en-US"/>
               <a:t>Fourth level</a:t>
             </a:r>
-            <a:endParaRPr lang="en-US"/>
           </a:p>
         </p:txBody>
       </p:sp>
@@ -5506,42 +7065,37 @@
           <a:p>
             <a:pPr lvl="0"/>
             <a:r>
-              <a:rPr lang="en-US" dirty="0"/>
+              <a:rPr lang="en-US"/>
               <a:t>For heading, use Ericsson Hilda in bold. For copy and bullets, use Ericsson Hilda.</a:t>
             </a:r>
-            <a:endParaRPr lang="en-US"/>
           </a:p>
           <a:p>
             <a:pPr lvl="0"/>
             <a:r>
-              <a:rPr lang="en-US" dirty="0"/>
+              <a:rPr lang="en-US"/>
               <a:t>First level</a:t>
             </a:r>
-            <a:endParaRPr lang="en-US"/>
           </a:p>
           <a:p>
             <a:pPr lvl="1"/>
             <a:r>
-              <a:rPr lang="en-US" dirty="0"/>
+              <a:rPr lang="en-US"/>
               <a:t>Second level</a:t>
             </a:r>
-            <a:endParaRPr lang="en-US"/>
           </a:p>
           <a:p>
             <a:pPr lvl="2"/>
             <a:r>
-              <a:rPr lang="en-US" dirty="0"/>
+              <a:rPr lang="en-US"/>
               <a:t>Third level</a:t>
             </a:r>
-            <a:endParaRPr lang="en-US"/>
           </a:p>
           <a:p>
             <a:pPr lvl="3"/>
             <a:r>
-              <a:rPr lang="en-US" dirty="0"/>
+              <a:rPr lang="en-US"/>
               <a:t>Fourth level</a:t>
             </a:r>
-            <a:endParaRPr lang="en-US"/>
           </a:p>
         </p:txBody>
       </p:sp>
@@ -5602,42 +7156,37 @@
           <a:p>
             <a:pPr lvl="0"/>
             <a:r>
-              <a:rPr lang="en-US" dirty="0"/>
+              <a:rPr lang="en-US"/>
               <a:t>For heading, use Ericsson Hilda in bold. For copy and bullets, use Ericsson Hilda.</a:t>
             </a:r>
-            <a:endParaRPr lang="en-US"/>
           </a:p>
           <a:p>
             <a:pPr lvl="0"/>
             <a:r>
-              <a:rPr lang="en-US" dirty="0"/>
+              <a:rPr lang="en-US"/>
               <a:t>First level</a:t>
             </a:r>
-            <a:endParaRPr lang="en-US"/>
           </a:p>
           <a:p>
             <a:pPr lvl="1"/>
             <a:r>
-              <a:rPr lang="en-US" dirty="0"/>
+              <a:rPr lang="en-US"/>
               <a:t>Second level</a:t>
             </a:r>
-            <a:endParaRPr lang="en-US"/>
           </a:p>
           <a:p>
             <a:pPr lvl="2"/>
             <a:r>
-              <a:rPr lang="en-US" dirty="0"/>
+              <a:rPr lang="en-US"/>
               <a:t>Third level</a:t>
             </a:r>
-            <a:endParaRPr lang="en-US"/>
           </a:p>
           <a:p>
             <a:pPr lvl="3"/>
             <a:r>
-              <a:rPr lang="en-US" dirty="0"/>
+              <a:rPr lang="en-US"/>
               <a:t>Fourth level</a:t>
             </a:r>
-            <a:endParaRPr lang="en-US"/>
           </a:p>
         </p:txBody>
       </p:sp>
@@ -5704,42 +7253,37 @@
           <a:p>
             <a:pPr lvl="0"/>
             <a:r>
-              <a:rPr lang="en-US" dirty="0"/>
+              <a:rPr lang="en-US"/>
               <a:t>For heading, use Ericsson Hilda in bold. For copy and bullets, use Ericsson Hilda.</a:t>
             </a:r>
-            <a:endParaRPr lang="en-US"/>
           </a:p>
           <a:p>
             <a:pPr lvl="0"/>
             <a:r>
-              <a:rPr lang="en-US" dirty="0"/>
+              <a:rPr lang="en-US"/>
               <a:t>First level</a:t>
             </a:r>
-            <a:endParaRPr lang="en-US"/>
           </a:p>
           <a:p>
             <a:pPr lvl="1"/>
             <a:r>
-              <a:rPr lang="en-US" dirty="0"/>
+              <a:rPr lang="en-US"/>
               <a:t>Second level</a:t>
             </a:r>
-            <a:endParaRPr lang="en-US"/>
           </a:p>
           <a:p>
             <a:pPr lvl="2"/>
             <a:r>
-              <a:rPr lang="en-US" dirty="0"/>
+              <a:rPr lang="en-US"/>
               <a:t>Third level</a:t>
             </a:r>
-            <a:endParaRPr lang="en-US"/>
           </a:p>
           <a:p>
             <a:pPr lvl="3"/>
             <a:r>
-              <a:rPr lang="en-US" dirty="0"/>
+              <a:rPr lang="en-US"/>
               <a:t>Fourth level</a:t>
             </a:r>
-            <a:endParaRPr lang="en-US"/>
           </a:p>
         </p:txBody>
       </p:sp>
@@ -5758,7 +7302,7 @@
         <p:spPr>
           <a:xfrm>
             <a:off x="421638" y="6524625"/>
-            <a:ext cx="65" cy="123111"/>
+            <a:ext cx="3064942" cy="123111"/>
           </a:xfrm>
           <a:prstGeom prst="rect">
             <a:avLst/>
@@ -5775,7 +7319,25 @@
               <a:buFontTx/>
               <a:buNone/>
             </a:pPr>
-            <a:endParaRPr lang="en-US" sz="800" b="0" i="0" u="none" dirty="0">
+            <a:r>
+              <a:rPr lang="en-US" sz="800" b="0" i="0" u="none">
+                <a:solidFill>
+                  <a:schemeClr val="tx1"/>
+                </a:solidFill>
+                <a:latin typeface="+mn-lt"/>
+              </a:rPr>
+              <a:t>  |  ERAMSWD Magnus Westerlund  |  2026-07-16  |  Open  |  Page </a:t>
+            </a:r>
+            <a:fld id="{680D51E1-1B72-441B-94C7-43A08B1F95B4}" type="slidenum">
+              <a:rPr lang="en-US" sz="800" b="0" i="0" u="none" smtClean="0">
+                <a:solidFill>
+                  <a:schemeClr val="tx1"/>
+                </a:solidFill>
+                <a:latin typeface="+mn-lt"/>
+              </a:rPr>
+              <a:t>‹#›</a:t>
+            </a:fld>
+            <a:endParaRPr lang="en-US" sz="800" b="0" i="0" u="none">
               <a:solidFill>
                 <a:schemeClr val="tx1"/>
               </a:solidFill>
@@ -5865,10 +7427,9 @@
           <a:p>
             <a:pPr lvl="0"/>
             <a:r>
-              <a:rPr lang="en-US" dirty="0"/>
+              <a:rPr lang="en-US"/>
               <a:t>Slide title, Ericsson Hilda Light 40pt, Ericsson Black, max 2-lines</a:t>
             </a:r>
-            <a:endParaRPr lang="en-US"/>
           </a:p>
         </p:txBody>
       </p:sp>
@@ -5921,26 +7482,23 @@
           <a:p>
             <a:pPr lvl="0"/>
             <a:r>
-              <a:rPr lang="en-US" dirty="0"/>
+              <a:rPr lang="en-US"/>
               <a:t>For heading, use Ericsson Hilda in bold. For copy and bullets, use E. Hilda.</a:t>
             </a:r>
-            <a:endParaRPr lang="en-US"/>
           </a:p>
           <a:p>
             <a:pPr lvl="0"/>
             <a:r>
-              <a:rPr lang="en-US" dirty="0"/>
+              <a:rPr lang="en-US"/>
               <a:t>First level</a:t>
             </a:r>
-            <a:endParaRPr lang="en-US"/>
           </a:p>
           <a:p>
             <a:pPr lvl="1"/>
             <a:r>
-              <a:rPr lang="en-US" dirty="0"/>
+              <a:rPr lang="en-US"/>
               <a:t>Second level</a:t>
             </a:r>
-            <a:endParaRPr lang="en-US"/>
           </a:p>
         </p:txBody>
       </p:sp>
@@ -5997,30 +7555,27 @@
           <a:p>
             <a:pPr lvl="0"/>
             <a:r>
-              <a:rPr lang="en-US" dirty="0"/>
+              <a:rPr lang="en-US"/>
               <a:t>For heading, use Ericsson Hilda in bold. For copy and bullets, use E. Hilda.</a:t>
             </a:r>
+          </a:p>
+          <a:p>
+            <a:pPr lvl="0"/>
+            <a:r>
+              <a:rPr lang="en-US"/>
+              <a:t>First level</a:t>
+            </a:r>
+          </a:p>
+          <a:p>
+            <a:pPr lvl="1"/>
+            <a:r>
+              <a:rPr lang="en-US"/>
+              <a:t>Second level</a:t>
+            </a:r>
+          </a:p>
+          <a:p>
+            <a:pPr lvl="3"/>
             <a:endParaRPr lang="en-US"/>
-          </a:p>
-          <a:p>
-            <a:pPr lvl="0"/>
-            <a:r>
-              <a:rPr lang="en-US" dirty="0"/>
-              <a:t>First level</a:t>
-            </a:r>
-            <a:endParaRPr lang="en-US"/>
-          </a:p>
-          <a:p>
-            <a:pPr lvl="1"/>
-            <a:r>
-              <a:rPr lang="en-US" dirty="0"/>
-              <a:t>Second level</a:t>
-            </a:r>
-            <a:endParaRPr lang="en-US"/>
-          </a:p>
-          <a:p>
-            <a:pPr lvl="3"/>
-            <a:endParaRPr lang="en-US" dirty="0"/>
           </a:p>
         </p:txBody>
       </p:sp>
@@ -6073,26 +7628,23 @@
           <a:p>
             <a:pPr lvl="0"/>
             <a:r>
-              <a:rPr lang="en-US" dirty="0"/>
+              <a:rPr lang="en-US"/>
               <a:t>For heading, use Ericsson Hilda in bold. For copy and bullets, use E. Hilda.</a:t>
             </a:r>
-            <a:endParaRPr lang="en-US"/>
           </a:p>
           <a:p>
             <a:pPr lvl="0"/>
             <a:r>
-              <a:rPr lang="en-US" dirty="0"/>
+              <a:rPr lang="en-US"/>
               <a:t>First level</a:t>
             </a:r>
-            <a:endParaRPr lang="en-US"/>
           </a:p>
           <a:p>
             <a:pPr lvl="1"/>
             <a:r>
-              <a:rPr lang="en-US" dirty="0"/>
+              <a:rPr lang="en-US"/>
               <a:t>Second level</a:t>
             </a:r>
-            <a:endParaRPr lang="en-US"/>
           </a:p>
         </p:txBody>
       </p:sp>
@@ -6146,26 +7698,23 @@
           <a:p>
             <a:pPr lvl="0"/>
             <a:r>
-              <a:rPr lang="en-US" dirty="0"/>
+              <a:rPr lang="en-US"/>
               <a:t>For heading, use Ericsson Hilda in bold. For copy and bullets, use E. Hilda.</a:t>
             </a:r>
-            <a:endParaRPr lang="en-US"/>
           </a:p>
           <a:p>
             <a:pPr lvl="0"/>
             <a:r>
-              <a:rPr lang="en-US" dirty="0"/>
+              <a:rPr lang="en-US"/>
               <a:t>First level</a:t>
             </a:r>
-            <a:endParaRPr lang="en-US"/>
           </a:p>
           <a:p>
             <a:pPr lvl="1"/>
             <a:r>
-              <a:rPr lang="en-US" dirty="0"/>
+              <a:rPr lang="en-US"/>
               <a:t>Second level</a:t>
             </a:r>
-            <a:endParaRPr lang="en-US"/>
           </a:p>
         </p:txBody>
       </p:sp>
@@ -6218,26 +7767,23 @@
           <a:p>
             <a:pPr lvl="0"/>
             <a:r>
-              <a:rPr lang="en-US" dirty="0"/>
+              <a:rPr lang="en-US"/>
               <a:t>For heading, use Ericsson Hilda in bold. For copy and bullets, use E. Hilda.</a:t>
             </a:r>
-            <a:endParaRPr lang="en-US"/>
           </a:p>
           <a:p>
             <a:pPr lvl="0"/>
             <a:r>
-              <a:rPr lang="en-US" dirty="0"/>
+              <a:rPr lang="en-US"/>
               <a:t>First level</a:t>
             </a:r>
-            <a:endParaRPr lang="en-US"/>
           </a:p>
           <a:p>
             <a:pPr lvl="1"/>
             <a:r>
-              <a:rPr lang="en-US" dirty="0"/>
+              <a:rPr lang="en-US"/>
               <a:t>Second level</a:t>
             </a:r>
-            <a:endParaRPr lang="en-US"/>
           </a:p>
         </p:txBody>
       </p:sp>
@@ -6290,26 +7836,23 @@
           <a:p>
             <a:pPr lvl="0"/>
             <a:r>
-              <a:rPr lang="en-US" dirty="0"/>
+              <a:rPr lang="en-US"/>
               <a:t>For heading, use Ericsson Hilda in bold. For copy and bullets, use E. Hilda.</a:t>
             </a:r>
-            <a:endParaRPr lang="en-US"/>
           </a:p>
           <a:p>
             <a:pPr lvl="0"/>
             <a:r>
-              <a:rPr lang="en-US" dirty="0"/>
+              <a:rPr lang="en-US"/>
               <a:t>First level</a:t>
             </a:r>
-            <a:endParaRPr lang="en-US"/>
           </a:p>
           <a:p>
             <a:pPr lvl="1"/>
             <a:r>
-              <a:rPr lang="en-US" dirty="0"/>
+              <a:rPr lang="en-US"/>
               <a:t>Second level</a:t>
             </a:r>
-            <a:endParaRPr lang="en-US"/>
           </a:p>
         </p:txBody>
       </p:sp>
@@ -6366,30 +7909,27 @@
           <a:p>
             <a:pPr lvl="0"/>
             <a:r>
-              <a:rPr lang="en-US" dirty="0"/>
+              <a:rPr lang="en-US"/>
               <a:t>For heading, use Ericsson Hilda in bold. For copy and bullets, use E. Hilda.</a:t>
             </a:r>
+          </a:p>
+          <a:p>
+            <a:pPr lvl="0"/>
+            <a:r>
+              <a:rPr lang="en-US"/>
+              <a:t>First level</a:t>
+            </a:r>
+          </a:p>
+          <a:p>
+            <a:pPr lvl="1"/>
+            <a:r>
+              <a:rPr lang="en-US"/>
+              <a:t>Second level</a:t>
+            </a:r>
+          </a:p>
+          <a:p>
+            <a:pPr lvl="3"/>
             <a:endParaRPr lang="en-US"/>
-          </a:p>
-          <a:p>
-            <a:pPr lvl="0"/>
-            <a:r>
-              <a:rPr lang="en-US" dirty="0"/>
-              <a:t>First level</a:t>
-            </a:r>
-            <a:endParaRPr lang="en-US"/>
-          </a:p>
-          <a:p>
-            <a:pPr lvl="1"/>
-            <a:r>
-              <a:rPr lang="en-US" dirty="0"/>
-              <a:t>Second level</a:t>
-            </a:r>
-            <a:endParaRPr lang="en-US"/>
-          </a:p>
-          <a:p>
-            <a:pPr lvl="3"/>
-            <a:endParaRPr lang="en-US" dirty="0"/>
           </a:p>
         </p:txBody>
       </p:sp>
@@ -6442,26 +7982,23 @@
           <a:p>
             <a:pPr lvl="0"/>
             <a:r>
-              <a:rPr lang="en-US" dirty="0"/>
+              <a:rPr lang="en-US"/>
               <a:t>For heading, use Ericsson Hilda in bold. For copy and bullets, use E. Hilda.</a:t>
             </a:r>
-            <a:endParaRPr lang="en-US"/>
           </a:p>
           <a:p>
             <a:pPr lvl="0"/>
             <a:r>
-              <a:rPr lang="en-US" dirty="0"/>
+              <a:rPr lang="en-US"/>
               <a:t>First level</a:t>
             </a:r>
-            <a:endParaRPr lang="en-US"/>
           </a:p>
           <a:p>
             <a:pPr lvl="1"/>
             <a:r>
-              <a:rPr lang="en-US" dirty="0"/>
+              <a:rPr lang="en-US"/>
               <a:t>Second level</a:t>
             </a:r>
-            <a:endParaRPr lang="en-US"/>
           </a:p>
         </p:txBody>
       </p:sp>
@@ -6480,7 +8017,7 @@
         <p:spPr>
           <a:xfrm>
             <a:off x="421638" y="6524625"/>
-            <a:ext cx="65" cy="123111"/>
+            <a:ext cx="3064942" cy="123111"/>
           </a:xfrm>
           <a:prstGeom prst="rect">
             <a:avLst/>
@@ -6497,7 +8034,25 @@
               <a:buFontTx/>
               <a:buNone/>
             </a:pPr>
-            <a:endParaRPr lang="en-US" sz="800" b="0" i="0" u="none" dirty="0">
+            <a:r>
+              <a:rPr lang="en-US" sz="800" b="0" i="0" u="none">
+                <a:solidFill>
+                  <a:schemeClr val="tx1"/>
+                </a:solidFill>
+                <a:latin typeface="+mn-lt"/>
+              </a:rPr>
+              <a:t>  |  ERAMSWD Magnus Westerlund  |  2026-07-16  |  Open  |  Page </a:t>
+            </a:r>
+            <a:fld id="{11A51C50-7352-4AF9-807A-BF9D829D283C}" type="slidenum">
+              <a:rPr lang="en-US" sz="800" b="0" i="0" u="none" smtClean="0">
+                <a:solidFill>
+                  <a:schemeClr val="tx1"/>
+                </a:solidFill>
+                <a:latin typeface="+mn-lt"/>
+              </a:rPr>
+              <a:t>‹#›</a:t>
+            </a:fld>
+            <a:endParaRPr lang="en-US" sz="800" b="0" i="0" u="none">
               <a:solidFill>
                 <a:schemeClr val="tx1"/>
               </a:solidFill>
@@ -6591,7 +8146,7 @@
               <a:buFont typeface="Ericsson Hilda" panose="00000500000000000000" pitchFamily="2" charset="0"/>
               <a:buChar char="●"/>
             </a:pPr>
-            <a:endParaRPr lang="en-US" dirty="0">
+            <a:endParaRPr lang="en-US">
               <a:solidFill>
                 <a:schemeClr val="bg1"/>
               </a:solidFill>
@@ -6633,10 +8188,9 @@
           </a:lstStyle>
           <a:p>
             <a:r>
-              <a:rPr lang="en-US" dirty="0"/>
+              <a:rPr lang="en-US"/>
               <a:t>Title/cover page,   Ericsson Hilda Light 80pt, max 3-lines</a:t>
             </a:r>
-            <a:endParaRPr lang="en-US"/>
           </a:p>
         </p:txBody>
       </p:sp>
@@ -6681,17 +8235,16 @@
           </a:lstStyle>
           <a:p>
             <a:r>
-              <a:rPr lang="en-US" dirty="0"/>
+              <a:rPr lang="en-US"/>
               <a:t>Description/subtitle/speaker…</a:t>
             </a:r>
             <a:br>
-              <a:rPr lang="en-US" dirty="0"/>
+              <a:rPr lang="en-US"/>
             </a:br>
             <a:r>
-              <a:rPr lang="en-US" dirty="0"/>
+              <a:rPr lang="en-US"/>
               <a:t>Ericsson Hilda Black 20pt</a:t>
             </a:r>
-            <a:endParaRPr lang="en-US"/>
           </a:p>
         </p:txBody>
       </p:sp>
@@ -6729,10 +8282,9 @@
           </a:lstStyle>
           <a:p>
             <a:r>
-              <a:rPr lang="en-US" dirty="0"/>
+              <a:rPr lang="en-US"/>
               <a:t>Speaker name</a:t>
             </a:r>
-            <a:endParaRPr lang="en-US"/>
           </a:p>
         </p:txBody>
       </p:sp>
@@ -6777,10 +8329,9 @@
           </a:lstStyle>
           <a:p>
             <a:r>
-              <a:rPr lang="en-US" dirty="0"/>
+              <a:rPr lang="en-US"/>
               <a:t>Organization</a:t>
             </a:r>
-            <a:endParaRPr lang="en-US"/>
           </a:p>
         </p:txBody>
       </p:sp>
@@ -6826,10 +8377,9 @@
           <a:p>
             <a:pPr lvl="0"/>
             <a:r>
-              <a:rPr lang="en-US" dirty="0"/>
+              <a:rPr lang="en-US"/>
               <a:t>YYYY-MM-DD</a:t>
             </a:r>
-            <a:endParaRPr lang="en-US"/>
           </a:p>
         </p:txBody>
       </p:sp>
@@ -6848,7 +8398,7 @@
         <p:spPr>
           <a:xfrm>
             <a:off x="421638" y="6524625"/>
-            <a:ext cx="65" cy="123111"/>
+            <a:ext cx="3064942" cy="123111"/>
           </a:xfrm>
           <a:prstGeom prst="rect">
             <a:avLst/>
@@ -6865,7 +8415,25 @@
               <a:buFontTx/>
               <a:buNone/>
             </a:pPr>
-            <a:endParaRPr lang="en-US" sz="800" b="0" i="0" u="none" dirty="0">
+            <a:r>
+              <a:rPr lang="en-US" sz="800" b="0" i="0" u="none">
+                <a:solidFill>
+                  <a:schemeClr val="tx1"/>
+                </a:solidFill>
+                <a:latin typeface="+mn-lt"/>
+              </a:rPr>
+              <a:t>  |  ERAMSWD Magnus Westerlund  |  2026-07-16  |  Open  |  Page </a:t>
+            </a:r>
+            <a:fld id="{CBBBA5E6-1E90-4A28-9571-7B0FE132F514}" type="slidenum">
+              <a:rPr lang="en-US" sz="800" b="0" i="0" u="none" smtClean="0">
+                <a:solidFill>
+                  <a:schemeClr val="tx1"/>
+                </a:solidFill>
+                <a:latin typeface="+mn-lt"/>
+              </a:rPr>
+              <a:t>‹#›</a:t>
+            </a:fld>
+            <a:endParaRPr lang="en-US" sz="800" b="0" i="0" u="none">
               <a:solidFill>
                 <a:schemeClr val="tx1"/>
               </a:solidFill>
@@ -6921,11 +8489,6 @@
     <a:overrideClrMapping bg1="dk1" tx1="lt1" bg2="dk2" tx2="lt2" accent1="accent1" accent2="accent2" accent3="accent3" accent4="accent4" accent5="accent5" accent6="accent6" hlink="hlink" folHlink="folHlink"/>
   </p:clrMapOvr>
   <p:hf sldNum="0" hdr="0" ftr="0"/>
-  <p:extLst>
-    <p:ext uri="{DCECCB84-F9BA-43D5-87BE-67443E8EF086}">
-      <p15:sldGuideLst xmlns:p15="http://schemas.microsoft.com/office/powerpoint/2012/main"/>
-    </p:ext>
-  </p:extLst>
 </p:sldLayout>
 </file>
 
@@ -7001,7 +8564,7 @@
               <a:buFont typeface="Ericsson Hilda" panose="00000500000000000000" pitchFamily="2" charset="0"/>
               <a:buChar char="●"/>
             </a:pPr>
-            <a:endParaRPr lang="en-US" dirty="0">
+            <a:endParaRPr lang="en-US">
               <a:solidFill>
                 <a:schemeClr val="bg1"/>
               </a:solidFill>
@@ -7097,10 +8660,9 @@
           <a:p>
             <a:pPr lvl="0"/>
             <a:r>
-              <a:rPr lang="en-US" dirty="0"/>
+              <a:rPr lang="en-US"/>
               <a:t>Slide title, Ericsson Hilda Light 40pt, Ericsson Black, max 2-lines</a:t>
             </a:r>
-            <a:endParaRPr lang="en-US"/>
           </a:p>
         </p:txBody>
       </p:sp>
@@ -7153,26 +8715,23 @@
           <a:p>
             <a:pPr lvl="0"/>
             <a:r>
-              <a:rPr lang="en-US" dirty="0"/>
+              <a:rPr lang="en-US"/>
               <a:t>For heading, use Ericsson Hilda in bold. For copy and bullets, use E. Hilda.</a:t>
             </a:r>
-            <a:endParaRPr lang="en-US"/>
           </a:p>
           <a:p>
             <a:pPr lvl="0"/>
             <a:r>
-              <a:rPr lang="en-US" dirty="0"/>
+              <a:rPr lang="en-US"/>
               <a:t>First level</a:t>
             </a:r>
-            <a:endParaRPr lang="en-US"/>
           </a:p>
           <a:p>
             <a:pPr lvl="1"/>
             <a:r>
-              <a:rPr lang="en-US" dirty="0"/>
+              <a:rPr lang="en-US"/>
               <a:t>Second level</a:t>
             </a:r>
-            <a:endParaRPr lang="en-US"/>
           </a:p>
         </p:txBody>
       </p:sp>
@@ -7229,30 +8788,27 @@
           <a:p>
             <a:pPr lvl="0"/>
             <a:r>
-              <a:rPr lang="en-US" dirty="0"/>
+              <a:rPr lang="en-US"/>
               <a:t>For heading, use Ericsson Hilda in bold. For copy and bullets, use E. Hilda.</a:t>
             </a:r>
+          </a:p>
+          <a:p>
+            <a:pPr lvl="0"/>
+            <a:r>
+              <a:rPr lang="en-US"/>
+              <a:t>First level</a:t>
+            </a:r>
+          </a:p>
+          <a:p>
+            <a:pPr lvl="1"/>
+            <a:r>
+              <a:rPr lang="en-US"/>
+              <a:t>Second level</a:t>
+            </a:r>
+          </a:p>
+          <a:p>
+            <a:pPr lvl="3"/>
             <a:endParaRPr lang="en-US"/>
-          </a:p>
-          <a:p>
-            <a:pPr lvl="0"/>
-            <a:r>
-              <a:rPr lang="en-US" dirty="0"/>
-              <a:t>First level</a:t>
-            </a:r>
-            <a:endParaRPr lang="en-US"/>
-          </a:p>
-          <a:p>
-            <a:pPr lvl="1"/>
-            <a:r>
-              <a:rPr lang="en-US" dirty="0"/>
-              <a:t>Second level</a:t>
-            </a:r>
-            <a:endParaRPr lang="en-US"/>
-          </a:p>
-          <a:p>
-            <a:pPr lvl="3"/>
-            <a:endParaRPr lang="en-US" dirty="0"/>
           </a:p>
         </p:txBody>
       </p:sp>
@@ -7305,26 +8861,23 @@
           <a:p>
             <a:pPr lvl="0"/>
             <a:r>
-              <a:rPr lang="en-US" dirty="0"/>
+              <a:rPr lang="en-US"/>
               <a:t>For heading, use Ericsson Hilda in bold. For copy and bullets, use E. Hilda.</a:t>
             </a:r>
-            <a:endParaRPr lang="en-US"/>
           </a:p>
           <a:p>
             <a:pPr lvl="0"/>
             <a:r>
-              <a:rPr lang="en-US" dirty="0"/>
+              <a:rPr lang="en-US"/>
               <a:t>First level</a:t>
             </a:r>
-            <a:endParaRPr lang="en-US"/>
           </a:p>
           <a:p>
             <a:pPr lvl="1"/>
             <a:r>
-              <a:rPr lang="en-US" dirty="0"/>
+              <a:rPr lang="en-US"/>
               <a:t>Second level</a:t>
             </a:r>
-            <a:endParaRPr lang="en-US"/>
           </a:p>
         </p:txBody>
       </p:sp>
@@ -7378,26 +8931,23 @@
           <a:p>
             <a:pPr lvl="0"/>
             <a:r>
-              <a:rPr lang="en-US" dirty="0"/>
+              <a:rPr lang="en-US"/>
               <a:t>For heading, use Ericsson Hilda in bold. For copy and bullets, use E. Hilda.</a:t>
             </a:r>
-            <a:endParaRPr lang="en-US"/>
           </a:p>
           <a:p>
             <a:pPr lvl="0"/>
             <a:r>
-              <a:rPr lang="en-US" dirty="0"/>
+              <a:rPr lang="en-US"/>
               <a:t>First level</a:t>
             </a:r>
-            <a:endParaRPr lang="en-US"/>
           </a:p>
           <a:p>
             <a:pPr lvl="1"/>
             <a:r>
-              <a:rPr lang="en-US" dirty="0"/>
+              <a:rPr lang="en-US"/>
               <a:t>Second level</a:t>
             </a:r>
-            <a:endParaRPr lang="en-US"/>
           </a:p>
         </p:txBody>
       </p:sp>
@@ -7450,26 +9000,23 @@
           <a:p>
             <a:pPr lvl="0"/>
             <a:r>
-              <a:rPr lang="en-US" dirty="0"/>
+              <a:rPr lang="en-US"/>
               <a:t>For heading, use Ericsson Hilda in bold. For copy and bullets, use E. Hilda.</a:t>
             </a:r>
-            <a:endParaRPr lang="en-US"/>
           </a:p>
           <a:p>
             <a:pPr lvl="0"/>
             <a:r>
-              <a:rPr lang="en-US" dirty="0"/>
+              <a:rPr lang="en-US"/>
               <a:t>First level</a:t>
             </a:r>
-            <a:endParaRPr lang="en-US"/>
           </a:p>
           <a:p>
             <a:pPr lvl="1"/>
             <a:r>
-              <a:rPr lang="en-US" dirty="0"/>
+              <a:rPr lang="en-US"/>
               <a:t>Second level</a:t>
             </a:r>
-            <a:endParaRPr lang="en-US"/>
           </a:p>
         </p:txBody>
       </p:sp>
@@ -7522,26 +9069,23 @@
           <a:p>
             <a:pPr lvl="0"/>
             <a:r>
-              <a:rPr lang="en-US" dirty="0"/>
+              <a:rPr lang="en-US"/>
               <a:t>For heading, use Ericsson Hilda in bold. For copy and bullets, use E. Hilda.</a:t>
             </a:r>
-            <a:endParaRPr lang="en-US"/>
           </a:p>
           <a:p>
             <a:pPr lvl="0"/>
             <a:r>
-              <a:rPr lang="en-US" dirty="0"/>
+              <a:rPr lang="en-US"/>
               <a:t>First level</a:t>
             </a:r>
-            <a:endParaRPr lang="en-US"/>
           </a:p>
           <a:p>
             <a:pPr lvl="1"/>
             <a:r>
-              <a:rPr lang="en-US" dirty="0"/>
+              <a:rPr lang="en-US"/>
               <a:t>Second level</a:t>
             </a:r>
-            <a:endParaRPr lang="en-US"/>
           </a:p>
         </p:txBody>
       </p:sp>
@@ -7598,30 +9142,27 @@
           <a:p>
             <a:pPr lvl="0"/>
             <a:r>
-              <a:rPr lang="en-US" dirty="0"/>
+              <a:rPr lang="en-US"/>
               <a:t>For heading, use Ericsson Hilda in bold. For copy and bullets, use E. Hilda.</a:t>
             </a:r>
+          </a:p>
+          <a:p>
+            <a:pPr lvl="0"/>
+            <a:r>
+              <a:rPr lang="en-US"/>
+              <a:t>First level</a:t>
+            </a:r>
+          </a:p>
+          <a:p>
+            <a:pPr lvl="1"/>
+            <a:r>
+              <a:rPr lang="en-US"/>
+              <a:t>Second level</a:t>
+            </a:r>
+          </a:p>
+          <a:p>
+            <a:pPr lvl="3"/>
             <a:endParaRPr lang="en-US"/>
-          </a:p>
-          <a:p>
-            <a:pPr lvl="0"/>
-            <a:r>
-              <a:rPr lang="en-US" dirty="0"/>
-              <a:t>First level</a:t>
-            </a:r>
-            <a:endParaRPr lang="en-US"/>
-          </a:p>
-          <a:p>
-            <a:pPr lvl="1"/>
-            <a:r>
-              <a:rPr lang="en-US" dirty="0"/>
-              <a:t>Second level</a:t>
-            </a:r>
-            <a:endParaRPr lang="en-US"/>
-          </a:p>
-          <a:p>
-            <a:pPr lvl="3"/>
-            <a:endParaRPr lang="en-US" dirty="0"/>
           </a:p>
         </p:txBody>
       </p:sp>
@@ -7674,26 +9215,23 @@
           <a:p>
             <a:pPr lvl="0"/>
             <a:r>
-              <a:rPr lang="en-US" dirty="0"/>
+              <a:rPr lang="en-US"/>
               <a:t>For heading, use Ericsson Hilda in bold. For copy and bullets, use E. Hilda.</a:t>
             </a:r>
-            <a:endParaRPr lang="en-US"/>
           </a:p>
           <a:p>
             <a:pPr lvl="0"/>
             <a:r>
-              <a:rPr lang="en-US" dirty="0"/>
+              <a:rPr lang="en-US"/>
               <a:t>First level</a:t>
             </a:r>
-            <a:endParaRPr lang="en-US"/>
           </a:p>
           <a:p>
             <a:pPr lvl="1"/>
             <a:r>
-              <a:rPr lang="en-US" dirty="0"/>
+              <a:rPr lang="en-US"/>
               <a:t>Second level</a:t>
             </a:r>
-            <a:endParaRPr lang="en-US"/>
           </a:p>
         </p:txBody>
       </p:sp>
@@ -7712,7 +9250,7 @@
         <p:spPr>
           <a:xfrm>
             <a:off x="421638" y="6524625"/>
-            <a:ext cx="65" cy="123111"/>
+            <a:ext cx="3064942" cy="123111"/>
           </a:xfrm>
           <a:prstGeom prst="rect">
             <a:avLst/>
@@ -7729,7 +9267,25 @@
               <a:buFontTx/>
               <a:buNone/>
             </a:pPr>
-            <a:endParaRPr lang="en-US" sz="800" b="0" i="0" u="none" dirty="0">
+            <a:r>
+              <a:rPr lang="en-US" sz="800" b="0" i="0" u="none">
+                <a:solidFill>
+                  <a:schemeClr val="tx1"/>
+                </a:solidFill>
+                <a:latin typeface="+mn-lt"/>
+              </a:rPr>
+              <a:t>  |  ERAMSWD Magnus Westerlund  |  2026-07-16  |  Open  |  Page </a:t>
+            </a:r>
+            <a:fld id="{AD68A651-9684-4C45-81EB-BFAEEB453514}" type="slidenum">
+              <a:rPr lang="en-US" sz="800" b="0" i="0" u="none" smtClean="0">
+                <a:solidFill>
+                  <a:schemeClr val="tx1"/>
+                </a:solidFill>
+                <a:latin typeface="+mn-lt"/>
+              </a:rPr>
+              <a:t>‹#›</a:t>
+            </a:fld>
+            <a:endParaRPr lang="en-US" sz="800" b="0" i="0" u="none">
               <a:solidFill>
                 <a:schemeClr val="tx1"/>
               </a:solidFill>
@@ -7815,10 +9371,9 @@
           </a:lstStyle>
           <a:p>
             <a:r>
-              <a:rPr lang="en-US" dirty="0"/>
+              <a:rPr lang="en-US"/>
               <a:t>Use this space for relevant Ericsson URLs or hashtags</a:t>
             </a:r>
-            <a:endParaRPr lang="en-US"/>
           </a:p>
         </p:txBody>
       </p:sp>
@@ -7943,7 +9498,7 @@
               <a:buFont typeface="Ericsson Hilda" panose="00000500000000000000" pitchFamily="2" charset="0"/>
               <a:buChar char="●"/>
             </a:pPr>
-            <a:endParaRPr lang="en-US" dirty="0">
+            <a:endParaRPr lang="en-US">
               <a:solidFill>
                 <a:schemeClr val="bg1"/>
               </a:solidFill>
@@ -8035,10 +9590,9 @@
           </a:lstStyle>
           <a:p>
             <a:r>
-              <a:rPr lang="en-US" dirty="0"/>
+              <a:rPr lang="en-US"/>
               <a:t>Use this space for relevant Ericsson URLs or hashtags</a:t>
             </a:r>
-            <a:endParaRPr lang="en-US"/>
           </a:p>
         </p:txBody>
       </p:sp>
@@ -8117,7 +9671,7 @@
               <a:buNone/>
             </a:pPr>
             <a:r>
-              <a:rPr lang="en-US" sz="1400" b="1" dirty="0">
+              <a:rPr lang="en-US" sz="1400" b="1">
                 <a:solidFill>
                   <a:schemeClr val="tx1"/>
                 </a:solidFill>
@@ -8135,7 +9689,7 @@
               <a:buFont typeface="Ericsson Hilda Light" panose="00000400000000000000" pitchFamily="2" charset="0"/>
               <a:buNone/>
             </a:pPr>
-            <a:endParaRPr lang="en-US" sz="1400" b="1" dirty="0">
+            <a:endParaRPr lang="en-US" sz="1400" b="1">
               <a:solidFill>
                 <a:schemeClr val="tx1"/>
               </a:solidFill>
@@ -8163,7 +9717,7 @@
               <a:defRPr/>
             </a:pPr>
             <a:r>
-              <a:rPr lang="en-US" sz="1200" u="sng" dirty="0" err="1">
+              <a:rPr lang="en-US" sz="1200" u="sng" err="1">
                 <a:solidFill>
                   <a:schemeClr val="tx1"/>
                 </a:solidFill>
@@ -8172,7 +9726,7 @@
               <a:t>EricssonHilda</a:t>
             </a:r>
             <a:r>
-              <a:rPr lang="en-US" sz="1200" u="sng" dirty="0">
+              <a:rPr lang="en-US" sz="1200" u="sng">
                 <a:solidFill>
                   <a:schemeClr val="tx1"/>
                 </a:solidFill>
@@ -8181,7 +9735,7 @@
               <a:t>(</a:t>
             </a:r>
             <a:r>
-              <a:rPr lang="en-US" sz="1200" u="sng" dirty="0" err="1">
+              <a:rPr lang="en-US" sz="1200" u="sng" err="1">
                 <a:solidFill>
                   <a:schemeClr val="tx1"/>
                 </a:solidFill>
@@ -8190,7 +9744,7 @@
               <a:t>ExtraLight</a:t>
             </a:r>
             <a:r>
-              <a:rPr lang="en-US" sz="1200" u="sng" dirty="0">
+              <a:rPr lang="en-US" sz="1200" u="sng">
                 <a:solidFill>
                   <a:schemeClr val="tx1"/>
                 </a:solidFill>
@@ -8199,7 +9753,7 @@
               <a:t>):</a:t>
             </a:r>
             <a:r>
-              <a:rPr lang="en-US" sz="1200" dirty="0">
+              <a:rPr lang="en-US" sz="1200">
                 <a:solidFill>
                   <a:schemeClr val="tx1"/>
                 </a:solidFill>
@@ -8208,7 +9762,7 @@
               <a:t>!"#$%&amp;'()*+,./0123456789:;&lt;=&gt;?@ABCDEFGHIJKLMNOPQRSTUVWXYZ[\]^_`</a:t>
             </a:r>
             <a:r>
-              <a:rPr lang="en-US" sz="1200" dirty="0" err="1">
+              <a:rPr lang="en-US" sz="1200" err="1">
                 <a:solidFill>
                   <a:schemeClr val="tx1"/>
                 </a:solidFill>
@@ -8217,7 +9771,7 @@
               <a:t>abcdefghijklmnopqrstuvwxyz</a:t>
             </a:r>
             <a:r>
-              <a:rPr lang="en-US" sz="1200" dirty="0">
+              <a:rPr lang="en-US" sz="1200">
                 <a:solidFill>
                   <a:schemeClr val="tx1"/>
                 </a:solidFill>
@@ -8226,7 +9780,7 @@
               <a:t>{|}~¡¢£¤¥¦§¨©ª«¬®¯°±²³´¶·¸¹º»¼½ÀÁÂÃÄÅÆÇÈËÌÍÎÏÐÑÒÓÔÕÖ×ØÙÚÛÜÝÞßàáâãäåæçèéêëìíîïðñòóôõö÷øùúûüýþÿĀāĂăąĆćĊċ</a:t>
             </a:r>
             <a:r>
-              <a:rPr lang="en-US" sz="1200" kern="1200" dirty="0">
+              <a:rPr lang="en-US" sz="1200" kern="1200">
                 <a:solidFill>
                   <a:schemeClr val="tx1"/>
                 </a:solidFill>
@@ -8237,7 +9791,7 @@
               <a:t>Čč</a:t>
             </a:r>
             <a:r>
-              <a:rPr lang="en-US" sz="1200" dirty="0">
+              <a:rPr lang="en-US" sz="1200">
                 <a:solidFill>
                   <a:schemeClr val="tx1"/>
                 </a:solidFill>
@@ -8246,7 +9800,7 @@
               <a:t>ĎďĐđĒĖėĘęĚěĞğĠġĢģĪīĮįİıĶķĹĺĻļĽľŁłŃńŅņŇňŌŐőŒœŔŕŖŗŘřŚśŞşŠšŢţŤťŪūŮůŰűŲųŴŵŶŷŸŹźŻżŽžƒȘșˆˇ˘˙˚˛˜˝</a:t>
             </a:r>
             <a:r>
-              <a:rPr lang="en-US" sz="1200" dirty="0" err="1">
+              <a:rPr lang="en-US" sz="1200" err="1">
                 <a:solidFill>
                   <a:schemeClr val="tx1"/>
                 </a:solidFill>
@@ -8255,7 +9809,7 @@
               <a:t>ẀẁẃẄẅỲỳ</a:t>
             </a:r>
             <a:r>
-              <a:rPr lang="en-US" sz="1200" dirty="0">
+              <a:rPr lang="en-US" sz="1200">
                 <a:solidFill>
                   <a:schemeClr val="tx1"/>
                 </a:solidFill>
@@ -8264,7 +9818,7 @@
               <a:t>‘’‚“”„†‡•…‰‹›⁄€™ĀĀĂĂĄĄĆĆĊĊČČĎĎĐĐĒĒĖĖĘĘĚĚĞĞĠĠĢĢĪĪĮĮİĶĶĹĹĻĻĽĽŃŃŅŅŇŇŌŌŐŐŔŔŖŖŘŘŚŚŞŞŢŢŤŤŪŪŮŮŰŰŲŲŴŴŶŶŹŹŻŻȘș−≤≥</a:t>
             </a:r>
             <a:r>
-              <a:rPr lang="en-US" sz="1200" dirty="0" err="1">
+              <a:rPr lang="en-US" sz="1200" err="1">
                 <a:solidFill>
                   <a:schemeClr val="tx1"/>
                 </a:solidFill>
@@ -8273,7 +9827,7 @@
               <a:t>ﬁﬂΆΈΉΊΌΎΏΐΑΒΓΕΖΗΘΙΚΛΜΝΞΟΠΡΣΤΥΦΧΨΪΫΆΈΉΊΰ</a:t>
             </a:r>
             <a:r>
-              <a:rPr lang="en-US" sz="1200" dirty="0">
+              <a:rPr lang="en-US" sz="1200">
                 <a:solidFill>
                   <a:schemeClr val="tx1"/>
                 </a:solidFill>
@@ -8304,7 +9858,7 @@
               <a:defRPr/>
             </a:pPr>
             <a:r>
-              <a:rPr lang="en-US" sz="1200" u="sng" dirty="0" err="1">
+              <a:rPr lang="en-US" sz="1200" u="sng" err="1">
                 <a:solidFill>
                   <a:schemeClr val="tx1"/>
                 </a:solidFill>
@@ -8313,7 +9867,7 @@
               <a:t>EricssonHilda</a:t>
             </a:r>
             <a:r>
-              <a:rPr lang="en-US" sz="1200" u="sng" dirty="0">
+              <a:rPr lang="en-US" sz="1200" u="sng">
                 <a:solidFill>
                   <a:schemeClr val="tx1"/>
                 </a:solidFill>
@@ -8322,7 +9876,7 @@
               <a:t>(Light):</a:t>
             </a:r>
             <a:r>
-              <a:rPr lang="en-US" sz="1200" dirty="0">
+              <a:rPr lang="en-US" sz="1200">
                 <a:solidFill>
                   <a:schemeClr val="tx1"/>
                 </a:solidFill>
@@ -8331,7 +9885,7 @@
               <a:t>!"#$%&amp;'()*+,./0123456789:;&lt;=&gt;?@ABCDEFGHIJKLMNOPQRSTUVWXYZ[\]^_`</a:t>
             </a:r>
             <a:r>
-              <a:rPr lang="en-US" sz="1200" dirty="0" err="1">
+              <a:rPr lang="en-US" sz="1200" err="1">
                 <a:solidFill>
                   <a:schemeClr val="tx1"/>
                 </a:solidFill>
@@ -8340,7 +9894,7 @@
               <a:t>abcdefghijklmnopqrstuvwxyz</a:t>
             </a:r>
             <a:r>
-              <a:rPr lang="en-US" sz="1200" dirty="0">
+              <a:rPr lang="en-US" sz="1200">
                 <a:solidFill>
                   <a:schemeClr val="tx1"/>
                 </a:solidFill>
@@ -8349,7 +9903,7 @@
               <a:t>{|}~¡¢£¤¥¦§¨©ª«¬®¯°±²³´¶·¸¹º»¼½ÀÁÂÃÄÅÆÇÈËÌÍÎÏÐÑÒÓÔÕÖ×ØÙÚÛÜÝÞßàáâãäåæçèéêëìíîïðñòóôõö÷øùúûüýþÿĀāĂăąĆćĊċ</a:t>
             </a:r>
             <a:r>
-              <a:rPr lang="en-US" sz="1200" kern="1200" dirty="0">
+              <a:rPr lang="en-US" sz="1200" kern="1200">
                 <a:solidFill>
                   <a:schemeClr val="tx1"/>
                 </a:solidFill>
@@ -8360,7 +9914,7 @@
               <a:t>Čč</a:t>
             </a:r>
             <a:r>
-              <a:rPr lang="en-US" sz="1200" dirty="0">
+              <a:rPr lang="en-US" sz="1200">
                 <a:solidFill>
                   <a:schemeClr val="tx1"/>
                 </a:solidFill>
@@ -8369,7 +9923,7 @@
               <a:t>ĎďĐđĒĖėĘęĚěĞğĠġĢģĪīĮįİıĶķĹĺĻļĽľŁłŃńŅņŇňŌŐőŒœŔŕŖŗŘřŚśŞşŠšŢţŤťŪūŮůŰűŲųŴŵŶŷŸŹźŻżŽžƒȘșˆˇ˘˙˚˛˜˝</a:t>
             </a:r>
             <a:r>
-              <a:rPr lang="en-US" sz="1200" dirty="0" err="1">
+              <a:rPr lang="en-US" sz="1200" err="1">
                 <a:solidFill>
                   <a:schemeClr val="tx1"/>
                 </a:solidFill>
@@ -8378,7 +9932,7 @@
               <a:t>ẀẁẃẄẅỲỳ</a:t>
             </a:r>
             <a:r>
-              <a:rPr lang="en-US" sz="1200" dirty="0">
+              <a:rPr lang="en-US" sz="1200">
                 <a:solidFill>
                   <a:schemeClr val="tx1"/>
                 </a:solidFill>
@@ -8387,7 +9941,7 @@
               <a:t>‘’‚“”„†‡•…‰‹›⁄€™ĀĀĂĂĄĄĆĆĊĊČČĎĎĐĐĒĒĖĖĘĘĚĚĞĞĠĠĢĢĪĪĮĮİĶĶĹĹĻĻĽĽŃŃŅŅŇŇŌŌŐŐŔŔŖŖŘŘŚŚŞŞŢŢŤŤŪŪŮŮŰŰŲŲŴŴŶŶŹŹŻŻȘș−≤≥</a:t>
             </a:r>
             <a:r>
-              <a:rPr lang="en-US" sz="1200" dirty="0" err="1">
+              <a:rPr lang="en-US" sz="1200" err="1">
                 <a:solidFill>
                   <a:schemeClr val="tx1"/>
                 </a:solidFill>
@@ -8396,7 +9950,7 @@
               <a:t>ﬁﬂΆΈΉΊΌΎΏΐΑΒΓΕΖΗΘΙΚΛΜΝΞΟΠΡΣΤΥΦΧΨΪΫΆΈΉΊΰ</a:t>
             </a:r>
             <a:r>
-              <a:rPr lang="en-US" sz="1200" dirty="0">
+              <a:rPr lang="en-US" sz="1200">
                 <a:solidFill>
                   <a:schemeClr val="tx1"/>
                 </a:solidFill>
@@ -8405,7 +9959,7 @@
               <a:t>αβγδεζηθικλνξορςΣΤΥΦΧΨΩΪΫΌΎΏЁЂЃЄЅІЇЈЉЊЋЌЎЏАБВГДЕЖЗИЙКЛМНОПРСТУФХЦЧШЩЪЫЬЭЮЯАБВГДЕЖЗИЙКЛМНОПРСТУФХЦЧШЩЪЫЬЭЮЯЁЂЃЄЅІЇЈЉЊЋЌЎЏѢѢѲѲѴѴҐҐәǽẀẁẂẃẄẅỲỳ№—–-</a:t>
             </a:r>
             <a:r>
-              <a:rPr lang="en-US" sz="1200" dirty="0">
+              <a:rPr lang="en-US" sz="1200">
                 <a:solidFill>
                   <a:schemeClr val="tx1"/>
                 </a:solidFill>
@@ -8413,7 +9967,7 @@
               </a:rPr>
               <a:t>●</a:t>
             </a:r>
-            <a:endParaRPr lang="en-US" sz="1200" dirty="0">
+            <a:endParaRPr lang="en-US" sz="1200">
               <a:solidFill>
                 <a:schemeClr val="tx1"/>
               </a:solidFill>
@@ -8428,7 +9982,7 @@
               <a:buNone/>
             </a:pPr>
             <a:r>
-              <a:rPr lang="en-US" sz="1200" u="sng" dirty="0" err="1">
+              <a:rPr lang="en-US" sz="1200" u="sng" err="1">
                 <a:solidFill>
                   <a:schemeClr val="tx1"/>
                 </a:solidFill>
@@ -8437,7 +9991,7 @@
               <a:t>EricssonHilda</a:t>
             </a:r>
             <a:r>
-              <a:rPr lang="en-US" sz="1200" u="sng" dirty="0">
+              <a:rPr lang="en-US" sz="1200" u="sng">
                 <a:solidFill>
                   <a:schemeClr val="tx1"/>
                 </a:solidFill>
@@ -8446,7 +10000,7 @@
               <a:t>(Regular):</a:t>
             </a:r>
             <a:r>
-              <a:rPr lang="en-US" sz="1200" dirty="0">
+              <a:rPr lang="en-US" sz="1200">
                 <a:solidFill>
                   <a:schemeClr val="tx1"/>
                 </a:solidFill>
@@ -8455,7 +10009,7 @@
               <a:t>!"#$%&amp;'()*+,./0123456789:;&lt;=&gt;?@ABCDEFGHIJKLMNOPQRSTUVWXYZ[\]^_`</a:t>
             </a:r>
             <a:r>
-              <a:rPr lang="en-US" sz="1200" dirty="0" err="1">
+              <a:rPr lang="en-US" sz="1200" err="1">
                 <a:solidFill>
                   <a:schemeClr val="tx1"/>
                 </a:solidFill>
@@ -8464,7 +10018,7 @@
               <a:t>abcdefghijklmnopqrstuvwxyz</a:t>
             </a:r>
             <a:r>
-              <a:rPr lang="en-US" sz="1200" dirty="0">
+              <a:rPr lang="en-US" sz="1200">
                 <a:solidFill>
                   <a:schemeClr val="tx1"/>
                 </a:solidFill>
@@ -8473,7 +10027,7 @@
               <a:t>{|}~¡¢£¤¥¦§¨©ª«¬®¯°±²³´¶·¸¹º»¼½ÀÁÂÃÄÅÆÇÈËÌÍÎÏÐÑÒÓÔÕÖ×ØÙÚÛÜÝÞßàáâãäåæçèéêëìíîïðñòóôõö÷øùúûüýþÿĀāĂăąĆćĊċČčĎďĐđĒĖėĘęĚěĞğĠġĢģĪīĮįİıĶķĹĺĻļĽľŁłŃńŅņŇňŌŐőŒœŔŕŖŗŘřŚśŞşŠšŢţŤťŪūŮůŰűŲųŴŵŶŷŸŹźŻżŽžƒȘșˆˇ˘˙˚˛˜˝</a:t>
             </a:r>
             <a:r>
-              <a:rPr lang="en-US" sz="1200" dirty="0" err="1">
+              <a:rPr lang="en-US" sz="1200" err="1">
                 <a:solidFill>
                   <a:schemeClr val="tx1"/>
                 </a:solidFill>
@@ -8482,7 +10036,7 @@
               <a:t>ẀẁẃẄẅỲỳ</a:t>
             </a:r>
             <a:r>
-              <a:rPr lang="en-US" sz="1200" dirty="0">
+              <a:rPr lang="en-US" sz="1200">
                 <a:solidFill>
                   <a:schemeClr val="tx1"/>
                 </a:solidFill>
@@ -8491,7 +10045,7 @@
               <a:t>‘’‚“”„†‡•…‰‹›⁄€™ĀĀĂĂĄĄĆĆĊĊČČĎĎĐĐĒĒĖĖĘĘĚĚĞĞĠĠĢĢĪĪĮĮİĶĶĹĹĻĻĽĽŃŃŅŅŇŇŌŌŐŐŔŔŖŖŘŘŚŚŞŞŢŢŤŤŪŪŮŮŰŰŲŲŴŴŶŶŹŹŻŻȘș−≤≥</a:t>
             </a:r>
             <a:r>
-              <a:rPr lang="en-US" sz="1200" dirty="0" err="1">
+              <a:rPr lang="en-US" sz="1200" err="1">
                 <a:solidFill>
                   <a:schemeClr val="tx1"/>
                 </a:solidFill>
@@ -8500,7 +10054,7 @@
               <a:t>ﬁﬂΆΈΉΊΌΎΏΐΑΒΓΕΖΗΘΙΚΛΜΝΞΟΠΡΣΤΥΦΧΨΪΫΆΈΉΊΰ</a:t>
             </a:r>
             <a:r>
-              <a:rPr lang="en-US" sz="1200" dirty="0">
+              <a:rPr lang="en-US" sz="1200">
                 <a:solidFill>
                   <a:schemeClr val="tx1"/>
                 </a:solidFill>
@@ -8531,7 +10085,7 @@
               <a:defRPr/>
             </a:pPr>
             <a:r>
-              <a:rPr lang="en-US" sz="1200" b="1" u="sng" dirty="0" err="1">
+              <a:rPr lang="en-US" sz="1200" b="1" u="sng" err="1">
                 <a:solidFill>
                   <a:schemeClr val="tx1"/>
                 </a:solidFill>
@@ -8540,7 +10094,7 @@
               <a:t>EricssonHildaLight+Bold</a:t>
             </a:r>
             <a:r>
-              <a:rPr lang="en-US" sz="1200" b="1" u="sng" dirty="0">
+              <a:rPr lang="en-US" sz="1200" b="1" u="sng">
                 <a:solidFill>
                   <a:schemeClr val="tx1"/>
                 </a:solidFill>
@@ -8549,7 +10103,7 @@
               <a:t>(Medium):</a:t>
             </a:r>
             <a:r>
-              <a:rPr lang="en-US" sz="1200" b="1" dirty="0">
+              <a:rPr lang="en-US" sz="1200" b="1">
                 <a:solidFill>
                   <a:schemeClr val="tx1"/>
                 </a:solidFill>
@@ -8558,7 +10112,7 @@
               <a:t>!"#$%&amp;'()*+,./0123456789:;&lt;=&gt;?@ABCDEFGHIJKLMNOPQRSTUVWXYZ[\]^_`</a:t>
             </a:r>
             <a:r>
-              <a:rPr lang="en-US" sz="1200" b="1" dirty="0" err="1">
+              <a:rPr lang="en-US" sz="1200" b="1" err="1">
                 <a:solidFill>
                   <a:schemeClr val="tx1"/>
                 </a:solidFill>
@@ -8567,7 +10121,7 @@
               <a:t>abcdefghijklmnopqrstuvwxyz</a:t>
             </a:r>
             <a:r>
-              <a:rPr lang="en-US" sz="1200" b="1" dirty="0">
+              <a:rPr lang="en-US" sz="1200" b="1">
                 <a:solidFill>
                   <a:schemeClr val="tx1"/>
                 </a:solidFill>
@@ -8576,7 +10130,7 @@
               <a:t>{|}~¡¢£¤¥¦§¨©ª«¬®¯°±²³´¶·¸¹º»¼½ÀÁÂÃÄÅÆÇÈËÌÍÎÏÐÑÒÓÔÕÖ×ØÙÚÛÜÝÞßàáâãäåæçèéêëìíîïðñòóôõö÷øùúûüýþÿĀāĂăąĆćĊċ</a:t>
             </a:r>
             <a:r>
-              <a:rPr lang="en-US" sz="1200" b="1" kern="1200" dirty="0">
+              <a:rPr lang="en-US" sz="1200" b="1" kern="1200">
                 <a:solidFill>
                   <a:schemeClr val="tx1"/>
                 </a:solidFill>
@@ -8587,7 +10141,7 @@
               <a:t>Čč</a:t>
             </a:r>
             <a:r>
-              <a:rPr lang="en-US" sz="1200" b="1" dirty="0">
+              <a:rPr lang="en-US" sz="1200" b="1">
                 <a:solidFill>
                   <a:schemeClr val="tx1"/>
                 </a:solidFill>
@@ -8596,7 +10150,7 @@
               <a:t>ĎďĐđĒĖėĘęĚěĞğĠġĢģĪīĮįİıĶķĹĺĻļĽľŁłŃńŅņŇňŌŐőŒœŔŕŖŗŘřŚśŞşŠšŢţŤťŪūŮůŰűŲųŴŵŶŷŸŹźŻżŽžƒȘșˆˇ˘˙˚˛˜˝</a:t>
             </a:r>
             <a:r>
-              <a:rPr lang="en-US" sz="1200" b="1" dirty="0" err="1">
+              <a:rPr lang="en-US" sz="1200" b="1" err="1">
                 <a:solidFill>
                   <a:schemeClr val="tx1"/>
                 </a:solidFill>
@@ -8605,7 +10159,7 @@
               <a:t>ẀẁẃẄẅỲỳ</a:t>
             </a:r>
             <a:r>
-              <a:rPr lang="en-US" sz="1200" b="1" dirty="0">
+              <a:rPr lang="en-US" sz="1200" b="1">
                 <a:solidFill>
                   <a:schemeClr val="tx1"/>
                 </a:solidFill>
@@ -8614,7 +10168,7 @@
               <a:t>‘’‚“”„†‡•…‰‹›⁄€™ĀĀĂĂĄĄĆĆĊĊČČĎĎĐĐĒĒĖĖĘĘĚĚĞĞĠĠĢĢĪĪĮĮİĶĶĹĹĻĻĽĽŃŃŅŅŇŇŌŌŐŐŔŔŖŖŘŘŚŚŞŞŢŢŤŤŪŪŮŮŰŰŲŲŴŴŶŶŹŹŻŻȘș−≤≥</a:t>
             </a:r>
             <a:r>
-              <a:rPr lang="en-US" sz="1200" b="1" dirty="0" err="1">
+              <a:rPr lang="en-US" sz="1200" b="1" err="1">
                 <a:solidFill>
                   <a:schemeClr val="tx1"/>
                 </a:solidFill>
@@ -8623,7 +10177,7 @@
               <a:t>ﬁﬂΆΈΉΊΌΎΏΐΑΒΓΕΖΗΘΙΚΛΜΝΞΟΠΡΣΤΥΦΧΨΪΫΆΈΉΊΰ</a:t>
             </a:r>
             <a:r>
-              <a:rPr lang="en-US" sz="1200" b="1" dirty="0">
+              <a:rPr lang="en-US" sz="1200" b="1">
                 <a:solidFill>
                   <a:schemeClr val="tx1"/>
                 </a:solidFill>
@@ -8632,7 +10186,7 @@
               <a:t>αβγδεζηθικλνξορςΣΤΥΦΧΨΩΪΫΌΎΏЁЂЃЄЅІЇЈЉЊЋЌЎЏАБВГДЕЖЗИЙКЛМНОПРСТУФХЦЧШЩЪЫЬЭЮЯАБВГДЕЖЗИЙКЛМНОПРСТУФХЦЧШЩЪЫЬЭЮЯЁЂЃЄЅІЇЈЉЊЋЌЎЏѢѢѲѲѴѴҐҐәǽẀẁẂẃẄẅỲỳ№—–-</a:t>
             </a:r>
             <a:r>
-              <a:rPr lang="en-US" sz="1200" b="1" dirty="0">
+              <a:rPr lang="en-US" sz="1200" b="1">
                 <a:solidFill>
                   <a:schemeClr val="tx1"/>
                 </a:solidFill>
@@ -8640,7 +10194,7 @@
               </a:rPr>
               <a:t>●</a:t>
             </a:r>
-            <a:endParaRPr lang="en-US" sz="1200" b="1" dirty="0">
+            <a:endParaRPr lang="en-US" sz="1200" b="1">
               <a:solidFill>
                 <a:schemeClr val="tx1"/>
               </a:solidFill>
@@ -8668,7 +10222,7 @@
               <a:defRPr/>
             </a:pPr>
             <a:r>
-              <a:rPr lang="en-US" sz="1200" b="1" u="sng" dirty="0" err="1">
+              <a:rPr lang="en-US" sz="1200" b="1" u="sng" err="1">
                 <a:solidFill>
                   <a:schemeClr val="tx1"/>
                 </a:solidFill>
@@ -8677,7 +10231,7 @@
               <a:t>EricssonHilda+Bold</a:t>
             </a:r>
             <a:r>
-              <a:rPr lang="en-US" sz="1200" b="1" u="sng" dirty="0">
+              <a:rPr lang="en-US" sz="1200" b="1" u="sng">
                 <a:solidFill>
                   <a:schemeClr val="tx1"/>
                 </a:solidFill>
@@ -8686,7 +10240,7 @@
               <a:t>(Bold):</a:t>
             </a:r>
             <a:r>
-              <a:rPr lang="en-US" sz="1200" b="1" dirty="0">
+              <a:rPr lang="en-US" sz="1200" b="1">
                 <a:solidFill>
                   <a:schemeClr val="tx1"/>
                 </a:solidFill>
@@ -8695,7 +10249,7 @@
               <a:t>!"#$%&amp;'()*+,./0123456789:;&lt;=&gt;?@ABCDEFGHIJKLMNOPQRSTUVWXYZ[\]^_`</a:t>
             </a:r>
             <a:r>
-              <a:rPr lang="en-US" sz="1200" b="1" dirty="0" err="1">
+              <a:rPr lang="en-US" sz="1200" b="1" err="1">
                 <a:solidFill>
                   <a:schemeClr val="tx1"/>
                 </a:solidFill>
@@ -8704,7 +10258,7 @@
               <a:t>abcdefghijklmnopqrstuvwxyz</a:t>
             </a:r>
             <a:r>
-              <a:rPr lang="en-US" sz="1200" b="1" dirty="0">
+              <a:rPr lang="en-US" sz="1200" b="1">
                 <a:solidFill>
                   <a:schemeClr val="tx1"/>
                 </a:solidFill>
@@ -8713,7 +10267,7 @@
               <a:t>{|}~¡¢£¤¥¦§¨©ª«¬®¯°±²³´¶·¸¹º»¼½ÀÁÂÃÄÅÆÇÈËÌÍÎÏÐÑÒÓÔÕÖ×ØÙÚÛÜÝÞßàáâãäåæçèéêëìíîïðñòóôõö÷øùúûüýþÿĀāĂăąĆćĊċČčĎďĐđĒĖėĘęĚěĞğĠġĢģĪīĮįİıĶķĹĺĻļĽľŁłŃńŅņŇňŌŐőŒœŔŕŖŗŘřŚśŞşŠšŢţŤťŪūŮůŰűŲųŴŵŶŷŸŹźŻżŽžƒȘșˆˇ˘˙˚˛˜˝</a:t>
             </a:r>
             <a:r>
-              <a:rPr lang="en-US" sz="1200" b="1" dirty="0" err="1">
+              <a:rPr lang="en-US" sz="1200" b="1" err="1">
                 <a:solidFill>
                   <a:schemeClr val="tx1"/>
                 </a:solidFill>
@@ -8722,7 +10276,7 @@
               <a:t>ẀẁẃẄẅỲỳ</a:t>
             </a:r>
             <a:r>
-              <a:rPr lang="en-US" sz="1200" b="1" dirty="0">
+              <a:rPr lang="en-US" sz="1200" b="1">
                 <a:solidFill>
                   <a:schemeClr val="tx1"/>
                 </a:solidFill>
@@ -8731,7 +10285,7 @@
               <a:t>‘’‚“”„†‡•…‰‹›⁄€™ĀĀĂĂĄĄĆĆĊĊČČĎĎĐĐĒĒĖĖĘĘĚĚĞĞĠĠĢĢĪĪĮĮİĶĶĹĹĻĻĽĽŃŃŅŅŇŇŌŌŐŐŔŔŖŖŘŘŚŚŞŞŢŢŤŤŪŪŮŮŰŰŲŲŴŴŶŶŹŹŻŻȘș−≤≥</a:t>
             </a:r>
             <a:r>
-              <a:rPr lang="en-US" sz="1200" b="1" dirty="0" err="1">
+              <a:rPr lang="en-US" sz="1200" b="1" err="1">
                 <a:solidFill>
                   <a:schemeClr val="tx1"/>
                 </a:solidFill>
@@ -8740,7 +10294,7 @@
               <a:t>ﬁﬂΆΈΉΊΌΎΏΐΑΒΓΕΖΗΘΙΚΛΜΝΞΟΠΡΣΤΥΦΧΨΪΫΆΈΉΊΰ</a:t>
             </a:r>
             <a:r>
-              <a:rPr lang="en-US" sz="1200" b="1" dirty="0">
+              <a:rPr lang="en-US" sz="1200" b="1">
                 <a:solidFill>
                   <a:schemeClr val="tx1"/>
                 </a:solidFill>
@@ -8771,7 +10325,7 @@
               <a:defRPr/>
             </a:pPr>
             <a:r>
-              <a:rPr lang="en-US" sz="1200" b="0" u="sng" dirty="0" err="1">
+              <a:rPr lang="en-US" sz="1200" b="0" u="sng" err="1">
                 <a:solidFill>
                   <a:schemeClr val="tx1"/>
                 </a:solidFill>
@@ -8780,7 +10334,7 @@
               <a:t>EricssonHilda</a:t>
             </a:r>
             <a:r>
-              <a:rPr lang="en-US" sz="1200" b="0" u="sng" dirty="0">
+              <a:rPr lang="en-US" sz="1200" b="0" u="sng">
                 <a:solidFill>
                   <a:schemeClr val="tx1"/>
                 </a:solidFill>
@@ -8789,7 +10343,7 @@
               <a:t>(</a:t>
             </a:r>
             <a:r>
-              <a:rPr lang="en-US" sz="1200" b="0" u="sng" dirty="0" err="1">
+              <a:rPr lang="en-US" sz="1200" b="0" u="sng" err="1">
                 <a:solidFill>
                   <a:schemeClr val="tx1"/>
                 </a:solidFill>
@@ -8798,7 +10352,7 @@
               <a:t>ExtraBold</a:t>
             </a:r>
             <a:r>
-              <a:rPr lang="en-US" sz="1200" b="0" u="sng" dirty="0">
+              <a:rPr lang="en-US" sz="1200" b="0" u="sng">
                 <a:solidFill>
                   <a:schemeClr val="tx1"/>
                 </a:solidFill>
@@ -8807,7 +10361,7 @@
               <a:t>):</a:t>
             </a:r>
             <a:r>
-              <a:rPr lang="en-US" sz="1200" b="0" dirty="0">
+              <a:rPr lang="en-US" sz="1200" b="0">
                 <a:solidFill>
                   <a:schemeClr val="tx1"/>
                 </a:solidFill>
@@ -8816,7 +10370,7 @@
               <a:t>!"#$%&amp;'()*+,./0123456789:;&lt;=&gt;?@ABCDEFGHIJKLMNOPQRSTUVWXYZ[\]^_`</a:t>
             </a:r>
             <a:r>
-              <a:rPr lang="en-US" sz="1200" b="0" dirty="0" err="1">
+              <a:rPr lang="en-US" sz="1200" b="0" err="1">
                 <a:solidFill>
                   <a:schemeClr val="tx1"/>
                 </a:solidFill>
@@ -8825,7 +10379,7 @@
               <a:t>abcdefghijklmnopqrstuvwxyz</a:t>
             </a:r>
             <a:r>
-              <a:rPr lang="en-US" sz="1200" b="0" dirty="0">
+              <a:rPr lang="en-US" sz="1200" b="0">
                 <a:solidFill>
                   <a:schemeClr val="tx1"/>
                 </a:solidFill>
@@ -8834,7 +10388,7 @@
               <a:t>{|}~¡¢£¤¥¦§¨©ª«¬®¯°±²³´¶·¸¹º»¼½ÀÁÂÃÄÅÆÇÈËÌÍÎÏÐÑÒÓÔÕÖ×ØÙÚÛÜÝÞßàáâãäåæçèéêëìíîïðñòóôõö÷øùúûüýþÿĀāĂăąĆćĊċ</a:t>
             </a:r>
             <a:r>
-              <a:rPr lang="en-US" sz="1200" b="0" kern="1200" dirty="0">
+              <a:rPr lang="en-US" sz="1200" b="0" kern="1200">
                 <a:solidFill>
                   <a:schemeClr val="tx1"/>
                 </a:solidFill>
@@ -8845,7 +10399,7 @@
               <a:t>Čč</a:t>
             </a:r>
             <a:r>
-              <a:rPr lang="en-US" sz="1200" b="0" dirty="0">
+              <a:rPr lang="en-US" sz="1200" b="0">
                 <a:solidFill>
                   <a:schemeClr val="tx1"/>
                 </a:solidFill>
@@ -8854,7 +10408,7 @@
               <a:t>ĎďĐđĒĖėĘęĚěĞğĠġĢģĪīĮįİıĶķĹĺĻļĽľŁłŃńŅņŇňŌŐőŒœŔŕŖŗŘřŚśŞşŠšŢţŤťŪūŮůŰűŲųŴŵŶŷŸŹźŻżŽžƒȘșˆˇ˘˙˚˛˜˝</a:t>
             </a:r>
             <a:r>
-              <a:rPr lang="en-US" sz="1200" b="0" dirty="0" err="1">
+              <a:rPr lang="en-US" sz="1200" b="0" err="1">
                 <a:solidFill>
                   <a:schemeClr val="tx1"/>
                 </a:solidFill>
@@ -8863,7 +10417,7 @@
               <a:t>ẀẁẃẄẅỲỳ</a:t>
             </a:r>
             <a:r>
-              <a:rPr lang="en-US" sz="1200" b="0" dirty="0">
+              <a:rPr lang="en-US" sz="1200" b="0">
                 <a:solidFill>
                   <a:schemeClr val="tx1"/>
                 </a:solidFill>
@@ -8872,7 +10426,7 @@
               <a:t>‘’‚“”„†‡•…‰‹›⁄€™ĀĀĂĂĄĄĆĆĊĊČČĎĎĐĐĒĒĖĖĘĘĚĚĞĞĠĠĢĢĪĪĮĮİĶĶĹĹĻĻĽĽŃŃŅŅŇŇŌŌŐŐŔŔŖŖŘŘŚŚŞŞŢŢŤŤŪŪŮŮŰŰŲŲŴŴŶŶŹŹŻŻȘș−≤≥</a:t>
             </a:r>
             <a:r>
-              <a:rPr lang="en-US" sz="1200" b="0" dirty="0" err="1">
+              <a:rPr lang="en-US" sz="1200" b="0" err="1">
                 <a:solidFill>
                   <a:schemeClr val="tx1"/>
                 </a:solidFill>
@@ -8881,7 +10435,7 @@
               <a:t>ﬁﬂΆΈΉΊΌΎΏΐΑΒΓΕΖΗΘΙΚΛΜΝΞΟΠΡΣΤΥΦΧΨΪΫΆΈΉΊΰ</a:t>
             </a:r>
             <a:r>
-              <a:rPr lang="en-US" sz="1200" b="0" dirty="0">
+              <a:rPr lang="en-US" sz="1200" b="0">
                 <a:solidFill>
                   <a:schemeClr val="tx1"/>
                 </a:solidFill>
@@ -8911,7 +10465,7 @@
               <a:tabLst/>
               <a:defRPr/>
             </a:pPr>
-            <a:endParaRPr lang="en-US" sz="1200" b="1" dirty="0">
+            <a:endParaRPr lang="en-US" sz="1200" b="1">
               <a:solidFill>
                 <a:schemeClr val="tx1"/>
               </a:solidFill>
@@ -8939,7 +10493,7 @@
               <a:defRPr/>
             </a:pPr>
             <a:r>
-              <a:rPr lang="en-US" sz="1200" b="1" dirty="0">
+              <a:rPr lang="en-US" sz="1200" b="1">
                 <a:solidFill>
                   <a:schemeClr val="tx1"/>
                 </a:solidFill>
@@ -8947,7 +10501,7 @@
               </a:rPr>
               <a:t>B C D F G H I L M O P R S W X b c d f g h I l m o p r s w x</a:t>
             </a:r>
-            <a:endParaRPr lang="en-US" sz="1200" b="1" dirty="0">
+            <a:endParaRPr lang="en-US" sz="1200" b="1">
               <a:solidFill>
                 <a:schemeClr val="tx1"/>
               </a:solidFill>
@@ -9001,7 +10555,7 @@
         <p:spPr>
           <a:xfrm>
             <a:off x="421638" y="6524625"/>
-            <a:ext cx="65" cy="123111"/>
+            <a:ext cx="3064942" cy="123111"/>
           </a:xfrm>
           <a:prstGeom prst="rect">
             <a:avLst/>
@@ -9018,7 +10572,25 @@
               <a:buFontTx/>
               <a:buNone/>
             </a:pPr>
-            <a:endParaRPr lang="en-US" sz="800" b="0" i="0" u="none" dirty="0">
+            <a:r>
+              <a:rPr lang="en-US" sz="800" b="0" i="0" u="none">
+                <a:solidFill>
+                  <a:schemeClr val="tx1"/>
+                </a:solidFill>
+                <a:latin typeface="+mn-lt"/>
+              </a:rPr>
+              <a:t>  |  ERAMSWD Magnus Westerlund  |  2026-07-16  |  Open  |  Page </a:t>
+            </a:r>
+            <a:fld id="{A1F7E8D1-1D41-42BC-968E-6F54B13836C8}" type="slidenum">
+              <a:rPr lang="en-US" sz="800" b="0" i="0" u="none" smtClean="0">
+                <a:solidFill>
+                  <a:schemeClr val="tx1"/>
+                </a:solidFill>
+                <a:latin typeface="+mn-lt"/>
+              </a:rPr>
+              <a:t>‹#›</a:t>
+            </a:fld>
+            <a:endParaRPr lang="en-US" sz="800" b="0" i="0" u="none">
               <a:solidFill>
                 <a:schemeClr val="tx1"/>
               </a:solidFill>
@@ -9112,7 +10684,7 @@
               <a:buFont typeface="Ericsson Hilda" panose="00000500000000000000" pitchFamily="2" charset="0"/>
               <a:buChar char="●"/>
             </a:pPr>
-            <a:endParaRPr lang="en-US" dirty="0">
+            <a:endParaRPr lang="en-US">
               <a:solidFill>
                 <a:schemeClr val="bg1"/>
               </a:solidFill>
@@ -9136,7 +10708,7 @@
         <p:spPr>
           <a:xfrm>
             <a:off x="421638" y="6524625"/>
-            <a:ext cx="65" cy="123111"/>
+            <a:ext cx="3064942" cy="123111"/>
           </a:xfrm>
           <a:prstGeom prst="rect">
             <a:avLst/>
@@ -9153,7 +10725,25 @@
               <a:buFontTx/>
               <a:buNone/>
             </a:pPr>
-            <a:endParaRPr lang="en-US" sz="800" b="0" i="0" u="none" dirty="0">
+            <a:r>
+              <a:rPr lang="en-US" sz="800" b="0" i="0" u="none">
+                <a:solidFill>
+                  <a:schemeClr val="tx1"/>
+                </a:solidFill>
+                <a:latin typeface="+mn-lt"/>
+              </a:rPr>
+              <a:t>  |  ERAMSWD Magnus Westerlund  |  2026-07-16  |  Open  |  Page </a:t>
+            </a:r>
+            <a:fld id="{EFB6956C-AA11-4E9F-9F15-85D293FE4F22}" type="slidenum">
+              <a:rPr lang="en-US" sz="800" b="0" i="0" u="none" smtClean="0">
+                <a:solidFill>
+                  <a:schemeClr val="tx1"/>
+                </a:solidFill>
+                <a:latin typeface="+mn-lt"/>
+              </a:rPr>
+              <a:t>‹#›</a:t>
+            </a:fld>
+            <a:endParaRPr lang="en-US" sz="800" b="0" i="0" u="none">
               <a:solidFill>
                 <a:schemeClr val="tx1"/>
               </a:solidFill>
@@ -9273,10 +10863,9 @@
           <a:p>
             <a:pPr lvl="0"/>
             <a:r>
-              <a:rPr lang="en-US" dirty="0"/>
+              <a:rPr lang="en-US"/>
               <a:t>Slide title, Ericsson Hilda Light 40pt, Ericsson Black, max 2-lines</a:t>
             </a:r>
-            <a:endParaRPr lang="en-US"/>
           </a:p>
         </p:txBody>
       </p:sp>
@@ -9295,7 +10884,7 @@
         <p:spPr>
           <a:xfrm>
             <a:off x="421638" y="6524625"/>
-            <a:ext cx="65" cy="123111"/>
+            <a:ext cx="3064942" cy="123111"/>
           </a:xfrm>
           <a:prstGeom prst="rect">
             <a:avLst/>
@@ -9312,7 +10901,25 @@
               <a:buFontTx/>
               <a:buNone/>
             </a:pPr>
-            <a:endParaRPr lang="en-US" sz="800" b="0" i="0" u="none" dirty="0">
+            <a:r>
+              <a:rPr lang="en-US" sz="800" b="0" i="0" u="none">
+                <a:solidFill>
+                  <a:schemeClr val="tx1"/>
+                </a:solidFill>
+                <a:latin typeface="+mn-lt"/>
+              </a:rPr>
+              <a:t>  |  ERAMSWD Magnus Westerlund  |  2026-07-16  |  Open  |  Page </a:t>
+            </a:r>
+            <a:fld id="{9E52126C-3B58-4DC8-B6BD-0857879716A9}" type="slidenum">
+              <a:rPr lang="en-US" sz="800" b="0" i="0" u="none" smtClean="0">
+                <a:solidFill>
+                  <a:schemeClr val="tx1"/>
+                </a:solidFill>
+                <a:latin typeface="+mn-lt"/>
+              </a:rPr>
+              <a:t>‹#›</a:t>
+            </a:fld>
+            <a:endParaRPr lang="en-US" sz="800" b="0" i="0" u="none">
               <a:solidFill>
                 <a:schemeClr val="tx1"/>
               </a:solidFill>
@@ -9406,7 +11013,7 @@
               <a:buFont typeface="Ericsson Hilda" panose="00000500000000000000" pitchFamily="2" charset="0"/>
               <a:buChar char="●"/>
             </a:pPr>
-            <a:endParaRPr lang="en-US" dirty="0">
+            <a:endParaRPr lang="en-US">
               <a:solidFill>
                 <a:schemeClr val="bg1"/>
               </a:solidFill>
@@ -9496,10 +11103,9 @@
           <a:p>
             <a:pPr lvl="0"/>
             <a:r>
-              <a:rPr lang="en-US" dirty="0"/>
+              <a:rPr lang="en-US"/>
               <a:t>Slide title, Ericsson Hilda Light 40pt, Ericsson Black, max 2-lines</a:t>
             </a:r>
-            <a:endParaRPr lang="en-US"/>
           </a:p>
         </p:txBody>
       </p:sp>
@@ -9518,7 +11124,7 @@
         <p:spPr>
           <a:xfrm>
             <a:off x="421638" y="6524625"/>
-            <a:ext cx="65" cy="123111"/>
+            <a:ext cx="3064942" cy="123111"/>
           </a:xfrm>
           <a:prstGeom prst="rect">
             <a:avLst/>
@@ -9535,7 +11141,25 @@
               <a:buFontTx/>
               <a:buNone/>
             </a:pPr>
-            <a:endParaRPr lang="en-US" sz="800" b="0" i="0" u="none" dirty="0">
+            <a:r>
+              <a:rPr lang="en-US" sz="800" b="0" i="0" u="none">
+                <a:solidFill>
+                  <a:schemeClr val="tx1"/>
+                </a:solidFill>
+                <a:latin typeface="+mn-lt"/>
+              </a:rPr>
+              <a:t>  |  ERAMSWD Magnus Westerlund  |  2026-07-16  |  Open  |  Page </a:t>
+            </a:r>
+            <a:fld id="{17AF3976-E219-4C62-8750-7FE374625997}" type="slidenum">
+              <a:rPr lang="en-US" sz="800" b="0" i="0" u="none" smtClean="0">
+                <a:solidFill>
+                  <a:schemeClr val="tx1"/>
+                </a:solidFill>
+                <a:latin typeface="+mn-lt"/>
+              </a:rPr>
+              <a:t>‹#›</a:t>
+            </a:fld>
+            <a:endParaRPr lang="en-US" sz="800" b="0" i="0" u="none">
               <a:solidFill>
                 <a:schemeClr val="tx1"/>
               </a:solidFill>
@@ -9619,10 +11243,9 @@
           <a:p>
             <a:pPr lvl="0"/>
             <a:r>
-              <a:rPr lang="en-US" dirty="0"/>
+              <a:rPr lang="en-US"/>
               <a:t>Use this layout for document slides when you need space for a long heading and big content area</a:t>
             </a:r>
-            <a:endParaRPr lang="en-US"/>
           </a:p>
         </p:txBody>
       </p:sp>
@@ -9689,42 +11312,37 @@
           <a:p>
             <a:pPr lvl="0"/>
             <a:r>
-              <a:rPr lang="en-US" dirty="0"/>
+              <a:rPr lang="en-US"/>
               <a:t>For heading, use Ericsson Hilda in bold. For copy and bullets, use Ericsson Hilda.</a:t>
             </a:r>
-            <a:endParaRPr lang="en-US"/>
           </a:p>
           <a:p>
             <a:pPr lvl="0"/>
             <a:r>
-              <a:rPr lang="en-US" dirty="0"/>
+              <a:rPr lang="en-US"/>
               <a:t>First level</a:t>
             </a:r>
-            <a:endParaRPr lang="en-US"/>
           </a:p>
           <a:p>
             <a:pPr lvl="1"/>
             <a:r>
-              <a:rPr lang="en-US" dirty="0"/>
+              <a:rPr lang="en-US"/>
               <a:t>Second level</a:t>
             </a:r>
-            <a:endParaRPr lang="en-US"/>
           </a:p>
           <a:p>
             <a:pPr lvl="2"/>
             <a:r>
-              <a:rPr lang="en-US" dirty="0"/>
+              <a:rPr lang="en-US"/>
               <a:t>Third level</a:t>
             </a:r>
-            <a:endParaRPr lang="en-US"/>
           </a:p>
           <a:p>
             <a:pPr lvl="3"/>
             <a:r>
-              <a:rPr lang="en-US" dirty="0"/>
+              <a:rPr lang="en-US"/>
               <a:t>Fourth level</a:t>
             </a:r>
-            <a:endParaRPr lang="en-US"/>
           </a:p>
         </p:txBody>
       </p:sp>
@@ -9743,7 +11361,7 @@
         <p:spPr>
           <a:xfrm>
             <a:off x="421638" y="6524625"/>
-            <a:ext cx="65" cy="123111"/>
+            <a:ext cx="3064942" cy="123111"/>
           </a:xfrm>
           <a:prstGeom prst="rect">
             <a:avLst/>
@@ -9760,7 +11378,25 @@
               <a:buFontTx/>
               <a:buNone/>
             </a:pPr>
-            <a:endParaRPr lang="en-US" sz="800" b="0" i="0" u="none" dirty="0">
+            <a:r>
+              <a:rPr lang="en-US" sz="800" b="0" i="0" u="none">
+                <a:solidFill>
+                  <a:schemeClr val="tx1"/>
+                </a:solidFill>
+                <a:latin typeface="+mn-lt"/>
+              </a:rPr>
+              <a:t>  |  ERAMSWD Magnus Westerlund  |  2026-07-16  |  Open  |  Page </a:t>
+            </a:r>
+            <a:fld id="{89FB2510-D418-4A31-AE7B-48A92BB7C8A6}" type="slidenum">
+              <a:rPr lang="en-US" sz="800" b="0" i="0" u="none" smtClean="0">
+                <a:solidFill>
+                  <a:schemeClr val="tx1"/>
+                </a:solidFill>
+                <a:latin typeface="+mn-lt"/>
+              </a:rPr>
+              <a:t>‹#›</a:t>
+            </a:fld>
+            <a:endParaRPr lang="en-US" sz="800" b="0" i="0" u="none">
               <a:solidFill>
                 <a:schemeClr val="tx1"/>
               </a:solidFill>
@@ -9854,7 +11490,7 @@
               <a:buFont typeface="Ericsson Hilda" panose="00000500000000000000" pitchFamily="2" charset="0"/>
               <a:buChar char="●"/>
             </a:pPr>
-            <a:endParaRPr lang="en-US" dirty="0">
+            <a:endParaRPr lang="en-US">
               <a:solidFill>
                 <a:schemeClr val="bg1"/>
               </a:solidFill>
@@ -9944,10 +11580,9 @@
           <a:p>
             <a:pPr lvl="0"/>
             <a:r>
-              <a:rPr lang="en-US" dirty="0"/>
+              <a:rPr lang="en-US"/>
               <a:t>Use this layout for document slides when you need space for a long heading and big content area</a:t>
             </a:r>
-            <a:endParaRPr lang="en-US"/>
           </a:p>
         </p:txBody>
       </p:sp>
@@ -10014,42 +11649,37 @@
           <a:p>
             <a:pPr lvl="0"/>
             <a:r>
-              <a:rPr lang="en-US" dirty="0"/>
+              <a:rPr lang="en-US"/>
               <a:t>For heading, use Ericsson Hilda in bold. For copy and bullets, use Ericsson Hilda.</a:t>
             </a:r>
-            <a:endParaRPr lang="en-US"/>
           </a:p>
           <a:p>
             <a:pPr lvl="0"/>
             <a:r>
-              <a:rPr lang="en-US" dirty="0"/>
+              <a:rPr lang="en-US"/>
               <a:t>First level</a:t>
             </a:r>
-            <a:endParaRPr lang="en-US"/>
           </a:p>
           <a:p>
             <a:pPr lvl="1"/>
             <a:r>
-              <a:rPr lang="en-US" dirty="0"/>
+              <a:rPr lang="en-US"/>
               <a:t>Second level</a:t>
             </a:r>
-            <a:endParaRPr lang="en-US"/>
           </a:p>
           <a:p>
             <a:pPr lvl="2"/>
             <a:r>
-              <a:rPr lang="en-US" dirty="0"/>
+              <a:rPr lang="en-US"/>
               <a:t>Third level</a:t>
             </a:r>
-            <a:endParaRPr lang="en-US"/>
           </a:p>
           <a:p>
             <a:pPr lvl="3"/>
             <a:r>
-              <a:rPr lang="en-US" dirty="0"/>
+              <a:rPr lang="en-US"/>
               <a:t>Fourth level</a:t>
             </a:r>
-            <a:endParaRPr lang="en-US"/>
           </a:p>
         </p:txBody>
       </p:sp>
@@ -10068,7 +11698,7 @@
         <p:spPr>
           <a:xfrm>
             <a:off x="421638" y="6524625"/>
-            <a:ext cx="65" cy="123111"/>
+            <a:ext cx="3064942" cy="123111"/>
           </a:xfrm>
           <a:prstGeom prst="rect">
             <a:avLst/>
@@ -10085,7 +11715,25 @@
               <a:buFontTx/>
               <a:buNone/>
             </a:pPr>
-            <a:endParaRPr lang="en-US" sz="800" b="0" i="0" u="none" dirty="0">
+            <a:r>
+              <a:rPr lang="en-US" sz="800" b="0" i="0" u="none">
+                <a:solidFill>
+                  <a:schemeClr val="tx1"/>
+                </a:solidFill>
+                <a:latin typeface="+mn-lt"/>
+              </a:rPr>
+              <a:t>  |  ERAMSWD Magnus Westerlund  |  2026-07-16  |  Open  |  Page </a:t>
+            </a:r>
+            <a:fld id="{D26AE597-4448-4AB9-9FDE-3F568D8DAB04}" type="slidenum">
+              <a:rPr lang="en-US" sz="800" b="0" i="0" u="none" smtClean="0">
+                <a:solidFill>
+                  <a:schemeClr val="tx1"/>
+                </a:solidFill>
+                <a:latin typeface="+mn-lt"/>
+              </a:rPr>
+              <a:t>‹#›</a:t>
+            </a:fld>
+            <a:endParaRPr lang="en-US" sz="800" b="0" i="0" u="none">
               <a:solidFill>
                 <a:schemeClr val="tx1"/>
               </a:solidFill>
@@ -10175,10 +11823,9 @@
           <a:p>
             <a:pPr lvl="0"/>
             <a:r>
-              <a:rPr lang="en-US" dirty="0"/>
+              <a:rPr lang="en-US"/>
               <a:t>Use this layout for presentations using short and crisp headings</a:t>
             </a:r>
-            <a:endParaRPr lang="en-US"/>
           </a:p>
         </p:txBody>
       </p:sp>
@@ -10245,42 +11892,37 @@
           <a:p>
             <a:pPr lvl="0"/>
             <a:r>
-              <a:rPr lang="en-US" dirty="0"/>
+              <a:rPr lang="en-US"/>
               <a:t>For heading, use Ericsson Hilda in bold. For copy and bullets, use Ericsson Hilda.</a:t>
             </a:r>
-            <a:endParaRPr lang="en-US"/>
           </a:p>
           <a:p>
             <a:pPr lvl="0"/>
             <a:r>
-              <a:rPr lang="en-US" dirty="0"/>
+              <a:rPr lang="en-US"/>
               <a:t>First level</a:t>
             </a:r>
-            <a:endParaRPr lang="en-US"/>
           </a:p>
           <a:p>
             <a:pPr lvl="1"/>
             <a:r>
-              <a:rPr lang="en-US" dirty="0"/>
+              <a:rPr lang="en-US"/>
               <a:t>Second level</a:t>
             </a:r>
-            <a:endParaRPr lang="en-US"/>
           </a:p>
           <a:p>
             <a:pPr lvl="2"/>
             <a:r>
-              <a:rPr lang="en-US" dirty="0"/>
+              <a:rPr lang="en-US"/>
               <a:t>Third level</a:t>
             </a:r>
-            <a:endParaRPr lang="en-US"/>
           </a:p>
           <a:p>
             <a:pPr lvl="3"/>
             <a:r>
-              <a:rPr lang="en-US" dirty="0"/>
+              <a:rPr lang="en-US"/>
               <a:t>Fourth level</a:t>
             </a:r>
-            <a:endParaRPr lang="en-US"/>
           </a:p>
         </p:txBody>
       </p:sp>
@@ -10299,7 +11941,7 @@
         <p:spPr>
           <a:xfrm>
             <a:off x="421638" y="6524625"/>
-            <a:ext cx="65" cy="123111"/>
+            <a:ext cx="3064942" cy="123111"/>
           </a:xfrm>
           <a:prstGeom prst="rect">
             <a:avLst/>
@@ -10316,7 +11958,25 @@
               <a:buFontTx/>
               <a:buNone/>
             </a:pPr>
-            <a:endParaRPr lang="en-US" sz="800" b="0" i="0" u="none" dirty="0">
+            <a:r>
+              <a:rPr lang="en-US" sz="800" b="0" i="0" u="none">
+                <a:solidFill>
+                  <a:schemeClr val="tx1"/>
+                </a:solidFill>
+                <a:latin typeface="+mn-lt"/>
+              </a:rPr>
+              <a:t>  |  ERAMSWD Magnus Westerlund  |  2026-07-16  |  Open  |  Page </a:t>
+            </a:r>
+            <a:fld id="{3638E53D-DFE6-4EE3-B98B-525EB641EC8D}" type="slidenum">
+              <a:rPr lang="en-US" sz="800" b="0" i="0" u="none" smtClean="0">
+                <a:solidFill>
+                  <a:schemeClr val="tx1"/>
+                </a:solidFill>
+                <a:latin typeface="+mn-lt"/>
+              </a:rPr>
+              <a:t>‹#›</a:t>
+            </a:fld>
+            <a:endParaRPr lang="en-US" sz="800" b="0" i="0" u="none">
               <a:solidFill>
                 <a:schemeClr val="tx1"/>
               </a:solidFill>
@@ -10400,10 +12060,9 @@
           <a:p>
             <a:pPr lvl="0"/>
             <a:r>
-              <a:rPr lang="en-US" dirty="0"/>
+              <a:rPr lang="en-US"/>
               <a:t>Slide title, Ericsson Hilda Light 40pt, Ericsson Black, max 2-lines</a:t>
             </a:r>
-            <a:endParaRPr lang="en-US"/>
           </a:p>
         </p:txBody>
       </p:sp>
@@ -10440,38 +12099,37 @@
           <a:p>
             <a:pPr lvl="0"/>
             <a:r>
-              <a:rPr lang="en-GB"/>
+              <a:rPr lang="en-US"/>
               <a:t>Click to edit Master text styles</a:t>
             </a:r>
           </a:p>
           <a:p>
             <a:pPr lvl="1"/>
             <a:r>
-              <a:rPr lang="en-GB"/>
+              <a:rPr lang="en-US"/>
               <a:t>Second level</a:t>
             </a:r>
           </a:p>
           <a:p>
             <a:pPr lvl="2"/>
             <a:r>
-              <a:rPr lang="en-GB"/>
+              <a:rPr lang="en-US"/>
               <a:t>Third level</a:t>
             </a:r>
           </a:p>
           <a:p>
             <a:pPr lvl="3"/>
             <a:r>
-              <a:rPr lang="en-GB"/>
+              <a:rPr lang="en-US"/>
               <a:t>Fourth level</a:t>
             </a:r>
           </a:p>
           <a:p>
             <a:pPr lvl="4"/>
             <a:r>
-              <a:rPr lang="en-GB"/>
+              <a:rPr lang="en-US"/>
               <a:t>Fifth level</a:t>
             </a:r>
-            <a:endParaRPr lang="en-US"/>
           </a:p>
         </p:txBody>
       </p:sp>
@@ -11071,7 +12729,7 @@
           <a:lstStyle/>
           <a:p>
             <a:r>
-              <a:rPr lang="en-US" dirty="0"/>
+              <a:rPr lang="en-US"/>
               <a:t>SCTP DTLS Chunk</a:t>
             </a:r>
           </a:p>
@@ -11103,40 +12761,39 @@
           <a:lstStyle/>
           <a:p>
             <a:r>
-              <a:rPr lang="en-SE" dirty="0">
+              <a:rPr lang="en-US">
                 <a:hlinkClick r:id="rId5"/>
               </a:rPr>
               <a:t>draft-ietf-tsvwg-sctp-dtls-chunk-04 </a:t>
             </a:r>
-            <a:endParaRPr lang="en-SE" dirty="0"/>
-          </a:p>
-          <a:p>
-            <a:endParaRPr lang="en-SE" dirty="0"/>
-          </a:p>
-          <a:p>
-            <a:r>
-              <a:rPr lang="en-SE" dirty="0"/>
+            <a:endParaRPr lang="en-US"/>
+          </a:p>
+          <a:p>
+            <a:endParaRPr lang="en-US"/>
+          </a:p>
+          <a:p>
+            <a:r>
+              <a:rPr lang="en-US"/>
               <a:t>Magnus Westerlund</a:t>
             </a:r>
           </a:p>
           <a:p>
             <a:r>
-              <a:rPr lang="en-SE" dirty="0"/>
+              <a:rPr lang="en-US"/>
               <a:t>John Preuß Mattsson</a:t>
             </a:r>
           </a:p>
           <a:p>
             <a:r>
-              <a:rPr lang="en-SE" dirty="0"/>
+              <a:rPr lang="en-US"/>
               <a:t>Claudio Porfiri</a:t>
             </a:r>
           </a:p>
           <a:p>
             <a:r>
-              <a:rPr lang="en-SE" dirty="0"/>
+              <a:rPr lang="en-US"/>
               <a:t>Michael Tüxen</a:t>
             </a:r>
-            <a:endParaRPr lang="en-US" dirty="0"/>
           </a:p>
         </p:txBody>
       </p:sp>
@@ -11165,7 +12822,7 @@
           <a:bodyPr/>
           <a:lstStyle/>
           <a:p>
-            <a:endParaRPr lang="en-US" dirty="0"/>
+            <a:endParaRPr lang="en-US"/>
           </a:p>
         </p:txBody>
       </p:sp>
@@ -11198,7 +12855,7 @@
           <a:bodyPr/>
           <a:lstStyle/>
           <a:p>
-            <a:endParaRPr lang="en-US" dirty="0"/>
+            <a:endParaRPr lang="en-US"/>
           </a:p>
         </p:txBody>
       </p:sp>
@@ -11231,7 +12888,7 @@
           <a:bodyPr/>
           <a:lstStyle/>
           <a:p>
-            <a:endParaRPr lang="en-US" dirty="0"/>
+            <a:endParaRPr lang="en-US"/>
           </a:p>
         </p:txBody>
       </p:sp>
@@ -11291,7 +12948,7 @@
           <a:lstStyle/>
           <a:p>
             <a:r>
-              <a:rPr lang="en-US" dirty="0"/>
+              <a:rPr lang="en-US"/>
               <a:t>Introduction</a:t>
             </a:r>
           </a:p>
@@ -11359,76 +13016,76 @@
           <a:lstStyle/>
           <a:p>
             <a:r>
-              <a:rPr lang="en-US" dirty="0"/>
+              <a:rPr lang="en-US"/>
               <a:t>DTLS Chunk</a:t>
             </a:r>
           </a:p>
           <a:p>
             <a:pPr lvl="1"/>
             <a:r>
-              <a:rPr lang="en-US" dirty="0"/>
+              <a:rPr lang="en-US"/>
               <a:t>SCTP Chunk</a:t>
             </a:r>
           </a:p>
           <a:p>
             <a:pPr lvl="1"/>
             <a:r>
-              <a:rPr lang="en-US" dirty="0"/>
+              <a:rPr lang="en-US"/>
               <a:t>Encrypted and Integrity protected encapsulation of all other SCTP Chunks</a:t>
             </a:r>
           </a:p>
           <a:p>
             <a:pPr lvl="1"/>
             <a:r>
-              <a:rPr lang="en-US" dirty="0"/>
+              <a:rPr lang="en-US"/>
               <a:t>Uses DTLS 1.3 record format as is</a:t>
             </a:r>
           </a:p>
           <a:p>
             <a:pPr lvl="1"/>
             <a:r>
-              <a:rPr lang="en-US" dirty="0"/>
+              <a:rPr lang="en-US"/>
               <a:t>API to set Keys and Cipher Algorithm</a:t>
             </a:r>
           </a:p>
           <a:p>
             <a:r>
-              <a:rPr lang="en-US" dirty="0"/>
+              <a:rPr lang="en-US"/>
               <a:t>Negotiate DTLS Key-Management Method</a:t>
             </a:r>
           </a:p>
           <a:p>
             <a:pPr lvl="1"/>
             <a:r>
-              <a:rPr lang="en-US" dirty="0"/>
+              <a:rPr lang="en-US"/>
               <a:t>Uses Clear text SCTP Parameter in INIT/INIT-ACK</a:t>
             </a:r>
           </a:p>
           <a:p>
             <a:pPr lvl="1"/>
             <a:r>
-              <a:rPr lang="en-US" dirty="0"/>
+              <a:rPr lang="en-US"/>
               <a:t>Downgrade attack through input to Key-Derivation Process</a:t>
             </a:r>
           </a:p>
           <a:p>
             <a:r>
-              <a:rPr lang="en-US" dirty="0"/>
+              <a:rPr lang="en-US"/>
               <a:t>One IPR Declaration: </a:t>
             </a:r>
             <a:r>
-              <a:rPr lang="en-US" dirty="0">
+              <a:rPr lang="en-US">
                 <a:hlinkClick r:id="rId6"/>
               </a:rPr>
               <a:t>https://datatracker.ietf.org/ipr/6219/</a:t>
             </a:r>
-            <a:endParaRPr lang="en-US" dirty="0"/>
-          </a:p>
-          <a:p>
-            <a:endParaRPr lang="en-US" dirty="0"/>
-          </a:p>
-          <a:p>
-            <a:endParaRPr lang="en-US" dirty="0"/>
+            <a:endParaRPr lang="en-US"/>
+          </a:p>
+          <a:p>
+            <a:endParaRPr lang="en-US"/>
+          </a:p>
+          <a:p>
+            <a:endParaRPr lang="en-US"/>
           </a:p>
         </p:txBody>
       </p:sp>
@@ -11524,7 +13181,7 @@
           <a:lstStyle/>
           <a:p>
             <a:r>
-              <a:rPr lang="en-US" dirty="0"/>
+              <a:rPr lang="en-US"/>
               <a:t>DTLS Chunk (Updated)</a:t>
             </a:r>
           </a:p>
@@ -11552,67 +13209,67 @@
           <a:lstStyle/>
           <a:p>
             <a:r>
-              <a:rPr lang="en-US" dirty="0"/>
+              <a:rPr lang="en-US"/>
               <a:t>Standard Chunk Header</a:t>
             </a:r>
           </a:p>
           <a:p>
             <a:pPr lvl="1"/>
             <a:r>
-              <a:rPr lang="en-US" dirty="0"/>
+              <a:rPr lang="en-US"/>
               <a:t>R: Indicate Restart Security Context used to protect this Packet</a:t>
             </a:r>
           </a:p>
           <a:p>
             <a:pPr lvl="1"/>
             <a:r>
-              <a:rPr lang="en-US" dirty="0"/>
+              <a:rPr lang="en-US"/>
               <a:t>Removed Pre padding indicator</a:t>
             </a:r>
           </a:p>
           <a:p>
             <a:r>
-              <a:rPr lang="en-US" dirty="0"/>
+              <a:rPr lang="en-US"/>
               <a:t>Payload is DTLS 1.3 Record layer per RFC 9147</a:t>
             </a:r>
           </a:p>
           <a:p>
             <a:r>
-              <a:rPr lang="en-US" dirty="0"/>
+              <a:rPr lang="en-US"/>
               <a:t>DTLS 1.3 Header Usage become Fixed</a:t>
             </a:r>
           </a:p>
           <a:p>
             <a:pPr lvl="1"/>
             <a:r>
-              <a:rPr lang="en-US" dirty="0"/>
+              <a:rPr lang="en-US"/>
               <a:t>E E: Epoch indicate key context (2 LSBs)</a:t>
             </a:r>
           </a:p>
           <a:p>
             <a:pPr lvl="1"/>
             <a:r>
-              <a:rPr lang="en-US" dirty="0"/>
+              <a:rPr lang="en-US"/>
               <a:t>Don’t use Connection ID</a:t>
             </a:r>
           </a:p>
           <a:p>
             <a:pPr lvl="1"/>
             <a:r>
-              <a:rPr lang="en-US" dirty="0"/>
+              <a:rPr lang="en-US"/>
               <a:t>Sequence Number: 16-bit mandated</a:t>
             </a:r>
           </a:p>
           <a:p>
             <a:pPr lvl="1"/>
             <a:r>
-              <a:rPr lang="en-US" dirty="0"/>
+              <a:rPr lang="en-US"/>
               <a:t>No Length field</a:t>
             </a:r>
           </a:p>
           <a:p>
             <a:r>
-              <a:rPr lang="en-US" dirty="0"/>
+              <a:rPr lang="en-US"/>
               <a:t>1 byte Pre-Padding always used</a:t>
             </a:r>
           </a:p>
@@ -11620,10 +13277,10 @@
             <a:pPr marL="265113" lvl="1" indent="0">
               <a:buNone/>
             </a:pPr>
-            <a:endParaRPr lang="en-US" dirty="0"/>
-          </a:p>
-          <a:p>
-            <a:endParaRPr lang="en-US" dirty="0"/>
+            <a:endParaRPr lang="en-US"/>
+          </a:p>
+          <a:p>
+            <a:endParaRPr lang="en-US"/>
           </a:p>
         </p:txBody>
       </p:sp>
@@ -11751,7 +13408,7 @@
           <a:lstStyle/>
           <a:p>
             <a:r>
-              <a:rPr lang="en-US" dirty="0"/>
+              <a:rPr lang="en-US"/>
               <a:t>Changes</a:t>
             </a:r>
           </a:p>
@@ -11779,54 +13436,46 @@
           <a:lstStyle/>
           <a:p>
             <a:r>
-              <a:rPr lang="en-US" dirty="0"/>
-              <a:t>Clarified Mandatory to Implement Ciphers that unless something else specifies it </a:t>
-            </a:r>
-            <a:r>
-              <a:rPr lang="en-US"/>
-              <a:t>one MUST/SHOULD </a:t>
-            </a:r>
-            <a:r>
-              <a:rPr lang="en-US" dirty="0"/>
-              <a:t>implement:</a:t>
+              <a:rPr lang="en-US"/>
+              <a:t>Clarified Mandatory to Implement Ciphers that unless something else specifies it one MUST/SHOULD implement:</a:t>
             </a:r>
           </a:p>
           <a:p>
             <a:pPr lvl="1"/>
             <a:r>
-              <a:rPr lang="en-SE" dirty="0"/>
+              <a:rPr lang="en-US"/>
               <a:t>TLS_AES_128_GCM_SHA256</a:t>
             </a:r>
           </a:p>
           <a:p>
             <a:pPr lvl="1"/>
             <a:r>
-              <a:rPr lang="en-SE" dirty="0"/>
+              <a:rPr lang="en-US"/>
               <a:t>TLS_AES_256_GCM_SHA384</a:t>
             </a:r>
           </a:p>
           <a:p>
             <a:pPr lvl="1"/>
             <a:r>
-              <a:rPr lang="en-SE" dirty="0"/>
+              <a:rPr lang="en-US"/>
               <a:t>TLS_CHACHA20_POLY1305_SHA256</a:t>
             </a:r>
           </a:p>
           <a:p>
             <a:r>
-              <a:rPr lang="en-US" dirty="0"/>
+              <a:rPr lang="en-US"/>
               <a:t>Clarified error indication in the establishment procedure</a:t>
             </a:r>
           </a:p>
           <a:p>
             <a:r>
-              <a:rPr lang="en-US" dirty="0"/>
+              <a:rPr lang="en-US"/>
               <a:t>API Updates to match changes and to fix implementation experience</a:t>
             </a:r>
           </a:p>
           <a:p>
             <a:r>
-              <a:rPr lang="en-US" dirty="0"/>
+              <a:rPr lang="en-US"/>
               <a:t>Lots of editorial improvements</a:t>
             </a:r>
           </a:p>
@@ -11869,7 +13518,7 @@
               <a:buFont typeface="Arial" panose="020B0604020202020204" pitchFamily="34" charset="0"/>
               <a:buChar char="•"/>
             </a:pPr>
-            <a:endParaRPr kumimoji="0" lang="en-US" sz="2000" b="0" i="0" u="none" strike="noStrike" kern="1000" cap="none" spc="-30" normalizeH="0" baseline="0" noProof="0" dirty="0">
+            <a:endParaRPr kumimoji="0" lang="en-US" sz="2000" b="0" i="0" u="none" strike="noStrike" kern="1000" cap="none" spc="-30" normalizeH="0" baseline="0" noProof="0">
               <a:ln>
                 <a:noFill/>
               </a:ln>
@@ -11919,7 +13568,7 @@
               <a:buChar char="•"/>
             </a:pPr>
             <a:r>
-              <a:rPr lang="en-US" dirty="0"/>
+              <a:rPr lang="en-US"/>
               <a:t>Added support for simultaneous open of SCTP Association</a:t>
             </a:r>
           </a:p>
@@ -11929,7 +13578,7 @@
               <a:buChar char="•"/>
             </a:pPr>
             <a:r>
-              <a:rPr lang="en-US" dirty="0"/>
+              <a:rPr lang="en-US"/>
               <a:t>Indicate Supported Role</a:t>
             </a:r>
           </a:p>
@@ -11939,7 +13588,7 @@
               <a:buChar char="•"/>
             </a:pPr>
             <a:r>
-              <a:rPr lang="en-US" dirty="0"/>
+              <a:rPr lang="en-US"/>
               <a:t>Tiebreaker to determine if both indicate both roles</a:t>
             </a:r>
           </a:p>
@@ -11949,7 +13598,7 @@
               <a:buChar char="•"/>
             </a:pPr>
             <a:r>
-              <a:rPr lang="en-US" dirty="0"/>
+              <a:rPr lang="en-US"/>
               <a:t>Two new Error Cause Codes</a:t>
             </a:r>
           </a:p>
@@ -11959,7 +13608,7 @@
               <a:buChar char="•"/>
             </a:pPr>
             <a:r>
-              <a:rPr lang="en-US" dirty="0"/>
+              <a:rPr lang="en-US"/>
               <a:t>Updated size of DTLS Key management ID</a:t>
             </a:r>
           </a:p>
@@ -11968,10 +13617,10 @@
               <a:buFont typeface="Arial" panose="020B0604020202020204" pitchFamily="34" charset="0"/>
               <a:buChar char="•"/>
             </a:pPr>
-            <a:endParaRPr lang="en-US" dirty="0"/>
-          </a:p>
-          <a:p>
-            <a:endParaRPr lang="en-US" dirty="0"/>
+            <a:endParaRPr lang="en-US"/>
+          </a:p>
+          <a:p>
+            <a:endParaRPr lang="en-US"/>
           </a:p>
         </p:txBody>
       </p:sp>
@@ -12094,7 +13743,7 @@
               </a:spcBef>
             </a:pPr>
             <a:r>
-              <a:rPr lang="en-US" dirty="0"/>
+              <a:rPr lang="en-US"/>
               <a:t>KM Method</a:t>
             </a:r>
           </a:p>
@@ -12122,7 +13771,7 @@
           <a:lstStyle/>
           <a:p>
             <a:r>
-              <a:rPr lang="en-US" dirty="0"/>
+              <a:rPr lang="en-US"/>
               <a:t>Interoperability</a:t>
             </a:r>
           </a:p>
@@ -12155,17 +13804,17 @@
           <a:lstStyle/>
           <a:p>
             <a:r>
-              <a:rPr lang="en-US" dirty="0"/>
+              <a:rPr lang="en-US"/>
               <a:t>Interoperability achieved between Redhat’s Linux SCTP Implementation and Ericsson’s user space stack using the key-management method of </a:t>
             </a:r>
             <a:r>
-              <a:rPr lang="en-SE" dirty="0">
+              <a:rPr lang="en-US">
                 <a:hlinkClick r:id="rId2"/>
               </a:rPr>
               <a:t>draft-porfiri-tsvwg-sctp-dtls-handshake-01</a:t>
             </a:r>
             <a:r>
-              <a:rPr lang="en-US" dirty="0"/>
+              <a:rPr lang="en-US"/>
               <a:t> </a:t>
             </a:r>
           </a:p>
@@ -12221,7 +13870,7 @@
               </a:spcBef>
             </a:pPr>
             <a:r>
-              <a:rPr lang="en-US" dirty="0"/>
+              <a:rPr lang="en-US"/>
               <a:t>Fedora Linux Kernel</a:t>
             </a:r>
           </a:p>
@@ -12280,7 +13929,7 @@
               </a:spcBef>
             </a:pPr>
             <a:r>
-              <a:rPr lang="en-US" dirty="0"/>
+              <a:rPr lang="en-US"/>
               <a:t>Linux SCTP</a:t>
             </a:r>
           </a:p>
@@ -12336,7 +13985,7 @@
               </a:spcBef>
             </a:pPr>
             <a:r>
-              <a:rPr lang="en-US" dirty="0"/>
+              <a:rPr lang="en-US"/>
               <a:t>Ubuntu Linux Kernel</a:t>
             </a:r>
           </a:p>
@@ -12395,7 +14044,7 @@
               </a:spcBef>
             </a:pPr>
             <a:r>
-              <a:rPr lang="en-US" dirty="0"/>
+              <a:rPr lang="en-US"/>
               <a:t>Ericsson SCTP</a:t>
             </a:r>
           </a:p>
@@ -12454,7 +14103,7 @@
               </a:spcBef>
             </a:pPr>
             <a:r>
-              <a:rPr lang="en-US" dirty="0"/>
+              <a:rPr lang="en-US"/>
               <a:t>Test APP</a:t>
             </a:r>
           </a:p>
@@ -12513,7 +14162,7 @@
               </a:spcBef>
             </a:pPr>
             <a:r>
-              <a:rPr lang="en-US" dirty="0"/>
+              <a:rPr lang="en-US"/>
               <a:t>KM Method</a:t>
             </a:r>
           </a:p>
@@ -12572,7 +14221,7 @@
               </a:spcBef>
             </a:pPr>
             <a:r>
-              <a:rPr lang="en-US" dirty="0"/>
+              <a:rPr lang="en-US"/>
               <a:t>OpenSSL</a:t>
             </a:r>
           </a:p>
@@ -12658,7 +14307,7 @@
               <a:tabLst/>
             </a:pPr>
             <a:r>
-              <a:rPr kumimoji="0" lang="en-US" sz="2000" b="0" i="0" u="none" strike="noStrike" kern="1000" cap="none" spc="-30" normalizeH="0" baseline="0" noProof="0" dirty="0">
+              <a:rPr kumimoji="0" lang="en-US" sz="2000" b="0" i="0" u="none" strike="noStrike" kern="1000" cap="none" spc="-30" normalizeH="0" baseline="0" noProof="0">
                 <a:ln>
                   <a:noFill/>
                 </a:ln>
@@ -12756,7 +14405,7 @@
               <a:tabLst/>
             </a:pPr>
             <a:r>
-              <a:rPr kumimoji="0" lang="en-US" sz="2000" b="0" i="0" u="none" strike="noStrike" kern="1000" cap="none" spc="-30" normalizeH="0" baseline="0" noProof="0" dirty="0">
+              <a:rPr kumimoji="0" lang="en-US" sz="2000" b="0" i="0" u="none" strike="noStrike" kern="1000" cap="none" spc="-30" normalizeH="0" baseline="0" noProof="0">
                 <a:ln>
                   <a:noFill/>
                 </a:ln>
@@ -12828,7 +14477,7 @@
               </a:spcBef>
             </a:pPr>
             <a:r>
-              <a:rPr lang="en-US" dirty="0"/>
+              <a:rPr lang="en-US"/>
               <a:t>Test APP</a:t>
             </a:r>
           </a:p>
@@ -12887,7 +14536,7 @@
               </a:spcBef>
             </a:pPr>
             <a:r>
-              <a:rPr lang="en-US" dirty="0"/>
+              <a:rPr lang="en-US"/>
               <a:t>WolfSSL</a:t>
             </a:r>
           </a:p>
@@ -12946,7 +14595,7 @@
               </a:spcBef>
             </a:pPr>
             <a:r>
-              <a:rPr lang="en-US" dirty="0"/>
+              <a:rPr lang="en-US"/>
               <a:t>WolfSSL</a:t>
             </a:r>
           </a:p>
@@ -13034,7 +14683,7 @@
               <a:buSzTx/>
               <a:tabLst/>
             </a:pPr>
-            <a:endParaRPr kumimoji="0" lang="en-US" sz="2000" b="0" i="0" u="none" strike="noStrike" kern="1000" cap="none" spc="-30" normalizeH="0" baseline="0" noProof="0" dirty="0">
+            <a:endParaRPr kumimoji="0" lang="en-US" sz="2000" b="0" i="0" u="none" strike="noStrike" kern="1000" cap="none" spc="-30" normalizeH="0" baseline="0" noProof="0">
               <a:ln>
                 <a:noFill/>
               </a:ln>
@@ -13107,7 +14756,7 @@
           <a:lstStyle/>
           <a:p>
             <a:r>
-              <a:rPr lang="en-US" dirty="0"/>
+              <a:rPr lang="en-US"/>
               <a:t>What has been tested</a:t>
             </a:r>
           </a:p>
@@ -13139,36 +14788,36 @@
           <a:lstStyle/>
           <a:p>
             <a:r>
-              <a:rPr lang="en-US" dirty="0"/>
+              <a:rPr lang="en-US"/>
               <a:t>Pre-shared Key has been used for validating the DTLS 1.3 implementation in Linux Kernel SCTP versus the WolfSSL implementation</a:t>
             </a:r>
           </a:p>
           <a:p>
             <a:r>
-              <a:rPr lang="en-US" dirty="0"/>
+              <a:rPr lang="en-US"/>
               <a:t>Implementation of the TLS 1.3 based Key Management of draft-porfiri-sctp-dtls-handshake to validate its specification</a:t>
             </a:r>
           </a:p>
           <a:p>
             <a:r>
-              <a:rPr lang="en-US" dirty="0"/>
+              <a:rPr lang="en-US"/>
               <a:t>Simple traffic cases for PSK and TLS 1.3 Key Management</a:t>
             </a:r>
           </a:p>
           <a:p>
             <a:r>
-              <a:rPr lang="en-US" dirty="0"/>
+              <a:rPr lang="en-US"/>
               <a:t>Single and multiple rekeying for TLS 1.3 KM</a:t>
             </a:r>
           </a:p>
           <a:p>
             <a:r>
-              <a:rPr lang="en-US" dirty="0"/>
+              <a:rPr lang="en-US"/>
               <a:t>Association Restart for TLS 1.3 KM</a:t>
             </a:r>
           </a:p>
           <a:p>
-            <a:endParaRPr lang="en-US" dirty="0"/>
+            <a:endParaRPr lang="en-US"/>
           </a:p>
         </p:txBody>
       </p:sp>
@@ -13228,7 +14877,7 @@
           <a:lstStyle/>
           <a:p>
             <a:r>
-              <a:rPr lang="en-US" dirty="0"/>
+              <a:rPr lang="en-US"/>
               <a:t>Status</a:t>
             </a:r>
           </a:p>
@@ -13256,27 +14905,27 @@
           <a:lstStyle/>
           <a:p>
             <a:r>
-              <a:rPr lang="en-US" dirty="0"/>
+              <a:rPr lang="en-US"/>
               <a:t>The Design Team considers DTLS Chunk specification to be stable when it comes to format and functionality</a:t>
             </a:r>
           </a:p>
           <a:p>
             <a:pPr lvl="1"/>
             <a:r>
-              <a:rPr lang="en-US" dirty="0"/>
+              <a:rPr lang="en-US"/>
               <a:t>Two independent implementations</a:t>
             </a:r>
           </a:p>
           <a:p>
             <a:pPr lvl="1"/>
             <a:r>
-              <a:rPr lang="en-US" dirty="0"/>
+              <a:rPr lang="en-US"/>
               <a:t>Interoperability tests has shown that specification works</a:t>
             </a:r>
           </a:p>
           <a:p>
             <a:r>
-              <a:rPr lang="en-US" dirty="0"/>
+              <a:rPr lang="en-US"/>
               <a:t>Specification text has improved significantly</a:t>
             </a:r>
           </a:p>
@@ -13284,18 +14933,18 @@
             <a:pPr marL="265113" lvl="1" indent="0">
               <a:buNone/>
             </a:pPr>
-            <a:endParaRPr lang="en-US" dirty="0"/>
-          </a:p>
-          <a:p>
-            <a:r>
-              <a:rPr lang="en-US" dirty="0"/>
+            <a:endParaRPr lang="en-US"/>
+          </a:p>
+          <a:p>
+            <a:r>
+              <a:rPr lang="en-US"/>
               <a:t>The Design Team requests reviews of the DTLS Chunk</a:t>
             </a:r>
           </a:p>
           <a:p>
             <a:pPr lvl="1"/>
             <a:r>
-              <a:rPr lang="en-US" dirty="0"/>
+              <a:rPr lang="en-US"/>
               <a:t>Consider to send LS to 3GPP on progress and request reviews</a:t>
             </a:r>
           </a:p>
@@ -13303,7 +14952,7 @@
             <a:pPr marL="265113" lvl="1" indent="0">
               <a:buNone/>
             </a:pPr>
-            <a:endParaRPr lang="en-US" dirty="0"/>
+            <a:endParaRPr lang="en-US"/>
           </a:p>
         </p:txBody>
       </p:sp>
@@ -13359,7 +15008,7 @@
           <a:lstStyle/>
           <a:p>
             <a:r>
-              <a:rPr lang="en-US" dirty="0"/>
+              <a:rPr lang="en-US"/>
               <a:t>Open Issue</a:t>
             </a:r>
           </a:p>
@@ -13387,21 +15036,21 @@
           <a:lstStyle/>
           <a:p>
             <a:r>
-              <a:rPr lang="en-US" dirty="0"/>
+              <a:rPr lang="en-US"/>
               <a:t>Do the specification need both the abstract API and the Socket API?</a:t>
             </a:r>
           </a:p>
           <a:p>
             <a:pPr lvl="1"/>
             <a:r>
-              <a:rPr lang="en-US" dirty="0"/>
+              <a:rPr lang="en-US"/>
               <a:t>They are different and shows that there are multiple implementations possible</a:t>
             </a:r>
           </a:p>
           <a:p>
             <a:pPr lvl="1"/>
             <a:r>
-              <a:rPr lang="en-US" dirty="0"/>
+              <a:rPr lang="en-US"/>
               <a:t>It is a lot of text</a:t>
             </a:r>
           </a:p>
@@ -13460,7 +15109,7 @@
           </a:bodyPr>
           <a:lstStyle/>
           <a:p>
-            <a:endParaRPr lang="en-US" dirty="0"/>
+            <a:endParaRPr lang="en-US"/>
           </a:p>
         </p:txBody>
       </p:sp>
@@ -14583,7 +16232,7 @@
 </file>
 
 <file path=customXml/item1.xml><?xml version="1.0" encoding="utf-8"?>
-<TemplafySlideTemplateConfiguration><![CDATA[{"elementsMetadata":[],"documentContentValidatorConfiguration":{"enableDocumentContentValidator":false,"documentContentValidatorVersion":0},"slideId":"637027476704980324","enableDocumentContentUpdater":true,"version":"1.9"}]]></TemplafySlideTemplateConfiguration>
+<TemplafySlideTemplateConfiguration><![CDATA[{"documentContentValidatorConfiguration":{"enableDocumentContentValidator":false,"documentContentValidatorVersion":0},"elementsMetadata":[],"slideId":"638780731662370544","enableDocumentContentUpdater":true,"version":"1.9"}]]></TemplafySlideTemplateConfiguration>
 </file>
 
 <file path=customXml/item10.xml><?xml version="1.0" encoding="utf-8"?>
@@ -14591,53 +16240,34 @@
 </file>
 
 <file path=customXml/item11.xml><?xml version="1.0" encoding="utf-8"?>
-<TemplafySlideTemplateConfiguration><![CDATA[{"documentContentValidatorConfiguration":{"enableDocumentContentValidator":false,"documentContentValidatorVersion":0},"elementsMetadata":[],"slideId":"638780731662370544","enableDocumentContentUpdater":true,"version":"1.9"}]]></TemplafySlideTemplateConfiguration>
+<TemplafySlideFormConfiguration><![CDATA[{"formFields":[],"formDataEntries":[]}]]></TemplafySlideFormConfiguration>
 </file>
 
 <file path=customXml/item12.xml><?xml version="1.0" encoding="utf-8"?>
+<TemplafySlideTemplateConfiguration><![CDATA[{"documentContentValidatorConfiguration":{"enableDocumentContentValidator":false,"documentContentValidatorVersion":0},"elementsMetadata":[],"slideId":"638780731662214300","enableDocumentContentUpdater":true,"version":"1.9"}]]></TemplafySlideTemplateConfiguration>
+</file>
+
+<file path=customXml/item13.xml><?xml version="1.0" encoding="utf-8"?>
+<TemplafySlideTemplateConfiguration><![CDATA[{"documentContentValidatorConfiguration":{"enableDocumentContentValidator":false,"documentContentValidatorVersion":0},"elementsMetadata":[],"slideId":"638780731662526815","enableDocumentContentUpdater":true,"version":"1.9"}]]></TemplafySlideTemplateConfiguration>
+</file>
+
+<file path=customXml/item14.xml><?xml version="1.0" encoding="utf-8"?>
 <TemplafySlideFormConfiguration><![CDATA[{"formFields":[],"formDataEntries":[]}]]></TemplafySlideFormConfiguration>
 </file>
 
-<file path=customXml/item13.xml><?xml version="1.0" encoding="utf-8"?>
+<file path=customXml/item15.xml><?xml version="1.0" encoding="utf-8"?>
+<TemplafySlideTemplateConfiguration><![CDATA[{"elementsMetadata":[],"documentContentValidatorConfiguration":{"enableDocumentContentValidator":false,"documentContentValidatorVersion":0},"slideId":"637027476704980324","enableDocumentContentUpdater":true,"version":"1.9"}]]></TemplafySlideTemplateConfiguration>
+</file>
+
+<file path=customXml/item2.xml><?xml version="1.0" encoding="utf-8"?>
+<TemplafyTemplateConfiguration><![CDATA[{"elementsMetadata":[],"transformationConfigurations":[{"language":"{{DocumentLanguage}}","disableUpdates":false,"type":"proofingLanguage"},{"propertyName":"FooterText","propertyValue":"true","disableUpdates":false,"type":"customDocumentProperty"},{"propertyName":"SecurityClass","propertyValue":"{{Form.ConfidentialityClass.Confidentiality}}","disableUpdates":false,"type":"customDocumentProperty"},{"propertyName":"ExtConf","propertyValue":"{{Form.ExternalConfidentialityLabel.ExternalConfidentiality}}","disableUpdates":false,"type":"customDocumentProperty"},{"propertyName":"Prepared","propertyValue":"{{Form.Prepared}}","disableUpdates":false,"type":"customDocumentProperty"},{"propertyName":"ApprovedBy","propertyValue":"{{Form.ApprovedBy}}","disableUpdates":false,"type":"customDocumentProperty"},{"propertyName":"DocNo","propertyValue":"{{Form.DocumentNumber}} {{Form.LanguageCode.LanguageCode}}","disableUpdates":false,"type":"customDocumentProperty"},{"propertyName":"Checked","propertyValue":"{{Form.Checked}}","disableUpdates":false,"type":"customDocumentProperty"},{"propertyName":"Date","propertyValue":"{{Form.Date}}","disableUpdates":false,"type":"customDocumentProperty"},{"propertyName":"Reference","propertyValue":"{{Form.Reference}}","disableUpdates":false,"type":"customDocumentProperty"},{"propertyName":"Title","propertyValue":"{{Form.DocumentTitle}}","disableUpdates":false,"type":"customDocumentProperty"},{"propertyName":"Keyword","propertyValue":"{{Form.Keywords}}","disableUpdates":false,"type":"customDocumentProperty"},{"propertyName":"DocumentType","propertyValue":"Presentation2011","disableUpdates":false,"type":"customDocumentProperty"},{"propertyName":"Language","propertyValue":"EnglishUS","disableUpdates":false,"type":"customDocumentProperty"},{"propertyName":"TemplateID","propertyValue":"FALSE","disableUpdates":false,"type":"customDocumentProperty"},{"propertyName":"ConfCtrl","propertyValue":"FALSE","disableUpdates":false,"type":"customDocumentProperty"},{"propertyName":"title","propertyValue":"{{Form.DocumentTitle}}","disableUpdates":false,"type":"documentProperty"},{"propertyName":"keywords","propertyValue":"{{Form.Keywords}}","disableUpdates":false,"type":"documentProperty"},{"propertyName":"creator","propertyValue":"{{Form.Prepared}}","disableUpdates":false,"type":"documentProperty"},{"propertyName":"DocTitle","propertyValue":"{{Form.DocTitle.DocTitle}}","disableUpdates":false,"type":"customDocumentProperty"},{"propertyName":"IsDocument","propertyValue":"{{Form.TemplateType.IsDocument}}","disableUpdates":false,"type":"customDocumentProperty"},{"propertyName":"IsPresentation","propertyValue":"{{Form.TemplateType.IsPresentation}}","disableUpdates":false,"type":"customDocumentProperty"},{"propertyName":"company","propertyValue":"Ericsson","disableUpdates":false,"type":"documentProperty"},{"propertyName":"PageNumberVisible","propertyValue":"{{Form.TotalPageNo.TotalPageNo_value}}","disableUpdates":false,"type":"customDocumentProperty"},{"propertyName":"Revision","propertyValue":"{{Form.Revision}}","disableUpdates":false,"type":"customDocumentProperty"},{"propertyName":"DocType","propertyValue":"{{Form.DocTypePresentation}}","disableUpdates":false,"type":"customDocumentProperty"},{"propertyName":"TemplateVersion","propertyValue":"R2A","disableUpdates":false,"type":"customDocumentProperty"},{"propertyName":"PackageNo","propertyValue":"LXA 119 603","disableUpdates":false,"type":"customDocumentProperty"},{"propertyName":"PackageVersion","propertyValue":"R6B","disableUpdates":false,"type":"customDocumentProperty"},{"propertyName":"TemplateName","propertyValue":"CXC 173 2731/1","disableUpdates":false,"type":"customDocumentProperty"},{"propertyName":"DocName","propertyValue":" ","disableUpdates":false,"type":"customDocumentProperty"},{"propertyName":"description","propertyValue":"{{Form.DocumentNumber}} {{Form.LanguageCode.LanguageCode}}\nRev {{Form.Revision}}","disableUpdates":false,"type":"documentProperty"},{"propertyName":"DocNoVisible","propertyValue":"{{Form.DocNo.ShowDocNo}}","disableUpdates":false,"type":"customDocumentProperty"}],"templateName":"","templateDescription":"","enableDocumentContentUpdater":true,"version":"1.9"}]]></TemplafyTemplateConfiguration>
+</file>
+
+<file path=customXml/item3.xml><?xml version="1.0" encoding="utf-8"?>
 <TemplafySlideTemplateConfiguration><![CDATA[{"documentContentValidatorConfiguration":{"enableDocumentContentValidator":false,"documentContentValidatorVersion":0},"elementsMetadata":[],"slideId":"638780731662370545","enableDocumentContentUpdater":true,"version":"1.9"}]]></TemplafySlideTemplateConfiguration>
 </file>
 
-<file path=customXml/item14.xml><?xml version="1.0" encoding="utf-8"?>
-<TemplafySlideTemplateConfiguration><![CDATA[{"documentContentValidatorConfiguration":{"enableDocumentContentValidator":false,"documentContentValidatorVersion":0},"elementsMetadata":[],"slideId":"638780731662526815","enableDocumentContentUpdater":true,"version":"1.9"}]]></TemplafySlideTemplateConfiguration>
-</file>
-
-<file path=customXml/item15.xml><?xml version="1.0" encoding="utf-8"?>
-<TemplafySlideFormConfiguration><![CDATA[{"formFields":[],"formDataEntries":[]}]]></TemplafySlideFormConfiguration>
-</file>
-
-<file path=customXml/item2.xml><?xml version="1.0" encoding="utf-8"?>
-<TemplafyFormConfiguration><![CDATA[{"formFields":[{"required":true,"placeholder":"","lines":0,"helpTexts":{"prefix":"","postfix":""},"spacing":{},"type":"textBox","name":"DocumentTitle","label":"Document Title","fullyQualifiedName":"DocumentTitle"},{"dataSource":"Confidentiality","displayColumn":"confidentiality","hideIfNoUserInteractionRequired":false,"distinct":true,"required":true,"autoSelectFirstOption":false,"helpTexts":{"prefix":"","postfix":""},"spacing":{},"type":"dropDown","name":"ConfidentialityClass","label":"Confidentiality Class","fullyQualifiedName":"ConfidentialityClass"},{"dataSource":"External Confidentiality label","displayColumn":"externalConfidentiality","hideIfNoUserInteractionRequired":false,"distinct":true,"required":false,"autoSelectFirstOption":false,"helpTexts":{"prefix":"","postfix":"(If no external confidentiality class then please choose the blank value)"},"spacing":{},"type":"dropDown","name":"ExternalConfidentialityLabel","label":"External Confidentiality label","fullyQualifiedName":"ExternalConfidentialityLabel"},{"column":"documentType","required":false,"placeholder":"","autoSelectFirstOption":false,"helpTexts":{"prefix":"","postfix":""},"spacing":{},"dataSource":"PowerPoint Document Type","type":"comboBox","name":"DocTypePresentation","label":"Document Type","fullyQualifiedName":"DocTypePresentation"},{"required":false,"placeholder":"","lines":0,"helpTexts":{"prefix":"","postfix":"(Commonly assigned by EriDoc)"},"spacing":{},"type":"textBox","name":"DocumentNumber","label":"Document Number","fullyQualifiedName":"DocumentNumber"},{"dataSource":"Language code","displayColumn":"showName","defaultValue":"1","hideIfNoUserInteractionRequired":false,"distinct":true,"required":false,"autoSelectFirstOption":false,"helpTexts":{"prefix":"","postfix":"(The language code will be appended to the Document No.)"},"spacing":{},"type":"dropDown","name":"LanguageCode","label":"Language Code","fullyQualifiedName":"LanguageCode"},{"column":"revision","required":false,"placeholder":"","autoSelectFirstOption":false,"helpTexts":{"prefix":"","postfix":""},"spacing":{},"dataSource":"Revision","type":"comboBox","name":"Revision","label":"Revision","fullyQualifiedName":"Revision"},{"required":false,"helpTexts":{"prefix":"","postfix":""},"spacing":{},"type":"datePicker","name":"Date","label":"Date","fullyQualifiedName":"Date"},{"helpTexts":{"prefix":"","postfix":""},"spacing":{},"type":"heading","name":"FooterVisibilityOptions","label":"Footer Visibility Options","fullyQualifiedName":"FooterVisibilityOptions"},{"dataSource":"PPT FooterVisibility","displayColumn":"templateType","defaultValue":"1","hideIfNoUserInteractionRequired":false,"distinct":true,"required":true,"autoSelectFirstOption":false,"helpTexts":{"prefix":"","postfix":""},"spacing":{},"type":"dropDown","name":"TemplateType","label":"Is this a document or presentation?","fullyQualifiedName":"TemplateType"},{"dataSource":"PPT FooterVisibility","displayColumn":"docTitle_label","filter":{"column":"templateType","otherFieldName":"TemplateType","fullyQualifiedOtherFieldName":"TemplateType","otherFieldColumn":"TemplateType","formReference":"none","operator":"equals"},"hideIfNoUserInteractionRequired":false,"distinct":true,"required":false,"autoSelectFirstOption":true,"helpTexts":{"prefix":"","postfix":""},"spacing":{},"type":"dropDown","name":"DocTitle","label":"Show document title in footer?","fullyQualifiedName":"DocTitle"},{"dataSource":"PPT FooterVisibility","displayColumn":"totalPageNo_text","filter":{"column":"templateType","otherFieldName":"TemplateType","fullyQualifiedOtherFieldName":"TemplateType","otherFieldColumn":"TemplateType","formReference":"none","operator":"equals"},"hideIfNoUserInteractionRequired":false,"distinct":true,"required":false,"autoSelectFirstOption":true,"helpTexts":{"prefix":"","postfix":""},"spacing":{},"type":"dropDown","name":"TotalPageNo","label":"Page numbering","fullyQualifiedName":"TotalPageNo"},{"dataSource":"PPT FooterVisibility","displayColumn":"showDocNo_label","filter":{"column":"templateType","otherFieldName":"TemplateType","fullyQualifiedOtherFieldName":"TemplateType","otherFieldColumn":"TemplateType","formReference":"none","operator":"equals"},"hideIfNoUserInteractionRequired":false,"distinct":true,"required":false,"autoSelectFirstOption":true,"helpTexts":{"prefix":"","postfix":""},"spacing":{},"type":"dropDown","name":"DocNo","label":"Show document number in footer?","fullyQualifiedName":"DocNo"},{"required":false,"placeholder":"","lines":0,"defaultValue":"{{UserProfile.Prepared}}","helpTexts":{"prefix":"","postfix":""},"spacing":{},"type":"textBox","name":"Prepared","label":"Prepared By (Subject Responsible)","fullyQualifiedName":"Prepared"},{"required":false,"placeholder":"","lines":0,"helpTexts":{"prefix":"","postfix":""},"spacing":{},"type":"textBox","name":"ApprovedBy","label":"Approved By (Document Responsible)","fullyQualifiedName":"ApprovedBy"},{"required":false,"placeholder":"","lines":0,"helpTexts":{"prefix":"","postfix":""},"spacing":{},"type":"textBox","name":"Checked","label":"Checked","fullyQualifiedName":"Checked"},{"required":false,"placeholder":"","lines":0,"helpTexts":{"prefix":"","postfix":"(Overwritten with EriDoc values at check-in)"},"spacing":{},"type":"textBox","name":"Reference","label":"Reference","fullyQualifiedName":"Reference"},{"required":false,"placeholder":"","lines":0,"helpTexts":{"prefix":"","postfix":""},"spacing":{},"type":"textBox","name":"Keywords","label":"Keywords","fullyQualifiedName":"Keywords"}],"formDataEntries":[{"name":"DocumentTitle","value":"pYKnA1M1iVGe972lLW237tBCWABVWwTW03TtSWLVXT0="},{"name":"ConfidentialityClass","value":"cT/FOwTWaPknrhRlNMh4SQ=="},{"name":"LanguageCode","value":"5wlu7ZdPxHQj1W0w+yTNSg=="},{"name":"Date","value":"fbd86WXKelPa8nlkyyencA=="},{"name":"TemplateType","value":"5wlu7ZdPxHQj1W0w+yTNSg=="},{"name":"DocTitle","value":"5wlu7ZdPxHQj1W0w+yTNSg=="},{"name":"TotalPageNo","value":"5wlu7ZdPxHQj1W0w+yTNSg=="},{"name":"DocNo","value":"5wlu7ZdPxHQj1W0w+yTNSg=="},{"name":"Prepared","value":"fdJUhNIjdwPGv3mvNZlQT4ASrQGRpusVL7uBTgJlxbo="}]}]]></TemplafyFormConfiguration>
-</file>
-
-<file path=customXml/item3.xml><?xml version="1.0" encoding="utf-8"?>
-<TemplafyTemplateConfiguration><![CDATA[{"elementsMetadata":[],"transformationConfigurations":[{"language":"{{DocumentLanguage}}","disableUpdates":false,"type":"proofingLanguage"},{"propertyName":"FooterText","propertyValue":"true","disableUpdates":false,"type":"customDocumentProperty"},{"propertyName":"SecurityClass","propertyValue":"{{Form.ConfidentialityClass.Confidentiality}}","disableUpdates":false,"type":"customDocumentProperty"},{"propertyName":"ExtConf","propertyValue":"{{Form.ExternalConfidentialityLabel.ExternalConfidentiality}}","disableUpdates":false,"type":"customDocumentProperty"},{"propertyName":"Prepared","propertyValue":"{{Form.Prepared}}","disableUpdates":false,"type":"customDocumentProperty"},{"propertyName":"ApprovedBy","propertyValue":"{{Form.ApprovedBy}}","disableUpdates":false,"type":"customDocumentProperty"},{"propertyName":"DocNo","propertyValue":"{{Form.DocumentNumber}} {{Form.LanguageCode.LanguageCode}}","disableUpdates":false,"type":"customDocumentProperty"},{"propertyName":"Checked","propertyValue":"{{Form.Checked}}","disableUpdates":false,"type":"customDocumentProperty"},{"propertyName":"Date","propertyValue":"{{Form.Date}}","disableUpdates":false,"type":"customDocumentProperty"},{"propertyName":"Reference","propertyValue":"{{Form.Reference}}","disableUpdates":false,"type":"customDocumentProperty"},{"propertyName":"Title","propertyValue":"{{Form.DocumentTitle}}","disableUpdates":false,"type":"customDocumentProperty"},{"propertyName":"Keyword","propertyValue":"{{Form.Keywords}}","disableUpdates":false,"type":"customDocumentProperty"},{"propertyName":"DocumentType","propertyValue":"Presentation2011","disableUpdates":false,"type":"customDocumentProperty"},{"propertyName":"Language","propertyValue":"EnglishUS","disableUpdates":false,"type":"customDocumentProperty"},{"propertyName":"TemplateID","propertyValue":"FALSE","disableUpdates":false,"type":"customDocumentProperty"},{"propertyName":"ConfCtrl","propertyValue":"FALSE","disableUpdates":false,"type":"customDocumentProperty"},{"propertyName":"title","propertyValue":"{{Form.DocumentTitle}}","disableUpdates":false,"type":"documentProperty"},{"propertyName":"keywords","propertyValue":"{{Form.Keywords}}","disableUpdates":false,"type":"documentProperty"},{"propertyName":"creator","propertyValue":"{{Form.Prepared}}","disableUpdates":false,"type":"documentProperty"},{"propertyName":"DocTitle","propertyValue":"{{Form.DocTitle.DocTitle}}","disableUpdates":false,"type":"customDocumentProperty"},{"propertyName":"IsDocument","propertyValue":"{{Form.TemplateType.IsDocument}}","disableUpdates":false,"type":"customDocumentProperty"},{"propertyName":"IsPresentation","propertyValue":"{{Form.TemplateType.IsPresentation}}","disableUpdates":false,"type":"customDocumentProperty"},{"propertyName":"company","propertyValue":"Ericsson","disableUpdates":false,"type":"documentProperty"},{"propertyName":"PageNumberVisible","propertyValue":"{{Form.TotalPageNo.TotalPageNo_value}}","disableUpdates":false,"type":"customDocumentProperty"},{"propertyName":"Revision","propertyValue":"{{Form.Revision}}","disableUpdates":false,"type":"customDocumentProperty"},{"propertyName":"DocType","propertyValue":"{{Form.DocTypePresentation}}","disableUpdates":false,"type":"customDocumentProperty"},{"propertyName":"TemplateVersion","propertyValue":"R2A","disableUpdates":false,"type":"customDocumentProperty"},{"propertyName":"PackageNo","propertyValue":"LXA 119 603","disableUpdates":false,"type":"customDocumentProperty"},{"propertyName":"PackageVersion","propertyValue":"R6B","disableUpdates":false,"type":"customDocumentProperty"},{"propertyName":"TemplateName","propertyValue":"CXC 173 2731/1","disableUpdates":false,"type":"customDocumentProperty"},{"propertyName":"DocName","propertyValue":" ","disableUpdates":false,"type":"customDocumentProperty"},{"propertyName":"description","propertyValue":"{{Form.DocumentNumber}} {{Form.LanguageCode.LanguageCode}}\nRev {{Form.Revision}}","disableUpdates":false,"type":"documentProperty"},{"propertyName":"DocNoVisible","propertyValue":"{{Form.DocNo.ShowDocNo}}","disableUpdates":false,"type":"customDocumentProperty"}],"templateName":"","templateDescription":"","enableDocumentContentUpdater":true,"version":"1.9"}]]></TemplafyTemplateConfiguration>
-</file>
-
 <file path=customXml/item4.xml><?xml version="1.0" encoding="utf-8"?>
-<?mso-contentType ?>
-<FormTemplates xmlns="http://schemas.microsoft.com/sharepoint/v3/contenttype/forms">
-  <Display>DocumentLibraryForm</Display>
-  <Edit>DocumentLibraryForm</Edit>
-  <New>DocumentLibraryForm</New>
-</FormTemplates>
-</file>
-
-<file path=customXml/item5.xml><?xml version="1.0" encoding="utf-8"?>
-<p:properties xmlns:p="http://schemas.microsoft.com/office/2006/metadata/properties" xmlns:xsi="http://www.w3.org/2001/XMLSchema-instance" xmlns:pc="http://schemas.microsoft.com/office/infopath/2007/PartnerControls">
-  <documentManagement/>
-</p:properties>
-</file>
-
-<file path=customXml/item6.xml><?xml version="1.0" encoding="utf-8"?>
-<TemplafySlideFormConfiguration><![CDATA[{"formFields":[],"formDataEntries":[]}]]></TemplafySlideFormConfiguration>
-</file>
-
-<file path=customXml/item7.xml><?xml version="1.0" encoding="utf-8"?>
 <ct:contentTypeSchema xmlns:ct="http://schemas.microsoft.com/office/2006/metadata/contentType" xmlns:ma="http://schemas.microsoft.com/office/2006/metadata/properties/metaAttributes" ct:_="" ma:_="" ma:contentTypeName="Document" ma:contentTypeID="0x0101002C8661F604A9A64C9627B875CBEE0D49" ma:contentTypeVersion="15" ma:contentTypeDescription="Create a new document." ma:contentTypeScope="" ma:versionID="a479c757ef17ea2b01d6697cee2b70c6">
   <xsd:schema xmlns:xsd="http://www.w3.org/2001/XMLSchema" xmlns:xs="http://www.w3.org/2001/XMLSchema" xmlns:p="http://schemas.microsoft.com/office/2006/metadata/properties" xmlns:ns3="92e1255f-bb7b-4dc9-b051-584cc104eb44" xmlns:ns4="a6550eff-0fc9-443f-8e77-72cbcf778382" targetNamespace="http://schemas.microsoft.com/office/2006/metadata/properties" ma:root="true" ma:fieldsID="08df2d0f55032e4052d032aa8ec7ed1f" ns3:_="" ns4:_="">
     <xsd:import namespace="92e1255f-bb7b-4dc9-b051-584cc104eb44"/>
@@ -14874,69 +16504,113 @@
 </ct:contentTypeSchema>
 </file>
 
+<file path=customXml/item5.xml><?xml version="1.0" encoding="utf-8"?>
+<TemplafySlideFormConfiguration><![CDATA[{"formFields":[],"formDataEntries":[]}]]></TemplafySlideFormConfiguration>
+</file>
+
+<file path=customXml/item6.xml><?xml version="1.0" encoding="utf-8"?>
+<?mso-contentType ?>
+<FormTemplates xmlns="http://schemas.microsoft.com/sharepoint/v3/contenttype/forms">
+  <Display>DocumentLibraryForm</Display>
+  <Edit>DocumentLibraryForm</Edit>
+  <New>DocumentLibraryForm</New>
+</FormTemplates>
+</file>
+
+<file path=customXml/item7.xml><?xml version="1.0" encoding="utf-8"?>
+<p:properties xmlns:p="http://schemas.microsoft.com/office/2006/metadata/properties" xmlns:xsi="http://www.w3.org/2001/XMLSchema-instance" xmlns:pc="http://schemas.microsoft.com/office/infopath/2007/PartnerControls">
+  <documentManagement/>
+</p:properties>
+</file>
+
 <file path=customXml/item8.xml><?xml version="1.0" encoding="utf-8"?>
 <TemplafySlideFormConfiguration><![CDATA[{"formFields":[],"formDataEntries":[]}]]></TemplafySlideFormConfiguration>
 </file>
 
 <file path=customXml/item9.xml><?xml version="1.0" encoding="utf-8"?>
-<TemplafySlideTemplateConfiguration><![CDATA[{"documentContentValidatorConfiguration":{"enableDocumentContentValidator":false,"documentContentValidatorVersion":0},"elementsMetadata":[],"slideId":"638780731662214300","enableDocumentContentUpdater":true,"version":"1.9"}]]></TemplafySlideTemplateConfiguration>
+<TemplafyFormConfiguration><![CDATA[{"formFields":[{"required":true,"placeholder":"","lines":0,"helpTexts":{"prefix":"","postfix":""},"spacing":{},"type":"textBox","name":"DocumentTitle","label":"Document Title","fullyQualifiedName":"DocumentTitle"},{"dataSource":"Confidentiality","displayColumn":"confidentiality","hideIfNoUserInteractionRequired":false,"distinct":true,"required":true,"autoSelectFirstOption":false,"helpTexts":{"prefix":"","postfix":""},"spacing":{},"type":"dropDown","name":"ConfidentialityClass","label":"Confidentiality Class","fullyQualifiedName":"ConfidentialityClass"},{"dataSource":"External Confidentiality label","displayColumn":"externalConfidentiality","hideIfNoUserInteractionRequired":false,"distinct":true,"required":false,"autoSelectFirstOption":false,"helpTexts":{"prefix":"","postfix":"(If no external confidentiality class then please choose the blank value)"},"spacing":{},"type":"dropDown","name":"ExternalConfidentialityLabel","label":"External Confidentiality label","fullyQualifiedName":"ExternalConfidentialityLabel"},{"column":"documentType","required":false,"placeholder":"","autoSelectFirstOption":false,"helpTexts":{"prefix":"","postfix":""},"spacing":{},"dataSource":"PowerPoint Document Type","type":"comboBox","name":"DocTypePresentation","label":"Document Type","fullyQualifiedName":"DocTypePresentation"},{"required":false,"placeholder":"","lines":0,"helpTexts":{"prefix":"","postfix":"(Commonly assigned by EriDoc)"},"spacing":{},"type":"textBox","name":"DocumentNumber","label":"Document Number","fullyQualifiedName":"DocumentNumber"},{"dataSource":"Language code","displayColumn":"showName","defaultValue":"1","hideIfNoUserInteractionRequired":false,"distinct":true,"required":false,"autoSelectFirstOption":false,"helpTexts":{"prefix":"","postfix":"(The language code will be appended to the Document No.)"},"spacing":{},"type":"dropDown","name":"LanguageCode","label":"Language Code","fullyQualifiedName":"LanguageCode"},{"column":"revision","required":false,"placeholder":"","autoSelectFirstOption":false,"helpTexts":{"prefix":"","postfix":""},"spacing":{},"dataSource":"Revision","type":"comboBox","name":"Revision","label":"Revision","fullyQualifiedName":"Revision"},{"required":false,"helpTexts":{"prefix":"","postfix":""},"spacing":{},"type":"datePicker","name":"Date","label":"Date","fullyQualifiedName":"Date"},{"helpTexts":{"prefix":"","postfix":""},"spacing":{},"type":"heading","name":"FooterVisibilityOptions","label":"Footer Visibility Options","fullyQualifiedName":"FooterVisibilityOptions"},{"dataSource":"PPT FooterVisibility","displayColumn":"templateType","defaultValue":"1","hideIfNoUserInteractionRequired":false,"distinct":true,"required":true,"autoSelectFirstOption":false,"helpTexts":{"prefix":"","postfix":""},"spacing":{},"type":"dropDown","name":"TemplateType","label":"Is this a document or presentation?","fullyQualifiedName":"TemplateType"},{"dataSource":"PPT FooterVisibility","displayColumn":"docTitle_label","filter":{"column":"templateType","otherFieldName":"TemplateType","fullyQualifiedOtherFieldName":"TemplateType","otherFieldColumn":"TemplateType","formReference":"none","operator":"equals"},"hideIfNoUserInteractionRequired":false,"distinct":true,"required":false,"autoSelectFirstOption":true,"helpTexts":{"prefix":"","postfix":""},"spacing":{},"type":"dropDown","name":"DocTitle","label":"Show document title in footer?","fullyQualifiedName":"DocTitle"},{"dataSource":"PPT FooterVisibility","displayColumn":"totalPageNo_text","filter":{"column":"templateType","otherFieldName":"TemplateType","fullyQualifiedOtherFieldName":"TemplateType","otherFieldColumn":"TemplateType","formReference":"none","operator":"equals"},"hideIfNoUserInteractionRequired":false,"distinct":true,"required":false,"autoSelectFirstOption":true,"helpTexts":{"prefix":"","postfix":""},"spacing":{},"type":"dropDown","name":"TotalPageNo","label":"Page numbering","fullyQualifiedName":"TotalPageNo"},{"dataSource":"PPT FooterVisibility","displayColumn":"showDocNo_label","filter":{"column":"templateType","otherFieldName":"TemplateType","fullyQualifiedOtherFieldName":"TemplateType","otherFieldColumn":"TemplateType","formReference":"none","operator":"equals"},"hideIfNoUserInteractionRequired":false,"distinct":true,"required":false,"autoSelectFirstOption":true,"helpTexts":{"prefix":"","postfix":""},"spacing":{},"type":"dropDown","name":"DocNo","label":"Show document number in footer?","fullyQualifiedName":"DocNo"},{"required":false,"placeholder":"","lines":0,"defaultValue":"{{UserProfile.Prepared}}","helpTexts":{"prefix":"","postfix":""},"spacing":{},"type":"textBox","name":"Prepared","label":"Prepared By (Subject Responsible)","fullyQualifiedName":"Prepared"},{"required":false,"placeholder":"","lines":0,"helpTexts":{"prefix":"","postfix":""},"spacing":{},"type":"textBox","name":"ApprovedBy","label":"Approved By (Document Responsible)","fullyQualifiedName":"ApprovedBy"},{"required":false,"placeholder":"","lines":0,"helpTexts":{"prefix":"","postfix":""},"spacing":{},"type":"textBox","name":"Checked","label":"Checked","fullyQualifiedName":"Checked"},{"required":false,"placeholder":"","lines":0,"helpTexts":{"prefix":"","postfix":"(Overwritten with EriDoc values at check-in)"},"spacing":{},"type":"textBox","name":"Reference","label":"Reference","fullyQualifiedName":"Reference"},{"required":false,"placeholder":"","lines":0,"helpTexts":{"prefix":"","postfix":""},"spacing":{},"type":"textBox","name":"Keywords","label":"Keywords","fullyQualifiedName":"Keywords"}],"formDataEntries":[{"name":"DocumentTitle","value":"pYKnA1M1iVGe972lLW237tBCWABVWwTW03TtSWLVXT0="},{"name":"ConfidentialityClass","value":"cT/FOwTWaPknrhRlNMh4SQ=="},{"name":"LanguageCode","value":"5wlu7ZdPxHQj1W0w+yTNSg=="},{"name":"Date","value":"fbd86WXKelPa8nlkyyencA=="},{"name":"TemplateType","value":"5wlu7ZdPxHQj1W0w+yTNSg=="},{"name":"DocTitle","value":"5wlu7ZdPxHQj1W0w+yTNSg=="},{"name":"TotalPageNo","value":"cT/FOwTWaPknrhRlNMh4SQ=="},{"name":"DocNo","value":"5wlu7ZdPxHQj1W0w+yTNSg=="},{"name":"Prepared","value":"fdJUhNIjdwPGv3mvNZlQT4ASrQGRpusVL7uBTgJlxbo="}]}]]></TemplafyFormConfiguration>
 </file>
 
 <file path=customXml/itemProps1.xml><?xml version="1.0" encoding="utf-8"?>
+<ds:datastoreItem xmlns:ds="http://schemas.openxmlformats.org/officeDocument/2006/customXml" ds:itemID="{683FEB75-8CFA-449C-A6B1-B1E4A86A58A1}">
+  <ds:schemaRefs/>
+</ds:datastoreItem>
+</file>
+
+<file path=customXml/itemProps10.xml><?xml version="1.0" encoding="utf-8"?>
+<ds:datastoreItem xmlns:ds="http://schemas.openxmlformats.org/officeDocument/2006/customXml" ds:itemID="{32BA7684-6BE4-4F73-B22E-30934AB379B8}">
+  <ds:schemaRefs/>
+</ds:datastoreItem>
+</file>
+
+<file path=customXml/itemProps11.xml><?xml version="1.0" encoding="utf-8"?>
+<ds:datastoreItem xmlns:ds="http://schemas.openxmlformats.org/officeDocument/2006/customXml" ds:itemID="{822D38AD-8010-4CD3-BD6B-117CB8DF70A4}">
+  <ds:schemaRefs/>
+</ds:datastoreItem>
+</file>
+
+<file path=customXml/itemProps12.xml><?xml version="1.0" encoding="utf-8"?>
+<ds:datastoreItem xmlns:ds="http://schemas.openxmlformats.org/officeDocument/2006/customXml" ds:itemID="{72516535-7702-46AF-9B1F-8623A67A824E}">
+  <ds:schemaRefs/>
+</ds:datastoreItem>
+</file>
+
+<file path=customXml/itemProps13.xml><?xml version="1.0" encoding="utf-8"?>
+<ds:datastoreItem xmlns:ds="http://schemas.openxmlformats.org/officeDocument/2006/customXml" ds:itemID="{1CE36EA9-2186-4EB1-871A-8AE59C2A13BB}">
+  <ds:schemaRefs/>
+</ds:datastoreItem>
+</file>
+
+<file path=customXml/itemProps14.xml><?xml version="1.0" encoding="utf-8"?>
+<ds:datastoreItem xmlns:ds="http://schemas.openxmlformats.org/officeDocument/2006/customXml" ds:itemID="{B9AEDDE3-EA02-4A8F-B8F8-0606A0AA45FC}">
+  <ds:schemaRefs/>
+</ds:datastoreItem>
+</file>
+
+<file path=customXml/itemProps15.xml><?xml version="1.0" encoding="utf-8"?>
 <ds:datastoreItem xmlns:ds="http://schemas.openxmlformats.org/officeDocument/2006/customXml" ds:itemID="{C09F197C-6A49-47D0-B877-F88807989676}">
   <ds:schemaRefs/>
 </ds:datastoreItem>
 </file>
 
-<file path=customXml/itemProps10.xml><?xml version="1.0" encoding="utf-8"?>
-<ds:datastoreItem xmlns:ds="http://schemas.openxmlformats.org/officeDocument/2006/customXml" ds:itemID="{822D38AD-8010-4CD3-BD6B-117CB8DF70A4}">
+<file path=customXml/itemProps2.xml><?xml version="1.0" encoding="utf-8"?>
+<ds:datastoreItem xmlns:ds="http://schemas.openxmlformats.org/officeDocument/2006/customXml" ds:itemID="{07958A4E-FAB1-42E4-B6B5-29B01F63F87B}">
   <ds:schemaRefs/>
 </ds:datastoreItem>
 </file>
 
-<file path=customXml/itemProps11.xml><?xml version="1.0" encoding="utf-8"?>
-<ds:datastoreItem xmlns:ds="http://schemas.openxmlformats.org/officeDocument/2006/customXml" ds:itemID="{683FEB75-8CFA-449C-A6B1-B1E4A86A58A1}">
-  <ds:schemaRefs/>
-</ds:datastoreItem>
-</file>
-
-<file path=customXml/itemProps12.xml><?xml version="1.0" encoding="utf-8"?>
-<ds:datastoreItem xmlns:ds="http://schemas.openxmlformats.org/officeDocument/2006/customXml" ds:itemID="{847502A6-7CBE-43AF-BDF6-4D4423521D8C}">
-  <ds:schemaRefs/>
-</ds:datastoreItem>
-</file>
-
-<file path=customXml/itemProps13.xml><?xml version="1.0" encoding="utf-8"?>
+<file path=customXml/itemProps3.xml><?xml version="1.0" encoding="utf-8"?>
 <ds:datastoreItem xmlns:ds="http://schemas.openxmlformats.org/officeDocument/2006/customXml" ds:itemID="{03AF3FDC-ACD1-46F3-A43E-782322DF9816}">
   <ds:schemaRefs/>
 </ds:datastoreItem>
 </file>
 
-<file path=customXml/itemProps14.xml><?xml version="1.0" encoding="utf-8"?>
-<ds:datastoreItem xmlns:ds="http://schemas.openxmlformats.org/officeDocument/2006/customXml" ds:itemID="{1CE36EA9-2186-4EB1-871A-8AE59C2A13BB}">
-  <ds:schemaRefs/>
+<file path=customXml/itemProps4.xml><?xml version="1.0" encoding="utf-8"?>
+<ds:datastoreItem xmlns:ds="http://schemas.openxmlformats.org/officeDocument/2006/customXml" ds:itemID="{A2258578-4028-422E-A2BB-56A6BD2305EC}">
+  <ds:schemaRefs>
+    <ds:schemaRef ds:uri="92e1255f-bb7b-4dc9-b051-584cc104eb44"/>
+    <ds:schemaRef ds:uri="a6550eff-0fc9-443f-8e77-72cbcf778382"/>
+    <ds:schemaRef ds:uri="http://purl.org/dc/elements/1.1/"/>
+    <ds:schemaRef ds:uri="http://purl.org/dc/terms/"/>
+    <ds:schemaRef ds:uri="http://schemas.microsoft.com/internal/obd"/>
+    <ds:schemaRef ds:uri="http://schemas.microsoft.com/office/2006/documentManagement/types"/>
+    <ds:schemaRef ds:uri="http://schemas.microsoft.com/office/2006/metadata/contentType"/>
+    <ds:schemaRef ds:uri="http://schemas.microsoft.com/office/2006/metadata/properties"/>
+    <ds:schemaRef ds:uri="http://schemas.microsoft.com/office/2006/metadata/properties/metaAttributes"/>
+    <ds:schemaRef ds:uri="http://schemas.microsoft.com/office/infopath/2007/PartnerControls"/>
+    <ds:schemaRef ds:uri="http://schemas.openxmlformats.org/package/2006/metadata/core-properties"/>
+    <ds:schemaRef ds:uri="http://www.w3.org/2001/XMLSchema"/>
+  </ds:schemaRefs>
 </ds:datastoreItem>
 </file>
 
-<file path=customXml/itemProps15.xml><?xml version="1.0" encoding="utf-8"?>
+<file path=customXml/itemProps5.xml><?xml version="1.0" encoding="utf-8"?>
 <ds:datastoreItem xmlns:ds="http://schemas.openxmlformats.org/officeDocument/2006/customXml" ds:itemID="{58CC0B31-82B9-497A-9A2E-F3F72D0BBDAD}">
   <ds:schemaRefs/>
 </ds:datastoreItem>
 </file>
 
-<file path=customXml/itemProps2.xml><?xml version="1.0" encoding="utf-8"?>
-<ds:datastoreItem xmlns:ds="http://schemas.openxmlformats.org/officeDocument/2006/customXml" ds:itemID="{D92C3DF5-A179-4E2D-BD20-07044B39171F}">
-  <ds:schemaRefs/>
-</ds:datastoreItem>
-</file>
-
-<file path=customXml/itemProps3.xml><?xml version="1.0" encoding="utf-8"?>
-<ds:datastoreItem xmlns:ds="http://schemas.openxmlformats.org/officeDocument/2006/customXml" ds:itemID="{07958A4E-FAB1-42E4-B6B5-29B01F63F87B}">
-  <ds:schemaRefs/>
-</ds:datastoreItem>
-</file>
-
-<file path=customXml/itemProps4.xml><?xml version="1.0" encoding="utf-8"?>
+<file path=customXml/itemProps6.xml><?xml version="1.0" encoding="utf-8"?>
 <ds:datastoreItem xmlns:ds="http://schemas.openxmlformats.org/officeDocument/2006/customXml" ds:itemID="{F5A7E41D-6E7F-4B05-AFAB-F540BD4C068B}">
   <ds:schemaRefs>
     <ds:schemaRef ds:uri="http://schemas.microsoft.com/sharepoint/v3/contenttype/forms"/>
@@ -14944,56 +16618,31 @@
 </ds:datastoreItem>
 </file>
 
-<file path=customXml/itemProps5.xml><?xml version="1.0" encoding="utf-8"?>
+<file path=customXml/itemProps7.xml><?xml version="1.0" encoding="utf-8"?>
 <ds:datastoreItem xmlns:ds="http://schemas.openxmlformats.org/officeDocument/2006/customXml" ds:itemID="{56F2EE69-0CCA-4F48-BE22-EC4A886C57A7}">
   <ds:schemaRefs>
+    <ds:schemaRef ds:uri="92e1255f-bb7b-4dc9-b051-584cc104eb44"/>
+    <ds:schemaRef ds:uri="a6550eff-0fc9-443f-8e77-72cbcf778382"/>
     <ds:schemaRef ds:uri="http://purl.org/dc/dcmitype/"/>
     <ds:schemaRef ds:uri="http://purl.org/dc/elements/1.1/"/>
+    <ds:schemaRef ds:uri="http://purl.org/dc/terms/"/>
     <ds:schemaRef ds:uri="http://schemas.microsoft.com/office/2006/documentManagement/types"/>
-    <ds:schemaRef ds:uri="http://schemas.microsoft.com/office/infopath/2007/PartnerControls"/>
-    <ds:schemaRef ds:uri="http://www.w3.org/XML/1998/namespace"/>
-    <ds:schemaRef ds:uri="http://purl.org/dc/terms/"/>
-    <ds:schemaRef ds:uri="92e1255f-bb7b-4dc9-b051-584cc104eb44"/>
     <ds:schemaRef ds:uri="http://schemas.microsoft.com/office/2006/metadata/properties"/>
-    <ds:schemaRef ds:uri="http://schemas.openxmlformats.org/package/2006/metadata/core-properties"/>
-    <ds:schemaRef ds:uri="a6550eff-0fc9-443f-8e77-72cbcf778382"/>
-  </ds:schemaRefs>
-</ds:datastoreItem>
-</file>
-
-<file path=customXml/itemProps6.xml><?xml version="1.0" encoding="utf-8"?>
-<ds:datastoreItem xmlns:ds="http://schemas.openxmlformats.org/officeDocument/2006/customXml" ds:itemID="{B9AEDDE3-EA02-4A8F-B8F8-0606A0AA45FC}">
-  <ds:schemaRefs/>
-</ds:datastoreItem>
-</file>
-
-<file path=customXml/itemProps7.xml><?xml version="1.0" encoding="utf-8"?>
-<ds:datastoreItem xmlns:ds="http://schemas.openxmlformats.org/officeDocument/2006/customXml" ds:itemID="{A2258578-4028-422E-A2BB-56A6BD2305EC}">
-  <ds:schemaRefs>
-    <ds:schemaRef ds:uri="http://schemas.microsoft.com/office/2006/metadata/contentType"/>
-    <ds:schemaRef ds:uri="http://schemas.microsoft.com/office/2006/metadata/properties/metaAttributes"/>
-    <ds:schemaRef ds:uri="http://www.w3.org/2001/XMLSchema"/>
-    <ds:schemaRef ds:uri="http://schemas.microsoft.com/office/2006/metadata/properties"/>
-    <ds:schemaRef ds:uri="92e1255f-bb7b-4dc9-b051-584cc104eb44"/>
-    <ds:schemaRef ds:uri="a6550eff-0fc9-443f-8e77-72cbcf778382"/>
-    <ds:schemaRef ds:uri="http://schemas.microsoft.com/office/2006/documentManagement/types"/>
     <ds:schemaRef ds:uri="http://schemas.microsoft.com/office/infopath/2007/PartnerControls"/>
     <ds:schemaRef ds:uri="http://schemas.openxmlformats.org/package/2006/metadata/core-properties"/>
-    <ds:schemaRef ds:uri="http://purl.org/dc/elements/1.1/"/>
-    <ds:schemaRef ds:uri="http://purl.org/dc/terms/"/>
-    <ds:schemaRef ds:uri="http://schemas.microsoft.com/internal/obd"/>
+    <ds:schemaRef ds:uri="http://www.w3.org/XML/1998/namespace"/>
   </ds:schemaRefs>
 </ds:datastoreItem>
 </file>
 
 <file path=customXml/itemProps8.xml><?xml version="1.0" encoding="utf-8"?>
-<ds:datastoreItem xmlns:ds="http://schemas.openxmlformats.org/officeDocument/2006/customXml" ds:itemID="{32BA7684-6BE4-4F73-B22E-30934AB379B8}">
+<ds:datastoreItem xmlns:ds="http://schemas.openxmlformats.org/officeDocument/2006/customXml" ds:itemID="{847502A6-7CBE-43AF-BDF6-4D4423521D8C}">
   <ds:schemaRefs/>
 </ds:datastoreItem>
 </file>
 
 <file path=customXml/itemProps9.xml><?xml version="1.0" encoding="utf-8"?>
-<ds:datastoreItem xmlns:ds="http://schemas.openxmlformats.org/officeDocument/2006/customXml" ds:itemID="{72516535-7702-46AF-9B1F-8623A67A824E}">
+<ds:datastoreItem xmlns:ds="http://schemas.openxmlformats.org/officeDocument/2006/customXml" ds:itemID="{D92C3DF5-A179-4E2D-BD20-07044B39171F}">
   <ds:schemaRefs/>
 </ds:datastoreItem>
 </file>

--- a/IETF-126-TSVWG-SCTP-DTLS-Chunk.pptx
+++ b/IETF-126-TSVWG-SCTP-DTLS-Chunk.pptx
@@ -25,31 +25,28 @@
   <p:notesSz cx="6858000" cy="9144000"/>
   <p:embeddedFontLst>
     <p:embeddedFont>
-      <p:font typeface="Ericsson Hilda" panose="020B0604020202020204" charset="0"/>
+      <p:font typeface="Ericsson Hilda" pitchFamily="2" charset="0"/>
       <p:regular r:id="rId28"/>
       <p:bold r:id="rId29"/>
-      <p:italic r:id="rId30"/>
-      <p:boldItalic r:id="rId31"/>
     </p:embeddedFont>
     <p:embeddedFont>
-      <p:font typeface="Ericsson Hilda ExtraBold" panose="020B0604020202020204" charset="0"/>
-      <p:bold r:id="rId32"/>
+      <p:font typeface="Ericsson Hilda ExtraBold" pitchFamily="2" charset="0"/>
+      <p:bold r:id="rId30"/>
     </p:embeddedFont>
     <p:embeddedFont>
-      <p:font typeface="Ericsson Hilda ExtraLight" panose="020B0604020202020204" charset="0"/>
-      <p:regular r:id="rId33"/>
+      <p:font typeface="Ericsson Hilda ExtraLight" pitchFamily="2" charset="0"/>
+      <p:regular r:id="rId31"/>
     </p:embeddedFont>
     <p:embeddedFont>
-      <p:font typeface="Ericsson Hilda Light" panose="020B0604020202020204" charset="0"/>
-      <p:regular r:id="rId34"/>
-      <p:italic r:id="rId35"/>
+      <p:font typeface="Ericsson Hilda Light" pitchFamily="2" charset="0"/>
+      <p:regular r:id="rId32"/>
     </p:embeddedFont>
     <p:embeddedFont>
-      <p:font typeface="Ericsson Technical Icons" panose="020B0604020202020204" charset="0"/>
-      <p:regular r:id="rId36"/>
-      <p:bold r:id="rId37"/>
-      <p:italic r:id="rId38"/>
-      <p:boldItalic r:id="rId39"/>
+      <p:font typeface="Ericsson Technical Icons" pitchFamily="2" charset="0"/>
+      <p:regular r:id="rId33"/>
+      <p:bold r:id="rId34"/>
+      <p:italic r:id="rId35"/>
+      <p:boldItalic r:id="rId36"/>
     </p:embeddedFont>
   </p:embeddedFontLst>
   <p:defaultTextStyle>
@@ -14905,54 +14902,67 @@
           <a:lstStyle/>
           <a:p>
             <a:r>
-              <a:rPr lang="en-US"/>
+              <a:rPr lang="en-US" dirty="0"/>
               <a:t>The Design Team considers DTLS Chunk specification to be stable when it comes to format and functionality</a:t>
             </a:r>
           </a:p>
           <a:p>
             <a:pPr lvl="1"/>
             <a:r>
-              <a:rPr lang="en-US"/>
+              <a:rPr lang="en-US" dirty="0"/>
               <a:t>Two independent implementations</a:t>
             </a:r>
           </a:p>
           <a:p>
             <a:pPr lvl="1"/>
             <a:r>
-              <a:rPr lang="en-US"/>
+              <a:rPr lang="en-US" dirty="0"/>
               <a:t>Interoperability tests has shown that specification works</a:t>
             </a:r>
           </a:p>
           <a:p>
             <a:r>
-              <a:rPr lang="en-US"/>
+              <a:rPr lang="en-US" dirty="0"/>
               <a:t>Specification text has improved significantly</a:t>
             </a:r>
+          </a:p>
+          <a:p>
+            <a:r>
+              <a:rPr lang="en-US" dirty="0"/>
+              <a:t>Have requested early allocation of </a:t>
+            </a:r>
+            <a:r>
+              <a:rPr lang="en-US"/>
+              <a:t>error causes</a:t>
+            </a:r>
+          </a:p>
+          <a:p>
+            <a:endParaRPr lang="en-US" dirty="0"/>
+          </a:p>
+          <a:p>
+            <a:r>
+              <a:rPr lang="en-US" dirty="0"/>
+              <a:t>The Design Team requests reviews of the DTLS Chunk</a:t>
+            </a:r>
+          </a:p>
+          <a:p>
+            <a:pPr lvl="1"/>
+            <a:r>
+              <a:rPr lang="en-US" dirty="0"/>
+              <a:t>Consider to send LS to 3GPP on progress and request reviews</a:t>
+            </a:r>
+          </a:p>
+          <a:p>
+            <a:pPr marL="0" indent="0">
+              <a:buNone/>
+            </a:pPr>
+            <a:endParaRPr lang="en-US" dirty="0"/>
           </a:p>
           <a:p>
             <a:pPr marL="265113" lvl="1" indent="0">
               <a:buNone/>
             </a:pPr>
-            <a:endParaRPr lang="en-US"/>
-          </a:p>
-          <a:p>
-            <a:r>
-              <a:rPr lang="en-US"/>
-              <a:t>The Design Team requests reviews of the DTLS Chunk</a:t>
-            </a:r>
-          </a:p>
-          <a:p>
-            <a:pPr lvl="1"/>
-            <a:r>
-              <a:rPr lang="en-US"/>
-              <a:t>Consider to send LS to 3GPP on progress and request reviews</a:t>
-            </a:r>
-          </a:p>
-          <a:p>
-            <a:pPr marL="265113" lvl="1" indent="0">
-              <a:buNone/>
-            </a:pPr>
-            <a:endParaRPr lang="en-US"/>
+            <a:endParaRPr lang="en-US" dirty="0"/>
           </a:p>
         </p:txBody>
       </p:sp>
@@ -16232,11 +16242,13 @@
 </file>
 
 <file path=customXml/item1.xml><?xml version="1.0" encoding="utf-8"?>
-<TemplafySlideTemplateConfiguration><![CDATA[{"documentContentValidatorConfiguration":{"enableDocumentContentValidator":false,"documentContentValidatorVersion":0},"elementsMetadata":[],"slideId":"638780731662370544","enableDocumentContentUpdater":true,"version":"1.9"}]]></TemplafySlideTemplateConfiguration>
+<p:properties xmlns:p="http://schemas.microsoft.com/office/2006/metadata/properties" xmlns:xsi="http://www.w3.org/2001/XMLSchema-instance" xmlns:pc="http://schemas.microsoft.com/office/infopath/2007/PartnerControls">
+  <documentManagement/>
+</p:properties>
 </file>
 
 <file path=customXml/item10.xml><?xml version="1.0" encoding="utf-8"?>
-<TemplafySlideFormConfiguration><![CDATA[{"formFields":[],"formDataEntries":[]}]]></TemplafySlideFormConfiguration>
+<TemplafyFormConfiguration><![CDATA[{"formFields":[{"required":true,"placeholder":"","lines":0,"helpTexts":{"prefix":"","postfix":""},"spacing":{},"type":"textBox","name":"DocumentTitle","label":"Document Title","fullyQualifiedName":"DocumentTitle"},{"dataSource":"Confidentiality","displayColumn":"confidentiality","hideIfNoUserInteractionRequired":false,"distinct":true,"required":true,"autoSelectFirstOption":false,"helpTexts":{"prefix":"","postfix":""},"spacing":{},"type":"dropDown","name":"ConfidentialityClass","label":"Confidentiality Class","fullyQualifiedName":"ConfidentialityClass"},{"dataSource":"External Confidentiality label","displayColumn":"externalConfidentiality","hideIfNoUserInteractionRequired":false,"distinct":true,"required":false,"autoSelectFirstOption":false,"helpTexts":{"prefix":"","postfix":"(If no external confidentiality class then please choose the blank value)"},"spacing":{},"type":"dropDown","name":"ExternalConfidentialityLabel","label":"External Confidentiality label","fullyQualifiedName":"ExternalConfidentialityLabel"},{"column":"documentType","required":false,"placeholder":"","autoSelectFirstOption":false,"helpTexts":{"prefix":"","postfix":""},"spacing":{},"dataSource":"PowerPoint Document Type","type":"comboBox","name":"DocTypePresentation","label":"Document Type","fullyQualifiedName":"DocTypePresentation"},{"required":false,"placeholder":"","lines":0,"helpTexts":{"prefix":"","postfix":"(Commonly assigned by EriDoc)"},"spacing":{},"type":"textBox","name":"DocumentNumber","label":"Document Number","fullyQualifiedName":"DocumentNumber"},{"dataSource":"Language code","displayColumn":"showName","defaultValue":"1","hideIfNoUserInteractionRequired":false,"distinct":true,"required":false,"autoSelectFirstOption":false,"helpTexts":{"prefix":"","postfix":"(The language code will be appended to the Document No.)"},"spacing":{},"type":"dropDown","name":"LanguageCode","label":"Language Code","fullyQualifiedName":"LanguageCode"},{"column":"revision","required":false,"placeholder":"","autoSelectFirstOption":false,"helpTexts":{"prefix":"","postfix":""},"spacing":{},"dataSource":"Revision","type":"comboBox","name":"Revision","label":"Revision","fullyQualifiedName":"Revision"},{"required":false,"helpTexts":{"prefix":"","postfix":""},"spacing":{},"type":"datePicker","name":"Date","label":"Date","fullyQualifiedName":"Date"},{"helpTexts":{"prefix":"","postfix":""},"spacing":{},"type":"heading","name":"FooterVisibilityOptions","label":"Footer Visibility Options","fullyQualifiedName":"FooterVisibilityOptions"},{"dataSource":"PPT FooterVisibility","displayColumn":"templateType","defaultValue":"1","hideIfNoUserInteractionRequired":false,"distinct":true,"required":true,"autoSelectFirstOption":false,"helpTexts":{"prefix":"","postfix":""},"spacing":{},"type":"dropDown","name":"TemplateType","label":"Is this a document or presentation?","fullyQualifiedName":"TemplateType"},{"dataSource":"PPT FooterVisibility","displayColumn":"docTitle_label","filter":{"column":"templateType","otherFieldName":"TemplateType","fullyQualifiedOtherFieldName":"TemplateType","otherFieldColumn":"TemplateType","formReference":"none","operator":"equals"},"hideIfNoUserInteractionRequired":false,"distinct":true,"required":false,"autoSelectFirstOption":true,"helpTexts":{"prefix":"","postfix":""},"spacing":{},"type":"dropDown","name":"DocTitle","label":"Show document title in footer?","fullyQualifiedName":"DocTitle"},{"dataSource":"PPT FooterVisibility","displayColumn":"totalPageNo_text","filter":{"column":"templateType","otherFieldName":"TemplateType","fullyQualifiedOtherFieldName":"TemplateType","otherFieldColumn":"TemplateType","formReference":"none","operator":"equals"},"hideIfNoUserInteractionRequired":false,"distinct":true,"required":false,"autoSelectFirstOption":true,"helpTexts":{"prefix":"","postfix":""},"spacing":{},"type":"dropDown","name":"TotalPageNo","label":"Page numbering","fullyQualifiedName":"TotalPageNo"},{"dataSource":"PPT FooterVisibility","displayColumn":"showDocNo_label","filter":{"column":"templateType","otherFieldName":"TemplateType","fullyQualifiedOtherFieldName":"TemplateType","otherFieldColumn":"TemplateType","formReference":"none","operator":"equals"},"hideIfNoUserInteractionRequired":false,"distinct":true,"required":false,"autoSelectFirstOption":true,"helpTexts":{"prefix":"","postfix":""},"spacing":{},"type":"dropDown","name":"DocNo","label":"Show document number in footer?","fullyQualifiedName":"DocNo"},{"required":false,"placeholder":"","lines":0,"defaultValue":"{{UserProfile.Prepared}}","helpTexts":{"prefix":"","postfix":""},"spacing":{},"type":"textBox","name":"Prepared","label":"Prepared By (Subject Responsible)","fullyQualifiedName":"Prepared"},{"required":false,"placeholder":"","lines":0,"helpTexts":{"prefix":"","postfix":""},"spacing":{},"type":"textBox","name":"ApprovedBy","label":"Approved By (Document Responsible)","fullyQualifiedName":"ApprovedBy"},{"required":false,"placeholder":"","lines":0,"helpTexts":{"prefix":"","postfix":""},"spacing":{},"type":"textBox","name":"Checked","label":"Checked","fullyQualifiedName":"Checked"},{"required":false,"placeholder":"","lines":0,"helpTexts":{"prefix":"","postfix":"(Overwritten with EriDoc values at check-in)"},"spacing":{},"type":"textBox","name":"Reference","label":"Reference","fullyQualifiedName":"Reference"},{"required":false,"placeholder":"","lines":0,"helpTexts":{"prefix":"","postfix":""},"spacing":{},"type":"textBox","name":"Keywords","label":"Keywords","fullyQualifiedName":"Keywords"}],"formDataEntries":[{"name":"DocumentTitle","value":"pYKnA1M1iVGe972lLW237tBCWABVWwTW03TtSWLVXT0="},{"name":"ConfidentialityClass","value":"cT/FOwTWaPknrhRlNMh4SQ=="},{"name":"LanguageCode","value":"5wlu7ZdPxHQj1W0w+yTNSg=="},{"name":"Date","value":"fbd86WXKelPa8nlkyyencA=="},{"name":"TemplateType","value":"5wlu7ZdPxHQj1W0w+yTNSg=="},{"name":"DocTitle","value":"5wlu7ZdPxHQj1W0w+yTNSg=="},{"name":"TotalPageNo","value":"cT/FOwTWaPknrhRlNMh4SQ=="},{"name":"DocNo","value":"5wlu7ZdPxHQj1W0w+yTNSg=="},{"name":"Prepared","value":"fdJUhNIjdwPGv3mvNZlQT4ASrQGRpusVL7uBTgJlxbo="}]}]]></TemplafyFormConfiguration>
 </file>
 
 <file path=customXml/item11.xml><?xml version="1.0" encoding="utf-8"?>
@@ -16244,19 +16256,19 @@
 </file>
 
 <file path=customXml/item12.xml><?xml version="1.0" encoding="utf-8"?>
+<TemplafySlideFormConfiguration><![CDATA[{"formFields":[],"formDataEntries":[]}]]></TemplafySlideFormConfiguration>
+</file>
+
+<file path=customXml/item13.xml><?xml version="1.0" encoding="utf-8"?>
+<TemplafySlideTemplateConfiguration><![CDATA[{"documentContentValidatorConfiguration":{"enableDocumentContentValidator":false,"documentContentValidatorVersion":0},"elementsMetadata":[],"slideId":"638780731662370545","enableDocumentContentUpdater":true,"version":"1.9"}]]></TemplafySlideTemplateConfiguration>
+</file>
+
+<file path=customXml/item14.xml><?xml version="1.0" encoding="utf-8"?>
 <TemplafySlideTemplateConfiguration><![CDATA[{"documentContentValidatorConfiguration":{"enableDocumentContentValidator":false,"documentContentValidatorVersion":0},"elementsMetadata":[],"slideId":"638780731662214300","enableDocumentContentUpdater":true,"version":"1.9"}]]></TemplafySlideTemplateConfiguration>
 </file>
 
-<file path=customXml/item13.xml><?xml version="1.0" encoding="utf-8"?>
+<file path=customXml/item15.xml><?xml version="1.0" encoding="utf-8"?>
 <TemplafySlideTemplateConfiguration><![CDATA[{"documentContentValidatorConfiguration":{"enableDocumentContentValidator":false,"documentContentValidatorVersion":0},"elementsMetadata":[],"slideId":"638780731662526815","enableDocumentContentUpdater":true,"version":"1.9"}]]></TemplafySlideTemplateConfiguration>
-</file>
-
-<file path=customXml/item14.xml><?xml version="1.0" encoding="utf-8"?>
-<TemplafySlideFormConfiguration><![CDATA[{"formFields":[],"formDataEntries":[]}]]></TemplafySlideFormConfiguration>
-</file>
-
-<file path=customXml/item15.xml><?xml version="1.0" encoding="utf-8"?>
-<TemplafySlideTemplateConfiguration><![CDATA[{"elementsMetadata":[],"documentContentValidatorConfiguration":{"enableDocumentContentValidator":false,"documentContentValidatorVersion":0},"slideId":"637027476704980324","enableDocumentContentUpdater":true,"version":"1.9"}]]></TemplafySlideTemplateConfiguration>
 </file>
 
 <file path=customXml/item2.xml><?xml version="1.0" encoding="utf-8"?>
@@ -16264,10 +16276,35 @@
 </file>
 
 <file path=customXml/item3.xml><?xml version="1.0" encoding="utf-8"?>
-<TemplafySlideTemplateConfiguration><![CDATA[{"documentContentValidatorConfiguration":{"enableDocumentContentValidator":false,"documentContentValidatorVersion":0},"elementsMetadata":[],"slideId":"638780731662370545","enableDocumentContentUpdater":true,"version":"1.9"}]]></TemplafySlideTemplateConfiguration>
+<TemplafySlideTemplateConfiguration><![CDATA[{"documentContentValidatorConfiguration":{"enableDocumentContentValidator":false,"documentContentValidatorVersion":0},"elementsMetadata":[],"slideId":"638780731662370544","enableDocumentContentUpdater":true,"version":"1.9"}]]></TemplafySlideTemplateConfiguration>
 </file>
 
 <file path=customXml/item4.xml><?xml version="1.0" encoding="utf-8"?>
+<?mso-contentType ?>
+<FormTemplates xmlns="http://schemas.microsoft.com/sharepoint/v3/contenttype/forms">
+  <Display>DocumentLibraryForm</Display>
+  <Edit>DocumentLibraryForm</Edit>
+  <New>DocumentLibraryForm</New>
+</FormTemplates>
+</file>
+
+<file path=customXml/item5.xml><?xml version="1.0" encoding="utf-8"?>
+<TemplafySlideFormConfiguration><![CDATA[{"formFields":[],"formDataEntries":[]}]]></TemplafySlideFormConfiguration>
+</file>
+
+<file path=customXml/item6.xml><?xml version="1.0" encoding="utf-8"?>
+<TemplafySlideFormConfiguration><![CDATA[{"formFields":[],"formDataEntries":[]}]]></TemplafySlideFormConfiguration>
+</file>
+
+<file path=customXml/item7.xml><?xml version="1.0" encoding="utf-8"?>
+<TemplafySlideTemplateConfiguration><![CDATA[{"elementsMetadata":[],"documentContentValidatorConfiguration":{"enableDocumentContentValidator":false,"documentContentValidatorVersion":0},"slideId":"637027476704980324","enableDocumentContentUpdater":true,"version":"1.9"}]]></TemplafySlideTemplateConfiguration>
+</file>
+
+<file path=customXml/item8.xml><?xml version="1.0" encoding="utf-8"?>
+<TemplafySlideFormConfiguration><![CDATA[{"formFields":[],"formDataEntries":[]}]]></TemplafySlideFormConfiguration>
+</file>
+
+<file path=customXml/item9.xml><?xml version="1.0" encoding="utf-8"?>
 <ct:contentTypeSchema xmlns:ct="http://schemas.microsoft.com/office/2006/metadata/contentType" xmlns:ma="http://schemas.microsoft.com/office/2006/metadata/properties/metaAttributes" ct:_="" ma:_="" ma:contentTypeName="Document" ma:contentTypeID="0x0101002C8661F604A9A64C9627B875CBEE0D49" ma:contentTypeVersion="15" ma:contentTypeDescription="Create a new document." ma:contentTypeScope="" ma:versionID="a479c757ef17ea2b01d6697cee2b70c6">
   <xsd:schema xmlns:xsd="http://www.w3.org/2001/XMLSchema" xmlns:xs="http://www.w3.org/2001/XMLSchema" xmlns:p="http://schemas.microsoft.com/office/2006/metadata/properties" xmlns:ns3="92e1255f-bb7b-4dc9-b051-584cc104eb44" xmlns:ns4="a6550eff-0fc9-443f-8e77-72cbcf778382" targetNamespace="http://schemas.microsoft.com/office/2006/metadata/properties" ma:root="true" ma:fieldsID="08df2d0f55032e4052d032aa8ec7ed1f" ns3:_="" ns4:_="">
     <xsd:import namespace="92e1255f-bb7b-4dc9-b051-584cc104eb44"/>
@@ -16504,71 +16541,55 @@
 </ct:contentTypeSchema>
 </file>
 
-<file path=customXml/item5.xml><?xml version="1.0" encoding="utf-8"?>
-<TemplafySlideFormConfiguration><![CDATA[{"formFields":[],"formDataEntries":[]}]]></TemplafySlideFormConfiguration>
-</file>
-
-<file path=customXml/item6.xml><?xml version="1.0" encoding="utf-8"?>
-<?mso-contentType ?>
-<FormTemplates xmlns="http://schemas.microsoft.com/sharepoint/v3/contenttype/forms">
-  <Display>DocumentLibraryForm</Display>
-  <Edit>DocumentLibraryForm</Edit>
-  <New>DocumentLibraryForm</New>
-</FormTemplates>
-</file>
-
-<file path=customXml/item7.xml><?xml version="1.0" encoding="utf-8"?>
-<p:properties xmlns:p="http://schemas.microsoft.com/office/2006/metadata/properties" xmlns:xsi="http://www.w3.org/2001/XMLSchema-instance" xmlns:pc="http://schemas.microsoft.com/office/infopath/2007/PartnerControls">
-  <documentManagement/>
-</p:properties>
-</file>
-
-<file path=customXml/item8.xml><?xml version="1.0" encoding="utf-8"?>
-<TemplafySlideFormConfiguration><![CDATA[{"formFields":[],"formDataEntries":[]}]]></TemplafySlideFormConfiguration>
-</file>
-
-<file path=customXml/item9.xml><?xml version="1.0" encoding="utf-8"?>
-<TemplafyFormConfiguration><![CDATA[{"formFields":[{"required":true,"placeholder":"","lines":0,"helpTexts":{"prefix":"","postfix":""},"spacing":{},"type":"textBox","name":"DocumentTitle","label":"Document Title","fullyQualifiedName":"DocumentTitle"},{"dataSource":"Confidentiality","displayColumn":"confidentiality","hideIfNoUserInteractionRequired":false,"distinct":true,"required":true,"autoSelectFirstOption":false,"helpTexts":{"prefix":"","postfix":""},"spacing":{},"type":"dropDown","name":"ConfidentialityClass","label":"Confidentiality Class","fullyQualifiedName":"ConfidentialityClass"},{"dataSource":"External Confidentiality label","displayColumn":"externalConfidentiality","hideIfNoUserInteractionRequired":false,"distinct":true,"required":false,"autoSelectFirstOption":false,"helpTexts":{"prefix":"","postfix":"(If no external confidentiality class then please choose the blank value)"},"spacing":{},"type":"dropDown","name":"ExternalConfidentialityLabel","label":"External Confidentiality label","fullyQualifiedName":"ExternalConfidentialityLabel"},{"column":"documentType","required":false,"placeholder":"","autoSelectFirstOption":false,"helpTexts":{"prefix":"","postfix":""},"spacing":{},"dataSource":"PowerPoint Document Type","type":"comboBox","name":"DocTypePresentation","label":"Document Type","fullyQualifiedName":"DocTypePresentation"},{"required":false,"placeholder":"","lines":0,"helpTexts":{"prefix":"","postfix":"(Commonly assigned by EriDoc)"},"spacing":{},"type":"textBox","name":"DocumentNumber","label":"Document Number","fullyQualifiedName":"DocumentNumber"},{"dataSource":"Language code","displayColumn":"showName","defaultValue":"1","hideIfNoUserInteractionRequired":false,"distinct":true,"required":false,"autoSelectFirstOption":false,"helpTexts":{"prefix":"","postfix":"(The language code will be appended to the Document No.)"},"spacing":{},"type":"dropDown","name":"LanguageCode","label":"Language Code","fullyQualifiedName":"LanguageCode"},{"column":"revision","required":false,"placeholder":"","autoSelectFirstOption":false,"helpTexts":{"prefix":"","postfix":""},"spacing":{},"dataSource":"Revision","type":"comboBox","name":"Revision","label":"Revision","fullyQualifiedName":"Revision"},{"required":false,"helpTexts":{"prefix":"","postfix":""},"spacing":{},"type":"datePicker","name":"Date","label":"Date","fullyQualifiedName":"Date"},{"helpTexts":{"prefix":"","postfix":""},"spacing":{},"type":"heading","name":"FooterVisibilityOptions","label":"Footer Visibility Options","fullyQualifiedName":"FooterVisibilityOptions"},{"dataSource":"PPT FooterVisibility","displayColumn":"templateType","defaultValue":"1","hideIfNoUserInteractionRequired":false,"distinct":true,"required":true,"autoSelectFirstOption":false,"helpTexts":{"prefix":"","postfix":""},"spacing":{},"type":"dropDown","name":"TemplateType","label":"Is this a document or presentation?","fullyQualifiedName":"TemplateType"},{"dataSource":"PPT FooterVisibility","displayColumn":"docTitle_label","filter":{"column":"templateType","otherFieldName":"TemplateType","fullyQualifiedOtherFieldName":"TemplateType","otherFieldColumn":"TemplateType","formReference":"none","operator":"equals"},"hideIfNoUserInteractionRequired":false,"distinct":true,"required":false,"autoSelectFirstOption":true,"helpTexts":{"prefix":"","postfix":""},"spacing":{},"type":"dropDown","name":"DocTitle","label":"Show document title in footer?","fullyQualifiedName":"DocTitle"},{"dataSource":"PPT FooterVisibility","displayColumn":"totalPageNo_text","filter":{"column":"templateType","otherFieldName":"TemplateType","fullyQualifiedOtherFieldName":"TemplateType","otherFieldColumn":"TemplateType","formReference":"none","operator":"equals"},"hideIfNoUserInteractionRequired":false,"distinct":true,"required":false,"autoSelectFirstOption":true,"helpTexts":{"prefix":"","postfix":""},"spacing":{},"type":"dropDown","name":"TotalPageNo","label":"Page numbering","fullyQualifiedName":"TotalPageNo"},{"dataSource":"PPT FooterVisibility","displayColumn":"showDocNo_label","filter":{"column":"templateType","otherFieldName":"TemplateType","fullyQualifiedOtherFieldName":"TemplateType","otherFieldColumn":"TemplateType","formReference":"none","operator":"equals"},"hideIfNoUserInteractionRequired":false,"distinct":true,"required":false,"autoSelectFirstOption":true,"helpTexts":{"prefix":"","postfix":""},"spacing":{},"type":"dropDown","name":"DocNo","label":"Show document number in footer?","fullyQualifiedName":"DocNo"},{"required":false,"placeholder":"","lines":0,"defaultValue":"{{UserProfile.Prepared}}","helpTexts":{"prefix":"","postfix":""},"spacing":{},"type":"textBox","name":"Prepared","label":"Prepared By (Subject Responsible)","fullyQualifiedName":"Prepared"},{"required":false,"placeholder":"","lines":0,"helpTexts":{"prefix":"","postfix":""},"spacing":{},"type":"textBox","name":"ApprovedBy","label":"Approved By (Document Responsible)","fullyQualifiedName":"ApprovedBy"},{"required":false,"placeholder":"","lines":0,"helpTexts":{"prefix":"","postfix":""},"spacing":{},"type":"textBox","name":"Checked","label":"Checked","fullyQualifiedName":"Checked"},{"required":false,"placeholder":"","lines":0,"helpTexts":{"prefix":"","postfix":"(Overwritten with EriDoc values at check-in)"},"spacing":{},"type":"textBox","name":"Reference","label":"Reference","fullyQualifiedName":"Reference"},{"required":false,"placeholder":"","lines":0,"helpTexts":{"prefix":"","postfix":""},"spacing":{},"type":"textBox","name":"Keywords","label":"Keywords","fullyQualifiedName":"Keywords"}],"formDataEntries":[{"name":"DocumentTitle","value":"pYKnA1M1iVGe972lLW237tBCWABVWwTW03TtSWLVXT0="},{"name":"ConfidentialityClass","value":"cT/FOwTWaPknrhRlNMh4SQ=="},{"name":"LanguageCode","value":"5wlu7ZdPxHQj1W0w+yTNSg=="},{"name":"Date","value":"fbd86WXKelPa8nlkyyencA=="},{"name":"TemplateType","value":"5wlu7ZdPxHQj1W0w+yTNSg=="},{"name":"DocTitle","value":"5wlu7ZdPxHQj1W0w+yTNSg=="},{"name":"TotalPageNo","value":"cT/FOwTWaPknrhRlNMh4SQ=="},{"name":"DocNo","value":"5wlu7ZdPxHQj1W0w+yTNSg=="},{"name":"Prepared","value":"fdJUhNIjdwPGv3mvNZlQT4ASrQGRpusVL7uBTgJlxbo="}]}]]></TemplafyFormConfiguration>
-</file>
-
 <file path=customXml/itemProps1.xml><?xml version="1.0" encoding="utf-8"?>
-<ds:datastoreItem xmlns:ds="http://schemas.openxmlformats.org/officeDocument/2006/customXml" ds:itemID="{683FEB75-8CFA-449C-A6B1-B1E4A86A58A1}">
-  <ds:schemaRefs/>
+<ds:datastoreItem xmlns:ds="http://schemas.openxmlformats.org/officeDocument/2006/customXml" ds:itemID="{56F2EE69-0CCA-4F48-BE22-EC4A886C57A7}">
+  <ds:schemaRefs>
+    <ds:schemaRef ds:uri="92e1255f-bb7b-4dc9-b051-584cc104eb44"/>
+    <ds:schemaRef ds:uri="a6550eff-0fc9-443f-8e77-72cbcf778382"/>
+    <ds:schemaRef ds:uri="http://purl.org/dc/dcmitype/"/>
+    <ds:schemaRef ds:uri="http://purl.org/dc/elements/1.1/"/>
+    <ds:schemaRef ds:uri="http://purl.org/dc/terms/"/>
+    <ds:schemaRef ds:uri="http://schemas.microsoft.com/office/2006/documentManagement/types"/>
+    <ds:schemaRef ds:uri="http://schemas.microsoft.com/office/2006/metadata/properties"/>
+    <ds:schemaRef ds:uri="http://schemas.microsoft.com/office/infopath/2007/PartnerControls"/>
+    <ds:schemaRef ds:uri="http://schemas.openxmlformats.org/package/2006/metadata/core-properties"/>
+    <ds:schemaRef ds:uri="http://www.w3.org/XML/1998/namespace"/>
+  </ds:schemaRefs>
 </ds:datastoreItem>
 </file>
 
 <file path=customXml/itemProps10.xml><?xml version="1.0" encoding="utf-8"?>
-<ds:datastoreItem xmlns:ds="http://schemas.openxmlformats.org/officeDocument/2006/customXml" ds:itemID="{32BA7684-6BE4-4F73-B22E-30934AB379B8}">
+<ds:datastoreItem xmlns:ds="http://schemas.openxmlformats.org/officeDocument/2006/customXml" ds:itemID="{D92C3DF5-A179-4E2D-BD20-07044B39171F}">
   <ds:schemaRefs/>
 </ds:datastoreItem>
 </file>
 
 <file path=customXml/itemProps11.xml><?xml version="1.0" encoding="utf-8"?>
-<ds:datastoreItem xmlns:ds="http://schemas.openxmlformats.org/officeDocument/2006/customXml" ds:itemID="{822D38AD-8010-4CD3-BD6B-117CB8DF70A4}">
+<ds:datastoreItem xmlns:ds="http://schemas.openxmlformats.org/officeDocument/2006/customXml" ds:itemID="{B9AEDDE3-EA02-4A8F-B8F8-0606A0AA45FC}">
   <ds:schemaRefs/>
 </ds:datastoreItem>
 </file>
 
 <file path=customXml/itemProps12.xml><?xml version="1.0" encoding="utf-8"?>
+<ds:datastoreItem xmlns:ds="http://schemas.openxmlformats.org/officeDocument/2006/customXml" ds:itemID="{847502A6-7CBE-43AF-BDF6-4D4423521D8C}">
+  <ds:schemaRefs/>
+</ds:datastoreItem>
+</file>
+
+<file path=customXml/itemProps13.xml><?xml version="1.0" encoding="utf-8"?>
+<ds:datastoreItem xmlns:ds="http://schemas.openxmlformats.org/officeDocument/2006/customXml" ds:itemID="{03AF3FDC-ACD1-46F3-A43E-782322DF9816}">
+  <ds:schemaRefs/>
+</ds:datastoreItem>
+</file>
+
+<file path=customXml/itemProps14.xml><?xml version="1.0" encoding="utf-8"?>
 <ds:datastoreItem xmlns:ds="http://schemas.openxmlformats.org/officeDocument/2006/customXml" ds:itemID="{72516535-7702-46AF-9B1F-8623A67A824E}">
   <ds:schemaRefs/>
 </ds:datastoreItem>
 </file>
 
-<file path=customXml/itemProps13.xml><?xml version="1.0" encoding="utf-8"?>
+<file path=customXml/itemProps15.xml><?xml version="1.0" encoding="utf-8"?>
 <ds:datastoreItem xmlns:ds="http://schemas.openxmlformats.org/officeDocument/2006/customXml" ds:itemID="{1CE36EA9-2186-4EB1-871A-8AE59C2A13BB}">
-  <ds:schemaRefs/>
-</ds:datastoreItem>
-</file>
-
-<file path=customXml/itemProps14.xml><?xml version="1.0" encoding="utf-8"?>
-<ds:datastoreItem xmlns:ds="http://schemas.openxmlformats.org/officeDocument/2006/customXml" ds:itemID="{B9AEDDE3-EA02-4A8F-B8F8-0606A0AA45FC}">
-  <ds:schemaRefs/>
-</ds:datastoreItem>
-</file>
-
-<file path=customXml/itemProps15.xml><?xml version="1.0" encoding="utf-8"?>
-<ds:datastoreItem xmlns:ds="http://schemas.openxmlformats.org/officeDocument/2006/customXml" ds:itemID="{C09F197C-6A49-47D0-B877-F88807989676}">
   <ds:schemaRefs/>
 </ds:datastoreItem>
 </file>
@@ -16580,12 +16601,44 @@
 </file>
 
 <file path=customXml/itemProps3.xml><?xml version="1.0" encoding="utf-8"?>
-<ds:datastoreItem xmlns:ds="http://schemas.openxmlformats.org/officeDocument/2006/customXml" ds:itemID="{03AF3FDC-ACD1-46F3-A43E-782322DF9816}">
+<ds:datastoreItem xmlns:ds="http://schemas.openxmlformats.org/officeDocument/2006/customXml" ds:itemID="{683FEB75-8CFA-449C-A6B1-B1E4A86A58A1}">
   <ds:schemaRefs/>
 </ds:datastoreItem>
 </file>
 
 <file path=customXml/itemProps4.xml><?xml version="1.0" encoding="utf-8"?>
+<ds:datastoreItem xmlns:ds="http://schemas.openxmlformats.org/officeDocument/2006/customXml" ds:itemID="{F5A7E41D-6E7F-4B05-AFAB-F540BD4C068B}">
+  <ds:schemaRefs>
+    <ds:schemaRef ds:uri="http://schemas.microsoft.com/sharepoint/v3/contenttype/forms"/>
+  </ds:schemaRefs>
+</ds:datastoreItem>
+</file>
+
+<file path=customXml/itemProps5.xml><?xml version="1.0" encoding="utf-8"?>
+<ds:datastoreItem xmlns:ds="http://schemas.openxmlformats.org/officeDocument/2006/customXml" ds:itemID="{822D38AD-8010-4CD3-BD6B-117CB8DF70A4}">
+  <ds:schemaRefs/>
+</ds:datastoreItem>
+</file>
+
+<file path=customXml/itemProps6.xml><?xml version="1.0" encoding="utf-8"?>
+<ds:datastoreItem xmlns:ds="http://schemas.openxmlformats.org/officeDocument/2006/customXml" ds:itemID="{58CC0B31-82B9-497A-9A2E-F3F72D0BBDAD}">
+  <ds:schemaRefs/>
+</ds:datastoreItem>
+</file>
+
+<file path=customXml/itemProps7.xml><?xml version="1.0" encoding="utf-8"?>
+<ds:datastoreItem xmlns:ds="http://schemas.openxmlformats.org/officeDocument/2006/customXml" ds:itemID="{C09F197C-6A49-47D0-B877-F88807989676}">
+  <ds:schemaRefs/>
+</ds:datastoreItem>
+</file>
+
+<file path=customXml/itemProps8.xml><?xml version="1.0" encoding="utf-8"?>
+<ds:datastoreItem xmlns:ds="http://schemas.openxmlformats.org/officeDocument/2006/customXml" ds:itemID="{32BA7684-6BE4-4F73-B22E-30934AB379B8}">
+  <ds:schemaRefs/>
+</ds:datastoreItem>
+</file>
+
+<file path=customXml/itemProps9.xml><?xml version="1.0" encoding="utf-8"?>
 <ds:datastoreItem xmlns:ds="http://schemas.openxmlformats.org/officeDocument/2006/customXml" ds:itemID="{A2258578-4028-422E-A2BB-56A6BD2305EC}">
   <ds:schemaRefs>
     <ds:schemaRef ds:uri="92e1255f-bb7b-4dc9-b051-584cc104eb44"/>
@@ -16604,49 +16657,6 @@
 </ds:datastoreItem>
 </file>
 
-<file path=customXml/itemProps5.xml><?xml version="1.0" encoding="utf-8"?>
-<ds:datastoreItem xmlns:ds="http://schemas.openxmlformats.org/officeDocument/2006/customXml" ds:itemID="{58CC0B31-82B9-497A-9A2E-F3F72D0BBDAD}">
-  <ds:schemaRefs/>
-</ds:datastoreItem>
-</file>
-
-<file path=customXml/itemProps6.xml><?xml version="1.0" encoding="utf-8"?>
-<ds:datastoreItem xmlns:ds="http://schemas.openxmlformats.org/officeDocument/2006/customXml" ds:itemID="{F5A7E41D-6E7F-4B05-AFAB-F540BD4C068B}">
-  <ds:schemaRefs>
-    <ds:schemaRef ds:uri="http://schemas.microsoft.com/sharepoint/v3/contenttype/forms"/>
-  </ds:schemaRefs>
-</ds:datastoreItem>
-</file>
-
-<file path=customXml/itemProps7.xml><?xml version="1.0" encoding="utf-8"?>
-<ds:datastoreItem xmlns:ds="http://schemas.openxmlformats.org/officeDocument/2006/customXml" ds:itemID="{56F2EE69-0CCA-4F48-BE22-EC4A886C57A7}">
-  <ds:schemaRefs>
-    <ds:schemaRef ds:uri="92e1255f-bb7b-4dc9-b051-584cc104eb44"/>
-    <ds:schemaRef ds:uri="a6550eff-0fc9-443f-8e77-72cbcf778382"/>
-    <ds:schemaRef ds:uri="http://purl.org/dc/dcmitype/"/>
-    <ds:schemaRef ds:uri="http://purl.org/dc/elements/1.1/"/>
-    <ds:schemaRef ds:uri="http://purl.org/dc/terms/"/>
-    <ds:schemaRef ds:uri="http://schemas.microsoft.com/office/2006/documentManagement/types"/>
-    <ds:schemaRef ds:uri="http://schemas.microsoft.com/office/2006/metadata/properties"/>
-    <ds:schemaRef ds:uri="http://schemas.microsoft.com/office/infopath/2007/PartnerControls"/>
-    <ds:schemaRef ds:uri="http://schemas.openxmlformats.org/package/2006/metadata/core-properties"/>
-    <ds:schemaRef ds:uri="http://www.w3.org/XML/1998/namespace"/>
-  </ds:schemaRefs>
-</ds:datastoreItem>
-</file>
-
-<file path=customXml/itemProps8.xml><?xml version="1.0" encoding="utf-8"?>
-<ds:datastoreItem xmlns:ds="http://schemas.openxmlformats.org/officeDocument/2006/customXml" ds:itemID="{847502A6-7CBE-43AF-BDF6-4D4423521D8C}">
-  <ds:schemaRefs/>
-</ds:datastoreItem>
-</file>
-
-<file path=customXml/itemProps9.xml><?xml version="1.0" encoding="utf-8"?>
-<ds:datastoreItem xmlns:ds="http://schemas.openxmlformats.org/officeDocument/2006/customXml" ds:itemID="{D92C3DF5-A179-4E2D-BD20-07044B39171F}">
-  <ds:schemaRefs/>
-</ds:datastoreItem>
-</file>
-
 <file path=docMetadata/LabelInfo.xml><?xml version="1.0" encoding="utf-8"?>
 <clbl:labelList xmlns:clbl="http://schemas.microsoft.com/office/2020/mipLabelMetadata">
   <clbl:label id="{92e84ceb-fbfd-47ab-be52-080c6b87953f}" enabled="0" method="" siteId="{92e84ceb-fbfd-47ab-be52-080c6b87953f}" removed="1"/>
